--- a/presentation/Superpowers_Codex_10min.pptx
+++ b/presentation/Superpowers_Codex_10min.pptx
@@ -11682,7 +11682,7 @@
                 <a:ea typeface="Calibri" pitchFamily="34" charset="-122"/>
                 <a:cs typeface="Calibri" pitchFamily="34" charset="-120"/>
               </a:rPr>
-              <a:t>바로 코딩하면 빠르지만, 방향이 어긋난 뒤에 알게 됩니다</a:t>
+              <a:t>바로 코딩하면 빠르지만, 방향이 어긋날 위험이 있습니다</a:t>
             </a:r>
             <a:endParaRPr lang="en-US" sz="2400" dirty="0"/>
           </a:p>
@@ -12224,7 +12224,7 @@
                 <a:ea typeface="Calibri" pitchFamily="34" charset="-122"/>
                 <a:cs typeface="Calibri" pitchFamily="34" charset="-120"/>
               </a:rPr>
-              <a:t>핵심 — 모델의 지능보다 “일하는 순서”를 먼저 정합니다</a:t>
+              <a:t>핵심 — AI가 얼마나 똑똑한지보다, 어떤 순서로 일하게 하는지가 결과를 좌우합니다</a:t>
             </a:r>
             <a:endParaRPr lang="en-US" sz="1350" dirty="0"/>
           </a:p>

--- a/presentation/Superpowers_Codex_10min.pptx
+++ b/presentation/Superpowers_Codex_10min.pptx
@@ -14454,7 +14454,7 @@
                 <a:ea typeface="Calibri" pitchFamily="34" charset="-122"/>
                 <a:cs typeface="Calibri" pitchFamily="34" charset="-120"/>
               </a:rPr>
-              <a:t>아이디어에서 완료까지, 한 줄로 이어집니다</a:t>
+              <a:t>앞 단계에서 나온 것이 다음 단계의 재료가 됩니다</a:t>
             </a:r>
             <a:endParaRPr lang="en-US" sz="2400" dirty="0"/>
           </a:p>
@@ -14501,18 +14501,57 @@
       </p:sp>
       <p:sp>
         <p:nvSpPr>
-          <p:cNvPr id="5" name="Shape 3"/>
+          <p:cNvPr id="5" name="Text 3"/>
+          <p:cNvSpPr txBox="1"/>
+          <p:nvPr/>
+        </p:nvSpPr>
+        <p:spPr>
+          <a:xfrm>
+            <a:off x="640080" y="1225296"/>
+            <a:ext cx="5486400" cy="237744"/>
+          </a:xfrm>
+          <a:prstGeom prst="rect">
+            <a:avLst/>
+          </a:prstGeom>
+          <a:noFill/>
+          <a:ln/>
+        </p:spPr>
+        <p:txBody>
+          <a:bodyPr wrap="square" lIns="0" tIns="0" rIns="0" bIns="0" rtlCol="0" anchor="ctr"/>
+          <a:lstStyle/>
+          <a:p>
+            <a:pPr indent="0" marL="0">
+              <a:buNone/>
+            </a:pPr>
+            <a:r>
+              <a:rPr lang="en-US" sz="1050" b="1" spc="60" kern="0" dirty="0">
+                <a:solidFill>
+                  <a:srgbClr val="8A94A6"/>
+                </a:solidFill>
+                <a:latin typeface="Calibri" pitchFamily="34" charset="0"/>
+                <a:ea typeface="Calibri" pitchFamily="34" charset="-122"/>
+                <a:cs typeface="Calibri" pitchFamily="34" charset="-120"/>
+              </a:rPr>
+              <a:t>무엇을 하는 단계인가</a:t>
+            </a:r>
+            <a:endParaRPr lang="en-US" sz="1050" dirty="0"/>
+          </a:p>
+        </p:txBody>
+      </p:sp>
+      <p:sp>
+        <p:nvSpPr>
+          <p:cNvPr id="6" name="Shape 4"/>
           <p:cNvSpPr/>
           <p:nvPr/>
         </p:nvSpPr>
         <p:spPr>
           <a:xfrm>
-            <a:off x="640080" y="1664208"/>
-            <a:ext cx="2006742" cy="2103120"/>
+            <a:off x="640080" y="1517904"/>
+            <a:ext cx="2006742" cy="950976"/>
           </a:xfrm>
           <a:prstGeom prst="roundRect">
             <a:avLst>
-              <a:gd name="adj" fmla="val 3190"/>
+              <a:gd name="adj" fmla="val 6731"/>
             </a:avLst>
           </a:prstGeom>
           <a:solidFill>
@@ -14523,30 +14562,30 @@
       </p:sp>
       <p:sp>
         <p:nvSpPr>
-          <p:cNvPr id="6" name="Text 4"/>
-          <p:cNvSpPr txBox="1"/>
-          <p:nvPr/>
-        </p:nvSpPr>
-        <p:spPr>
-          <a:xfrm>
-            <a:off x="877824" y="1920240"/>
-            <a:ext cx="1531254" cy="256032"/>
-          </a:xfrm>
-          <a:prstGeom prst="rect">
-            <a:avLst/>
-          </a:prstGeom>
-          <a:noFill/>
-          <a:ln/>
-        </p:spPr>
-        <p:txBody>
-          <a:bodyPr wrap="square" lIns="0" tIns="0" rIns="0" bIns="0" rtlCol="0" anchor="ctr"/>
-          <a:lstStyle/>
-          <a:p>
-            <a:pPr indent="0" marL="0">
-              <a:buNone/>
-            </a:pPr>
-            <a:r>
-              <a:rPr lang="en-US" sz="1100" b="1" dirty="0">
+          <p:cNvPr id="7" name="Text 5"/>
+          <p:cNvSpPr txBox="1"/>
+          <p:nvPr/>
+        </p:nvSpPr>
+        <p:spPr>
+          <a:xfrm>
+            <a:off x="877824" y="1664208"/>
+            <a:ext cx="1531254" cy="219456"/>
+          </a:xfrm>
+          <a:prstGeom prst="rect">
+            <a:avLst/>
+          </a:prstGeom>
+          <a:noFill/>
+          <a:ln/>
+        </p:spPr>
+        <p:txBody>
+          <a:bodyPr wrap="square" lIns="0" tIns="0" rIns="0" bIns="0" rtlCol="0" anchor="ctr"/>
+          <a:lstStyle/>
+          <a:p>
+            <a:pPr indent="0" marL="0">
+              <a:buNone/>
+            </a:pPr>
+            <a:r>
+              <a:rPr lang="en-US" sz="1050" b="1" dirty="0">
                 <a:solidFill>
                   <a:srgbClr val="8A94A6"/>
                 </a:solidFill>
@@ -14556,20 +14595,20 @@
               </a:rPr>
               <a:t>01</a:t>
             </a:r>
-            <a:endParaRPr lang="en-US" sz="1100" dirty="0"/>
-          </a:p>
-        </p:txBody>
-      </p:sp>
-      <p:sp>
-        <p:nvSpPr>
-          <p:cNvPr id="7" name="Text 5"/>
-          <p:cNvSpPr txBox="1"/>
-          <p:nvPr/>
-        </p:nvSpPr>
-        <p:spPr>
-          <a:xfrm>
-            <a:off x="877824" y="2322576"/>
-            <a:ext cx="1531254" cy="603504"/>
+            <a:endParaRPr lang="en-US" sz="1050" dirty="0"/>
+          </a:p>
+        </p:txBody>
+      </p:sp>
+      <p:sp>
+        <p:nvSpPr>
+          <p:cNvPr id="8" name="Text 6"/>
+          <p:cNvSpPr txBox="1"/>
+          <p:nvPr/>
+        </p:nvSpPr>
+        <p:spPr>
+          <a:xfrm>
+            <a:off x="877824" y="1938528"/>
+            <a:ext cx="1531254" cy="420624"/>
           </a:xfrm>
           <a:prstGeom prst="rect">
             <a:avLst/>
@@ -14583,12 +14622,12 @@
           <a:p>
             <a:pPr indent="0" marL="0">
               <a:lnSpc>
-                <a:spcPct val="110000"/>
+                <a:spcPct val="105000"/>
               </a:lnSpc>
               <a:buNone/>
             </a:pPr>
             <a:r>
-              <a:rPr lang="en-US" sz="1450" b="1" dirty="0">
+              <a:rPr lang="en-US" sz="1400" b="1" dirty="0">
                 <a:solidFill>
                   <a:srgbClr val="0F1B33"/>
                 </a:solidFill>
@@ -14598,49 +14637,7 @@
               </a:rPr>
               <a:t>아이디어</a:t>
             </a:r>
-            <a:endParaRPr lang="en-US" sz="1450" dirty="0"/>
-          </a:p>
-        </p:txBody>
-      </p:sp>
-      <p:sp>
-        <p:nvSpPr>
-          <p:cNvPr id="8" name="Text 6"/>
-          <p:cNvSpPr txBox="1"/>
-          <p:nvPr/>
-        </p:nvSpPr>
-        <p:spPr>
-          <a:xfrm>
-            <a:off x="877824" y="2999232"/>
-            <a:ext cx="1531254" cy="457200"/>
-          </a:xfrm>
-          <a:prstGeom prst="rect">
-            <a:avLst/>
-          </a:prstGeom>
-          <a:noFill/>
-          <a:ln/>
-        </p:spPr>
-        <p:txBody>
-          <a:bodyPr wrap="square" lIns="0" tIns="0" rIns="0" bIns="0" rtlCol="0" anchor="ctr"/>
-          <a:lstStyle/>
-          <a:p>
-            <a:pPr indent="0" marL="0">
-              <a:lnSpc>
-                <a:spcPct val="120000"/>
-              </a:lnSpc>
-              <a:buNone/>
-            </a:pPr>
-            <a:r>
-              <a:rPr lang="en-US" sz="1100" dirty="0">
-                <a:solidFill>
-                  <a:srgbClr val="5B6577"/>
-                </a:solidFill>
-                <a:latin typeface="Calibri" pitchFamily="34" charset="0"/>
-                <a:ea typeface="Calibri" pitchFamily="34" charset="-122"/>
-                <a:cs typeface="Calibri" pitchFamily="34" charset="-120"/>
-              </a:rPr>
-              <a:t>만들고 싶은 것</a:t>
-            </a:r>
-            <a:endParaRPr lang="en-US" sz="1100" dirty="0"/>
+            <a:endParaRPr lang="en-US" sz="1400" dirty="0"/>
           </a:p>
         </p:txBody>
       </p:sp>
@@ -14652,8 +14649,8 @@
         </p:nvSpPr>
         <p:spPr>
           <a:xfrm>
-            <a:off x="2646822" y="2532888"/>
-            <a:ext cx="219456" cy="365760"/>
+            <a:off x="2646822" y="1828800"/>
+            <a:ext cx="219456" cy="329184"/>
           </a:xfrm>
           <a:prstGeom prst="rect">
             <a:avLst/>
@@ -14691,12 +14688,12 @@
         </p:nvSpPr>
         <p:spPr>
           <a:xfrm>
-            <a:off x="2866278" y="1664208"/>
-            <a:ext cx="2006742" cy="2103120"/>
+            <a:off x="2866278" y="1517904"/>
+            <a:ext cx="2006742" cy="950976"/>
           </a:xfrm>
           <a:prstGeom prst="roundRect">
             <a:avLst>
-              <a:gd name="adj" fmla="val 3190"/>
+              <a:gd name="adj" fmla="val 6731"/>
             </a:avLst>
           </a:prstGeom>
           <a:solidFill>
@@ -14713,24 +14710,24 @@
         </p:nvSpPr>
         <p:spPr>
           <a:xfrm>
-            <a:off x="3104022" y="1920240"/>
-            <a:ext cx="1531254" cy="256032"/>
-          </a:xfrm>
-          <a:prstGeom prst="rect">
-            <a:avLst/>
-          </a:prstGeom>
-          <a:noFill/>
-          <a:ln/>
-        </p:spPr>
-        <p:txBody>
-          <a:bodyPr wrap="square" lIns="0" tIns="0" rIns="0" bIns="0" rtlCol="0" anchor="ctr"/>
-          <a:lstStyle/>
-          <a:p>
-            <a:pPr indent="0" marL="0">
-              <a:buNone/>
-            </a:pPr>
-            <a:r>
-              <a:rPr lang="en-US" sz="1100" b="1" dirty="0">
+            <a:off x="3104022" y="1664208"/>
+            <a:ext cx="1531254" cy="219456"/>
+          </a:xfrm>
+          <a:prstGeom prst="rect">
+            <a:avLst/>
+          </a:prstGeom>
+          <a:noFill/>
+          <a:ln/>
+        </p:spPr>
+        <p:txBody>
+          <a:bodyPr wrap="square" lIns="0" tIns="0" rIns="0" bIns="0" rtlCol="0" anchor="ctr"/>
+          <a:lstStyle/>
+          <a:p>
+            <a:pPr indent="0" marL="0">
+              <a:buNone/>
+            </a:pPr>
+            <a:r>
+              <a:rPr lang="en-US" sz="1050" b="1" dirty="0">
                 <a:solidFill>
                   <a:srgbClr val="8A94A6"/>
                 </a:solidFill>
@@ -14740,7 +14737,7 @@
               </a:rPr>
               <a:t>02</a:t>
             </a:r>
-            <a:endParaRPr lang="en-US" sz="1100" dirty="0"/>
+            <a:endParaRPr lang="en-US" sz="1050" dirty="0"/>
           </a:p>
         </p:txBody>
       </p:sp>
@@ -14752,8 +14749,8 @@
         </p:nvSpPr>
         <p:spPr>
           <a:xfrm>
-            <a:off x="3104022" y="2322576"/>
-            <a:ext cx="1531254" cy="603504"/>
+            <a:off x="3104022" y="1938528"/>
+            <a:ext cx="1531254" cy="420624"/>
           </a:xfrm>
           <a:prstGeom prst="rect">
             <a:avLst/>
@@ -14767,12 +14764,12 @@
           <a:p>
             <a:pPr indent="0" marL="0">
               <a:lnSpc>
-                <a:spcPct val="110000"/>
+                <a:spcPct val="105000"/>
               </a:lnSpc>
               <a:buNone/>
             </a:pPr>
             <a:r>
-              <a:rPr lang="en-US" sz="1450" b="1" dirty="0">
+              <a:rPr lang="en-US" sz="1400" b="1" dirty="0">
                 <a:solidFill>
                   <a:srgbClr val="0F1B33"/>
                 </a:solidFill>
@@ -14782,7 +14779,7 @@
               </a:rPr>
               <a:t>Brainstorming</a:t>
             </a:r>
-            <a:endParaRPr lang="en-US" sz="1450" dirty="0"/>
+            <a:endParaRPr lang="en-US" sz="1400" dirty="0"/>
           </a:p>
         </p:txBody>
       </p:sp>
@@ -14794,50 +14791,8 @@
         </p:nvSpPr>
         <p:spPr>
           <a:xfrm>
-            <a:off x="3104022" y="2999232"/>
-            <a:ext cx="1531254" cy="457200"/>
-          </a:xfrm>
-          <a:prstGeom prst="rect">
-            <a:avLst/>
-          </a:prstGeom>
-          <a:noFill/>
-          <a:ln/>
-        </p:spPr>
-        <p:txBody>
-          <a:bodyPr wrap="square" lIns="0" tIns="0" rIns="0" bIns="0" rtlCol="0" anchor="ctr"/>
-          <a:lstStyle/>
-          <a:p>
-            <a:pPr indent="0" marL="0">
-              <a:lnSpc>
-                <a:spcPct val="120000"/>
-              </a:lnSpc>
-              <a:buNone/>
-            </a:pPr>
-            <a:r>
-              <a:rPr lang="en-US" sz="1100" dirty="0">
-                <a:solidFill>
-                  <a:srgbClr val="5B6577"/>
-                </a:solidFill>
-                <a:latin typeface="Calibri" pitchFamily="34" charset="0"/>
-                <a:ea typeface="Calibri" pitchFamily="34" charset="-122"/>
-                <a:cs typeface="Calibri" pitchFamily="34" charset="-120"/>
-              </a:rPr>
-              <a:t>질문 · 대안 · 설계</a:t>
-            </a:r>
-            <a:endParaRPr lang="en-US" sz="1100" dirty="0"/>
-          </a:p>
-        </p:txBody>
-      </p:sp>
-      <p:sp>
-        <p:nvSpPr>
-          <p:cNvPr id="14" name="Text 12"/>
-          <p:cNvSpPr txBox="1"/>
-          <p:nvPr/>
-        </p:nvSpPr>
-        <p:spPr>
-          <a:xfrm>
-            <a:off x="4873020" y="2532888"/>
-            <a:ext cx="219456" cy="365760"/>
+            <a:off x="4873020" y="1828800"/>
+            <a:ext cx="219456" cy="329184"/>
           </a:xfrm>
           <a:prstGeom prst="rect">
             <a:avLst/>
@@ -14869,18 +14824,18 @@
       </p:sp>
       <p:sp>
         <p:nvSpPr>
-          <p:cNvPr id="15" name="Shape 13"/>
+          <p:cNvPr id="14" name="Shape 12"/>
           <p:cNvSpPr/>
           <p:nvPr/>
         </p:nvSpPr>
         <p:spPr>
           <a:xfrm>
-            <a:off x="5092476" y="1664208"/>
-            <a:ext cx="2006742" cy="2103120"/>
+            <a:off x="5092476" y="1517904"/>
+            <a:ext cx="2006742" cy="950976"/>
           </a:xfrm>
           <a:prstGeom prst="roundRect">
             <a:avLst>
-              <a:gd name="adj" fmla="val 3190"/>
+              <a:gd name="adj" fmla="val 6731"/>
             </a:avLst>
           </a:prstGeom>
           <a:solidFill>
@@ -14891,30 +14846,111 @@
       </p:sp>
       <p:sp>
         <p:nvSpPr>
+          <p:cNvPr id="15" name="Text 13"/>
+          <p:cNvSpPr txBox="1"/>
+          <p:nvPr/>
+        </p:nvSpPr>
+        <p:spPr>
+          <a:xfrm>
+            <a:off x="5330220" y="1664208"/>
+            <a:ext cx="1531254" cy="219456"/>
+          </a:xfrm>
+          <a:prstGeom prst="rect">
+            <a:avLst/>
+          </a:prstGeom>
+          <a:noFill/>
+          <a:ln/>
+        </p:spPr>
+        <p:txBody>
+          <a:bodyPr wrap="square" lIns="0" tIns="0" rIns="0" bIns="0" rtlCol="0" anchor="ctr"/>
+          <a:lstStyle/>
+          <a:p>
+            <a:pPr indent="0" marL="0">
+              <a:buNone/>
+            </a:pPr>
+            <a:r>
+              <a:rPr lang="en-US" sz="1050" b="1" dirty="0">
+                <a:solidFill>
+                  <a:srgbClr val="8A94A6"/>
+                </a:solidFill>
+                <a:latin typeface="Calibri" pitchFamily="34" charset="0"/>
+                <a:ea typeface="Calibri" pitchFamily="34" charset="-122"/>
+                <a:cs typeface="Calibri" pitchFamily="34" charset="-120"/>
+              </a:rPr>
+              <a:t>03</a:t>
+            </a:r>
+            <a:endParaRPr lang="en-US" sz="1050" dirty="0"/>
+          </a:p>
+        </p:txBody>
+      </p:sp>
+      <p:sp>
+        <p:nvSpPr>
           <p:cNvPr id="16" name="Text 14"/>
           <p:cNvSpPr txBox="1"/>
           <p:nvPr/>
         </p:nvSpPr>
         <p:spPr>
           <a:xfrm>
-            <a:off x="5330220" y="1920240"/>
-            <a:ext cx="1531254" cy="256032"/>
-          </a:xfrm>
-          <a:prstGeom prst="rect">
-            <a:avLst/>
-          </a:prstGeom>
-          <a:noFill/>
-          <a:ln/>
-        </p:spPr>
-        <p:txBody>
-          <a:bodyPr wrap="square" lIns="0" tIns="0" rIns="0" bIns="0" rtlCol="0" anchor="ctr"/>
-          <a:lstStyle/>
-          <a:p>
-            <a:pPr indent="0" marL="0">
-              <a:buNone/>
-            </a:pPr>
-            <a:r>
-              <a:rPr lang="en-US" sz="1100" b="1" dirty="0">
+            <a:off x="5330220" y="1938528"/>
+            <a:ext cx="1531254" cy="420624"/>
+          </a:xfrm>
+          <a:prstGeom prst="rect">
+            <a:avLst/>
+          </a:prstGeom>
+          <a:noFill/>
+          <a:ln/>
+        </p:spPr>
+        <p:txBody>
+          <a:bodyPr wrap="square" lIns="0" tIns="0" rIns="0" bIns="0" rtlCol="0" anchor="ctr"/>
+          <a:lstStyle/>
+          <a:p>
+            <a:pPr indent="0" marL="0">
+              <a:lnSpc>
+                <a:spcPct val="105000"/>
+              </a:lnSpc>
+              <a:buNone/>
+            </a:pPr>
+            <a:r>
+              <a:rPr lang="en-US" sz="1400" b="1" dirty="0">
+                <a:solidFill>
+                  <a:srgbClr val="0F1B33"/>
+                </a:solidFill>
+                <a:latin typeface="Calibri" pitchFamily="34" charset="0"/>
+                <a:ea typeface="Calibri" pitchFamily="34" charset="-122"/>
+                <a:cs typeface="Calibri" pitchFamily="34" charset="-120"/>
+              </a:rPr>
+              <a:t>Writing Plans</a:t>
+            </a:r>
+            <a:endParaRPr lang="en-US" sz="1400" dirty="0"/>
+          </a:p>
+        </p:txBody>
+      </p:sp>
+      <p:sp>
+        <p:nvSpPr>
+          <p:cNvPr id="17" name="Text 15"/>
+          <p:cNvSpPr txBox="1"/>
+          <p:nvPr/>
+        </p:nvSpPr>
+        <p:spPr>
+          <a:xfrm>
+            <a:off x="7099219" y="1828800"/>
+            <a:ext cx="219456" cy="329184"/>
+          </a:xfrm>
+          <a:prstGeom prst="rect">
+            <a:avLst/>
+          </a:prstGeom>
+          <a:noFill/>
+          <a:ln/>
+        </p:spPr>
+        <p:txBody>
+          <a:bodyPr wrap="square" lIns="0" tIns="0" rIns="0" bIns="0" rtlCol="0" anchor="ctr"/>
+          <a:lstStyle/>
+          <a:p>
+            <a:pPr algn="ctr" indent="0" marL="0">
+              <a:buNone/>
+            </a:pPr>
+            <a:r>
+              <a:rPr lang="en-US" sz="1300" b="1" dirty="0">
                 <a:solidFill>
                   <a:srgbClr val="8A94A6"/>
                 </a:solidFill>
@@ -14922,129 +14958,6 @@
                 <a:ea typeface="Calibri" pitchFamily="34" charset="-122"/>
                 <a:cs typeface="Calibri" pitchFamily="34" charset="-120"/>
               </a:rPr>
-              <a:t>03</a:t>
-            </a:r>
-            <a:endParaRPr lang="en-US" sz="1100" dirty="0"/>
-          </a:p>
-        </p:txBody>
-      </p:sp>
-      <p:sp>
-        <p:nvSpPr>
-          <p:cNvPr id="17" name="Text 15"/>
-          <p:cNvSpPr txBox="1"/>
-          <p:nvPr/>
-        </p:nvSpPr>
-        <p:spPr>
-          <a:xfrm>
-            <a:off x="5330220" y="2322576"/>
-            <a:ext cx="1531254" cy="603504"/>
-          </a:xfrm>
-          <a:prstGeom prst="rect">
-            <a:avLst/>
-          </a:prstGeom>
-          <a:noFill/>
-          <a:ln/>
-        </p:spPr>
-        <p:txBody>
-          <a:bodyPr wrap="square" lIns="0" tIns="0" rIns="0" bIns="0" rtlCol="0" anchor="ctr"/>
-          <a:lstStyle/>
-          <a:p>
-            <a:pPr indent="0" marL="0">
-              <a:lnSpc>
-                <a:spcPct val="110000"/>
-              </a:lnSpc>
-              <a:buNone/>
-            </a:pPr>
-            <a:r>
-              <a:rPr lang="en-US" sz="1450" b="1" dirty="0">
-                <a:solidFill>
-                  <a:srgbClr val="0F1B33"/>
-                </a:solidFill>
-                <a:latin typeface="Calibri" pitchFamily="34" charset="0"/>
-                <a:ea typeface="Calibri" pitchFamily="34" charset="-122"/>
-                <a:cs typeface="Calibri" pitchFamily="34" charset="-120"/>
-              </a:rPr>
-              <a:t>Writing Plans</a:t>
-            </a:r>
-            <a:endParaRPr lang="en-US" sz="1450" dirty="0"/>
-          </a:p>
-        </p:txBody>
-      </p:sp>
-      <p:sp>
-        <p:nvSpPr>
-          <p:cNvPr id="18" name="Text 16"/>
-          <p:cNvSpPr txBox="1"/>
-          <p:nvPr/>
-        </p:nvSpPr>
-        <p:spPr>
-          <a:xfrm>
-            <a:off x="5330220" y="2999232"/>
-            <a:ext cx="1531254" cy="457200"/>
-          </a:xfrm>
-          <a:prstGeom prst="rect">
-            <a:avLst/>
-          </a:prstGeom>
-          <a:noFill/>
-          <a:ln/>
-        </p:spPr>
-        <p:txBody>
-          <a:bodyPr wrap="square" lIns="0" tIns="0" rIns="0" bIns="0" rtlCol="0" anchor="ctr"/>
-          <a:lstStyle/>
-          <a:p>
-            <a:pPr indent="0" marL="0">
-              <a:lnSpc>
-                <a:spcPct val="120000"/>
-              </a:lnSpc>
-              <a:buNone/>
-            </a:pPr>
-            <a:r>
-              <a:rPr lang="en-US" sz="1100" dirty="0">
-                <a:solidFill>
-                  <a:srgbClr val="5B6577"/>
-                </a:solidFill>
-                <a:latin typeface="Calibri" pitchFamily="34" charset="0"/>
-                <a:ea typeface="Calibri" pitchFamily="34" charset="-122"/>
-                <a:cs typeface="Calibri" pitchFamily="34" charset="-120"/>
-              </a:rPr>
-              <a:t>파일 · 테스트 · 순서</a:t>
-            </a:r>
-            <a:endParaRPr lang="en-US" sz="1100" dirty="0"/>
-          </a:p>
-        </p:txBody>
-      </p:sp>
-      <p:sp>
-        <p:nvSpPr>
-          <p:cNvPr id="19" name="Text 17"/>
-          <p:cNvSpPr txBox="1"/>
-          <p:nvPr/>
-        </p:nvSpPr>
-        <p:spPr>
-          <a:xfrm>
-            <a:off x="7099219" y="2532888"/>
-            <a:ext cx="219456" cy="365760"/>
-          </a:xfrm>
-          <a:prstGeom prst="rect">
-            <a:avLst/>
-          </a:prstGeom>
-          <a:noFill/>
-          <a:ln/>
-        </p:spPr>
-        <p:txBody>
-          <a:bodyPr wrap="square" lIns="0" tIns="0" rIns="0" bIns="0" rtlCol="0" anchor="ctr"/>
-          <a:lstStyle/>
-          <a:p>
-            <a:pPr algn="ctr" indent="0" marL="0">
-              <a:buNone/>
-            </a:pPr>
-            <a:r>
-              <a:rPr lang="en-US" sz="1300" b="1" dirty="0">
-                <a:solidFill>
-                  <a:srgbClr val="8A94A6"/>
-                </a:solidFill>
-                <a:latin typeface="Calibri" pitchFamily="34" charset="0"/>
-                <a:ea typeface="Calibri" pitchFamily="34" charset="-122"/>
-                <a:cs typeface="Calibri" pitchFamily="34" charset="-120"/>
-              </a:rPr>
               <a:t>→</a:t>
             </a:r>
             <a:endParaRPr lang="en-US" sz="1300" dirty="0"/>
@@ -15053,18 +14966,18 @@
       </p:sp>
       <p:sp>
         <p:nvSpPr>
-          <p:cNvPr id="20" name="Shape 18"/>
+          <p:cNvPr id="18" name="Shape 16"/>
           <p:cNvSpPr/>
           <p:nvPr/>
         </p:nvSpPr>
         <p:spPr>
           <a:xfrm>
-            <a:off x="7318675" y="1664208"/>
-            <a:ext cx="2006742" cy="2103120"/>
+            <a:off x="7318675" y="1517904"/>
+            <a:ext cx="2006742" cy="950976"/>
           </a:xfrm>
           <a:prstGeom prst="roundRect">
             <a:avLst>
-              <a:gd name="adj" fmla="val 3190"/>
+              <a:gd name="adj" fmla="val 6731"/>
             </a:avLst>
           </a:prstGeom>
           <a:solidFill>
@@ -15075,137 +14988,95 @@
       </p:sp>
       <p:sp>
         <p:nvSpPr>
+          <p:cNvPr id="19" name="Text 17"/>
+          <p:cNvSpPr txBox="1"/>
+          <p:nvPr/>
+        </p:nvSpPr>
+        <p:spPr>
+          <a:xfrm>
+            <a:off x="7556419" y="1664208"/>
+            <a:ext cx="1531254" cy="219456"/>
+          </a:xfrm>
+          <a:prstGeom prst="rect">
+            <a:avLst/>
+          </a:prstGeom>
+          <a:noFill/>
+          <a:ln/>
+        </p:spPr>
+        <p:txBody>
+          <a:bodyPr wrap="square" lIns="0" tIns="0" rIns="0" bIns="0" rtlCol="0" anchor="ctr"/>
+          <a:lstStyle/>
+          <a:p>
+            <a:pPr indent="0" marL="0">
+              <a:buNone/>
+            </a:pPr>
+            <a:r>
+              <a:rPr lang="en-US" sz="1050" b="1" dirty="0">
+                <a:solidFill>
+                  <a:srgbClr val="9FB8FF"/>
+                </a:solidFill>
+                <a:latin typeface="Calibri" pitchFamily="34" charset="0"/>
+                <a:ea typeface="Calibri" pitchFamily="34" charset="-122"/>
+                <a:cs typeface="Calibri" pitchFamily="34" charset="-120"/>
+              </a:rPr>
+              <a:t>04</a:t>
+            </a:r>
+            <a:endParaRPr lang="en-US" sz="1050" dirty="0"/>
+          </a:p>
+        </p:txBody>
+      </p:sp>
+      <p:sp>
+        <p:nvSpPr>
+          <p:cNvPr id="20" name="Text 18"/>
+          <p:cNvSpPr txBox="1"/>
+          <p:nvPr/>
+        </p:nvSpPr>
+        <p:spPr>
+          <a:xfrm>
+            <a:off x="7556419" y="1938528"/>
+            <a:ext cx="1531254" cy="420624"/>
+          </a:xfrm>
+          <a:prstGeom prst="rect">
+            <a:avLst/>
+          </a:prstGeom>
+          <a:noFill/>
+          <a:ln/>
+        </p:spPr>
+        <p:txBody>
+          <a:bodyPr wrap="square" lIns="0" tIns="0" rIns="0" bIns="0" rtlCol="0" anchor="ctr"/>
+          <a:lstStyle/>
+          <a:p>
+            <a:pPr indent="0" marL="0">
+              <a:lnSpc>
+                <a:spcPct val="105000"/>
+              </a:lnSpc>
+              <a:buNone/>
+            </a:pPr>
+            <a:r>
+              <a:rPr lang="en-US" sz="1400" b="1" dirty="0">
+                <a:solidFill>
+                  <a:srgbClr val="FFFFFF"/>
+                </a:solidFill>
+                <a:latin typeface="Calibri" pitchFamily="34" charset="0"/>
+                <a:ea typeface="Calibri" pitchFamily="34" charset="-122"/>
+                <a:cs typeface="Calibri" pitchFamily="34" charset="-120"/>
+              </a:rPr>
+              <a:t>TDD 구현</a:t>
+            </a:r>
+            <a:endParaRPr lang="en-US" sz="1400" dirty="0"/>
+          </a:p>
+        </p:txBody>
+      </p:sp>
+      <p:sp>
+        <p:nvSpPr>
           <p:cNvPr id="21" name="Text 19"/>
           <p:cNvSpPr txBox="1"/>
           <p:nvPr/>
         </p:nvSpPr>
         <p:spPr>
           <a:xfrm>
-            <a:off x="7556419" y="1920240"/>
-            <a:ext cx="1531254" cy="256032"/>
-          </a:xfrm>
-          <a:prstGeom prst="rect">
-            <a:avLst/>
-          </a:prstGeom>
-          <a:noFill/>
-          <a:ln/>
-        </p:spPr>
-        <p:txBody>
-          <a:bodyPr wrap="square" lIns="0" tIns="0" rIns="0" bIns="0" rtlCol="0" anchor="ctr"/>
-          <a:lstStyle/>
-          <a:p>
-            <a:pPr indent="0" marL="0">
-              <a:buNone/>
-            </a:pPr>
-            <a:r>
-              <a:rPr lang="en-US" sz="1100" b="1" dirty="0">
-                <a:solidFill>
-                  <a:srgbClr val="9FB8FF"/>
-                </a:solidFill>
-                <a:latin typeface="Calibri" pitchFamily="34" charset="0"/>
-                <a:ea typeface="Calibri" pitchFamily="34" charset="-122"/>
-                <a:cs typeface="Calibri" pitchFamily="34" charset="-120"/>
-              </a:rPr>
-              <a:t>04</a:t>
-            </a:r>
-            <a:endParaRPr lang="en-US" sz="1100" dirty="0"/>
-          </a:p>
-        </p:txBody>
-      </p:sp>
-      <p:sp>
-        <p:nvSpPr>
-          <p:cNvPr id="22" name="Text 20"/>
-          <p:cNvSpPr txBox="1"/>
-          <p:nvPr/>
-        </p:nvSpPr>
-        <p:spPr>
-          <a:xfrm>
-            <a:off x="7556419" y="2322576"/>
-            <a:ext cx="1531254" cy="603504"/>
-          </a:xfrm>
-          <a:prstGeom prst="rect">
-            <a:avLst/>
-          </a:prstGeom>
-          <a:noFill/>
-          <a:ln/>
-        </p:spPr>
-        <p:txBody>
-          <a:bodyPr wrap="square" lIns="0" tIns="0" rIns="0" bIns="0" rtlCol="0" anchor="ctr"/>
-          <a:lstStyle/>
-          <a:p>
-            <a:pPr indent="0" marL="0">
-              <a:lnSpc>
-                <a:spcPct val="110000"/>
-              </a:lnSpc>
-              <a:buNone/>
-            </a:pPr>
-            <a:r>
-              <a:rPr lang="en-US" sz="1450" b="1" dirty="0">
-                <a:solidFill>
-                  <a:srgbClr val="FFFFFF"/>
-                </a:solidFill>
-                <a:latin typeface="Calibri" pitchFamily="34" charset="0"/>
-                <a:ea typeface="Calibri" pitchFamily="34" charset="-122"/>
-                <a:cs typeface="Calibri" pitchFamily="34" charset="-120"/>
-              </a:rPr>
-              <a:t>TDD 구현</a:t>
-            </a:r>
-            <a:endParaRPr lang="en-US" sz="1450" dirty="0"/>
-          </a:p>
-        </p:txBody>
-      </p:sp>
-      <p:sp>
-        <p:nvSpPr>
-          <p:cNvPr id="23" name="Text 21"/>
-          <p:cNvSpPr txBox="1"/>
-          <p:nvPr/>
-        </p:nvSpPr>
-        <p:spPr>
-          <a:xfrm>
-            <a:off x="7556419" y="2999232"/>
-            <a:ext cx="1531254" cy="457200"/>
-          </a:xfrm>
-          <a:prstGeom prst="rect">
-            <a:avLst/>
-          </a:prstGeom>
-          <a:noFill/>
-          <a:ln/>
-        </p:spPr>
-        <p:txBody>
-          <a:bodyPr wrap="square" lIns="0" tIns="0" rIns="0" bIns="0" rtlCol="0" anchor="ctr"/>
-          <a:lstStyle/>
-          <a:p>
-            <a:pPr indent="0" marL="0">
-              <a:lnSpc>
-                <a:spcPct val="120000"/>
-              </a:lnSpc>
-              <a:buNone/>
-            </a:pPr>
-            <a:r>
-              <a:rPr lang="en-US" sz="1100" dirty="0">
-                <a:solidFill>
-                  <a:srgbClr val="E4EBFB"/>
-                </a:solidFill>
-                <a:latin typeface="Calibri" pitchFamily="34" charset="0"/>
-                <a:ea typeface="Calibri" pitchFamily="34" charset="-122"/>
-                <a:cs typeface="Calibri" pitchFamily="34" charset="-120"/>
-              </a:rPr>
-              <a:t>RED → GREEN</a:t>
-            </a:r>
-            <a:endParaRPr lang="en-US" sz="1100" dirty="0"/>
-          </a:p>
-        </p:txBody>
-      </p:sp>
-      <p:sp>
-        <p:nvSpPr>
-          <p:cNvPr id="24" name="Text 22"/>
-          <p:cNvSpPr txBox="1"/>
-          <p:nvPr/>
-        </p:nvSpPr>
-        <p:spPr>
-          <a:xfrm>
-            <a:off x="9325417" y="2532888"/>
-            <a:ext cx="219456" cy="365760"/>
+            <a:off x="9325417" y="1828800"/>
+            <a:ext cx="219456" cy="329184"/>
           </a:xfrm>
           <a:prstGeom prst="rect">
             <a:avLst/>
@@ -15237,18 +15108,18 @@
       </p:sp>
       <p:sp>
         <p:nvSpPr>
-          <p:cNvPr id="25" name="Shape 23"/>
+          <p:cNvPr id="22" name="Shape 20"/>
           <p:cNvSpPr/>
           <p:nvPr/>
         </p:nvSpPr>
         <p:spPr>
           <a:xfrm>
-            <a:off x="9544873" y="1664208"/>
-            <a:ext cx="2006742" cy="2103120"/>
+            <a:off x="9544873" y="1517904"/>
+            <a:ext cx="2006742" cy="950976"/>
           </a:xfrm>
           <a:prstGeom prst="roundRect">
             <a:avLst>
-              <a:gd name="adj" fmla="val 3190"/>
+              <a:gd name="adj" fmla="val 6731"/>
             </a:avLst>
           </a:prstGeom>
           <a:solidFill>
@@ -15259,141 +15130,718 @@
       </p:sp>
       <p:sp>
         <p:nvSpPr>
+          <p:cNvPr id="23" name="Text 21"/>
+          <p:cNvSpPr txBox="1"/>
+          <p:nvPr/>
+        </p:nvSpPr>
+        <p:spPr>
+          <a:xfrm>
+            <a:off x="9782617" y="1664208"/>
+            <a:ext cx="1531254" cy="219456"/>
+          </a:xfrm>
+          <a:prstGeom prst="rect">
+            <a:avLst/>
+          </a:prstGeom>
+          <a:noFill/>
+          <a:ln/>
+        </p:spPr>
+        <p:txBody>
+          <a:bodyPr wrap="square" lIns="0" tIns="0" rIns="0" bIns="0" rtlCol="0" anchor="ctr"/>
+          <a:lstStyle/>
+          <a:p>
+            <a:pPr indent="0" marL="0">
+              <a:buNone/>
+            </a:pPr>
+            <a:r>
+              <a:rPr lang="en-US" sz="1050" b="1" dirty="0">
+                <a:solidFill>
+                  <a:srgbClr val="9FB8FF"/>
+                </a:solidFill>
+                <a:latin typeface="Calibri" pitchFamily="34" charset="0"/>
+                <a:ea typeface="Calibri" pitchFamily="34" charset="-122"/>
+                <a:cs typeface="Calibri" pitchFamily="34" charset="-120"/>
+              </a:rPr>
+              <a:t>05</a:t>
+            </a:r>
+            <a:endParaRPr lang="en-US" sz="1050" dirty="0"/>
+          </a:p>
+        </p:txBody>
+      </p:sp>
+      <p:sp>
+        <p:nvSpPr>
+          <p:cNvPr id="24" name="Text 22"/>
+          <p:cNvSpPr txBox="1"/>
+          <p:nvPr/>
+        </p:nvSpPr>
+        <p:spPr>
+          <a:xfrm>
+            <a:off x="9782617" y="1938528"/>
+            <a:ext cx="1531254" cy="420624"/>
+          </a:xfrm>
+          <a:prstGeom prst="rect">
+            <a:avLst/>
+          </a:prstGeom>
+          <a:noFill/>
+          <a:ln/>
+        </p:spPr>
+        <p:txBody>
+          <a:bodyPr wrap="square" lIns="0" tIns="0" rIns="0" bIns="0" rtlCol="0" anchor="ctr"/>
+          <a:lstStyle/>
+          <a:p>
+            <a:pPr indent="0" marL="0">
+              <a:lnSpc>
+                <a:spcPct val="105000"/>
+              </a:lnSpc>
+              <a:buNone/>
+            </a:pPr>
+            <a:r>
+              <a:rPr lang="en-US" sz="1400" b="1" dirty="0">
+                <a:solidFill>
+                  <a:srgbClr val="FFFFFF"/>
+                </a:solidFill>
+                <a:latin typeface="Calibri" pitchFamily="34" charset="0"/>
+                <a:ea typeface="Calibri" pitchFamily="34" charset="-122"/>
+                <a:cs typeface="Calibri" pitchFamily="34" charset="-120"/>
+              </a:rPr>
+              <a:t>검증 · 완료</a:t>
+            </a:r>
+            <a:endParaRPr lang="en-US" sz="1400" dirty="0"/>
+          </a:p>
+        </p:txBody>
+      </p:sp>
+      <p:sp>
+        <p:nvSpPr>
+          <p:cNvPr id="25" name="Text 23"/>
+          <p:cNvSpPr txBox="1"/>
+          <p:nvPr/>
+        </p:nvSpPr>
+        <p:spPr>
+          <a:xfrm>
+            <a:off x="640080" y="2761488"/>
+            <a:ext cx="5486400" cy="237744"/>
+          </a:xfrm>
+          <a:prstGeom prst="rect">
+            <a:avLst/>
+          </a:prstGeom>
+          <a:noFill/>
+          <a:ln/>
+        </p:spPr>
+        <p:txBody>
+          <a:bodyPr wrap="square" lIns="0" tIns="0" rIns="0" bIns="0" rtlCol="0" anchor="ctr"/>
+          <a:lstStyle/>
+          <a:p>
+            <a:pPr indent="0" marL="0">
+              <a:buNone/>
+            </a:pPr>
+            <a:r>
+              <a:rPr lang="en-US" sz="1050" b="1" spc="60" kern="0" dirty="0">
+                <a:solidFill>
+                  <a:srgbClr val="2F6BFF"/>
+                </a:solidFill>
+                <a:latin typeface="Calibri" pitchFamily="34" charset="0"/>
+                <a:ea typeface="Calibri" pitchFamily="34" charset="-122"/>
+                <a:cs typeface="Calibri" pitchFamily="34" charset="-120"/>
+              </a:rPr>
+              <a:t>그래서 무엇이 나오는가</a:t>
+            </a:r>
+            <a:endParaRPr lang="en-US" sz="1050" dirty="0"/>
+          </a:p>
+        </p:txBody>
+      </p:sp>
+      <p:sp>
+        <p:nvSpPr>
           <p:cNvPr id="26" name="Text 24"/>
           <p:cNvSpPr txBox="1"/>
           <p:nvPr/>
         </p:nvSpPr>
         <p:spPr>
           <a:xfrm>
-            <a:off x="9782617" y="1920240"/>
-            <a:ext cx="1531254" cy="256032"/>
-          </a:xfrm>
-          <a:prstGeom prst="rect">
-            <a:avLst/>
-          </a:prstGeom>
-          <a:noFill/>
-          <a:ln/>
-        </p:spPr>
-        <p:txBody>
-          <a:bodyPr wrap="square" lIns="0" tIns="0" rIns="0" bIns="0" rtlCol="0" anchor="ctr"/>
-          <a:lstStyle/>
-          <a:p>
-            <a:pPr indent="0" marL="0">
-              <a:buNone/>
-            </a:pPr>
-            <a:r>
-              <a:rPr lang="en-US" sz="1100" b="1" dirty="0">
-                <a:solidFill>
-                  <a:srgbClr val="9FB8FF"/>
-                </a:solidFill>
-                <a:latin typeface="Calibri" pitchFamily="34" charset="0"/>
-                <a:ea typeface="Calibri" pitchFamily="34" charset="-122"/>
-                <a:cs typeface="Calibri" pitchFamily="34" charset="-120"/>
-              </a:rPr>
-              <a:t>05</a:t>
-            </a:r>
-            <a:endParaRPr lang="en-US" sz="1100" dirty="0"/>
-          </a:p>
-        </p:txBody>
-      </p:sp>
-      <p:sp>
-        <p:nvSpPr>
-          <p:cNvPr id="27" name="Text 25"/>
-          <p:cNvSpPr txBox="1"/>
-          <p:nvPr/>
-        </p:nvSpPr>
-        <p:spPr>
-          <a:xfrm>
-            <a:off x="9782617" y="2322576"/>
-            <a:ext cx="1531254" cy="603504"/>
-          </a:xfrm>
-          <a:prstGeom prst="rect">
-            <a:avLst/>
-          </a:prstGeom>
-          <a:noFill/>
-          <a:ln/>
-        </p:spPr>
-        <p:txBody>
-          <a:bodyPr wrap="square" lIns="0" tIns="0" rIns="0" bIns="0" rtlCol="0" anchor="ctr"/>
-          <a:lstStyle/>
-          <a:p>
-            <a:pPr indent="0" marL="0">
-              <a:lnSpc>
-                <a:spcPct val="110000"/>
-              </a:lnSpc>
-              <a:buNone/>
-            </a:pPr>
-            <a:r>
-              <a:rPr lang="en-US" sz="1450" b="1" dirty="0">
-                <a:solidFill>
-                  <a:srgbClr val="FFFFFF"/>
-                </a:solidFill>
-                <a:latin typeface="Calibri" pitchFamily="34" charset="0"/>
-                <a:ea typeface="Calibri" pitchFamily="34" charset="-122"/>
-                <a:cs typeface="Calibri" pitchFamily="34" charset="-120"/>
-              </a:rPr>
-              <a:t>검증 · 완료</a:t>
-            </a:r>
-            <a:endParaRPr lang="en-US" sz="1450" dirty="0"/>
-          </a:p>
-        </p:txBody>
-      </p:sp>
-      <p:sp>
-        <p:nvSpPr>
-          <p:cNvPr id="28" name="Text 26"/>
-          <p:cNvSpPr txBox="1"/>
-          <p:nvPr/>
-        </p:nvSpPr>
-        <p:spPr>
-          <a:xfrm>
-            <a:off x="9782617" y="2999232"/>
-            <a:ext cx="1531254" cy="457200"/>
-          </a:xfrm>
-          <a:prstGeom prst="rect">
-            <a:avLst/>
-          </a:prstGeom>
-          <a:noFill/>
-          <a:ln/>
-        </p:spPr>
-        <p:txBody>
-          <a:bodyPr wrap="square" lIns="0" tIns="0" rIns="0" bIns="0" rtlCol="0" anchor="ctr"/>
-          <a:lstStyle/>
-          <a:p>
-            <a:pPr indent="0" marL="0">
-              <a:lnSpc>
-                <a:spcPct val="120000"/>
-              </a:lnSpc>
-              <a:buNone/>
-            </a:pPr>
-            <a:r>
-              <a:rPr lang="en-US" sz="1100" dirty="0">
-                <a:solidFill>
-                  <a:srgbClr val="AFBFD6"/>
-                </a:solidFill>
-                <a:latin typeface="Calibri" pitchFamily="34" charset="0"/>
-                <a:ea typeface="Calibri" pitchFamily="34" charset="-122"/>
-                <a:cs typeface="Calibri" pitchFamily="34" charset="-120"/>
-              </a:rPr>
-              <a:t>테스트 · 리뷰 · 브랜치</a:t>
-            </a:r>
-            <a:endParaRPr lang="en-US" sz="1100" dirty="0"/>
-          </a:p>
-        </p:txBody>
-      </p:sp>
-      <p:sp>
-        <p:nvSpPr>
-          <p:cNvPr id="29" name="Shape 27"/>
+            <a:off x="640080" y="2487168"/>
+            <a:ext cx="2006742" cy="237744"/>
+          </a:xfrm>
+          <a:prstGeom prst="rect">
+            <a:avLst/>
+          </a:prstGeom>
+          <a:noFill/>
+          <a:ln/>
+        </p:spPr>
+        <p:txBody>
+          <a:bodyPr wrap="square" lIns="0" tIns="0" rIns="0" bIns="0" rtlCol="0" anchor="ctr"/>
+          <a:lstStyle/>
+          <a:p>
+            <a:pPr algn="ctr" indent="0" marL="0">
+              <a:buNone/>
+            </a:pPr>
+            <a:r>
+              <a:rPr lang="en-US" sz="1300" b="1" dirty="0">
+                <a:solidFill>
+                  <a:srgbClr val="D3E0FF"/>
+                </a:solidFill>
+                <a:latin typeface="Calibri" pitchFamily="34" charset="0"/>
+                <a:ea typeface="Calibri" pitchFamily="34" charset="-122"/>
+                <a:cs typeface="Calibri" pitchFamily="34" charset="-120"/>
+              </a:rPr>
+              <a:t>↓</a:t>
+            </a:r>
+            <a:endParaRPr lang="en-US" sz="1300" dirty="0"/>
+          </a:p>
+        </p:txBody>
+      </p:sp>
+      <p:sp>
+        <p:nvSpPr>
+          <p:cNvPr id="27" name="Shape 25"/>
           <p:cNvSpPr/>
           <p:nvPr/>
         </p:nvSpPr>
         <p:spPr>
           <a:xfrm>
-            <a:off x="640080" y="4279392"/>
-            <a:ext cx="10911535" cy="932688"/>
+            <a:off x="640080" y="3072384"/>
+            <a:ext cx="2006742" cy="1316736"/>
           </a:xfrm>
           <a:prstGeom prst="roundRect">
             <a:avLst>
-              <a:gd name="adj" fmla="val 5882"/>
+              <a:gd name="adj" fmla="val 4861"/>
+            </a:avLst>
+          </a:prstGeom>
+          <a:solidFill>
+            <a:srgbClr val="FFFFFF"/>
+          </a:solidFill>
+          <a:ln w="12700">
+            <a:solidFill>
+              <a:srgbClr val="D3E0FF"/>
+            </a:solidFill>
+            <a:prstDash val="solid"/>
+          </a:ln>
+        </p:spPr>
+      </p:sp>
+      <p:sp>
+        <p:nvSpPr>
+          <p:cNvPr id="28" name="Text 26"/>
+          <p:cNvSpPr txBox="1"/>
+          <p:nvPr/>
+        </p:nvSpPr>
+        <p:spPr>
+          <a:xfrm>
+            <a:off x="877824" y="3291840"/>
+            <a:ext cx="1531254" cy="877824"/>
+          </a:xfrm>
+          <a:prstGeom prst="rect">
+            <a:avLst/>
+          </a:prstGeom>
+          <a:noFill/>
+          <a:ln/>
+        </p:spPr>
+        <p:txBody>
+          <a:bodyPr wrap="square" lIns="0" tIns="0" rIns="0" bIns="0" rtlCol="0" anchor="ctr"/>
+          <a:lstStyle/>
+          <a:p>
+            <a:pPr indent="0" marL="0">
+              <a:lnSpc>
+                <a:spcPct val="130000"/>
+              </a:lnSpc>
+              <a:buNone/>
+            </a:pPr>
+            <a:r>
+              <a:rPr lang="en-US" sz="1150" dirty="0">
+                <a:solidFill>
+                  <a:srgbClr val="27374F"/>
+                </a:solidFill>
+                <a:latin typeface="Calibri" pitchFamily="34" charset="0"/>
+                <a:ea typeface="Calibri" pitchFamily="34" charset="-122"/>
+                <a:cs typeface="Calibri" pitchFamily="34" charset="-120"/>
+              </a:rPr>
+              <a:t>만들고 싶은 것 한 문장</a:t>
+            </a:r>
+            <a:endParaRPr lang="en-US" sz="1150" dirty="0"/>
+          </a:p>
+        </p:txBody>
+      </p:sp>
+      <p:sp>
+        <p:nvSpPr>
+          <p:cNvPr id="29" name="Text 27"/>
+          <p:cNvSpPr txBox="1"/>
+          <p:nvPr/>
+        </p:nvSpPr>
+        <p:spPr>
+          <a:xfrm>
+            <a:off x="2866278" y="2487168"/>
+            <a:ext cx="2006742" cy="237744"/>
+          </a:xfrm>
+          <a:prstGeom prst="rect">
+            <a:avLst/>
+          </a:prstGeom>
+          <a:noFill/>
+          <a:ln/>
+        </p:spPr>
+        <p:txBody>
+          <a:bodyPr wrap="square" lIns="0" tIns="0" rIns="0" bIns="0" rtlCol="0" anchor="ctr"/>
+          <a:lstStyle/>
+          <a:p>
+            <a:pPr algn="ctr" indent="0" marL="0">
+              <a:buNone/>
+            </a:pPr>
+            <a:r>
+              <a:rPr lang="en-US" sz="1300" b="1" dirty="0">
+                <a:solidFill>
+                  <a:srgbClr val="D3E0FF"/>
+                </a:solidFill>
+                <a:latin typeface="Calibri" pitchFamily="34" charset="0"/>
+                <a:ea typeface="Calibri" pitchFamily="34" charset="-122"/>
+                <a:cs typeface="Calibri" pitchFamily="34" charset="-120"/>
+              </a:rPr>
+              <a:t>↓</a:t>
+            </a:r>
+            <a:endParaRPr lang="en-US" sz="1300" dirty="0"/>
+          </a:p>
+        </p:txBody>
+      </p:sp>
+      <p:sp>
+        <p:nvSpPr>
+          <p:cNvPr id="30" name="Shape 28"/>
+          <p:cNvSpPr/>
+          <p:nvPr/>
+        </p:nvSpPr>
+        <p:spPr>
+          <a:xfrm>
+            <a:off x="2866278" y="3072384"/>
+            <a:ext cx="2006742" cy="1316736"/>
+          </a:xfrm>
+          <a:prstGeom prst="roundRect">
+            <a:avLst>
+              <a:gd name="adj" fmla="val 4861"/>
+            </a:avLst>
+          </a:prstGeom>
+          <a:solidFill>
+            <a:srgbClr val="FFFFFF"/>
+          </a:solidFill>
+          <a:ln w="12700">
+            <a:solidFill>
+              <a:srgbClr val="D3E0FF"/>
+            </a:solidFill>
+            <a:prstDash val="solid"/>
+          </a:ln>
+        </p:spPr>
+      </p:sp>
+      <p:sp>
+        <p:nvSpPr>
+          <p:cNvPr id="31" name="Text 29"/>
+          <p:cNvSpPr txBox="1"/>
+          <p:nvPr/>
+        </p:nvSpPr>
+        <p:spPr>
+          <a:xfrm>
+            <a:off x="3104022" y="3291840"/>
+            <a:ext cx="1531254" cy="877824"/>
+          </a:xfrm>
+          <a:prstGeom prst="rect">
+            <a:avLst/>
+          </a:prstGeom>
+          <a:noFill/>
+          <a:ln/>
+        </p:spPr>
+        <p:txBody>
+          <a:bodyPr wrap="square" lIns="0" tIns="0" rIns="0" bIns="0" rtlCol="0" anchor="ctr"/>
+          <a:lstStyle/>
+          <a:p>
+            <a:pPr indent="0" marL="0">
+              <a:lnSpc>
+                <a:spcPct val="130000"/>
+              </a:lnSpc>
+              <a:buNone/>
+            </a:pPr>
+            <a:r>
+              <a:rPr lang="en-US" sz="1150" dirty="0">
+                <a:solidFill>
+                  <a:srgbClr val="27374F"/>
+                </a:solidFill>
+                <a:latin typeface="Calibri" pitchFamily="34" charset="0"/>
+                <a:ea typeface="Calibri" pitchFamily="34" charset="-122"/>
+                <a:cs typeface="Calibri" pitchFamily="34" charset="-120"/>
+              </a:rPr>
+              <a:t>확정된 요구사항과 설계</a:t>
+            </a:r>
+            <a:endParaRPr lang="en-US" sz="1150" dirty="0"/>
+          </a:p>
+        </p:txBody>
+      </p:sp>
+      <p:sp>
+        <p:nvSpPr>
+          <p:cNvPr id="32" name="Text 30"/>
+          <p:cNvSpPr txBox="1"/>
+          <p:nvPr/>
+        </p:nvSpPr>
+        <p:spPr>
+          <a:xfrm>
+            <a:off x="5092476" y="2487168"/>
+            <a:ext cx="2006742" cy="237744"/>
+          </a:xfrm>
+          <a:prstGeom prst="rect">
+            <a:avLst/>
+          </a:prstGeom>
+          <a:noFill/>
+          <a:ln/>
+        </p:spPr>
+        <p:txBody>
+          <a:bodyPr wrap="square" lIns="0" tIns="0" rIns="0" bIns="0" rtlCol="0" anchor="ctr"/>
+          <a:lstStyle/>
+          <a:p>
+            <a:pPr algn="ctr" indent="0" marL="0">
+              <a:buNone/>
+            </a:pPr>
+            <a:r>
+              <a:rPr lang="en-US" sz="1300" b="1" dirty="0">
+                <a:solidFill>
+                  <a:srgbClr val="D3E0FF"/>
+                </a:solidFill>
+                <a:latin typeface="Calibri" pitchFamily="34" charset="0"/>
+                <a:ea typeface="Calibri" pitchFamily="34" charset="-122"/>
+                <a:cs typeface="Calibri" pitchFamily="34" charset="-120"/>
+              </a:rPr>
+              <a:t>↓</a:t>
+            </a:r>
+            <a:endParaRPr lang="en-US" sz="1300" dirty="0"/>
+          </a:p>
+        </p:txBody>
+      </p:sp>
+      <p:sp>
+        <p:nvSpPr>
+          <p:cNvPr id="33" name="Shape 31"/>
+          <p:cNvSpPr/>
+          <p:nvPr/>
+        </p:nvSpPr>
+        <p:spPr>
+          <a:xfrm>
+            <a:off x="5092476" y="3072384"/>
+            <a:ext cx="2006742" cy="1316736"/>
+          </a:xfrm>
+          <a:prstGeom prst="roundRect">
+            <a:avLst>
+              <a:gd name="adj" fmla="val 4861"/>
+            </a:avLst>
+          </a:prstGeom>
+          <a:solidFill>
+            <a:srgbClr val="FFFFFF"/>
+          </a:solidFill>
+          <a:ln w="12700">
+            <a:solidFill>
+              <a:srgbClr val="D3E0FF"/>
+            </a:solidFill>
+            <a:prstDash val="solid"/>
+          </a:ln>
+        </p:spPr>
+      </p:sp>
+      <p:sp>
+        <p:nvSpPr>
+          <p:cNvPr id="34" name="Text 32"/>
+          <p:cNvSpPr txBox="1"/>
+          <p:nvPr/>
+        </p:nvSpPr>
+        <p:spPr>
+          <a:xfrm>
+            <a:off x="5330220" y="3291840"/>
+            <a:ext cx="1531254" cy="877824"/>
+          </a:xfrm>
+          <a:prstGeom prst="rect">
+            <a:avLst/>
+          </a:prstGeom>
+          <a:noFill/>
+          <a:ln/>
+        </p:spPr>
+        <p:txBody>
+          <a:bodyPr wrap="square" lIns="0" tIns="0" rIns="0" bIns="0" rtlCol="0" anchor="ctr"/>
+          <a:lstStyle/>
+          <a:p>
+            <a:pPr indent="0" marL="0">
+              <a:lnSpc>
+                <a:spcPct val="130000"/>
+              </a:lnSpc>
+              <a:buNone/>
+            </a:pPr>
+            <a:r>
+              <a:rPr lang="en-US" sz="1150" dirty="0">
+                <a:solidFill>
+                  <a:srgbClr val="27374F"/>
+                </a:solidFill>
+                <a:latin typeface="Calibri" pitchFamily="34" charset="0"/>
+                <a:ea typeface="Calibri" pitchFamily="34" charset="-122"/>
+                <a:cs typeface="Calibri" pitchFamily="34" charset="-120"/>
+              </a:rPr>
+              <a:t>구현 계획서</a:t>
+            </a:r>
+            <a:endParaRPr lang="en-US" sz="1150" dirty="0"/>
+          </a:p>
+          <a:p>
+            <a:pPr indent="0" marL="0">
+              <a:lnSpc>
+                <a:spcPct val="130000"/>
+              </a:lnSpc>
+              <a:buNone/>
+            </a:pPr>
+            <a:r>
+              <a:rPr lang="en-US" sz="1150" dirty="0">
+                <a:solidFill>
+                  <a:srgbClr val="27374F"/>
+                </a:solidFill>
+                <a:latin typeface="Calibri" pitchFamily="34" charset="0"/>
+                <a:ea typeface="Calibri" pitchFamily="34" charset="-122"/>
+                <a:cs typeface="Calibri" pitchFamily="34" charset="-120"/>
+              </a:rPr>
+              <a:t>(파일·테스트·순서)</a:t>
+            </a:r>
+            <a:endParaRPr lang="en-US" sz="1150" dirty="0"/>
+          </a:p>
+        </p:txBody>
+      </p:sp>
+      <p:sp>
+        <p:nvSpPr>
+          <p:cNvPr id="35" name="Text 33"/>
+          <p:cNvSpPr txBox="1"/>
+          <p:nvPr/>
+        </p:nvSpPr>
+        <p:spPr>
+          <a:xfrm>
+            <a:off x="7318675" y="2487168"/>
+            <a:ext cx="2006742" cy="237744"/>
+          </a:xfrm>
+          <a:prstGeom prst="rect">
+            <a:avLst/>
+          </a:prstGeom>
+          <a:noFill/>
+          <a:ln/>
+        </p:spPr>
+        <p:txBody>
+          <a:bodyPr wrap="square" lIns="0" tIns="0" rIns="0" bIns="0" rtlCol="0" anchor="ctr"/>
+          <a:lstStyle/>
+          <a:p>
+            <a:pPr algn="ctr" indent="0" marL="0">
+              <a:buNone/>
+            </a:pPr>
+            <a:r>
+              <a:rPr lang="en-US" sz="1300" b="1" dirty="0">
+                <a:solidFill>
+                  <a:srgbClr val="D3E0FF"/>
+                </a:solidFill>
+                <a:latin typeface="Calibri" pitchFamily="34" charset="0"/>
+                <a:ea typeface="Calibri" pitchFamily="34" charset="-122"/>
+                <a:cs typeface="Calibri" pitchFamily="34" charset="-120"/>
+              </a:rPr>
+              <a:t>↓</a:t>
+            </a:r>
+            <a:endParaRPr lang="en-US" sz="1300" dirty="0"/>
+          </a:p>
+        </p:txBody>
+      </p:sp>
+      <p:sp>
+        <p:nvSpPr>
+          <p:cNvPr id="36" name="Shape 34"/>
+          <p:cNvSpPr/>
+          <p:nvPr/>
+        </p:nvSpPr>
+        <p:spPr>
+          <a:xfrm>
+            <a:off x="7318675" y="3072384"/>
+            <a:ext cx="2006742" cy="1316736"/>
+          </a:xfrm>
+          <a:prstGeom prst="roundRect">
+            <a:avLst>
+              <a:gd name="adj" fmla="val 4861"/>
+            </a:avLst>
+          </a:prstGeom>
+          <a:solidFill>
+            <a:srgbClr val="FFFFFF"/>
+          </a:solidFill>
+          <a:ln w="12700">
+            <a:solidFill>
+              <a:srgbClr val="D3E0FF"/>
+            </a:solidFill>
+            <a:prstDash val="solid"/>
+          </a:ln>
+        </p:spPr>
+      </p:sp>
+      <p:sp>
+        <p:nvSpPr>
+          <p:cNvPr id="37" name="Text 35"/>
+          <p:cNvSpPr txBox="1"/>
+          <p:nvPr/>
+        </p:nvSpPr>
+        <p:spPr>
+          <a:xfrm>
+            <a:off x="7556419" y="3291840"/>
+            <a:ext cx="1531254" cy="877824"/>
+          </a:xfrm>
+          <a:prstGeom prst="rect">
+            <a:avLst/>
+          </a:prstGeom>
+          <a:noFill/>
+          <a:ln/>
+        </p:spPr>
+        <p:txBody>
+          <a:bodyPr wrap="square" lIns="0" tIns="0" rIns="0" bIns="0" rtlCol="0" anchor="ctr"/>
+          <a:lstStyle/>
+          <a:p>
+            <a:pPr indent="0" marL="0">
+              <a:lnSpc>
+                <a:spcPct val="130000"/>
+              </a:lnSpc>
+              <a:buNone/>
+            </a:pPr>
+            <a:r>
+              <a:rPr lang="en-US" sz="1150" dirty="0">
+                <a:solidFill>
+                  <a:srgbClr val="27374F"/>
+                </a:solidFill>
+                <a:latin typeface="Calibri" pitchFamily="34" charset="0"/>
+                <a:ea typeface="Calibri" pitchFamily="34" charset="-122"/>
+                <a:cs typeface="Calibri" pitchFamily="34" charset="-120"/>
+              </a:rPr>
+              <a:t>테스트를 통과한 코드</a:t>
+            </a:r>
+            <a:endParaRPr lang="en-US" sz="1150" dirty="0"/>
+          </a:p>
+        </p:txBody>
+      </p:sp>
+      <p:sp>
+        <p:nvSpPr>
+          <p:cNvPr id="38" name="Text 36"/>
+          <p:cNvSpPr txBox="1"/>
+          <p:nvPr/>
+        </p:nvSpPr>
+        <p:spPr>
+          <a:xfrm>
+            <a:off x="9544873" y="2487168"/>
+            <a:ext cx="2006742" cy="237744"/>
+          </a:xfrm>
+          <a:prstGeom prst="rect">
+            <a:avLst/>
+          </a:prstGeom>
+          <a:noFill/>
+          <a:ln/>
+        </p:spPr>
+        <p:txBody>
+          <a:bodyPr wrap="square" lIns="0" tIns="0" rIns="0" bIns="0" rtlCol="0" anchor="ctr"/>
+          <a:lstStyle/>
+          <a:p>
+            <a:pPr algn="ctr" indent="0" marL="0">
+              <a:buNone/>
+            </a:pPr>
+            <a:r>
+              <a:rPr lang="en-US" sz="1300" b="1" dirty="0">
+                <a:solidFill>
+                  <a:srgbClr val="D3E0FF"/>
+                </a:solidFill>
+                <a:latin typeface="Calibri" pitchFamily="34" charset="0"/>
+                <a:ea typeface="Calibri" pitchFamily="34" charset="-122"/>
+                <a:cs typeface="Calibri" pitchFamily="34" charset="-120"/>
+              </a:rPr>
+              <a:t>↓</a:t>
+            </a:r>
+            <a:endParaRPr lang="en-US" sz="1300" dirty="0"/>
+          </a:p>
+        </p:txBody>
+      </p:sp>
+      <p:sp>
+        <p:nvSpPr>
+          <p:cNvPr id="39" name="Shape 37"/>
+          <p:cNvSpPr/>
+          <p:nvPr/>
+        </p:nvSpPr>
+        <p:spPr>
+          <a:xfrm>
+            <a:off x="9544873" y="3072384"/>
+            <a:ext cx="2006742" cy="1316736"/>
+          </a:xfrm>
+          <a:prstGeom prst="roundRect">
+            <a:avLst>
+              <a:gd name="adj" fmla="val 4861"/>
+            </a:avLst>
+          </a:prstGeom>
+          <a:solidFill>
+            <a:srgbClr val="FFFFFF"/>
+          </a:solidFill>
+          <a:ln w="12700">
+            <a:solidFill>
+              <a:srgbClr val="D3E0FF"/>
+            </a:solidFill>
+            <a:prstDash val="solid"/>
+          </a:ln>
+        </p:spPr>
+      </p:sp>
+      <p:sp>
+        <p:nvSpPr>
+          <p:cNvPr id="40" name="Text 38"/>
+          <p:cNvSpPr txBox="1"/>
+          <p:nvPr/>
+        </p:nvSpPr>
+        <p:spPr>
+          <a:xfrm>
+            <a:off x="9782617" y="3291840"/>
+            <a:ext cx="1531254" cy="877824"/>
+          </a:xfrm>
+          <a:prstGeom prst="rect">
+            <a:avLst/>
+          </a:prstGeom>
+          <a:noFill/>
+          <a:ln/>
+        </p:spPr>
+        <p:txBody>
+          <a:bodyPr wrap="square" lIns="0" tIns="0" rIns="0" bIns="0" rtlCol="0" anchor="ctr"/>
+          <a:lstStyle/>
+          <a:p>
+            <a:pPr indent="0" marL="0">
+              <a:lnSpc>
+                <a:spcPct val="130000"/>
+              </a:lnSpc>
+              <a:buNone/>
+            </a:pPr>
+            <a:r>
+              <a:rPr lang="en-US" sz="1150" dirty="0">
+                <a:solidFill>
+                  <a:srgbClr val="27374F"/>
+                </a:solidFill>
+                <a:latin typeface="Calibri" pitchFamily="34" charset="0"/>
+                <a:ea typeface="Calibri" pitchFamily="34" charset="-122"/>
+                <a:cs typeface="Calibri" pitchFamily="34" charset="-120"/>
+              </a:rPr>
+              <a:t>테스트 기록과</a:t>
+            </a:r>
+            <a:endParaRPr lang="en-US" sz="1150" dirty="0"/>
+          </a:p>
+          <a:p>
+            <a:pPr indent="0" marL="0">
+              <a:lnSpc>
+                <a:spcPct val="130000"/>
+              </a:lnSpc>
+              <a:buNone/>
+            </a:pPr>
+            <a:r>
+              <a:rPr lang="en-US" sz="1150" dirty="0">
+                <a:solidFill>
+                  <a:srgbClr val="27374F"/>
+                </a:solidFill>
+                <a:latin typeface="Calibri" pitchFamily="34" charset="0"/>
+                <a:ea typeface="Calibri" pitchFamily="34" charset="-122"/>
+                <a:cs typeface="Calibri" pitchFamily="34" charset="-120"/>
+              </a:rPr>
+              <a:t>정리된 브랜치</a:t>
+            </a:r>
+            <a:endParaRPr lang="en-US" sz="1150" dirty="0"/>
+          </a:p>
+        </p:txBody>
+      </p:sp>
+      <p:sp>
+        <p:nvSpPr>
+          <p:cNvPr id="41" name="Shape 39"/>
+          <p:cNvSpPr/>
+          <p:nvPr/>
+        </p:nvSpPr>
+        <p:spPr>
+          <a:xfrm>
+            <a:off x="640080" y="4700016"/>
+            <a:ext cx="10911535" cy="969264"/>
+          </a:xfrm>
+          <a:prstGeom prst="roundRect">
+            <a:avLst>
+              <a:gd name="adj" fmla="val 5660"/>
             </a:avLst>
           </a:prstGeom>
           <a:solidFill>
@@ -15404,103 +15852,36 @@
       </p:sp>
       <p:sp>
         <p:nvSpPr>
-          <p:cNvPr id="30" name="Text 28"/>
-          <p:cNvSpPr txBox="1"/>
-          <p:nvPr/>
-        </p:nvSpPr>
-        <p:spPr>
-          <a:xfrm>
-            <a:off x="914400" y="4279392"/>
-            <a:ext cx="10362895" cy="932688"/>
-          </a:xfrm>
-          <a:prstGeom prst="rect">
-            <a:avLst/>
-          </a:prstGeom>
-          <a:noFill/>
-          <a:ln/>
-        </p:spPr>
-        <p:txBody>
-          <a:bodyPr wrap="square" lIns="0" tIns="0" rIns="0" bIns="0" rtlCol="0" anchor="ctr"/>
-          <a:lstStyle/>
-          <a:p>
-            <a:pPr algn="ctr" indent="0" marL="0">
-              <a:buNone/>
-            </a:pPr>
-            <a:r>
-              <a:rPr lang="en-US" sz="1300" dirty="0">
-                <a:solidFill>
-                  <a:srgbClr val="8A6A44"/>
-                </a:solidFill>
-                <a:latin typeface="Calibri" pitchFamily="34" charset="0"/>
-                <a:ea typeface="Calibri" pitchFamily="34" charset="-122"/>
-                <a:cs typeface="Calibri" pitchFamily="34" charset="-120"/>
-              </a:rPr>
-              <a:t>작업 중 오류가 생기면  </a:t>
-            </a:r>
-            <a:pPr algn="ctr" indent="0" marL="0">
-              <a:buNone/>
-            </a:pPr>
-            <a:r>
-              <a:rPr lang="en-US" sz="1300" b="1" dirty="0">
-                <a:solidFill>
-                  <a:srgbClr val="B4651F"/>
-                </a:solidFill>
-                <a:latin typeface="Calibri" pitchFamily="34" charset="0"/>
-                <a:ea typeface="Calibri" pitchFamily="34" charset="-122"/>
-                <a:cs typeface="Calibri" pitchFamily="34" charset="-120"/>
-              </a:rPr>
-              <a:t>Systematic Debugging</a:t>
-            </a:r>
-            <a:pPr algn="ctr" indent="0" marL="0">
-              <a:buNone/>
-            </a:pPr>
-            <a:r>
-              <a:rPr lang="en-US" sz="1300" dirty="0">
-                <a:solidFill>
-                  <a:srgbClr val="8A6A44"/>
-                </a:solidFill>
-                <a:latin typeface="Calibri" pitchFamily="34" charset="0"/>
-                <a:ea typeface="Calibri" pitchFamily="34" charset="-122"/>
-                <a:cs typeface="Calibri" pitchFamily="34" charset="-120"/>
-              </a:rPr>
-              <a:t>  으로 원인부터 찾은 뒤 다시 흐름에 복귀합니다.</a:t>
-            </a:r>
-            <a:endParaRPr lang="en-US" sz="1300" dirty="0"/>
-          </a:p>
-        </p:txBody>
-      </p:sp>
-      <p:sp>
-        <p:nvSpPr>
-          <p:cNvPr id="31" name="Shape 29"/>
+          <p:cNvPr id="42" name="Shape 40"/>
           <p:cNvSpPr/>
           <p:nvPr/>
         </p:nvSpPr>
         <p:spPr>
           <a:xfrm>
-            <a:off x="640080" y="5431536"/>
-            <a:ext cx="10911535" cy="566928"/>
+            <a:off x="950976" y="5010912"/>
+            <a:ext cx="1133856" cy="347472"/>
           </a:xfrm>
           <a:prstGeom prst="roundRect">
             <a:avLst>
-              <a:gd name="adj" fmla="val 9677"/>
+              <a:gd name="adj" fmla="val 50000"/>
             </a:avLst>
           </a:prstGeom>
           <a:solidFill>
-            <a:srgbClr val="EEF3FF"/>
+            <a:srgbClr val="F2994A"/>
           </a:solidFill>
           <a:ln/>
         </p:spPr>
       </p:sp>
       <p:sp>
         <p:nvSpPr>
-          <p:cNvPr id="32" name="Text 30"/>
-          <p:cNvSpPr txBox="1"/>
-          <p:nvPr/>
-        </p:nvSpPr>
-        <p:spPr>
-          <a:xfrm>
-            <a:off x="914400" y="5431536"/>
-            <a:ext cx="10362895" cy="566928"/>
+          <p:cNvPr id="43" name="Text 41"/>
+          <p:cNvSpPr txBox="1"/>
+          <p:nvPr/>
+        </p:nvSpPr>
+        <p:spPr>
+          <a:xfrm>
+            <a:off x="950976" y="5010912"/>
+            <a:ext cx="1133856" cy="347472"/>
           </a:xfrm>
           <a:prstGeom prst="rect">
             <a:avLst/>
@@ -15516,17 +15897,109 @@
               <a:buNone/>
             </a:pPr>
             <a:r>
-              <a:rPr lang="en-US" sz="1350" b="1" dirty="0">
-                <a:solidFill>
-                  <a:srgbClr val="1E4FD1"/>
-                </a:solidFill>
-                <a:latin typeface="Calibri" pitchFamily="34" charset="0"/>
-                <a:ea typeface="Calibri" pitchFamily="34" charset="-122"/>
-                <a:cs typeface="Calibri" pitchFamily="34" charset="-120"/>
-              </a:rPr>
-              <a:t>이해 → 계획 → 구현 → 검증. 각 단계의 결과가 다음 단계의 입력이 됩니다.</a:t>
-            </a:r>
-            <a:endParaRPr lang="en-US" sz="1350" dirty="0"/>
+              <a:rPr lang="en-US" sz="1050" b="1" dirty="0">
+                <a:solidFill>
+                  <a:srgbClr val="FFFFFF"/>
+                </a:solidFill>
+                <a:latin typeface="Calibri" pitchFamily="34" charset="0"/>
+                <a:ea typeface="Calibri" pitchFamily="34" charset="-122"/>
+                <a:cs typeface="Calibri" pitchFamily="34" charset="-120"/>
+              </a:rPr>
+              <a:t>오류 발생 시</a:t>
+            </a:r>
+            <a:endParaRPr lang="en-US" sz="1050" dirty="0"/>
+          </a:p>
+        </p:txBody>
+      </p:sp>
+      <p:sp>
+        <p:nvSpPr>
+          <p:cNvPr id="44" name="Text 42"/>
+          <p:cNvSpPr txBox="1"/>
+          <p:nvPr/>
+        </p:nvSpPr>
+        <p:spPr>
+          <a:xfrm>
+            <a:off x="2249424" y="4700016"/>
+            <a:ext cx="8991295" cy="969264"/>
+          </a:xfrm>
+          <a:prstGeom prst="rect">
+            <a:avLst/>
+          </a:prstGeom>
+          <a:noFill/>
+          <a:ln/>
+        </p:spPr>
+        <p:txBody>
+          <a:bodyPr wrap="square" lIns="0" tIns="0" rIns="0" bIns="0" rtlCol="0" anchor="ctr"/>
+          <a:lstStyle/>
+          <a:p>
+            <a:pPr indent="0" marL="0">
+              <a:buNone/>
+            </a:pPr>
+            <a:r>
+              <a:rPr lang="en-US" sz="1250" b="1" dirty="0">
+                <a:solidFill>
+                  <a:srgbClr val="A9541A"/>
+                </a:solidFill>
+                <a:latin typeface="Calibri" pitchFamily="34" charset="0"/>
+                <a:ea typeface="Calibri" pitchFamily="34" charset="-122"/>
+                <a:cs typeface="Calibri" pitchFamily="34" charset="-120"/>
+              </a:rPr>
+              <a:t>Systematic Debugging</a:t>
+            </a:r>
+            <a:pPr indent="0" marL="0">
+              <a:buNone/>
+            </a:pPr>
+            <a:r>
+              <a:rPr lang="en-US" sz="1250" dirty="0">
+                <a:solidFill>
+                  <a:srgbClr val="7E6242"/>
+                </a:solidFill>
+                <a:latin typeface="Calibri" pitchFamily="34" charset="0"/>
+                <a:ea typeface="Calibri" pitchFamily="34" charset="-122"/>
+                <a:cs typeface="Calibri" pitchFamily="34" charset="-120"/>
+              </a:rPr>
+              <a:t> 으로 재현 → 증거 → 원인을 확인한 뒤, 멈췄던 단계로 돌아갑니다.</a:t>
+            </a:r>
+            <a:endParaRPr lang="en-US" sz="1250" dirty="0"/>
+          </a:p>
+        </p:txBody>
+      </p:sp>
+      <p:sp>
+        <p:nvSpPr>
+          <p:cNvPr id="45" name="Text 43"/>
+          <p:cNvSpPr txBox="1"/>
+          <p:nvPr/>
+        </p:nvSpPr>
+        <p:spPr>
+          <a:xfrm>
+            <a:off x="640080" y="6382512"/>
+            <a:ext cx="10911535" cy="237744"/>
+          </a:xfrm>
+          <a:prstGeom prst="rect">
+            <a:avLst/>
+          </a:prstGeom>
+          <a:noFill/>
+          <a:ln/>
+        </p:spPr>
+        <p:txBody>
+          <a:bodyPr wrap="square" lIns="0" tIns="0" rIns="0" bIns="0" rtlCol="0" anchor="ctr"/>
+          <a:lstStyle/>
+          <a:p>
+            <a:pPr indent="0" marL="0">
+              <a:buNone/>
+            </a:pPr>
+            <a:r>
+              <a:rPr lang="en-US" sz="950" dirty="0">
+                <a:solidFill>
+                  <a:srgbClr val="8A94A6"/>
+                </a:solidFill>
+                <a:latin typeface="Calibri" pitchFamily="34" charset="0"/>
+                <a:ea typeface="Calibri" pitchFamily="34" charset="-122"/>
+                <a:cs typeface="Calibri" pitchFamily="34" charset="-120"/>
+              </a:rPr>
+              <a:t>Superpowers가 각 단계에 어떤 Skill을 쓰는지는 다음 장부터 살펴봅니다.</a:t>
+            </a:r>
+            <a:endParaRPr lang="en-US" sz="950" dirty="0"/>
           </a:p>
         </p:txBody>
       </p:sp>

--- a/presentation/Superpowers_Codex_10min.pptx
+++ b/presentation/Superpowers_Codex_10min.pptx
@@ -14507,7 +14507,7 @@
         </p:nvSpPr>
         <p:spPr>
           <a:xfrm>
-            <a:off x="640080" y="1225296"/>
+            <a:off x="640080" y="1188720"/>
             <a:ext cx="5486400" cy="237744"/>
           </a:xfrm>
           <a:prstGeom prst="rect">
@@ -14546,12 +14546,12 @@
         </p:nvSpPr>
         <p:spPr>
           <a:xfrm>
-            <a:off x="640080" y="1517904"/>
-            <a:ext cx="2006742" cy="950976"/>
+            <a:off x="640080" y="1481328"/>
+            <a:ext cx="2006742" cy="1207008"/>
           </a:xfrm>
           <a:prstGeom prst="roundRect">
             <a:avLst>
-              <a:gd name="adj" fmla="val 6731"/>
+              <a:gd name="adj" fmla="val 5303"/>
             </a:avLst>
           </a:prstGeom>
           <a:solidFill>
@@ -14568,24 +14568,24 @@
         </p:nvSpPr>
         <p:spPr>
           <a:xfrm>
-            <a:off x="877824" y="1664208"/>
-            <a:ext cx="1531254" cy="219456"/>
-          </a:xfrm>
-          <a:prstGeom prst="rect">
-            <a:avLst/>
-          </a:prstGeom>
-          <a:noFill/>
-          <a:ln/>
-        </p:spPr>
-        <p:txBody>
-          <a:bodyPr wrap="square" lIns="0" tIns="0" rIns="0" bIns="0" rtlCol="0" anchor="ctr"/>
-          <a:lstStyle/>
-          <a:p>
-            <a:pPr indent="0" marL="0">
-              <a:buNone/>
-            </a:pPr>
-            <a:r>
-              <a:rPr lang="en-US" sz="1050" b="1" dirty="0">
+            <a:off x="859536" y="1609344"/>
+            <a:ext cx="1567830" cy="201168"/>
+          </a:xfrm>
+          <a:prstGeom prst="rect">
+            <a:avLst/>
+          </a:prstGeom>
+          <a:noFill/>
+          <a:ln/>
+        </p:spPr>
+        <p:txBody>
+          <a:bodyPr wrap="square" lIns="0" tIns="0" rIns="0" bIns="0" rtlCol="0" anchor="ctr"/>
+          <a:lstStyle/>
+          <a:p>
+            <a:pPr indent="0" marL="0">
+              <a:buNone/>
+            </a:pPr>
+            <a:r>
+              <a:rPr lang="en-US" sz="1000" b="1" dirty="0">
                 <a:solidFill>
                   <a:srgbClr val="8A94A6"/>
                 </a:solidFill>
@@ -14595,7 +14595,7 @@
               </a:rPr>
               <a:t>01</a:t>
             </a:r>
-            <a:endParaRPr lang="en-US" sz="1050" dirty="0"/>
+            <a:endParaRPr lang="en-US" sz="1000" dirty="0"/>
           </a:p>
         </p:txBody>
       </p:sp>
@@ -14607,8 +14607,8 @@
         </p:nvSpPr>
         <p:spPr>
           <a:xfrm>
-            <a:off x="877824" y="1938528"/>
-            <a:ext cx="1531254" cy="420624"/>
+            <a:off x="859536" y="1847088"/>
+            <a:ext cx="1567830" cy="530352"/>
           </a:xfrm>
           <a:prstGeom prst="rect">
             <a:avLst/>
@@ -14622,12 +14622,12 @@
           <a:p>
             <a:pPr indent="0" marL="0">
               <a:lnSpc>
-                <a:spcPct val="105000"/>
+                <a:spcPct val="115000"/>
               </a:lnSpc>
               <a:buNone/>
             </a:pPr>
             <a:r>
-              <a:rPr lang="en-US" sz="1400" b="1" dirty="0">
+              <a:rPr lang="en-US" sz="1300" b="1" dirty="0">
                 <a:solidFill>
                   <a:srgbClr val="0F1B33"/>
                 </a:solidFill>
@@ -14635,9 +14635,9 @@
                 <a:ea typeface="Calibri" pitchFamily="34" charset="-122"/>
                 <a:cs typeface="Calibri" pitchFamily="34" charset="-120"/>
               </a:rPr>
-              <a:t>아이디어</a:t>
-            </a:r>
-            <a:endParaRPr lang="en-US" sz="1400" dirty="0"/>
+              <a:t>하고 싶은 것 말하기</a:t>
+            </a:r>
+            <a:endParaRPr lang="en-US" sz="1300" dirty="0"/>
           </a:p>
         </p:txBody>
       </p:sp>
@@ -14649,7 +14649,7 @@
         </p:nvSpPr>
         <p:spPr>
           <a:xfrm>
-            <a:off x="2646822" y="1828800"/>
+            <a:off x="2646822" y="1920240"/>
             <a:ext cx="219456" cy="329184"/>
           </a:xfrm>
           <a:prstGeom prst="rect">
@@ -14688,12 +14688,12 @@
         </p:nvSpPr>
         <p:spPr>
           <a:xfrm>
-            <a:off x="2866278" y="1517904"/>
-            <a:ext cx="2006742" cy="950976"/>
+            <a:off x="2866278" y="1481328"/>
+            <a:ext cx="2006742" cy="1207008"/>
           </a:xfrm>
           <a:prstGeom prst="roundRect">
             <a:avLst>
-              <a:gd name="adj" fmla="val 6731"/>
+              <a:gd name="adj" fmla="val 5303"/>
             </a:avLst>
           </a:prstGeom>
           <a:solidFill>
@@ -14710,24 +14710,24 @@
         </p:nvSpPr>
         <p:spPr>
           <a:xfrm>
-            <a:off x="3104022" y="1664208"/>
-            <a:ext cx="1531254" cy="219456"/>
-          </a:xfrm>
-          <a:prstGeom prst="rect">
-            <a:avLst/>
-          </a:prstGeom>
-          <a:noFill/>
-          <a:ln/>
-        </p:spPr>
-        <p:txBody>
-          <a:bodyPr wrap="square" lIns="0" tIns="0" rIns="0" bIns="0" rtlCol="0" anchor="ctr"/>
-          <a:lstStyle/>
-          <a:p>
-            <a:pPr indent="0" marL="0">
-              <a:buNone/>
-            </a:pPr>
-            <a:r>
-              <a:rPr lang="en-US" sz="1050" b="1" dirty="0">
+            <a:off x="3085734" y="1609344"/>
+            <a:ext cx="1567830" cy="201168"/>
+          </a:xfrm>
+          <a:prstGeom prst="rect">
+            <a:avLst/>
+          </a:prstGeom>
+          <a:noFill/>
+          <a:ln/>
+        </p:spPr>
+        <p:txBody>
+          <a:bodyPr wrap="square" lIns="0" tIns="0" rIns="0" bIns="0" rtlCol="0" anchor="ctr"/>
+          <a:lstStyle/>
+          <a:p>
+            <a:pPr indent="0" marL="0">
+              <a:buNone/>
+            </a:pPr>
+            <a:r>
+              <a:rPr lang="en-US" sz="1000" b="1" dirty="0">
                 <a:solidFill>
                   <a:srgbClr val="8A94A6"/>
                 </a:solidFill>
@@ -14737,7 +14737,7 @@
               </a:rPr>
               <a:t>02</a:t>
             </a:r>
-            <a:endParaRPr lang="en-US" sz="1050" dirty="0"/>
+            <a:endParaRPr lang="en-US" sz="1000" dirty="0"/>
           </a:p>
         </p:txBody>
       </p:sp>
@@ -14749,8 +14749,8 @@
         </p:nvSpPr>
         <p:spPr>
           <a:xfrm>
-            <a:off x="3104022" y="1938528"/>
-            <a:ext cx="1531254" cy="420624"/>
+            <a:off x="3085734" y="1847088"/>
+            <a:ext cx="1567830" cy="530352"/>
           </a:xfrm>
           <a:prstGeom prst="rect">
             <a:avLst/>
@@ -14764,12 +14764,12 @@
           <a:p>
             <a:pPr indent="0" marL="0">
               <a:lnSpc>
-                <a:spcPct val="105000"/>
+                <a:spcPct val="115000"/>
               </a:lnSpc>
               <a:buNone/>
             </a:pPr>
             <a:r>
-              <a:rPr lang="en-US" sz="1400" b="1" dirty="0">
+              <a:rPr lang="en-US" sz="1300" b="1" dirty="0">
                 <a:solidFill>
                   <a:srgbClr val="0F1B33"/>
                 </a:solidFill>
@@ -14777,21 +14777,60 @@
                 <a:ea typeface="Calibri" pitchFamily="34" charset="-122"/>
                 <a:cs typeface="Calibri" pitchFamily="34" charset="-120"/>
               </a:rPr>
+              <a:t>질문으로 조건 좁히기</a:t>
+            </a:r>
+            <a:endParaRPr lang="en-US" sz="1300" dirty="0"/>
+          </a:p>
+        </p:txBody>
+      </p:sp>
+      <p:sp>
+        <p:nvSpPr>
+          <p:cNvPr id="13" name="Text 11"/>
+          <p:cNvSpPr txBox="1"/>
+          <p:nvPr/>
+        </p:nvSpPr>
+        <p:spPr>
+          <a:xfrm>
+            <a:off x="3085734" y="2395728"/>
+            <a:ext cx="1567830" cy="219456"/>
+          </a:xfrm>
+          <a:prstGeom prst="rect">
+            <a:avLst/>
+          </a:prstGeom>
+          <a:noFill/>
+          <a:ln/>
+        </p:spPr>
+        <p:txBody>
+          <a:bodyPr wrap="square" lIns="0" tIns="0" rIns="0" bIns="0" rtlCol="0" anchor="ctr"/>
+          <a:lstStyle/>
+          <a:p>
+            <a:pPr indent="0" marL="0">
+              <a:buNone/>
+            </a:pPr>
+            <a:r>
+              <a:rPr lang="en-US" sz="950" dirty="0">
+                <a:solidFill>
+                  <a:srgbClr val="5B6577"/>
+                </a:solidFill>
+                <a:latin typeface="Calibri" pitchFamily="34" charset="0"/>
+                <a:ea typeface="Calibri" pitchFamily="34" charset="-122"/>
+                <a:cs typeface="Calibri" pitchFamily="34" charset="-120"/>
+              </a:rPr>
               <a:t>Brainstorming</a:t>
             </a:r>
-            <a:endParaRPr lang="en-US" sz="1400" dirty="0"/>
-          </a:p>
-        </p:txBody>
-      </p:sp>
-      <p:sp>
-        <p:nvSpPr>
-          <p:cNvPr id="13" name="Text 11"/>
-          <p:cNvSpPr txBox="1"/>
-          <p:nvPr/>
-        </p:nvSpPr>
-        <p:spPr>
-          <a:xfrm>
-            <a:off x="4873020" y="1828800"/>
+            <a:endParaRPr lang="en-US" sz="950" dirty="0"/>
+          </a:p>
+        </p:txBody>
+      </p:sp>
+      <p:sp>
+        <p:nvSpPr>
+          <p:cNvPr id="14" name="Text 12"/>
+          <p:cNvSpPr txBox="1"/>
+          <p:nvPr/>
+        </p:nvSpPr>
+        <p:spPr>
+          <a:xfrm>
+            <a:off x="4873020" y="1920240"/>
             <a:ext cx="219456" cy="329184"/>
           </a:xfrm>
           <a:prstGeom prst="rect">
@@ -14824,18 +14863,18 @@
       </p:sp>
       <p:sp>
         <p:nvSpPr>
-          <p:cNvPr id="14" name="Shape 12"/>
+          <p:cNvPr id="15" name="Shape 13"/>
           <p:cNvSpPr/>
           <p:nvPr/>
         </p:nvSpPr>
         <p:spPr>
           <a:xfrm>
-            <a:off x="5092476" y="1517904"/>
-            <a:ext cx="2006742" cy="950976"/>
+            <a:off x="5092476" y="1481328"/>
+            <a:ext cx="2006742" cy="1207008"/>
           </a:xfrm>
           <a:prstGeom prst="roundRect">
             <a:avLst>
-              <a:gd name="adj" fmla="val 6731"/>
+              <a:gd name="adj" fmla="val 5303"/>
             </a:avLst>
           </a:prstGeom>
           <a:solidFill>
@@ -14846,30 +14885,30 @@
       </p:sp>
       <p:sp>
         <p:nvSpPr>
-          <p:cNvPr id="15" name="Text 13"/>
-          <p:cNvSpPr txBox="1"/>
-          <p:nvPr/>
-        </p:nvSpPr>
-        <p:spPr>
-          <a:xfrm>
-            <a:off x="5330220" y="1664208"/>
-            <a:ext cx="1531254" cy="219456"/>
-          </a:xfrm>
-          <a:prstGeom prst="rect">
-            <a:avLst/>
-          </a:prstGeom>
-          <a:noFill/>
-          <a:ln/>
-        </p:spPr>
-        <p:txBody>
-          <a:bodyPr wrap="square" lIns="0" tIns="0" rIns="0" bIns="0" rtlCol="0" anchor="ctr"/>
-          <a:lstStyle/>
-          <a:p>
-            <a:pPr indent="0" marL="0">
-              <a:buNone/>
-            </a:pPr>
-            <a:r>
-              <a:rPr lang="en-US" sz="1050" b="1" dirty="0">
+          <p:cNvPr id="16" name="Text 14"/>
+          <p:cNvSpPr txBox="1"/>
+          <p:nvPr/>
+        </p:nvSpPr>
+        <p:spPr>
+          <a:xfrm>
+            <a:off x="5311932" y="1609344"/>
+            <a:ext cx="1567830" cy="201168"/>
+          </a:xfrm>
+          <a:prstGeom prst="rect">
+            <a:avLst/>
+          </a:prstGeom>
+          <a:noFill/>
+          <a:ln/>
+        </p:spPr>
+        <p:txBody>
+          <a:bodyPr wrap="square" lIns="0" tIns="0" rIns="0" bIns="0" rtlCol="0" anchor="ctr"/>
+          <a:lstStyle/>
+          <a:p>
+            <a:pPr indent="0" marL="0">
+              <a:buNone/>
+            </a:pPr>
+            <a:r>
+              <a:rPr lang="en-US" sz="1000" b="1" dirty="0">
                 <a:solidFill>
                   <a:srgbClr val="8A94A6"/>
                 </a:solidFill>
@@ -14879,20 +14918,20 @@
               </a:rPr>
               <a:t>03</a:t>
             </a:r>
-            <a:endParaRPr lang="en-US" sz="1050" dirty="0"/>
-          </a:p>
-        </p:txBody>
-      </p:sp>
-      <p:sp>
-        <p:nvSpPr>
-          <p:cNvPr id="16" name="Text 14"/>
-          <p:cNvSpPr txBox="1"/>
-          <p:nvPr/>
-        </p:nvSpPr>
-        <p:spPr>
-          <a:xfrm>
-            <a:off x="5330220" y="1938528"/>
-            <a:ext cx="1531254" cy="420624"/>
+            <a:endParaRPr lang="en-US" sz="1000" dirty="0"/>
+          </a:p>
+        </p:txBody>
+      </p:sp>
+      <p:sp>
+        <p:nvSpPr>
+          <p:cNvPr id="17" name="Text 15"/>
+          <p:cNvSpPr txBox="1"/>
+          <p:nvPr/>
+        </p:nvSpPr>
+        <p:spPr>
+          <a:xfrm>
+            <a:off x="5311932" y="1847088"/>
+            <a:ext cx="1567830" cy="530352"/>
           </a:xfrm>
           <a:prstGeom prst="rect">
             <a:avLst/>
@@ -14906,12 +14945,12 @@
           <a:p>
             <a:pPr indent="0" marL="0">
               <a:lnSpc>
-                <a:spcPct val="105000"/>
+                <a:spcPct val="115000"/>
               </a:lnSpc>
               <a:buNone/>
             </a:pPr>
             <a:r>
-              <a:rPr lang="en-US" sz="1400" b="1" dirty="0">
+              <a:rPr lang="en-US" sz="1300" b="1" dirty="0">
                 <a:solidFill>
                   <a:srgbClr val="0F1B33"/>
                 </a:solidFill>
@@ -14919,21 +14958,60 @@
                 <a:ea typeface="Calibri" pitchFamily="34" charset="-122"/>
                 <a:cs typeface="Calibri" pitchFamily="34" charset="-120"/>
               </a:rPr>
+              <a:t>할 일을 잘게 쪼개기</a:t>
+            </a:r>
+            <a:endParaRPr lang="en-US" sz="1300" dirty="0"/>
+          </a:p>
+        </p:txBody>
+      </p:sp>
+      <p:sp>
+        <p:nvSpPr>
+          <p:cNvPr id="18" name="Text 16"/>
+          <p:cNvSpPr txBox="1"/>
+          <p:nvPr/>
+        </p:nvSpPr>
+        <p:spPr>
+          <a:xfrm>
+            <a:off x="5311932" y="2395728"/>
+            <a:ext cx="1567830" cy="219456"/>
+          </a:xfrm>
+          <a:prstGeom prst="rect">
+            <a:avLst/>
+          </a:prstGeom>
+          <a:noFill/>
+          <a:ln/>
+        </p:spPr>
+        <p:txBody>
+          <a:bodyPr wrap="square" lIns="0" tIns="0" rIns="0" bIns="0" rtlCol="0" anchor="ctr"/>
+          <a:lstStyle/>
+          <a:p>
+            <a:pPr indent="0" marL="0">
+              <a:buNone/>
+            </a:pPr>
+            <a:r>
+              <a:rPr lang="en-US" sz="950" dirty="0">
+                <a:solidFill>
+                  <a:srgbClr val="5B6577"/>
+                </a:solidFill>
+                <a:latin typeface="Calibri" pitchFamily="34" charset="0"/>
+                <a:ea typeface="Calibri" pitchFamily="34" charset="-122"/>
+                <a:cs typeface="Calibri" pitchFamily="34" charset="-120"/>
+              </a:rPr>
               <a:t>Writing Plans</a:t>
             </a:r>
-            <a:endParaRPr lang="en-US" sz="1400" dirty="0"/>
-          </a:p>
-        </p:txBody>
-      </p:sp>
-      <p:sp>
-        <p:nvSpPr>
-          <p:cNvPr id="17" name="Text 15"/>
-          <p:cNvSpPr txBox="1"/>
-          <p:nvPr/>
-        </p:nvSpPr>
-        <p:spPr>
-          <a:xfrm>
-            <a:off x="7099219" y="1828800"/>
+            <a:endParaRPr lang="en-US" sz="950" dirty="0"/>
+          </a:p>
+        </p:txBody>
+      </p:sp>
+      <p:sp>
+        <p:nvSpPr>
+          <p:cNvPr id="19" name="Text 17"/>
+          <p:cNvSpPr txBox="1"/>
+          <p:nvPr/>
+        </p:nvSpPr>
+        <p:spPr>
+          <a:xfrm>
+            <a:off x="7099219" y="1920240"/>
             <a:ext cx="219456" cy="329184"/>
           </a:xfrm>
           <a:prstGeom prst="rect">
@@ -14966,18 +15044,18 @@
       </p:sp>
       <p:sp>
         <p:nvSpPr>
-          <p:cNvPr id="18" name="Shape 16"/>
+          <p:cNvPr id="20" name="Shape 18"/>
           <p:cNvSpPr/>
           <p:nvPr/>
         </p:nvSpPr>
         <p:spPr>
           <a:xfrm>
-            <a:off x="7318675" y="1517904"/>
-            <a:ext cx="2006742" cy="950976"/>
+            <a:off x="7318675" y="1481328"/>
+            <a:ext cx="2006742" cy="1207008"/>
           </a:xfrm>
           <a:prstGeom prst="roundRect">
             <a:avLst>
-              <a:gd name="adj" fmla="val 6731"/>
+              <a:gd name="adj" fmla="val 5303"/>
             </a:avLst>
           </a:prstGeom>
           <a:solidFill>
@@ -14988,30 +15066,30 @@
       </p:sp>
       <p:sp>
         <p:nvSpPr>
-          <p:cNvPr id="19" name="Text 17"/>
-          <p:cNvSpPr txBox="1"/>
-          <p:nvPr/>
-        </p:nvSpPr>
-        <p:spPr>
-          <a:xfrm>
-            <a:off x="7556419" y="1664208"/>
-            <a:ext cx="1531254" cy="219456"/>
-          </a:xfrm>
-          <a:prstGeom prst="rect">
-            <a:avLst/>
-          </a:prstGeom>
-          <a:noFill/>
-          <a:ln/>
-        </p:spPr>
-        <p:txBody>
-          <a:bodyPr wrap="square" lIns="0" tIns="0" rIns="0" bIns="0" rtlCol="0" anchor="ctr"/>
-          <a:lstStyle/>
-          <a:p>
-            <a:pPr indent="0" marL="0">
-              <a:buNone/>
-            </a:pPr>
-            <a:r>
-              <a:rPr lang="en-US" sz="1050" b="1" dirty="0">
+          <p:cNvPr id="21" name="Text 19"/>
+          <p:cNvSpPr txBox="1"/>
+          <p:nvPr/>
+        </p:nvSpPr>
+        <p:spPr>
+          <a:xfrm>
+            <a:off x="7538131" y="1609344"/>
+            <a:ext cx="1567830" cy="201168"/>
+          </a:xfrm>
+          <a:prstGeom prst="rect">
+            <a:avLst/>
+          </a:prstGeom>
+          <a:noFill/>
+          <a:ln/>
+        </p:spPr>
+        <p:txBody>
+          <a:bodyPr wrap="square" lIns="0" tIns="0" rIns="0" bIns="0" rtlCol="0" anchor="ctr"/>
+          <a:lstStyle/>
+          <a:p>
+            <a:pPr indent="0" marL="0">
+              <a:buNone/>
+            </a:pPr>
+            <a:r>
+              <a:rPr lang="en-US" sz="1000" b="1" dirty="0">
                 <a:solidFill>
                   <a:srgbClr val="9FB8FF"/>
                 </a:solidFill>
@@ -15021,20 +15099,20 @@
               </a:rPr>
               <a:t>04</a:t>
             </a:r>
-            <a:endParaRPr lang="en-US" sz="1050" dirty="0"/>
-          </a:p>
-        </p:txBody>
-      </p:sp>
-      <p:sp>
-        <p:nvSpPr>
-          <p:cNvPr id="20" name="Text 18"/>
-          <p:cNvSpPr txBox="1"/>
-          <p:nvPr/>
-        </p:nvSpPr>
-        <p:spPr>
-          <a:xfrm>
-            <a:off x="7556419" y="1938528"/>
-            <a:ext cx="1531254" cy="420624"/>
+            <a:endParaRPr lang="en-US" sz="1000" dirty="0"/>
+          </a:p>
+        </p:txBody>
+      </p:sp>
+      <p:sp>
+        <p:nvSpPr>
+          <p:cNvPr id="22" name="Text 20"/>
+          <p:cNvSpPr txBox="1"/>
+          <p:nvPr/>
+        </p:nvSpPr>
+        <p:spPr>
+          <a:xfrm>
+            <a:off x="7538131" y="1847088"/>
+            <a:ext cx="1567830" cy="530352"/>
           </a:xfrm>
           <a:prstGeom prst="rect">
             <a:avLst/>
@@ -15048,12 +15126,12 @@
           <a:p>
             <a:pPr indent="0" marL="0">
               <a:lnSpc>
-                <a:spcPct val="105000"/>
+                <a:spcPct val="115000"/>
               </a:lnSpc>
               <a:buNone/>
             </a:pPr>
             <a:r>
-              <a:rPr lang="en-US" sz="1400" b="1" dirty="0">
+              <a:rPr lang="en-US" sz="1300" b="1" dirty="0">
                 <a:solidFill>
                   <a:srgbClr val="FFFFFF"/>
                 </a:solidFill>
@@ -15061,21 +15139,60 @@
                 <a:ea typeface="Calibri" pitchFamily="34" charset="-122"/>
                 <a:cs typeface="Calibri" pitchFamily="34" charset="-120"/>
               </a:rPr>
-              <a:t>TDD 구현</a:t>
-            </a:r>
-            <a:endParaRPr lang="en-US" sz="1400" dirty="0"/>
-          </a:p>
-        </p:txBody>
-      </p:sp>
-      <p:sp>
-        <p:nvSpPr>
-          <p:cNvPr id="21" name="Text 19"/>
-          <p:cNvSpPr txBox="1"/>
-          <p:nvPr/>
-        </p:nvSpPr>
-        <p:spPr>
-          <a:xfrm>
-            <a:off x="9325417" y="1828800"/>
+              <a:t>테스트 먼저, 구현 나중</a:t>
+            </a:r>
+            <a:endParaRPr lang="en-US" sz="1300" dirty="0"/>
+          </a:p>
+        </p:txBody>
+      </p:sp>
+      <p:sp>
+        <p:nvSpPr>
+          <p:cNvPr id="23" name="Text 21"/>
+          <p:cNvSpPr txBox="1"/>
+          <p:nvPr/>
+        </p:nvSpPr>
+        <p:spPr>
+          <a:xfrm>
+            <a:off x="7538131" y="2395728"/>
+            <a:ext cx="1567830" cy="219456"/>
+          </a:xfrm>
+          <a:prstGeom prst="rect">
+            <a:avLst/>
+          </a:prstGeom>
+          <a:noFill/>
+          <a:ln/>
+        </p:spPr>
+        <p:txBody>
+          <a:bodyPr wrap="square" lIns="0" tIns="0" rIns="0" bIns="0" rtlCol="0" anchor="ctr"/>
+          <a:lstStyle/>
+          <a:p>
+            <a:pPr indent="0" marL="0">
+              <a:buNone/>
+            </a:pPr>
+            <a:r>
+              <a:rPr lang="en-US" sz="950" dirty="0">
+                <a:solidFill>
+                  <a:srgbClr val="DCE7FF"/>
+                </a:solidFill>
+                <a:latin typeface="Calibri" pitchFamily="34" charset="0"/>
+                <a:ea typeface="Calibri" pitchFamily="34" charset="-122"/>
+                <a:cs typeface="Calibri" pitchFamily="34" charset="-120"/>
+              </a:rPr>
+              <a:t>TDD</a:t>
+            </a:r>
+            <a:endParaRPr lang="en-US" sz="950" dirty="0"/>
+          </a:p>
+        </p:txBody>
+      </p:sp>
+      <p:sp>
+        <p:nvSpPr>
+          <p:cNvPr id="24" name="Text 22"/>
+          <p:cNvSpPr txBox="1"/>
+          <p:nvPr/>
+        </p:nvSpPr>
+        <p:spPr>
+          <a:xfrm>
+            <a:off x="9325417" y="1920240"/>
             <a:ext cx="219456" cy="329184"/>
           </a:xfrm>
           <a:prstGeom prst="rect">
@@ -15108,18 +15225,18 @@
       </p:sp>
       <p:sp>
         <p:nvSpPr>
-          <p:cNvPr id="22" name="Shape 20"/>
+          <p:cNvPr id="25" name="Shape 23"/>
           <p:cNvSpPr/>
           <p:nvPr/>
         </p:nvSpPr>
         <p:spPr>
           <a:xfrm>
-            <a:off x="9544873" y="1517904"/>
-            <a:ext cx="2006742" cy="950976"/>
+            <a:off x="9544873" y="1481328"/>
+            <a:ext cx="2006742" cy="1207008"/>
           </a:xfrm>
           <a:prstGeom prst="roundRect">
             <a:avLst>
-              <a:gd name="adj" fmla="val 6731"/>
+              <a:gd name="adj" fmla="val 5303"/>
             </a:avLst>
           </a:prstGeom>
           <a:solidFill>
@@ -15130,30 +15247,30 @@
       </p:sp>
       <p:sp>
         <p:nvSpPr>
-          <p:cNvPr id="23" name="Text 21"/>
-          <p:cNvSpPr txBox="1"/>
-          <p:nvPr/>
-        </p:nvSpPr>
-        <p:spPr>
-          <a:xfrm>
-            <a:off x="9782617" y="1664208"/>
-            <a:ext cx="1531254" cy="219456"/>
-          </a:xfrm>
-          <a:prstGeom prst="rect">
-            <a:avLst/>
-          </a:prstGeom>
-          <a:noFill/>
-          <a:ln/>
-        </p:spPr>
-        <p:txBody>
-          <a:bodyPr wrap="square" lIns="0" tIns="0" rIns="0" bIns="0" rtlCol="0" anchor="ctr"/>
-          <a:lstStyle/>
-          <a:p>
-            <a:pPr indent="0" marL="0">
-              <a:buNone/>
-            </a:pPr>
-            <a:r>
-              <a:rPr lang="en-US" sz="1050" b="1" dirty="0">
+          <p:cNvPr id="26" name="Text 24"/>
+          <p:cNvSpPr txBox="1"/>
+          <p:nvPr/>
+        </p:nvSpPr>
+        <p:spPr>
+          <a:xfrm>
+            <a:off x="9764329" y="1609344"/>
+            <a:ext cx="1567830" cy="201168"/>
+          </a:xfrm>
+          <a:prstGeom prst="rect">
+            <a:avLst/>
+          </a:prstGeom>
+          <a:noFill/>
+          <a:ln/>
+        </p:spPr>
+        <p:txBody>
+          <a:bodyPr wrap="square" lIns="0" tIns="0" rIns="0" bIns="0" rtlCol="0" anchor="ctr"/>
+          <a:lstStyle/>
+          <a:p>
+            <a:pPr indent="0" marL="0">
+              <a:buNone/>
+            </a:pPr>
+            <a:r>
+              <a:rPr lang="en-US" sz="1000" b="1" dirty="0">
                 <a:solidFill>
                   <a:srgbClr val="9FB8FF"/>
                 </a:solidFill>
@@ -15163,101 +15280,140 @@
               </a:rPr>
               <a:t>05</a:t>
             </a:r>
+            <a:endParaRPr lang="en-US" sz="1000" dirty="0"/>
+          </a:p>
+        </p:txBody>
+      </p:sp>
+      <p:sp>
+        <p:nvSpPr>
+          <p:cNvPr id="27" name="Text 25"/>
+          <p:cNvSpPr txBox="1"/>
+          <p:nvPr/>
+        </p:nvSpPr>
+        <p:spPr>
+          <a:xfrm>
+            <a:off x="9764329" y="1847088"/>
+            <a:ext cx="1567830" cy="530352"/>
+          </a:xfrm>
+          <a:prstGeom prst="rect">
+            <a:avLst/>
+          </a:prstGeom>
+          <a:noFill/>
+          <a:ln/>
+        </p:spPr>
+        <p:txBody>
+          <a:bodyPr wrap="square" lIns="0" tIns="0" rIns="0" bIns="0" rtlCol="0" anchor="ctr"/>
+          <a:lstStyle/>
+          <a:p>
+            <a:pPr indent="0" marL="0">
+              <a:lnSpc>
+                <a:spcPct val="115000"/>
+              </a:lnSpc>
+              <a:buNone/>
+            </a:pPr>
+            <a:r>
+              <a:rPr lang="en-US" sz="1300" b="1" dirty="0">
+                <a:solidFill>
+                  <a:srgbClr val="FFFFFF"/>
+                </a:solidFill>
+                <a:latin typeface="Calibri" pitchFamily="34" charset="0"/>
+                <a:ea typeface="Calibri" pitchFamily="34" charset="-122"/>
+                <a:cs typeface="Calibri" pitchFamily="34" charset="-120"/>
+              </a:rPr>
+              <a:t>증거로 확인하고 끝내기</a:t>
+            </a:r>
+            <a:endParaRPr lang="en-US" sz="1300" dirty="0"/>
+          </a:p>
+        </p:txBody>
+      </p:sp>
+      <p:sp>
+        <p:nvSpPr>
+          <p:cNvPr id="28" name="Text 26"/>
+          <p:cNvSpPr txBox="1"/>
+          <p:nvPr/>
+        </p:nvSpPr>
+        <p:spPr>
+          <a:xfrm>
+            <a:off x="9764329" y="2395728"/>
+            <a:ext cx="1567830" cy="219456"/>
+          </a:xfrm>
+          <a:prstGeom prst="rect">
+            <a:avLst/>
+          </a:prstGeom>
+          <a:noFill/>
+          <a:ln/>
+        </p:spPr>
+        <p:txBody>
+          <a:bodyPr wrap="square" lIns="0" tIns="0" rIns="0" bIns="0" rtlCol="0" anchor="ctr"/>
+          <a:lstStyle/>
+          <a:p>
+            <a:pPr indent="0" marL="0">
+              <a:buNone/>
+            </a:pPr>
+            <a:r>
+              <a:rPr lang="en-US" sz="950" dirty="0">
+                <a:solidFill>
+                  <a:srgbClr val="8FA2BC"/>
+                </a:solidFill>
+                <a:latin typeface="Calibri" pitchFamily="34" charset="0"/>
+                <a:ea typeface="Calibri" pitchFamily="34" charset="-122"/>
+                <a:cs typeface="Calibri" pitchFamily="34" charset="-120"/>
+              </a:rPr>
+              <a:t>검증 · 완료</a:t>
+            </a:r>
+            <a:endParaRPr lang="en-US" sz="950" dirty="0"/>
+          </a:p>
+        </p:txBody>
+      </p:sp>
+      <p:sp>
+        <p:nvSpPr>
+          <p:cNvPr id="29" name="Text 27"/>
+          <p:cNvSpPr txBox="1"/>
+          <p:nvPr/>
+        </p:nvSpPr>
+        <p:spPr>
+          <a:xfrm>
+            <a:off x="640080" y="2926080"/>
+            <a:ext cx="5486400" cy="237744"/>
+          </a:xfrm>
+          <a:prstGeom prst="rect">
+            <a:avLst/>
+          </a:prstGeom>
+          <a:noFill/>
+          <a:ln/>
+        </p:spPr>
+        <p:txBody>
+          <a:bodyPr wrap="square" lIns="0" tIns="0" rIns="0" bIns="0" rtlCol="0" anchor="ctr"/>
+          <a:lstStyle/>
+          <a:p>
+            <a:pPr indent="0" marL="0">
+              <a:buNone/>
+            </a:pPr>
+            <a:r>
+              <a:rPr lang="en-US" sz="1050" b="1" spc="60" kern="0" dirty="0">
+                <a:solidFill>
+                  <a:srgbClr val="2F6BFF"/>
+                </a:solidFill>
+                <a:latin typeface="Calibri" pitchFamily="34" charset="0"/>
+                <a:ea typeface="Calibri" pitchFamily="34" charset="-122"/>
+                <a:cs typeface="Calibri" pitchFamily="34" charset="-120"/>
+              </a:rPr>
+              <a:t>그래서 무엇이 나오는가</a:t>
+            </a:r>
             <a:endParaRPr lang="en-US" sz="1050" dirty="0"/>
           </a:p>
         </p:txBody>
       </p:sp>
       <p:sp>
         <p:nvSpPr>
-          <p:cNvPr id="24" name="Text 22"/>
-          <p:cNvSpPr txBox="1"/>
-          <p:nvPr/>
-        </p:nvSpPr>
-        <p:spPr>
-          <a:xfrm>
-            <a:off x="9782617" y="1938528"/>
-            <a:ext cx="1531254" cy="420624"/>
-          </a:xfrm>
-          <a:prstGeom prst="rect">
-            <a:avLst/>
-          </a:prstGeom>
-          <a:noFill/>
-          <a:ln/>
-        </p:spPr>
-        <p:txBody>
-          <a:bodyPr wrap="square" lIns="0" tIns="0" rIns="0" bIns="0" rtlCol="0" anchor="ctr"/>
-          <a:lstStyle/>
-          <a:p>
-            <a:pPr indent="0" marL="0">
-              <a:lnSpc>
-                <a:spcPct val="105000"/>
-              </a:lnSpc>
-              <a:buNone/>
-            </a:pPr>
-            <a:r>
-              <a:rPr lang="en-US" sz="1400" b="1" dirty="0">
-                <a:solidFill>
-                  <a:srgbClr val="FFFFFF"/>
-                </a:solidFill>
-                <a:latin typeface="Calibri" pitchFamily="34" charset="0"/>
-                <a:ea typeface="Calibri" pitchFamily="34" charset="-122"/>
-                <a:cs typeface="Calibri" pitchFamily="34" charset="-120"/>
-              </a:rPr>
-              <a:t>검증 · 완료</a:t>
-            </a:r>
-            <a:endParaRPr lang="en-US" sz="1400" dirty="0"/>
-          </a:p>
-        </p:txBody>
-      </p:sp>
-      <p:sp>
-        <p:nvSpPr>
-          <p:cNvPr id="25" name="Text 23"/>
-          <p:cNvSpPr txBox="1"/>
-          <p:nvPr/>
-        </p:nvSpPr>
-        <p:spPr>
-          <a:xfrm>
-            <a:off x="640080" y="2761488"/>
-            <a:ext cx="5486400" cy="237744"/>
-          </a:xfrm>
-          <a:prstGeom prst="rect">
-            <a:avLst/>
-          </a:prstGeom>
-          <a:noFill/>
-          <a:ln/>
-        </p:spPr>
-        <p:txBody>
-          <a:bodyPr wrap="square" lIns="0" tIns="0" rIns="0" bIns="0" rtlCol="0" anchor="ctr"/>
-          <a:lstStyle/>
-          <a:p>
-            <a:pPr indent="0" marL="0">
-              <a:buNone/>
-            </a:pPr>
-            <a:r>
-              <a:rPr lang="en-US" sz="1050" b="1" spc="60" kern="0" dirty="0">
-                <a:solidFill>
-                  <a:srgbClr val="2F6BFF"/>
-                </a:solidFill>
-                <a:latin typeface="Calibri" pitchFamily="34" charset="0"/>
-                <a:ea typeface="Calibri" pitchFamily="34" charset="-122"/>
-                <a:cs typeface="Calibri" pitchFamily="34" charset="-120"/>
-              </a:rPr>
-              <a:t>그래서 무엇이 나오는가</a:t>
-            </a:r>
-            <a:endParaRPr lang="en-US" sz="1050" dirty="0"/>
-          </a:p>
-        </p:txBody>
-      </p:sp>
-      <p:sp>
-        <p:nvSpPr>
-          <p:cNvPr id="26" name="Text 24"/>
-          <p:cNvSpPr txBox="1"/>
-          <p:nvPr/>
-        </p:nvSpPr>
-        <p:spPr>
-          <a:xfrm>
-            <a:off x="640080" y="2487168"/>
-            <a:ext cx="2006742" cy="237744"/>
+          <p:cNvPr id="30" name="Text 28"/>
+          <p:cNvSpPr txBox="1"/>
+          <p:nvPr/>
+        </p:nvSpPr>
+        <p:spPr>
+          <a:xfrm>
+            <a:off x="640080" y="2706624"/>
+            <a:ext cx="2006742" cy="219456"/>
           </a:xfrm>
           <a:prstGeom prst="rect">
             <a:avLst/>
@@ -15289,18 +15445,18 @@
       </p:sp>
       <p:sp>
         <p:nvSpPr>
-          <p:cNvPr id="27" name="Shape 25"/>
+          <p:cNvPr id="31" name="Shape 29"/>
           <p:cNvSpPr/>
           <p:nvPr/>
         </p:nvSpPr>
         <p:spPr>
           <a:xfrm>
-            <a:off x="640080" y="3072384"/>
-            <a:ext cx="2006742" cy="1316736"/>
+            <a:off x="640080" y="3236976"/>
+            <a:ext cx="2006742" cy="1188720"/>
           </a:xfrm>
           <a:prstGeom prst="roundRect">
             <a:avLst>
-              <a:gd name="adj" fmla="val 4861"/>
+              <a:gd name="adj" fmla="val 5385"/>
             </a:avLst>
           </a:prstGeom>
           <a:solidFill>
@@ -15316,14 +15472,14 @@
       </p:sp>
       <p:sp>
         <p:nvSpPr>
-          <p:cNvPr id="28" name="Text 26"/>
-          <p:cNvSpPr txBox="1"/>
-          <p:nvPr/>
-        </p:nvSpPr>
-        <p:spPr>
-          <a:xfrm>
-            <a:off x="877824" y="3291840"/>
-            <a:ext cx="1531254" cy="877824"/>
+          <p:cNvPr id="32" name="Text 30"/>
+          <p:cNvSpPr txBox="1"/>
+          <p:nvPr/>
+        </p:nvSpPr>
+        <p:spPr>
+          <a:xfrm>
+            <a:off x="859536" y="3419856"/>
+            <a:ext cx="1567830" cy="822960"/>
           </a:xfrm>
           <a:prstGeom prst="rect">
             <a:avLst/>
@@ -15350,22 +15506,42 @@
                 <a:ea typeface="Calibri" pitchFamily="34" charset="-122"/>
                 <a:cs typeface="Calibri" pitchFamily="34" charset="-120"/>
               </a:rPr>
-              <a:t>만들고 싶은 것 한 문장</a:t>
+              <a:t>만들고 싶은 것</a:t>
             </a:r>
             <a:endParaRPr lang="en-US" sz="1150" dirty="0"/>
           </a:p>
-        </p:txBody>
-      </p:sp>
-      <p:sp>
-        <p:nvSpPr>
-          <p:cNvPr id="29" name="Text 27"/>
-          <p:cNvSpPr txBox="1"/>
-          <p:nvPr/>
-        </p:nvSpPr>
-        <p:spPr>
-          <a:xfrm>
-            <a:off x="2866278" y="2487168"/>
-            <a:ext cx="2006742" cy="237744"/>
+          <a:p>
+            <a:pPr indent="0" marL="0">
+              <a:lnSpc>
+                <a:spcPct val="130000"/>
+              </a:lnSpc>
+              <a:buNone/>
+            </a:pPr>
+            <a:r>
+              <a:rPr lang="en-US" sz="1150" dirty="0">
+                <a:solidFill>
+                  <a:srgbClr val="27374F"/>
+                </a:solidFill>
+                <a:latin typeface="Calibri" pitchFamily="34" charset="0"/>
+                <a:ea typeface="Calibri" pitchFamily="34" charset="-122"/>
+                <a:cs typeface="Calibri" pitchFamily="34" charset="-120"/>
+              </a:rPr>
+              <a:t>한 문장</a:t>
+            </a:r>
+            <a:endParaRPr lang="en-US" sz="1150" dirty="0"/>
+          </a:p>
+        </p:txBody>
+      </p:sp>
+      <p:sp>
+        <p:nvSpPr>
+          <p:cNvPr id="33" name="Text 31"/>
+          <p:cNvSpPr txBox="1"/>
+          <p:nvPr/>
+        </p:nvSpPr>
+        <p:spPr>
+          <a:xfrm>
+            <a:off x="2866278" y="2706624"/>
+            <a:ext cx="2006742" cy="219456"/>
           </a:xfrm>
           <a:prstGeom prst="rect">
             <a:avLst/>
@@ -15397,18 +15573,18 @@
       </p:sp>
       <p:sp>
         <p:nvSpPr>
-          <p:cNvPr id="30" name="Shape 28"/>
+          <p:cNvPr id="34" name="Shape 32"/>
           <p:cNvSpPr/>
           <p:nvPr/>
         </p:nvSpPr>
         <p:spPr>
           <a:xfrm>
-            <a:off x="2866278" y="3072384"/>
-            <a:ext cx="2006742" cy="1316736"/>
+            <a:off x="2866278" y="3236976"/>
+            <a:ext cx="2006742" cy="1188720"/>
           </a:xfrm>
           <a:prstGeom prst="roundRect">
             <a:avLst>
-              <a:gd name="adj" fmla="val 4861"/>
+              <a:gd name="adj" fmla="val 5385"/>
             </a:avLst>
           </a:prstGeom>
           <a:solidFill>
@@ -15424,14 +15600,14 @@
       </p:sp>
       <p:sp>
         <p:nvSpPr>
-          <p:cNvPr id="31" name="Text 29"/>
-          <p:cNvSpPr txBox="1"/>
-          <p:nvPr/>
-        </p:nvSpPr>
-        <p:spPr>
-          <a:xfrm>
-            <a:off x="3104022" y="3291840"/>
-            <a:ext cx="1531254" cy="877824"/>
+          <p:cNvPr id="35" name="Text 33"/>
+          <p:cNvSpPr txBox="1"/>
+          <p:nvPr/>
+        </p:nvSpPr>
+        <p:spPr>
+          <a:xfrm>
+            <a:off x="3085734" y="3419856"/>
+            <a:ext cx="1567830" cy="822960"/>
           </a:xfrm>
           <a:prstGeom prst="rect">
             <a:avLst/>
@@ -15458,22 +15634,42 @@
                 <a:ea typeface="Calibri" pitchFamily="34" charset="-122"/>
                 <a:cs typeface="Calibri" pitchFamily="34" charset="-120"/>
               </a:rPr>
-              <a:t>확정된 요구사항과 설계</a:t>
+              <a:t>확정된 요구사항과</a:t>
             </a:r>
             <a:endParaRPr lang="en-US" sz="1150" dirty="0"/>
           </a:p>
-        </p:txBody>
-      </p:sp>
-      <p:sp>
-        <p:nvSpPr>
-          <p:cNvPr id="32" name="Text 30"/>
-          <p:cNvSpPr txBox="1"/>
-          <p:nvPr/>
-        </p:nvSpPr>
-        <p:spPr>
-          <a:xfrm>
-            <a:off x="5092476" y="2487168"/>
-            <a:ext cx="2006742" cy="237744"/>
+          <a:p>
+            <a:pPr indent="0" marL="0">
+              <a:lnSpc>
+                <a:spcPct val="130000"/>
+              </a:lnSpc>
+              <a:buNone/>
+            </a:pPr>
+            <a:r>
+              <a:rPr lang="en-US" sz="1150" dirty="0">
+                <a:solidFill>
+                  <a:srgbClr val="27374F"/>
+                </a:solidFill>
+                <a:latin typeface="Calibri" pitchFamily="34" charset="0"/>
+                <a:ea typeface="Calibri" pitchFamily="34" charset="-122"/>
+                <a:cs typeface="Calibri" pitchFamily="34" charset="-120"/>
+              </a:rPr>
+              <a:t>설계</a:t>
+            </a:r>
+            <a:endParaRPr lang="en-US" sz="1150" dirty="0"/>
+          </a:p>
+        </p:txBody>
+      </p:sp>
+      <p:sp>
+        <p:nvSpPr>
+          <p:cNvPr id="36" name="Text 34"/>
+          <p:cNvSpPr txBox="1"/>
+          <p:nvPr/>
+        </p:nvSpPr>
+        <p:spPr>
+          <a:xfrm>
+            <a:off x="5092476" y="2706624"/>
+            <a:ext cx="2006742" cy="219456"/>
           </a:xfrm>
           <a:prstGeom prst="rect">
             <a:avLst/>
@@ -15505,18 +15701,18 @@
       </p:sp>
       <p:sp>
         <p:nvSpPr>
-          <p:cNvPr id="33" name="Shape 31"/>
+          <p:cNvPr id="37" name="Shape 35"/>
           <p:cNvSpPr/>
           <p:nvPr/>
         </p:nvSpPr>
         <p:spPr>
           <a:xfrm>
-            <a:off x="5092476" y="3072384"/>
-            <a:ext cx="2006742" cy="1316736"/>
+            <a:off x="5092476" y="3236976"/>
+            <a:ext cx="2006742" cy="1188720"/>
           </a:xfrm>
           <a:prstGeom prst="roundRect">
             <a:avLst>
-              <a:gd name="adj" fmla="val 4861"/>
+              <a:gd name="adj" fmla="val 5385"/>
             </a:avLst>
           </a:prstGeom>
           <a:solidFill>
@@ -15532,14 +15728,14 @@
       </p:sp>
       <p:sp>
         <p:nvSpPr>
-          <p:cNvPr id="34" name="Text 32"/>
-          <p:cNvSpPr txBox="1"/>
-          <p:nvPr/>
-        </p:nvSpPr>
-        <p:spPr>
-          <a:xfrm>
-            <a:off x="5330220" y="3291840"/>
-            <a:ext cx="1531254" cy="877824"/>
+          <p:cNvPr id="38" name="Text 36"/>
+          <p:cNvSpPr txBox="1"/>
+          <p:nvPr/>
+        </p:nvSpPr>
+        <p:spPr>
+          <a:xfrm>
+            <a:off x="5311932" y="3419856"/>
+            <a:ext cx="1567830" cy="822960"/>
           </a:xfrm>
           <a:prstGeom prst="rect">
             <a:avLst/>
@@ -15594,14 +15790,14 @@
       </p:sp>
       <p:sp>
         <p:nvSpPr>
-          <p:cNvPr id="35" name="Text 33"/>
-          <p:cNvSpPr txBox="1"/>
-          <p:nvPr/>
-        </p:nvSpPr>
-        <p:spPr>
-          <a:xfrm>
-            <a:off x="7318675" y="2487168"/>
-            <a:ext cx="2006742" cy="237744"/>
+          <p:cNvPr id="39" name="Text 37"/>
+          <p:cNvSpPr txBox="1"/>
+          <p:nvPr/>
+        </p:nvSpPr>
+        <p:spPr>
+          <a:xfrm>
+            <a:off x="7318675" y="2706624"/>
+            <a:ext cx="2006742" cy="219456"/>
           </a:xfrm>
           <a:prstGeom prst="rect">
             <a:avLst/>
@@ -15633,18 +15829,18 @@
       </p:sp>
       <p:sp>
         <p:nvSpPr>
-          <p:cNvPr id="36" name="Shape 34"/>
+          <p:cNvPr id="40" name="Shape 38"/>
           <p:cNvSpPr/>
           <p:nvPr/>
         </p:nvSpPr>
         <p:spPr>
           <a:xfrm>
-            <a:off x="7318675" y="3072384"/>
-            <a:ext cx="2006742" cy="1316736"/>
+            <a:off x="7318675" y="3236976"/>
+            <a:ext cx="2006742" cy="1188720"/>
           </a:xfrm>
           <a:prstGeom prst="roundRect">
             <a:avLst>
-              <a:gd name="adj" fmla="val 4861"/>
+              <a:gd name="adj" fmla="val 5385"/>
             </a:avLst>
           </a:prstGeom>
           <a:solidFill>
@@ -15660,14 +15856,14 @@
       </p:sp>
       <p:sp>
         <p:nvSpPr>
-          <p:cNvPr id="37" name="Text 35"/>
-          <p:cNvSpPr txBox="1"/>
-          <p:nvPr/>
-        </p:nvSpPr>
-        <p:spPr>
-          <a:xfrm>
-            <a:off x="7556419" y="3291840"/>
-            <a:ext cx="1531254" cy="877824"/>
+          <p:cNvPr id="41" name="Text 39"/>
+          <p:cNvSpPr txBox="1"/>
+          <p:nvPr/>
+        </p:nvSpPr>
+        <p:spPr>
+          <a:xfrm>
+            <a:off x="7538131" y="3419856"/>
+            <a:ext cx="1567830" cy="822960"/>
           </a:xfrm>
           <a:prstGeom prst="rect">
             <a:avLst/>
@@ -15694,22 +15890,42 @@
                 <a:ea typeface="Calibri" pitchFamily="34" charset="-122"/>
                 <a:cs typeface="Calibri" pitchFamily="34" charset="-120"/>
               </a:rPr>
-              <a:t>테스트를 통과한 코드</a:t>
+              <a:t>테스트를 통과한</a:t>
             </a:r>
             <a:endParaRPr lang="en-US" sz="1150" dirty="0"/>
           </a:p>
-        </p:txBody>
-      </p:sp>
-      <p:sp>
-        <p:nvSpPr>
-          <p:cNvPr id="38" name="Text 36"/>
-          <p:cNvSpPr txBox="1"/>
-          <p:nvPr/>
-        </p:nvSpPr>
-        <p:spPr>
-          <a:xfrm>
-            <a:off x="9544873" y="2487168"/>
-            <a:ext cx="2006742" cy="237744"/>
+          <a:p>
+            <a:pPr indent="0" marL="0">
+              <a:lnSpc>
+                <a:spcPct val="130000"/>
+              </a:lnSpc>
+              <a:buNone/>
+            </a:pPr>
+            <a:r>
+              <a:rPr lang="en-US" sz="1150" dirty="0">
+                <a:solidFill>
+                  <a:srgbClr val="27374F"/>
+                </a:solidFill>
+                <a:latin typeface="Calibri" pitchFamily="34" charset="0"/>
+                <a:ea typeface="Calibri" pitchFamily="34" charset="-122"/>
+                <a:cs typeface="Calibri" pitchFamily="34" charset="-120"/>
+              </a:rPr>
+              <a:t>코드</a:t>
+            </a:r>
+            <a:endParaRPr lang="en-US" sz="1150" dirty="0"/>
+          </a:p>
+        </p:txBody>
+      </p:sp>
+      <p:sp>
+        <p:nvSpPr>
+          <p:cNvPr id="42" name="Text 40"/>
+          <p:cNvSpPr txBox="1"/>
+          <p:nvPr/>
+        </p:nvSpPr>
+        <p:spPr>
+          <a:xfrm>
+            <a:off x="9544873" y="2706624"/>
+            <a:ext cx="2006742" cy="219456"/>
           </a:xfrm>
           <a:prstGeom prst="rect">
             <a:avLst/>
@@ -15741,18 +15957,18 @@
       </p:sp>
       <p:sp>
         <p:nvSpPr>
-          <p:cNvPr id="39" name="Shape 37"/>
+          <p:cNvPr id="43" name="Shape 41"/>
           <p:cNvSpPr/>
           <p:nvPr/>
         </p:nvSpPr>
         <p:spPr>
           <a:xfrm>
-            <a:off x="9544873" y="3072384"/>
-            <a:ext cx="2006742" cy="1316736"/>
+            <a:off x="9544873" y="3236976"/>
+            <a:ext cx="2006742" cy="1188720"/>
           </a:xfrm>
           <a:prstGeom prst="roundRect">
             <a:avLst>
-              <a:gd name="adj" fmla="val 4861"/>
+              <a:gd name="adj" fmla="val 5385"/>
             </a:avLst>
           </a:prstGeom>
           <a:solidFill>
@@ -15768,14 +15984,14 @@
       </p:sp>
       <p:sp>
         <p:nvSpPr>
-          <p:cNvPr id="40" name="Text 38"/>
-          <p:cNvSpPr txBox="1"/>
-          <p:nvPr/>
-        </p:nvSpPr>
-        <p:spPr>
-          <a:xfrm>
-            <a:off x="9782617" y="3291840"/>
-            <a:ext cx="1531254" cy="877824"/>
+          <p:cNvPr id="44" name="Text 42"/>
+          <p:cNvSpPr txBox="1"/>
+          <p:nvPr/>
+        </p:nvSpPr>
+        <p:spPr>
+          <a:xfrm>
+            <a:off x="9764329" y="3419856"/>
+            <a:ext cx="1567830" cy="822960"/>
           </a:xfrm>
           <a:prstGeom prst="rect">
             <a:avLst/>
@@ -15830,18 +16046,18 @@
       </p:sp>
       <p:sp>
         <p:nvSpPr>
-          <p:cNvPr id="41" name="Shape 39"/>
+          <p:cNvPr id="45" name="Shape 43"/>
           <p:cNvSpPr/>
           <p:nvPr/>
         </p:nvSpPr>
         <p:spPr>
           <a:xfrm>
-            <a:off x="640080" y="4700016"/>
-            <a:ext cx="10911535" cy="969264"/>
+            <a:off x="640080" y="4736592"/>
+            <a:ext cx="10911535" cy="914400"/>
           </a:xfrm>
           <a:prstGeom prst="roundRect">
             <a:avLst>
-              <a:gd name="adj" fmla="val 5660"/>
+              <a:gd name="adj" fmla="val 6000"/>
             </a:avLst>
           </a:prstGeom>
           <a:solidFill>
@@ -15852,13 +16068,13 @@
       </p:sp>
       <p:sp>
         <p:nvSpPr>
-          <p:cNvPr id="42" name="Shape 40"/>
+          <p:cNvPr id="46" name="Shape 44"/>
           <p:cNvSpPr/>
           <p:nvPr/>
         </p:nvSpPr>
         <p:spPr>
           <a:xfrm>
-            <a:off x="950976" y="5010912"/>
+            <a:off x="950976" y="5020056"/>
             <a:ext cx="1133856" cy="347472"/>
           </a:xfrm>
           <a:prstGeom prst="roundRect">
@@ -15874,13 +16090,13 @@
       </p:sp>
       <p:sp>
         <p:nvSpPr>
-          <p:cNvPr id="43" name="Text 41"/>
-          <p:cNvSpPr txBox="1"/>
-          <p:nvPr/>
-        </p:nvSpPr>
-        <p:spPr>
-          <a:xfrm>
-            <a:off x="950976" y="5010912"/>
+          <p:cNvPr id="47" name="Text 45"/>
+          <p:cNvSpPr txBox="1"/>
+          <p:nvPr/>
+        </p:nvSpPr>
+        <p:spPr>
+          <a:xfrm>
+            <a:off x="950976" y="5020056"/>
             <a:ext cx="1133856" cy="347472"/>
           </a:xfrm>
           <a:prstGeom prst="rect">
@@ -15913,25 +16129,39 @@
       </p:sp>
       <p:sp>
         <p:nvSpPr>
-          <p:cNvPr id="44" name="Text 42"/>
-          <p:cNvSpPr txBox="1"/>
-          <p:nvPr/>
-        </p:nvSpPr>
-        <p:spPr>
-          <a:xfrm>
-            <a:off x="2249424" y="4700016"/>
-            <a:ext cx="8991295" cy="969264"/>
-          </a:xfrm>
-          <a:prstGeom prst="rect">
-            <a:avLst/>
-          </a:prstGeom>
-          <a:noFill/>
-          <a:ln/>
-        </p:spPr>
-        <p:txBody>
-          <a:bodyPr wrap="square" lIns="0" tIns="0" rIns="0" bIns="0" rtlCol="0" anchor="ctr"/>
-          <a:lstStyle/>
-          <a:p>
+          <p:cNvPr id="48" name="Text 46"/>
+          <p:cNvSpPr txBox="1"/>
+          <p:nvPr/>
+        </p:nvSpPr>
+        <p:spPr>
+          <a:xfrm>
+            <a:off x="2249424" y="4736592"/>
+            <a:ext cx="8991295" cy="914400"/>
+          </a:xfrm>
+          <a:prstGeom prst="rect">
+            <a:avLst/>
+          </a:prstGeom>
+          <a:noFill/>
+          <a:ln/>
+        </p:spPr>
+        <p:txBody>
+          <a:bodyPr wrap="square" lIns="0" tIns="0" rIns="0" bIns="0" rtlCol="0" anchor="ctr"/>
+          <a:lstStyle/>
+          <a:p>
+            <a:pPr indent="0" marL="0">
+              <a:buNone/>
+            </a:pPr>
+            <a:r>
+              <a:rPr lang="en-US" sz="1250" dirty="0">
+                <a:solidFill>
+                  <a:srgbClr val="7E6242"/>
+                </a:solidFill>
+                <a:latin typeface="Calibri" pitchFamily="34" charset="0"/>
+                <a:ea typeface="Calibri" pitchFamily="34" charset="-122"/>
+                <a:cs typeface="Calibri" pitchFamily="34" charset="-120"/>
+              </a:rPr>
+              <a:t>추측하지 않고 </a:t>
+            </a:r>
             <a:pPr indent="0" marL="0">
               <a:buNone/>
             </a:pPr>
@@ -15944,7 +16174,7 @@
                 <a:ea typeface="Calibri" pitchFamily="34" charset="-122"/>
                 <a:cs typeface="Calibri" pitchFamily="34" charset="-120"/>
               </a:rPr>
-              <a:t>Systematic Debugging</a:t>
+              <a:t>재현 → 증거 → 원인</a:t>
             </a:r>
             <a:pPr indent="0" marL="0">
               <a:buNone/>
@@ -15958,7 +16188,7 @@
                 <a:ea typeface="Calibri" pitchFamily="34" charset="-122"/>
                 <a:cs typeface="Calibri" pitchFamily="34" charset="-120"/>
               </a:rPr>
-              <a:t> 으로 재현 → 증거 → 원인을 확인한 뒤, 멈췄던 단계로 돌아갑니다.</a:t>
+              <a:t> 순으로 확인한 뒤, 멈췄던 단계로 돌아갑니다. (Systematic Debugging)</a:t>
             </a:r>
             <a:endParaRPr lang="en-US" sz="1250" dirty="0"/>
           </a:p>
@@ -15966,7 +16196,7 @@
       </p:sp>
       <p:sp>
         <p:nvSpPr>
-          <p:cNvPr id="45" name="Text 43"/>
+          <p:cNvPr id="49" name="Text 47"/>
           <p:cNvSpPr txBox="1"/>
           <p:nvPr/>
         </p:nvSpPr>
@@ -15997,7 +16227,7 @@
                 <a:ea typeface="Calibri" pitchFamily="34" charset="-122"/>
                 <a:cs typeface="Calibri" pitchFamily="34" charset="-120"/>
               </a:rPr>
-              <a:t>Superpowers가 각 단계에 어떤 Skill을 쓰는지는 다음 장부터 살펴봅니다.</a:t>
+              <a:t>TDD = 실패하는 테스트를 먼저 쓰고, 그 테스트를 통과시키는 코드를 쓰는 방식 · 각 단계에 쓰이는 Skill은 다음 장부터 살펴봅니다.</a:t>
             </a:r>
             <a:endParaRPr lang="en-US" sz="950" dirty="0"/>
           </a:p>

--- a/presentation/Superpowers_Codex_10min.pptx
+++ b/presentation/Superpowers_Codex_10min.pptx
@@ -698,7 +698,7 @@
             <a:r>
               <a:rPr lang="en-US" dirty="0"/>
               <a:t>[Sources]
-https://github.com/obra/superpowers/tree/main/skills</a:t>
+https://learn.chatgpt.com/ko-KR/docs/skills-and-plugins</a:t>
             </a:r>
             <a:endParaRPr lang="en-US" dirty="0"/>
           </a:p>
@@ -1685,7 +1685,7 @@
             <a:r>
               <a:rPr lang="en-US" dirty="0"/>
               <a:t>[Sources]
-https://learn.chatgpt.com/ko-KR/docs/skills-and-plugins</a:t>
+https://github.com/obra/superpowers</a:t>
             </a:r>
             <a:endParaRPr lang="en-US" dirty="0"/>
           </a:p>
@@ -1774,7 +1774,7 @@
             <a:r>
               <a:rPr lang="en-US" dirty="0"/>
               <a:t>[Sources]
-https://github.com/obra/superpowers</a:t>
+https://github.com/obra/superpowers/tree/main/skills</a:t>
             </a:r>
             <a:endParaRPr lang="en-US" dirty="0"/>
           </a:p>
@@ -2984,7 +2984,7 @@
                 <a:ea typeface="Calibri" pitchFamily="34" charset="-122"/>
                 <a:cs typeface="Calibri" pitchFamily="34" charset="-120"/>
               </a:rPr>
-              <a:t>03 어떻게 고르는가</a:t>
+              <a:t>03 어떤 Skill이 있는가</a:t>
             </a:r>
             <a:endParaRPr lang="en-US" sz="1100" dirty="0"/>
           </a:p>
@@ -3026,7 +3026,7 @@
                 <a:ea typeface="Calibri" pitchFamily="34" charset="-122"/>
                 <a:cs typeface="Calibri" pitchFamily="34" charset="-120"/>
               </a:rPr>
-              <a:t>② 구현 · 협업 — 계획대로 작게 만들고 계속 확인합니다</a:t>
+              <a:t>③ 품질 · 완료 — 확인된 결과로 마무리합니다</a:t>
             </a:r>
             <a:endParaRPr lang="en-US" sz="2400" dirty="0"/>
           </a:p>
@@ -3080,7 +3080,7 @@
         <p:spPr>
           <a:xfrm>
             <a:off x="640080" y="1481328"/>
-            <a:ext cx="5300320" cy="1700784"/>
+            <a:ext cx="3429914" cy="1700784"/>
           </a:xfrm>
           <a:prstGeom prst="roundRect">
             <a:avLst>
@@ -3168,7 +3168,7 @@
         <p:spPr>
           <a:xfrm>
             <a:off x="1353312" y="1755648"/>
-            <a:ext cx="4294480" cy="329184"/>
+            <a:ext cx="2424074" cy="329184"/>
           </a:xfrm>
           <a:prstGeom prst="rect">
             <a:avLst/>
@@ -3192,7 +3192,7 @@
                 <a:ea typeface="Calibri" pitchFamily="34" charset="-122"/>
                 <a:cs typeface="Calibri" pitchFamily="34" charset="-120"/>
               </a:rPr>
-              <a:t>test-driven-development</a:t>
+              <a:t>systematic-debugging</a:t>
             </a:r>
             <a:endParaRPr lang="en-US" sz="1300" dirty="0"/>
           </a:p>
@@ -3207,7 +3207,7 @@
         <p:spPr>
           <a:xfrm>
             <a:off x="950976" y="2231136"/>
-            <a:ext cx="4678528" cy="731520"/>
+            <a:ext cx="2808122" cy="731520"/>
           </a:xfrm>
           <a:prstGeom prst="rect">
             <a:avLst/>
@@ -3234,7 +3234,7 @@
                 <a:ea typeface="Calibri" pitchFamily="34" charset="-122"/>
                 <a:cs typeface="Calibri" pitchFamily="34" charset="-120"/>
               </a:rPr>
-              <a:t>실패하는 테스트를 먼저 만들고, 그것을 통과하는 최소한의 코드를 씁니다.</a:t>
+              <a:t>추측 대신 재현 → 증거 → 원인 순으로 확인합니다.</a:t>
             </a:r>
             <a:endParaRPr lang="en-US" sz="1200" dirty="0"/>
           </a:p>
@@ -3248,8 +3248,8 @@
         </p:nvSpPr>
         <p:spPr>
           <a:xfrm>
-            <a:off x="6251296" y="1481328"/>
-            <a:ext cx="5300320" cy="1700784"/>
+            <a:off x="4380890" y="1481328"/>
+            <a:ext cx="3429914" cy="1700784"/>
           </a:xfrm>
           <a:prstGeom prst="roundRect">
             <a:avLst>
@@ -3275,7 +3275,7 @@
         </p:nvSpPr>
         <p:spPr>
           <a:xfrm>
-            <a:off x="6562192" y="1773936"/>
+            <a:off x="4691786" y="1773936"/>
             <a:ext cx="292608" cy="292608"/>
           </a:xfrm>
           <a:prstGeom prst="roundRect">
@@ -3297,7 +3297,7 @@
         </p:nvSpPr>
         <p:spPr>
           <a:xfrm>
-            <a:off x="6562192" y="1773936"/>
+            <a:off x="4691786" y="1773936"/>
             <a:ext cx="292608" cy="292608"/>
           </a:xfrm>
           <a:prstGeom prst="rect">
@@ -3336,8 +3336,8 @@
         </p:nvSpPr>
         <p:spPr>
           <a:xfrm>
-            <a:off x="6964528" y="1755648"/>
-            <a:ext cx="4294480" cy="329184"/>
+            <a:off x="5094122" y="1755648"/>
+            <a:ext cx="2424074" cy="329184"/>
           </a:xfrm>
           <a:prstGeom prst="rect">
             <a:avLst/>
@@ -3361,7 +3361,7 @@
                 <a:ea typeface="Calibri" pitchFamily="34" charset="-122"/>
                 <a:cs typeface="Calibri" pitchFamily="34" charset="-120"/>
               </a:rPr>
-              <a:t>executing-plans</a:t>
+              <a:t>requesting-code-review</a:t>
             </a:r>
             <a:endParaRPr lang="en-US" sz="1300" dirty="0"/>
           </a:p>
@@ -3375,8 +3375,8 @@
         </p:nvSpPr>
         <p:spPr>
           <a:xfrm>
-            <a:off x="6562192" y="2231136"/>
-            <a:ext cx="4678528" cy="731520"/>
+            <a:off x="4691786" y="2231136"/>
+            <a:ext cx="2808122" cy="731520"/>
           </a:xfrm>
           <a:prstGeom prst="rect">
             <a:avLst/>
@@ -3403,7 +3403,7 @@
                 <a:ea typeface="Calibri" pitchFamily="34" charset="-122"/>
                 <a:cs typeface="Calibri" pitchFamily="34" charset="-120"/>
               </a:rPr>
-              <a:t>작성된 계획을 체크포인트별로, 순서대로 실행합니다.</a:t>
+              <a:t>요구사항과 구현이 맞는지 검토를 요청합니다.</a:t>
             </a:r>
             <a:endParaRPr lang="en-US" sz="1200" dirty="0"/>
           </a:p>
@@ -3417,8 +3417,8 @@
         </p:nvSpPr>
         <p:spPr>
           <a:xfrm>
-            <a:off x="640080" y="3474720"/>
-            <a:ext cx="5300320" cy="1700784"/>
+            <a:off x="8121701" y="1481328"/>
+            <a:ext cx="3429914" cy="1700784"/>
           </a:xfrm>
           <a:prstGeom prst="roundRect">
             <a:avLst>
@@ -3444,7 +3444,7 @@
         </p:nvSpPr>
         <p:spPr>
           <a:xfrm>
-            <a:off x="950976" y="3767328"/>
+            <a:off x="8432597" y="1773936"/>
             <a:ext cx="292608" cy="292608"/>
           </a:xfrm>
           <a:prstGeom prst="roundRect">
@@ -3466,7 +3466,7 @@
         </p:nvSpPr>
         <p:spPr>
           <a:xfrm>
-            <a:off x="950976" y="3767328"/>
+            <a:off x="8432597" y="1773936"/>
             <a:ext cx="292608" cy="292608"/>
           </a:xfrm>
           <a:prstGeom prst="rect">
@@ -3505,8 +3505,8 @@
         </p:nvSpPr>
         <p:spPr>
           <a:xfrm>
-            <a:off x="1353312" y="3749040"/>
-            <a:ext cx="4294480" cy="329184"/>
+            <a:off x="8834933" y="1755648"/>
+            <a:ext cx="2424074" cy="329184"/>
           </a:xfrm>
           <a:prstGeom prst="rect">
             <a:avLst/>
@@ -3530,7 +3530,7 @@
                 <a:ea typeface="Calibri" pitchFamily="34" charset="-122"/>
                 <a:cs typeface="Calibri" pitchFamily="34" charset="-120"/>
               </a:rPr>
-              <a:t>subagent-driven-development</a:t>
+              <a:t>receiving-code-review</a:t>
             </a:r>
             <a:endParaRPr lang="en-US" sz="1300" dirty="0"/>
           </a:p>
@@ -3544,8 +3544,8 @@
         </p:nvSpPr>
         <p:spPr>
           <a:xfrm>
-            <a:off x="950976" y="4224528"/>
-            <a:ext cx="4678528" cy="731520"/>
+            <a:off x="8432597" y="2231136"/>
+            <a:ext cx="2808122" cy="731520"/>
           </a:xfrm>
           <a:prstGeom prst="rect">
             <a:avLst/>
@@ -3572,7 +3572,7 @@
                 <a:ea typeface="Calibri" pitchFamily="34" charset="-122"/>
                 <a:cs typeface="Calibri" pitchFamily="34" charset="-120"/>
               </a:rPr>
-              <a:t>작업마다 새 에이전트가 구현하고 단계마다 리뷰를 받습니다.</a:t>
+              <a:t>받은 피드백을 그대로 받지 않고 검증한 뒤 반영합니다.</a:t>
             </a:r>
             <a:endParaRPr lang="en-US" sz="1200" dirty="0"/>
           </a:p>
@@ -3586,8 +3586,8 @@
         </p:nvSpPr>
         <p:spPr>
           <a:xfrm>
-            <a:off x="6251296" y="3474720"/>
-            <a:ext cx="5300320" cy="1700784"/>
+            <a:off x="640080" y="3474720"/>
+            <a:ext cx="3429914" cy="1700784"/>
           </a:xfrm>
           <a:prstGeom prst="roundRect">
             <a:avLst>
@@ -3613,7 +3613,7 @@
         </p:nvSpPr>
         <p:spPr>
           <a:xfrm>
-            <a:off x="6562192" y="3767328"/>
+            <a:off x="950976" y="3767328"/>
             <a:ext cx="292608" cy="292608"/>
           </a:xfrm>
           <a:prstGeom prst="roundRect">
@@ -3635,7 +3635,7 @@
         </p:nvSpPr>
         <p:spPr>
           <a:xfrm>
-            <a:off x="6562192" y="3767328"/>
+            <a:off x="950976" y="3767328"/>
             <a:ext cx="292608" cy="292608"/>
           </a:xfrm>
           <a:prstGeom prst="rect">
@@ -3674,8 +3674,8 @@
         </p:nvSpPr>
         <p:spPr>
           <a:xfrm>
-            <a:off x="6964528" y="3749040"/>
-            <a:ext cx="4294480" cy="329184"/>
+            <a:off x="1353312" y="3749040"/>
+            <a:ext cx="2424074" cy="329184"/>
           </a:xfrm>
           <a:prstGeom prst="rect">
             <a:avLst/>
@@ -3699,7 +3699,7 @@
                 <a:ea typeface="Calibri" pitchFamily="34" charset="-122"/>
                 <a:cs typeface="Calibri" pitchFamily="34" charset="-120"/>
               </a:rPr>
-              <a:t>dispatching-parallel-agents</a:t>
+              <a:t>verification-before-completion</a:t>
             </a:r>
             <a:endParaRPr lang="en-US" sz="1300" dirty="0"/>
           </a:p>
@@ -3713,8 +3713,8 @@
         </p:nvSpPr>
         <p:spPr>
           <a:xfrm>
-            <a:off x="6562192" y="4224528"/>
-            <a:ext cx="4678528" cy="731520"/>
+            <a:off x="950976" y="4224528"/>
+            <a:ext cx="2808122" cy="731520"/>
           </a:xfrm>
           <a:prstGeom prst="rect">
             <a:avLst/>
@@ -3741,7 +3741,7 @@
                 <a:ea typeface="Calibri" pitchFamily="34" charset="-122"/>
                 <a:cs typeface="Calibri" pitchFamily="34" charset="-120"/>
               </a:rPr>
-              <a:t>서로 의존하지 않는 일은 여러 에이전트로 나눠 동시에 처리합니다.</a:t>
+              <a:t>테스트를 돌려 통과한 뒤에야 완료를 선언합니다.</a:t>
             </a:r>
             <a:endParaRPr lang="en-US" sz="1200" dirty="0"/>
           </a:p>
@@ -3750,6 +3750,344 @@
       <p:sp>
         <p:nvSpPr>
           <p:cNvPr id="25" name="Shape 23"/>
+          <p:cNvSpPr/>
+          <p:nvPr/>
+        </p:nvSpPr>
+        <p:spPr>
+          <a:xfrm>
+            <a:off x="4380890" y="3474720"/>
+            <a:ext cx="3429914" cy="1700784"/>
+          </a:xfrm>
+          <a:prstGeom prst="roundRect">
+            <a:avLst>
+              <a:gd name="adj" fmla="val 3763"/>
+            </a:avLst>
+          </a:prstGeom>
+          <a:solidFill>
+            <a:srgbClr val="F6F7F9"/>
+          </a:solidFill>
+          <a:ln w="12700">
+            <a:solidFill>
+              <a:srgbClr val="E5E8EE"/>
+            </a:solidFill>
+            <a:prstDash val="solid"/>
+          </a:ln>
+        </p:spPr>
+      </p:sp>
+      <p:sp>
+        <p:nvSpPr>
+          <p:cNvPr id="26" name="Shape 24"/>
+          <p:cNvSpPr/>
+          <p:nvPr/>
+        </p:nvSpPr>
+        <p:spPr>
+          <a:xfrm>
+            <a:off x="4691786" y="3767328"/>
+            <a:ext cx="292608" cy="292608"/>
+          </a:xfrm>
+          <a:prstGeom prst="roundRect">
+            <a:avLst>
+              <a:gd name="adj" fmla="val 28125"/>
+            </a:avLst>
+          </a:prstGeom>
+          <a:solidFill>
+            <a:srgbClr val="2F6BFF"/>
+          </a:solidFill>
+          <a:ln/>
+        </p:spPr>
+      </p:sp>
+      <p:sp>
+        <p:nvSpPr>
+          <p:cNvPr id="27" name="Text 25"/>
+          <p:cNvSpPr txBox="1"/>
+          <p:nvPr/>
+        </p:nvSpPr>
+        <p:spPr>
+          <a:xfrm>
+            <a:off x="4691786" y="3767328"/>
+            <a:ext cx="292608" cy="292608"/>
+          </a:xfrm>
+          <a:prstGeom prst="rect">
+            <a:avLst/>
+          </a:prstGeom>
+          <a:noFill/>
+          <a:ln/>
+        </p:spPr>
+        <p:txBody>
+          <a:bodyPr wrap="square" lIns="0" tIns="0" rIns="0" bIns="0" rtlCol="0" anchor="ctr"/>
+          <a:lstStyle/>
+          <a:p>
+            <a:pPr algn="ctr" indent="0" marL="0">
+              <a:buNone/>
+            </a:pPr>
+            <a:r>
+              <a:rPr lang="en-US" sz="1100" b="1" dirty="0">
+                <a:solidFill>
+                  <a:srgbClr val="FFFFFF"/>
+                </a:solidFill>
+                <a:latin typeface="Calibri" pitchFamily="34" charset="0"/>
+                <a:ea typeface="Calibri" pitchFamily="34" charset="-122"/>
+                <a:cs typeface="Calibri" pitchFamily="34" charset="-120"/>
+              </a:rPr>
+              <a:t>5</a:t>
+            </a:r>
+            <a:endParaRPr lang="en-US" sz="1100" dirty="0"/>
+          </a:p>
+        </p:txBody>
+      </p:sp>
+      <p:sp>
+        <p:nvSpPr>
+          <p:cNvPr id="28" name="Text 26"/>
+          <p:cNvSpPr txBox="1"/>
+          <p:nvPr/>
+        </p:nvSpPr>
+        <p:spPr>
+          <a:xfrm>
+            <a:off x="5094122" y="3749040"/>
+            <a:ext cx="2424074" cy="329184"/>
+          </a:xfrm>
+          <a:prstGeom prst="rect">
+            <a:avLst/>
+          </a:prstGeom>
+          <a:noFill/>
+          <a:ln/>
+        </p:spPr>
+        <p:txBody>
+          <a:bodyPr wrap="square" lIns="0" tIns="0" rIns="0" bIns="0" rtlCol="0" anchor="ctr"/>
+          <a:lstStyle/>
+          <a:p>
+            <a:pPr indent="0" marL="0">
+              <a:buNone/>
+            </a:pPr>
+            <a:r>
+              <a:rPr lang="en-US" sz="1300" b="1" dirty="0">
+                <a:solidFill>
+                  <a:srgbClr val="0F1B33"/>
+                </a:solidFill>
+                <a:latin typeface="Calibri" pitchFamily="34" charset="0"/>
+                <a:ea typeface="Calibri" pitchFamily="34" charset="-122"/>
+                <a:cs typeface="Calibri" pitchFamily="34" charset="-120"/>
+              </a:rPr>
+              <a:t>finishing-a-development-branch</a:t>
+            </a:r>
+            <a:endParaRPr lang="en-US" sz="1300" dirty="0"/>
+          </a:p>
+        </p:txBody>
+      </p:sp>
+      <p:sp>
+        <p:nvSpPr>
+          <p:cNvPr id="29" name="Text 27"/>
+          <p:cNvSpPr txBox="1"/>
+          <p:nvPr/>
+        </p:nvSpPr>
+        <p:spPr>
+          <a:xfrm>
+            <a:off x="4691786" y="4224528"/>
+            <a:ext cx="2808122" cy="731520"/>
+          </a:xfrm>
+          <a:prstGeom prst="rect">
+            <a:avLst/>
+          </a:prstGeom>
+          <a:noFill/>
+          <a:ln/>
+        </p:spPr>
+        <p:txBody>
+          <a:bodyPr wrap="square" lIns="0" tIns="0" rIns="0" bIns="0" rtlCol="0" anchor="ctr"/>
+          <a:lstStyle/>
+          <a:p>
+            <a:pPr indent="0" marL="0">
+              <a:lnSpc>
+                <a:spcPct val="128000"/>
+              </a:lnSpc>
+              <a:buNone/>
+            </a:pPr>
+            <a:r>
+              <a:rPr lang="en-US" sz="1200" dirty="0">
+                <a:solidFill>
+                  <a:srgbClr val="5B6577"/>
+                </a:solidFill>
+                <a:latin typeface="Calibri" pitchFamily="34" charset="0"/>
+                <a:ea typeface="Calibri" pitchFamily="34" charset="-122"/>
+                <a:cs typeface="Calibri" pitchFamily="34" charset="-120"/>
+              </a:rPr>
+              <a:t>병합 · PR · 브랜치 유지 중 하나를 골라 마무리합니다.</a:t>
+            </a:r>
+            <a:endParaRPr lang="en-US" sz="1200" dirty="0"/>
+          </a:p>
+        </p:txBody>
+      </p:sp>
+      <p:sp>
+        <p:nvSpPr>
+          <p:cNvPr id="30" name="Shape 28"/>
+          <p:cNvSpPr/>
+          <p:nvPr/>
+        </p:nvSpPr>
+        <p:spPr>
+          <a:xfrm>
+            <a:off x="8121701" y="3474720"/>
+            <a:ext cx="3429914" cy="1700784"/>
+          </a:xfrm>
+          <a:prstGeom prst="roundRect">
+            <a:avLst>
+              <a:gd name="adj" fmla="val 3763"/>
+            </a:avLst>
+          </a:prstGeom>
+          <a:solidFill>
+            <a:srgbClr val="F6F7F9"/>
+          </a:solidFill>
+          <a:ln w="12700">
+            <a:solidFill>
+              <a:srgbClr val="E5E8EE"/>
+            </a:solidFill>
+            <a:prstDash val="solid"/>
+          </a:ln>
+        </p:spPr>
+      </p:sp>
+      <p:sp>
+        <p:nvSpPr>
+          <p:cNvPr id="31" name="Shape 29"/>
+          <p:cNvSpPr/>
+          <p:nvPr/>
+        </p:nvSpPr>
+        <p:spPr>
+          <a:xfrm>
+            <a:off x="8432597" y="3767328"/>
+            <a:ext cx="292608" cy="292608"/>
+          </a:xfrm>
+          <a:prstGeom prst="roundRect">
+            <a:avLst>
+              <a:gd name="adj" fmla="val 28125"/>
+            </a:avLst>
+          </a:prstGeom>
+          <a:solidFill>
+            <a:srgbClr val="2F6BFF"/>
+          </a:solidFill>
+          <a:ln/>
+        </p:spPr>
+      </p:sp>
+      <p:sp>
+        <p:nvSpPr>
+          <p:cNvPr id="32" name="Text 30"/>
+          <p:cNvSpPr txBox="1"/>
+          <p:nvPr/>
+        </p:nvSpPr>
+        <p:spPr>
+          <a:xfrm>
+            <a:off x="8432597" y="3767328"/>
+            <a:ext cx="292608" cy="292608"/>
+          </a:xfrm>
+          <a:prstGeom prst="rect">
+            <a:avLst/>
+          </a:prstGeom>
+          <a:noFill/>
+          <a:ln/>
+        </p:spPr>
+        <p:txBody>
+          <a:bodyPr wrap="square" lIns="0" tIns="0" rIns="0" bIns="0" rtlCol="0" anchor="ctr"/>
+          <a:lstStyle/>
+          <a:p>
+            <a:pPr algn="ctr" indent="0" marL="0">
+              <a:buNone/>
+            </a:pPr>
+            <a:r>
+              <a:rPr lang="en-US" sz="1100" b="1" dirty="0">
+                <a:solidFill>
+                  <a:srgbClr val="FFFFFF"/>
+                </a:solidFill>
+                <a:latin typeface="Calibri" pitchFamily="34" charset="0"/>
+                <a:ea typeface="Calibri" pitchFamily="34" charset="-122"/>
+                <a:cs typeface="Calibri" pitchFamily="34" charset="-120"/>
+              </a:rPr>
+              <a:t>6</a:t>
+            </a:r>
+            <a:endParaRPr lang="en-US" sz="1100" dirty="0"/>
+          </a:p>
+        </p:txBody>
+      </p:sp>
+      <p:sp>
+        <p:nvSpPr>
+          <p:cNvPr id="33" name="Text 31"/>
+          <p:cNvSpPr txBox="1"/>
+          <p:nvPr/>
+        </p:nvSpPr>
+        <p:spPr>
+          <a:xfrm>
+            <a:off x="8834933" y="3749040"/>
+            <a:ext cx="2424074" cy="329184"/>
+          </a:xfrm>
+          <a:prstGeom prst="rect">
+            <a:avLst/>
+          </a:prstGeom>
+          <a:noFill/>
+          <a:ln/>
+        </p:spPr>
+        <p:txBody>
+          <a:bodyPr wrap="square" lIns="0" tIns="0" rIns="0" bIns="0" rtlCol="0" anchor="ctr"/>
+          <a:lstStyle/>
+          <a:p>
+            <a:pPr indent="0" marL="0">
+              <a:buNone/>
+            </a:pPr>
+            <a:r>
+              <a:rPr lang="en-US" sz="1300" b="1" dirty="0">
+                <a:solidFill>
+                  <a:srgbClr val="0F1B33"/>
+                </a:solidFill>
+                <a:latin typeface="Calibri" pitchFamily="34" charset="0"/>
+                <a:ea typeface="Calibri" pitchFamily="34" charset="-122"/>
+                <a:cs typeface="Calibri" pitchFamily="34" charset="-120"/>
+              </a:rPr>
+              <a:t>writing-skills</a:t>
+            </a:r>
+            <a:endParaRPr lang="en-US" sz="1300" dirty="0"/>
+          </a:p>
+        </p:txBody>
+      </p:sp>
+      <p:sp>
+        <p:nvSpPr>
+          <p:cNvPr id="34" name="Text 32"/>
+          <p:cNvSpPr txBox="1"/>
+          <p:nvPr/>
+        </p:nvSpPr>
+        <p:spPr>
+          <a:xfrm>
+            <a:off x="8432597" y="4224528"/>
+            <a:ext cx="2808122" cy="731520"/>
+          </a:xfrm>
+          <a:prstGeom prst="rect">
+            <a:avLst/>
+          </a:prstGeom>
+          <a:noFill/>
+          <a:ln/>
+        </p:spPr>
+        <p:txBody>
+          <a:bodyPr wrap="square" lIns="0" tIns="0" rIns="0" bIns="0" rtlCol="0" anchor="ctr"/>
+          <a:lstStyle/>
+          <a:p>
+            <a:pPr indent="0" marL="0">
+              <a:lnSpc>
+                <a:spcPct val="128000"/>
+              </a:lnSpc>
+              <a:buNone/>
+            </a:pPr>
+            <a:r>
+              <a:rPr lang="en-US" sz="1200" dirty="0">
+                <a:solidFill>
+                  <a:srgbClr val="5B6577"/>
+                </a:solidFill>
+                <a:latin typeface="Calibri" pitchFamily="34" charset="0"/>
+                <a:ea typeface="Calibri" pitchFamily="34" charset="-122"/>
+                <a:cs typeface="Calibri" pitchFamily="34" charset="-120"/>
+              </a:rPr>
+              <a:t>새 Skill을 직접 만들고 수정 · 검증합니다.</a:t>
+            </a:r>
+            <a:endParaRPr lang="en-US" sz="1200" dirty="0"/>
+          </a:p>
+        </p:txBody>
+      </p:sp>
+      <p:sp>
+        <p:nvSpPr>
+          <p:cNvPr id="35" name="Shape 33"/>
           <p:cNvSpPr/>
           <p:nvPr/>
         </p:nvSpPr>
@@ -3771,7 +4109,7 @@
       </p:sp>
       <p:sp>
         <p:nvSpPr>
-          <p:cNvPr id="26" name="Text 24"/>
+          <p:cNvPr id="36" name="Text 34"/>
           <p:cNvSpPr txBox="1"/>
           <p:nvPr/>
         </p:nvSpPr>
@@ -3802,7 +4140,7 @@
                 <a:ea typeface="Calibri" pitchFamily="34" charset="-122"/>
                 <a:cs typeface="Calibri" pitchFamily="34" charset="-120"/>
               </a:rPr>
-              <a:t>공통 목적 — 계획을 지키면서 작은 결과를 만들고 매번 확인합니다</a:t>
+              <a:t>공통 목적 — “된 것 같다”가 아니라 확인된 결과로 끝냅니다</a:t>
             </a:r>
             <a:endParaRPr lang="en-US" sz="1350" dirty="0"/>
           </a:p>
@@ -3810,7 +4148,7 @@
       </p:sp>
       <p:sp>
         <p:nvSpPr>
-          <p:cNvPr id="27" name="Text 25"/>
+          <p:cNvPr id="37" name="Text 35"/>
           <p:cNvSpPr txBox="1"/>
           <p:nvPr/>
         </p:nvSpPr>
@@ -3841,7 +4179,7 @@
                 <a:ea typeface="Calibri" pitchFamily="34" charset="-122"/>
                 <a:cs typeface="Calibri" pitchFamily="34" charset="-120"/>
               </a:rPr>
-              <a:t>Subagent 관련 기능은 사용 환경과 설정에 따라 달라질 수 있습니다.</a:t>
+              <a:t>Skill 이름은 Superpowers 6.3.0 기준입니다. · github.com/obra/superpowers/tree/main/skills</a:t>
             </a:r>
             <a:endParaRPr lang="en-US" sz="950" dirty="0"/>
           </a:p>
@@ -3912,7 +4250,7 @@
                 <a:ea typeface="Calibri" pitchFamily="34" charset="-122"/>
                 <a:cs typeface="Calibri" pitchFamily="34" charset="-120"/>
               </a:rPr>
-              <a:t>03 어떻게 고르는가</a:t>
+              <a:t>04 어떻게 쓰는가</a:t>
             </a:r>
             <a:endParaRPr lang="en-US" sz="1100" dirty="0"/>
           </a:p>
@@ -3954,7 +4292,7 @@
                 <a:ea typeface="Calibri" pitchFamily="34" charset="-122"/>
                 <a:cs typeface="Calibri" pitchFamily="34" charset="-120"/>
               </a:rPr>
-              <a:t>③ 품질 · 완료 — 확인된 결과로 마무리합니다</a:t>
+              <a:t>모델은 요청과 Skill 설명을 비교해 절차를 고릅니다</a:t>
             </a:r>
             <a:endParaRPr lang="en-US" sz="2400" dirty="0"/>
           </a:p>
@@ -4007,12 +4345,12 @@
         </p:nvSpPr>
         <p:spPr>
           <a:xfrm>
-            <a:off x="640080" y="1481328"/>
-            <a:ext cx="3429914" cy="1700784"/>
+            <a:off x="640080" y="1572768"/>
+            <a:ext cx="2021373" cy="1847088"/>
           </a:xfrm>
           <a:prstGeom prst="roundRect">
             <a:avLst>
-              <a:gd name="adj" fmla="val 3763"/>
+              <a:gd name="adj" fmla="val 3465"/>
             </a:avLst>
           </a:prstGeom>
           <a:solidFill>
@@ -4034,12 +4372,220 @@
         </p:nvSpPr>
         <p:spPr>
           <a:xfrm>
-            <a:off x="950976" y="1773936"/>
-            <a:ext cx="292608" cy="292608"/>
+            <a:off x="914400" y="1847088"/>
+            <a:ext cx="310896" cy="310896"/>
           </a:xfrm>
           <a:prstGeom prst="roundRect">
             <a:avLst>
-              <a:gd name="adj" fmla="val 28125"/>
+              <a:gd name="adj" fmla="val 26471"/>
+            </a:avLst>
+          </a:prstGeom>
+          <a:solidFill>
+            <a:srgbClr val="0F1B33"/>
+          </a:solidFill>
+          <a:ln/>
+        </p:spPr>
+      </p:sp>
+      <p:sp>
+        <p:nvSpPr>
+          <p:cNvPr id="7" name="Text 5"/>
+          <p:cNvSpPr txBox="1"/>
+          <p:nvPr/>
+        </p:nvSpPr>
+        <p:spPr>
+          <a:xfrm>
+            <a:off x="914400" y="1847088"/>
+            <a:ext cx="310896" cy="310896"/>
+          </a:xfrm>
+          <a:prstGeom prst="rect">
+            <a:avLst/>
+          </a:prstGeom>
+          <a:noFill/>
+          <a:ln/>
+        </p:spPr>
+        <p:txBody>
+          <a:bodyPr wrap="square" lIns="0" tIns="0" rIns="0" bIns="0" rtlCol="0" anchor="ctr"/>
+          <a:lstStyle/>
+          <a:p>
+            <a:pPr algn="ctr" indent="0" marL="0">
+              <a:buNone/>
+            </a:pPr>
+            <a:r>
+              <a:rPr lang="en-US" sz="1200" b="1" dirty="0">
+                <a:solidFill>
+                  <a:srgbClr val="FFFFFF"/>
+                </a:solidFill>
+                <a:latin typeface="Calibri" pitchFamily="34" charset="0"/>
+                <a:ea typeface="Calibri" pitchFamily="34" charset="-122"/>
+                <a:cs typeface="Calibri" pitchFamily="34" charset="-120"/>
+              </a:rPr>
+              <a:t>1</a:t>
+            </a:r>
+            <a:endParaRPr lang="en-US" sz="1200" dirty="0"/>
+          </a:p>
+        </p:txBody>
+      </p:sp>
+      <p:sp>
+        <p:nvSpPr>
+          <p:cNvPr id="8" name="Text 6"/>
+          <p:cNvSpPr txBox="1"/>
+          <p:nvPr/>
+        </p:nvSpPr>
+        <p:spPr>
+          <a:xfrm>
+            <a:off x="877824" y="2340864"/>
+            <a:ext cx="1545885" cy="329184"/>
+          </a:xfrm>
+          <a:prstGeom prst="rect">
+            <a:avLst/>
+          </a:prstGeom>
+          <a:noFill/>
+          <a:ln/>
+        </p:spPr>
+        <p:txBody>
+          <a:bodyPr wrap="square" lIns="0" tIns="0" rIns="0" bIns="0" rtlCol="0" anchor="ctr"/>
+          <a:lstStyle/>
+          <a:p>
+            <a:pPr indent="0" marL="0">
+              <a:buNone/>
+            </a:pPr>
+            <a:r>
+              <a:rPr lang="en-US" sz="1350" b="1" dirty="0">
+                <a:solidFill>
+                  <a:srgbClr val="0F1B33"/>
+                </a:solidFill>
+                <a:latin typeface="Calibri" pitchFamily="34" charset="0"/>
+                <a:ea typeface="Calibri" pitchFamily="34" charset="-122"/>
+                <a:cs typeface="Calibri" pitchFamily="34" charset="-120"/>
+              </a:rPr>
+              <a:t>사용자 요청</a:t>
+            </a:r>
+            <a:endParaRPr lang="en-US" sz="1350" dirty="0"/>
+          </a:p>
+        </p:txBody>
+      </p:sp>
+      <p:sp>
+        <p:nvSpPr>
+          <p:cNvPr id="9" name="Text 7"/>
+          <p:cNvSpPr txBox="1"/>
+          <p:nvPr/>
+        </p:nvSpPr>
+        <p:spPr>
+          <a:xfrm>
+            <a:off x="877824" y="2706624"/>
+            <a:ext cx="1545885" cy="512064"/>
+          </a:xfrm>
+          <a:prstGeom prst="rect">
+            <a:avLst/>
+          </a:prstGeom>
+          <a:noFill/>
+          <a:ln/>
+        </p:spPr>
+        <p:txBody>
+          <a:bodyPr wrap="square" lIns="0" tIns="0" rIns="0" bIns="0" rtlCol="0" anchor="ctr"/>
+          <a:lstStyle/>
+          <a:p>
+            <a:pPr indent="0" marL="0">
+              <a:lnSpc>
+                <a:spcPct val="120000"/>
+              </a:lnSpc>
+              <a:buNone/>
+            </a:pPr>
+            <a:r>
+              <a:rPr lang="en-US" sz="1100" dirty="0">
+                <a:solidFill>
+                  <a:srgbClr val="5B6577"/>
+                </a:solidFill>
+                <a:latin typeface="Calibri" pitchFamily="34" charset="0"/>
+                <a:ea typeface="Calibri" pitchFamily="34" charset="-122"/>
+                <a:cs typeface="Calibri" pitchFamily="34" charset="-120"/>
+              </a:rPr>
+              <a:t>“오류 원인을 찾아줘”</a:t>
+            </a:r>
+            <a:endParaRPr lang="en-US" sz="1100" dirty="0"/>
+          </a:p>
+        </p:txBody>
+      </p:sp>
+      <p:sp>
+        <p:nvSpPr>
+          <p:cNvPr id="10" name="Text 8"/>
+          <p:cNvSpPr txBox="1"/>
+          <p:nvPr/>
+        </p:nvSpPr>
+        <p:spPr>
+          <a:xfrm>
+            <a:off x="2661453" y="2304288"/>
+            <a:ext cx="201168" cy="365760"/>
+          </a:xfrm>
+          <a:prstGeom prst="rect">
+            <a:avLst/>
+          </a:prstGeom>
+          <a:noFill/>
+          <a:ln/>
+        </p:spPr>
+        <p:txBody>
+          <a:bodyPr wrap="square" lIns="0" tIns="0" rIns="0" bIns="0" rtlCol="0" anchor="ctr"/>
+          <a:lstStyle/>
+          <a:p>
+            <a:pPr algn="ctr" indent="0" marL="0">
+              <a:buNone/>
+            </a:pPr>
+            <a:r>
+              <a:rPr lang="en-US" sz="2200" b="1" dirty="0">
+                <a:solidFill>
+                  <a:srgbClr val="8A94A6"/>
+                </a:solidFill>
+                <a:latin typeface="Calibri" pitchFamily="34" charset="0"/>
+                <a:ea typeface="Calibri" pitchFamily="34" charset="-122"/>
+                <a:cs typeface="Calibri" pitchFamily="34" charset="-120"/>
+              </a:rPr>
+              <a:t>›</a:t>
+            </a:r>
+            <a:endParaRPr lang="en-US" sz="2200" dirty="0"/>
+          </a:p>
+        </p:txBody>
+      </p:sp>
+      <p:sp>
+        <p:nvSpPr>
+          <p:cNvPr id="11" name="Shape 9"/>
+          <p:cNvSpPr/>
+          <p:nvPr/>
+        </p:nvSpPr>
+        <p:spPr>
+          <a:xfrm>
+            <a:off x="2862621" y="1572768"/>
+            <a:ext cx="2021373" cy="1847088"/>
+          </a:xfrm>
+          <a:prstGeom prst="roundRect">
+            <a:avLst>
+              <a:gd name="adj" fmla="val 3465"/>
+            </a:avLst>
+          </a:prstGeom>
+          <a:solidFill>
+            <a:srgbClr val="EEF3FF"/>
+          </a:solidFill>
+          <a:ln w="12700">
+            <a:solidFill>
+              <a:srgbClr val="D3E0FF"/>
+            </a:solidFill>
+            <a:prstDash val="solid"/>
+          </a:ln>
+        </p:spPr>
+      </p:sp>
+      <p:sp>
+        <p:nvSpPr>
+          <p:cNvPr id="12" name="Shape 10"/>
+          <p:cNvSpPr/>
+          <p:nvPr/>
+        </p:nvSpPr>
+        <p:spPr>
+          <a:xfrm>
+            <a:off x="3136941" y="1847088"/>
+            <a:ext cx="310896" cy="310896"/>
+          </a:xfrm>
+          <a:prstGeom prst="roundRect">
+            <a:avLst>
+              <a:gd name="adj" fmla="val 26471"/>
             </a:avLst>
           </a:prstGeom>
           <a:solidFill>
@@ -4050,14 +4596,14 @@
       </p:sp>
       <p:sp>
         <p:nvSpPr>
-          <p:cNvPr id="7" name="Text 5"/>
-          <p:cNvSpPr txBox="1"/>
-          <p:nvPr/>
-        </p:nvSpPr>
-        <p:spPr>
-          <a:xfrm>
-            <a:off x="950976" y="1773936"/>
-            <a:ext cx="292608" cy="292608"/>
+          <p:cNvPr id="13" name="Text 11"/>
+          <p:cNvSpPr txBox="1"/>
+          <p:nvPr/>
+        </p:nvSpPr>
+        <p:spPr>
+          <a:xfrm>
+            <a:off x="3136941" y="1847088"/>
+            <a:ext cx="310896" cy="310896"/>
           </a:xfrm>
           <a:prstGeom prst="rect">
             <a:avLst/>
@@ -4073,7 +4619,7 @@
               <a:buNone/>
             </a:pPr>
             <a:r>
-              <a:rPr lang="en-US" sz="1100" b="1" dirty="0">
+              <a:rPr lang="en-US" sz="1200" b="1" dirty="0">
                 <a:solidFill>
                   <a:srgbClr val="FFFFFF"/>
                 </a:solidFill>
@@ -4081,7 +4627,88 @@
                 <a:ea typeface="Calibri" pitchFamily="34" charset="-122"/>
                 <a:cs typeface="Calibri" pitchFamily="34" charset="-120"/>
               </a:rPr>
-              <a:t>1</a:t>
+              <a:t>2</a:t>
+            </a:r>
+            <a:endParaRPr lang="en-US" sz="1200" dirty="0"/>
+          </a:p>
+        </p:txBody>
+      </p:sp>
+      <p:sp>
+        <p:nvSpPr>
+          <p:cNvPr id="14" name="Text 12"/>
+          <p:cNvSpPr txBox="1"/>
+          <p:nvPr/>
+        </p:nvSpPr>
+        <p:spPr>
+          <a:xfrm>
+            <a:off x="3100365" y="2340864"/>
+            <a:ext cx="1545885" cy="329184"/>
+          </a:xfrm>
+          <a:prstGeom prst="rect">
+            <a:avLst/>
+          </a:prstGeom>
+          <a:noFill/>
+          <a:ln/>
+        </p:spPr>
+        <p:txBody>
+          <a:bodyPr wrap="square" lIns="0" tIns="0" rIns="0" bIns="0" rtlCol="0" anchor="ctr"/>
+          <a:lstStyle/>
+          <a:p>
+            <a:pPr indent="0" marL="0">
+              <a:buNone/>
+            </a:pPr>
+            <a:r>
+              <a:rPr lang="en-US" sz="1350" b="1" dirty="0">
+                <a:solidFill>
+                  <a:srgbClr val="0F1B33"/>
+                </a:solidFill>
+                <a:latin typeface="Calibri" pitchFamily="34" charset="0"/>
+                <a:ea typeface="Calibri" pitchFamily="34" charset="-122"/>
+                <a:cs typeface="Calibri" pitchFamily="34" charset="-120"/>
+              </a:rPr>
+              <a:t>Skill 목록 확인</a:t>
+            </a:r>
+            <a:endParaRPr lang="en-US" sz="1350" dirty="0"/>
+          </a:p>
+        </p:txBody>
+      </p:sp>
+      <p:sp>
+        <p:nvSpPr>
+          <p:cNvPr id="15" name="Text 13"/>
+          <p:cNvSpPr txBox="1"/>
+          <p:nvPr/>
+        </p:nvSpPr>
+        <p:spPr>
+          <a:xfrm>
+            <a:off x="3100365" y="2706624"/>
+            <a:ext cx="1545885" cy="512064"/>
+          </a:xfrm>
+          <a:prstGeom prst="rect">
+            <a:avLst/>
+          </a:prstGeom>
+          <a:noFill/>
+          <a:ln/>
+        </p:spPr>
+        <p:txBody>
+          <a:bodyPr wrap="square" lIns="0" tIns="0" rIns="0" bIns="0" rtlCol="0" anchor="ctr"/>
+          <a:lstStyle/>
+          <a:p>
+            <a:pPr indent="0" marL="0">
+              <a:lnSpc>
+                <a:spcPct val="120000"/>
+              </a:lnSpc>
+              <a:buNone/>
+            </a:pPr>
+            <a:r>
+              <a:rPr lang="en-US" sz="1100" dirty="0">
+                <a:solidFill>
+                  <a:srgbClr val="5B6577"/>
+                </a:solidFill>
+                <a:latin typeface="Calibri" pitchFamily="34" charset="0"/>
+                <a:ea typeface="Calibri" pitchFamily="34" charset="-122"/>
+                <a:cs typeface="Calibri" pitchFamily="34" charset="-120"/>
+              </a:rPr>
+              <a:t>이름과 설명을 훑습니다</a:t>
             </a:r>
             <a:endParaRPr lang="en-US" sz="1100" dirty="0"/>
           </a:p>
@@ -4089,99 +4716,57 @@
       </p:sp>
       <p:sp>
         <p:nvSpPr>
-          <p:cNvPr id="8" name="Text 6"/>
-          <p:cNvSpPr txBox="1"/>
-          <p:nvPr/>
-        </p:nvSpPr>
-        <p:spPr>
-          <a:xfrm>
-            <a:off x="1353312" y="1755648"/>
-            <a:ext cx="2424074" cy="329184"/>
-          </a:xfrm>
-          <a:prstGeom prst="rect">
-            <a:avLst/>
-          </a:prstGeom>
-          <a:noFill/>
-          <a:ln/>
-        </p:spPr>
-        <p:txBody>
-          <a:bodyPr wrap="square" lIns="0" tIns="0" rIns="0" bIns="0" rtlCol="0" anchor="ctr"/>
-          <a:lstStyle/>
-          <a:p>
-            <a:pPr indent="0" marL="0">
-              <a:buNone/>
-            </a:pPr>
-            <a:r>
-              <a:rPr lang="en-US" sz="1300" b="1" dirty="0">
-                <a:solidFill>
-                  <a:srgbClr val="0F1B33"/>
-                </a:solidFill>
-                <a:latin typeface="Calibri" pitchFamily="34" charset="0"/>
-                <a:ea typeface="Calibri" pitchFamily="34" charset="-122"/>
-                <a:cs typeface="Calibri" pitchFamily="34" charset="-120"/>
-              </a:rPr>
-              <a:t>systematic-debugging</a:t>
-            </a:r>
-            <a:endParaRPr lang="en-US" sz="1300" dirty="0"/>
-          </a:p>
-        </p:txBody>
-      </p:sp>
-      <p:sp>
-        <p:nvSpPr>
-          <p:cNvPr id="9" name="Text 7"/>
-          <p:cNvSpPr txBox="1"/>
-          <p:nvPr/>
-        </p:nvSpPr>
-        <p:spPr>
-          <a:xfrm>
-            <a:off x="950976" y="2231136"/>
-            <a:ext cx="2808122" cy="731520"/>
-          </a:xfrm>
-          <a:prstGeom prst="rect">
-            <a:avLst/>
-          </a:prstGeom>
-          <a:noFill/>
-          <a:ln/>
-        </p:spPr>
-        <p:txBody>
-          <a:bodyPr wrap="square" lIns="0" tIns="0" rIns="0" bIns="0" rtlCol="0" anchor="ctr"/>
-          <a:lstStyle/>
-          <a:p>
-            <a:pPr indent="0" marL="0">
-              <a:lnSpc>
-                <a:spcPct val="128000"/>
-              </a:lnSpc>
-              <a:buNone/>
-            </a:pPr>
-            <a:r>
-              <a:rPr lang="en-US" sz="1200" dirty="0">
-                <a:solidFill>
-                  <a:srgbClr val="5B6577"/>
-                </a:solidFill>
-                <a:latin typeface="Calibri" pitchFamily="34" charset="0"/>
-                <a:ea typeface="Calibri" pitchFamily="34" charset="-122"/>
-                <a:cs typeface="Calibri" pitchFamily="34" charset="-120"/>
-              </a:rPr>
-              <a:t>추측 대신 재현 → 증거 → 원인 순으로 확인합니다.</a:t>
-            </a:r>
-            <a:endParaRPr lang="en-US" sz="1200" dirty="0"/>
-          </a:p>
-        </p:txBody>
-      </p:sp>
-      <p:sp>
-        <p:nvSpPr>
-          <p:cNvPr id="10" name="Shape 8"/>
+          <p:cNvPr id="16" name="Text 14"/>
+          <p:cNvSpPr txBox="1"/>
+          <p:nvPr/>
+        </p:nvSpPr>
+        <p:spPr>
+          <a:xfrm>
+            <a:off x="4883993" y="2304288"/>
+            <a:ext cx="201168" cy="365760"/>
+          </a:xfrm>
+          <a:prstGeom prst="rect">
+            <a:avLst/>
+          </a:prstGeom>
+          <a:noFill/>
+          <a:ln/>
+        </p:spPr>
+        <p:txBody>
+          <a:bodyPr wrap="square" lIns="0" tIns="0" rIns="0" bIns="0" rtlCol="0" anchor="ctr"/>
+          <a:lstStyle/>
+          <a:p>
+            <a:pPr algn="ctr" indent="0" marL="0">
+              <a:buNone/>
+            </a:pPr>
+            <a:r>
+              <a:rPr lang="en-US" sz="2200" b="1" dirty="0">
+                <a:solidFill>
+                  <a:srgbClr val="8A94A6"/>
+                </a:solidFill>
+                <a:latin typeface="Calibri" pitchFamily="34" charset="0"/>
+                <a:ea typeface="Calibri" pitchFamily="34" charset="-122"/>
+                <a:cs typeface="Calibri" pitchFamily="34" charset="-120"/>
+              </a:rPr>
+              <a:t>›</a:t>
+            </a:r>
+            <a:endParaRPr lang="en-US" sz="2200" dirty="0"/>
+          </a:p>
+        </p:txBody>
+      </p:sp>
+      <p:sp>
+        <p:nvSpPr>
+          <p:cNvPr id="17" name="Shape 15"/>
           <p:cNvSpPr/>
           <p:nvPr/>
         </p:nvSpPr>
         <p:spPr>
           <a:xfrm>
-            <a:off x="4380890" y="1481328"/>
-            <a:ext cx="3429914" cy="1700784"/>
+            <a:off x="5085161" y="1572768"/>
+            <a:ext cx="2021373" cy="1847088"/>
           </a:xfrm>
           <a:prstGeom prst="roundRect">
             <a:avLst>
-              <a:gd name="adj" fmla="val 3763"/>
+              <a:gd name="adj" fmla="val 3465"/>
             </a:avLst>
           </a:prstGeom>
           <a:solidFill>
@@ -4197,18 +4782,226 @@
       </p:sp>
       <p:sp>
         <p:nvSpPr>
-          <p:cNvPr id="11" name="Shape 9"/>
+          <p:cNvPr id="18" name="Shape 16"/>
           <p:cNvSpPr/>
           <p:nvPr/>
         </p:nvSpPr>
         <p:spPr>
           <a:xfrm>
-            <a:off x="4691786" y="1773936"/>
-            <a:ext cx="292608" cy="292608"/>
+            <a:off x="5359481" y="1847088"/>
+            <a:ext cx="310896" cy="310896"/>
           </a:xfrm>
           <a:prstGeom prst="roundRect">
             <a:avLst>
-              <a:gd name="adj" fmla="val 28125"/>
+              <a:gd name="adj" fmla="val 26471"/>
+            </a:avLst>
+          </a:prstGeom>
+          <a:solidFill>
+            <a:srgbClr val="0F1B33"/>
+          </a:solidFill>
+          <a:ln/>
+        </p:spPr>
+      </p:sp>
+      <p:sp>
+        <p:nvSpPr>
+          <p:cNvPr id="19" name="Text 17"/>
+          <p:cNvSpPr txBox="1"/>
+          <p:nvPr/>
+        </p:nvSpPr>
+        <p:spPr>
+          <a:xfrm>
+            <a:off x="5359481" y="1847088"/>
+            <a:ext cx="310896" cy="310896"/>
+          </a:xfrm>
+          <a:prstGeom prst="rect">
+            <a:avLst/>
+          </a:prstGeom>
+          <a:noFill/>
+          <a:ln/>
+        </p:spPr>
+        <p:txBody>
+          <a:bodyPr wrap="square" lIns="0" tIns="0" rIns="0" bIns="0" rtlCol="0" anchor="ctr"/>
+          <a:lstStyle/>
+          <a:p>
+            <a:pPr algn="ctr" indent="0" marL="0">
+              <a:buNone/>
+            </a:pPr>
+            <a:r>
+              <a:rPr lang="en-US" sz="1200" b="1" dirty="0">
+                <a:solidFill>
+                  <a:srgbClr val="FFFFFF"/>
+                </a:solidFill>
+                <a:latin typeface="Calibri" pitchFamily="34" charset="0"/>
+                <a:ea typeface="Calibri" pitchFamily="34" charset="-122"/>
+                <a:cs typeface="Calibri" pitchFamily="34" charset="-120"/>
+              </a:rPr>
+              <a:t>3</a:t>
+            </a:r>
+            <a:endParaRPr lang="en-US" sz="1200" dirty="0"/>
+          </a:p>
+        </p:txBody>
+      </p:sp>
+      <p:sp>
+        <p:nvSpPr>
+          <p:cNvPr id="20" name="Text 18"/>
+          <p:cNvSpPr txBox="1"/>
+          <p:nvPr/>
+        </p:nvSpPr>
+        <p:spPr>
+          <a:xfrm>
+            <a:off x="5322905" y="2340864"/>
+            <a:ext cx="1545885" cy="329184"/>
+          </a:xfrm>
+          <a:prstGeom prst="rect">
+            <a:avLst/>
+          </a:prstGeom>
+          <a:noFill/>
+          <a:ln/>
+        </p:spPr>
+        <p:txBody>
+          <a:bodyPr wrap="square" lIns="0" tIns="0" rIns="0" bIns="0" rtlCol="0" anchor="ctr"/>
+          <a:lstStyle/>
+          <a:p>
+            <a:pPr indent="0" marL="0">
+              <a:buNone/>
+            </a:pPr>
+            <a:r>
+              <a:rPr lang="en-US" sz="1350" b="1" dirty="0">
+                <a:solidFill>
+                  <a:srgbClr val="0F1B33"/>
+                </a:solidFill>
+                <a:latin typeface="Calibri" pitchFamily="34" charset="0"/>
+                <a:ea typeface="Calibri" pitchFamily="34" charset="-122"/>
+                <a:cs typeface="Calibri" pitchFamily="34" charset="-120"/>
+              </a:rPr>
+              <a:t>용도 비교</a:t>
+            </a:r>
+            <a:endParaRPr lang="en-US" sz="1350" dirty="0"/>
+          </a:p>
+        </p:txBody>
+      </p:sp>
+      <p:sp>
+        <p:nvSpPr>
+          <p:cNvPr id="21" name="Text 19"/>
+          <p:cNvSpPr txBox="1"/>
+          <p:nvPr/>
+        </p:nvSpPr>
+        <p:spPr>
+          <a:xfrm>
+            <a:off x="5322905" y="2706624"/>
+            <a:ext cx="1545885" cy="512064"/>
+          </a:xfrm>
+          <a:prstGeom prst="rect">
+            <a:avLst/>
+          </a:prstGeom>
+          <a:noFill/>
+          <a:ln/>
+        </p:spPr>
+        <p:txBody>
+          <a:bodyPr wrap="square" lIns="0" tIns="0" rIns="0" bIns="0" rtlCol="0" anchor="ctr"/>
+          <a:lstStyle/>
+          <a:p>
+            <a:pPr indent="0" marL="0">
+              <a:lnSpc>
+                <a:spcPct val="120000"/>
+              </a:lnSpc>
+              <a:buNone/>
+            </a:pPr>
+            <a:r>
+              <a:rPr lang="en-US" sz="1100" dirty="0">
+                <a:solidFill>
+                  <a:srgbClr val="5B6577"/>
+                </a:solidFill>
+                <a:latin typeface="Calibri" pitchFamily="34" charset="0"/>
+                <a:ea typeface="Calibri" pitchFamily="34" charset="-122"/>
+                <a:cs typeface="Calibri" pitchFamily="34" charset="-120"/>
+              </a:rPr>
+              <a:t>요청과 맞는지 판단합니다</a:t>
+            </a:r>
+            <a:endParaRPr lang="en-US" sz="1100" dirty="0"/>
+          </a:p>
+        </p:txBody>
+      </p:sp>
+      <p:sp>
+        <p:nvSpPr>
+          <p:cNvPr id="22" name="Text 20"/>
+          <p:cNvSpPr txBox="1"/>
+          <p:nvPr/>
+        </p:nvSpPr>
+        <p:spPr>
+          <a:xfrm>
+            <a:off x="7106534" y="2304288"/>
+            <a:ext cx="201168" cy="365760"/>
+          </a:xfrm>
+          <a:prstGeom prst="rect">
+            <a:avLst/>
+          </a:prstGeom>
+          <a:noFill/>
+          <a:ln/>
+        </p:spPr>
+        <p:txBody>
+          <a:bodyPr wrap="square" lIns="0" tIns="0" rIns="0" bIns="0" rtlCol="0" anchor="ctr"/>
+          <a:lstStyle/>
+          <a:p>
+            <a:pPr algn="ctr" indent="0" marL="0">
+              <a:buNone/>
+            </a:pPr>
+            <a:r>
+              <a:rPr lang="en-US" sz="2200" b="1" dirty="0">
+                <a:solidFill>
+                  <a:srgbClr val="8A94A6"/>
+                </a:solidFill>
+                <a:latin typeface="Calibri" pitchFamily="34" charset="0"/>
+                <a:ea typeface="Calibri" pitchFamily="34" charset="-122"/>
+                <a:cs typeface="Calibri" pitchFamily="34" charset="-120"/>
+              </a:rPr>
+              <a:t>›</a:t>
+            </a:r>
+            <a:endParaRPr lang="en-US" sz="2200" dirty="0"/>
+          </a:p>
+        </p:txBody>
+      </p:sp>
+      <p:sp>
+        <p:nvSpPr>
+          <p:cNvPr id="23" name="Shape 21"/>
+          <p:cNvSpPr/>
+          <p:nvPr/>
+        </p:nvSpPr>
+        <p:spPr>
+          <a:xfrm>
+            <a:off x="7307702" y="1572768"/>
+            <a:ext cx="2021373" cy="1847088"/>
+          </a:xfrm>
+          <a:prstGeom prst="roundRect">
+            <a:avLst>
+              <a:gd name="adj" fmla="val 3465"/>
+            </a:avLst>
+          </a:prstGeom>
+          <a:solidFill>
+            <a:srgbClr val="EEF3FF"/>
+          </a:solidFill>
+          <a:ln w="12700">
+            <a:solidFill>
+              <a:srgbClr val="D3E0FF"/>
+            </a:solidFill>
+            <a:prstDash val="solid"/>
+          </a:ln>
+        </p:spPr>
+      </p:sp>
+      <p:sp>
+        <p:nvSpPr>
+          <p:cNvPr id="24" name="Shape 22"/>
+          <p:cNvSpPr/>
+          <p:nvPr/>
+        </p:nvSpPr>
+        <p:spPr>
+          <a:xfrm>
+            <a:off x="7582022" y="1847088"/>
+            <a:ext cx="310896" cy="310896"/>
+          </a:xfrm>
+          <a:prstGeom prst="roundRect">
+            <a:avLst>
+              <a:gd name="adj" fmla="val 26471"/>
             </a:avLst>
           </a:prstGeom>
           <a:solidFill>
@@ -4219,14 +5012,14 @@
       </p:sp>
       <p:sp>
         <p:nvSpPr>
-          <p:cNvPr id="12" name="Text 10"/>
-          <p:cNvSpPr txBox="1"/>
-          <p:nvPr/>
-        </p:nvSpPr>
-        <p:spPr>
-          <a:xfrm>
-            <a:off x="4691786" y="1773936"/>
-            <a:ext cx="292608" cy="292608"/>
+          <p:cNvPr id="25" name="Text 23"/>
+          <p:cNvSpPr txBox="1"/>
+          <p:nvPr/>
+        </p:nvSpPr>
+        <p:spPr>
+          <a:xfrm>
+            <a:off x="7582022" y="1847088"/>
+            <a:ext cx="310896" cy="310896"/>
           </a:xfrm>
           <a:prstGeom prst="rect">
             <a:avLst/>
@@ -4242,7 +5035,7 @@
               <a:buNone/>
             </a:pPr>
             <a:r>
-              <a:rPr lang="en-US" sz="1100" b="1" dirty="0">
+              <a:rPr lang="en-US" sz="1200" b="1" dirty="0">
                 <a:solidFill>
                   <a:srgbClr val="FFFFFF"/>
                 </a:solidFill>
@@ -4250,7 +5043,88 @@
                 <a:ea typeface="Calibri" pitchFamily="34" charset="-122"/>
                 <a:cs typeface="Calibri" pitchFamily="34" charset="-120"/>
               </a:rPr>
-              <a:t>2</a:t>
+              <a:t>4</a:t>
+            </a:r>
+            <a:endParaRPr lang="en-US" sz="1200" dirty="0"/>
+          </a:p>
+        </p:txBody>
+      </p:sp>
+      <p:sp>
+        <p:nvSpPr>
+          <p:cNvPr id="26" name="Text 24"/>
+          <p:cNvSpPr txBox="1"/>
+          <p:nvPr/>
+        </p:nvSpPr>
+        <p:spPr>
+          <a:xfrm>
+            <a:off x="7545446" y="2340864"/>
+            <a:ext cx="1545885" cy="329184"/>
+          </a:xfrm>
+          <a:prstGeom prst="rect">
+            <a:avLst/>
+          </a:prstGeom>
+          <a:noFill/>
+          <a:ln/>
+        </p:spPr>
+        <p:txBody>
+          <a:bodyPr wrap="square" lIns="0" tIns="0" rIns="0" bIns="0" rtlCol="0" anchor="ctr"/>
+          <a:lstStyle/>
+          <a:p>
+            <a:pPr indent="0" marL="0">
+              <a:buNone/>
+            </a:pPr>
+            <a:r>
+              <a:rPr lang="en-US" sz="1350" b="1" dirty="0">
+                <a:solidFill>
+                  <a:srgbClr val="0F1B33"/>
+                </a:solidFill>
+                <a:latin typeface="Calibri" pitchFamily="34" charset="0"/>
+                <a:ea typeface="Calibri" pitchFamily="34" charset="-122"/>
+                <a:cs typeface="Calibri" pitchFamily="34" charset="-120"/>
+              </a:rPr>
+              <a:t>Skill 호출</a:t>
+            </a:r>
+            <a:endParaRPr lang="en-US" sz="1350" dirty="0"/>
+          </a:p>
+        </p:txBody>
+      </p:sp>
+      <p:sp>
+        <p:nvSpPr>
+          <p:cNvPr id="27" name="Text 25"/>
+          <p:cNvSpPr txBox="1"/>
+          <p:nvPr/>
+        </p:nvSpPr>
+        <p:spPr>
+          <a:xfrm>
+            <a:off x="7545446" y="2706624"/>
+            <a:ext cx="1545885" cy="512064"/>
+          </a:xfrm>
+          <a:prstGeom prst="rect">
+            <a:avLst/>
+          </a:prstGeom>
+          <a:noFill/>
+          <a:ln/>
+        </p:spPr>
+        <p:txBody>
+          <a:bodyPr wrap="square" lIns="0" tIns="0" rIns="0" bIns="0" rtlCol="0" anchor="ctr"/>
+          <a:lstStyle/>
+          <a:p>
+            <a:pPr indent="0" marL="0">
+              <a:lnSpc>
+                <a:spcPct val="120000"/>
+              </a:lnSpc>
+              <a:buNone/>
+            </a:pPr>
+            <a:r>
+              <a:rPr lang="en-US" sz="1100" dirty="0">
+                <a:solidFill>
+                  <a:srgbClr val="5B6577"/>
+                </a:solidFill>
+                <a:latin typeface="Calibri" pitchFamily="34" charset="0"/>
+                <a:ea typeface="Calibri" pitchFamily="34" charset="-122"/>
+                <a:cs typeface="Calibri" pitchFamily="34" charset="-120"/>
+              </a:rPr>
+              <a:t>전체 지침을 읽습니다</a:t>
             </a:r>
             <a:endParaRPr lang="en-US" sz="1100" dirty="0"/>
           </a:p>
@@ -4258,99 +5132,57 @@
       </p:sp>
       <p:sp>
         <p:nvSpPr>
-          <p:cNvPr id="13" name="Text 11"/>
-          <p:cNvSpPr txBox="1"/>
-          <p:nvPr/>
-        </p:nvSpPr>
-        <p:spPr>
-          <a:xfrm>
-            <a:off x="5094122" y="1755648"/>
-            <a:ext cx="2424074" cy="329184"/>
-          </a:xfrm>
-          <a:prstGeom prst="rect">
-            <a:avLst/>
-          </a:prstGeom>
-          <a:noFill/>
-          <a:ln/>
-        </p:spPr>
-        <p:txBody>
-          <a:bodyPr wrap="square" lIns="0" tIns="0" rIns="0" bIns="0" rtlCol="0" anchor="ctr"/>
-          <a:lstStyle/>
-          <a:p>
-            <a:pPr indent="0" marL="0">
-              <a:buNone/>
-            </a:pPr>
-            <a:r>
-              <a:rPr lang="en-US" sz="1300" b="1" dirty="0">
-                <a:solidFill>
-                  <a:srgbClr val="0F1B33"/>
-                </a:solidFill>
-                <a:latin typeface="Calibri" pitchFamily="34" charset="0"/>
-                <a:ea typeface="Calibri" pitchFamily="34" charset="-122"/>
-                <a:cs typeface="Calibri" pitchFamily="34" charset="-120"/>
-              </a:rPr>
-              <a:t>requesting-code-review</a:t>
-            </a:r>
-            <a:endParaRPr lang="en-US" sz="1300" dirty="0"/>
-          </a:p>
-        </p:txBody>
-      </p:sp>
-      <p:sp>
-        <p:nvSpPr>
-          <p:cNvPr id="14" name="Text 12"/>
-          <p:cNvSpPr txBox="1"/>
-          <p:nvPr/>
-        </p:nvSpPr>
-        <p:spPr>
-          <a:xfrm>
-            <a:off x="4691786" y="2231136"/>
-            <a:ext cx="2808122" cy="731520"/>
-          </a:xfrm>
-          <a:prstGeom prst="rect">
-            <a:avLst/>
-          </a:prstGeom>
-          <a:noFill/>
-          <a:ln/>
-        </p:spPr>
-        <p:txBody>
-          <a:bodyPr wrap="square" lIns="0" tIns="0" rIns="0" bIns="0" rtlCol="0" anchor="ctr"/>
-          <a:lstStyle/>
-          <a:p>
-            <a:pPr indent="0" marL="0">
-              <a:lnSpc>
-                <a:spcPct val="128000"/>
-              </a:lnSpc>
-              <a:buNone/>
-            </a:pPr>
-            <a:r>
-              <a:rPr lang="en-US" sz="1200" dirty="0">
-                <a:solidFill>
-                  <a:srgbClr val="5B6577"/>
-                </a:solidFill>
-                <a:latin typeface="Calibri" pitchFamily="34" charset="0"/>
-                <a:ea typeface="Calibri" pitchFamily="34" charset="-122"/>
-                <a:cs typeface="Calibri" pitchFamily="34" charset="-120"/>
-              </a:rPr>
-              <a:t>요구사항과 구현이 맞는지 검토를 요청합니다.</a:t>
-            </a:r>
-            <a:endParaRPr lang="en-US" sz="1200" dirty="0"/>
-          </a:p>
-        </p:txBody>
-      </p:sp>
-      <p:sp>
-        <p:nvSpPr>
-          <p:cNvPr id="15" name="Shape 13"/>
+          <p:cNvPr id="28" name="Text 26"/>
+          <p:cNvSpPr txBox="1"/>
+          <p:nvPr/>
+        </p:nvSpPr>
+        <p:spPr>
+          <a:xfrm>
+            <a:off x="9329075" y="2304288"/>
+            <a:ext cx="201168" cy="365760"/>
+          </a:xfrm>
+          <a:prstGeom prst="rect">
+            <a:avLst/>
+          </a:prstGeom>
+          <a:noFill/>
+          <a:ln/>
+        </p:spPr>
+        <p:txBody>
+          <a:bodyPr wrap="square" lIns="0" tIns="0" rIns="0" bIns="0" rtlCol="0" anchor="ctr"/>
+          <a:lstStyle/>
+          <a:p>
+            <a:pPr algn="ctr" indent="0" marL="0">
+              <a:buNone/>
+            </a:pPr>
+            <a:r>
+              <a:rPr lang="en-US" sz="2200" b="1" dirty="0">
+                <a:solidFill>
+                  <a:srgbClr val="8A94A6"/>
+                </a:solidFill>
+                <a:latin typeface="Calibri" pitchFamily="34" charset="0"/>
+                <a:ea typeface="Calibri" pitchFamily="34" charset="-122"/>
+                <a:cs typeface="Calibri" pitchFamily="34" charset="-120"/>
+              </a:rPr>
+              <a:t>›</a:t>
+            </a:r>
+            <a:endParaRPr lang="en-US" sz="2200" dirty="0"/>
+          </a:p>
+        </p:txBody>
+      </p:sp>
+      <p:sp>
+        <p:nvSpPr>
+          <p:cNvPr id="29" name="Shape 27"/>
           <p:cNvSpPr/>
           <p:nvPr/>
         </p:nvSpPr>
         <p:spPr>
           <a:xfrm>
-            <a:off x="8121701" y="1481328"/>
-            <a:ext cx="3429914" cy="1700784"/>
+            <a:off x="9530243" y="1572768"/>
+            <a:ext cx="2021373" cy="1847088"/>
           </a:xfrm>
           <a:prstGeom prst="roundRect">
             <a:avLst>
-              <a:gd name="adj" fmla="val 3763"/>
+              <a:gd name="adj" fmla="val 3465"/>
             </a:avLst>
           </a:prstGeom>
           <a:solidFill>
@@ -4366,36 +5198,36 @@
       </p:sp>
       <p:sp>
         <p:nvSpPr>
-          <p:cNvPr id="16" name="Shape 14"/>
+          <p:cNvPr id="30" name="Shape 28"/>
           <p:cNvSpPr/>
           <p:nvPr/>
         </p:nvSpPr>
         <p:spPr>
           <a:xfrm>
-            <a:off x="8432597" y="1773936"/>
-            <a:ext cx="292608" cy="292608"/>
+            <a:off x="9804563" y="1847088"/>
+            <a:ext cx="310896" cy="310896"/>
           </a:xfrm>
           <a:prstGeom prst="roundRect">
             <a:avLst>
-              <a:gd name="adj" fmla="val 28125"/>
+              <a:gd name="adj" fmla="val 26471"/>
             </a:avLst>
           </a:prstGeom>
           <a:solidFill>
-            <a:srgbClr val="2F6BFF"/>
+            <a:srgbClr val="0F1B33"/>
           </a:solidFill>
           <a:ln/>
         </p:spPr>
       </p:sp>
       <p:sp>
         <p:nvSpPr>
-          <p:cNvPr id="17" name="Text 15"/>
-          <p:cNvSpPr txBox="1"/>
-          <p:nvPr/>
-        </p:nvSpPr>
-        <p:spPr>
-          <a:xfrm>
-            <a:off x="8432597" y="1773936"/>
-            <a:ext cx="292608" cy="292608"/>
+          <p:cNvPr id="31" name="Text 29"/>
+          <p:cNvSpPr txBox="1"/>
+          <p:nvPr/>
+        </p:nvSpPr>
+        <p:spPr>
+          <a:xfrm>
+            <a:off x="9804563" y="1847088"/>
+            <a:ext cx="310896" cy="310896"/>
           </a:xfrm>
           <a:prstGeom prst="rect">
             <a:avLst/>
@@ -4411,7 +5243,7 @@
               <a:buNone/>
             </a:pPr>
             <a:r>
-              <a:rPr lang="en-US" sz="1100" b="1" dirty="0">
+              <a:rPr lang="en-US" sz="1200" b="1" dirty="0">
                 <a:solidFill>
                   <a:srgbClr val="FFFFFF"/>
                 </a:solidFill>
@@ -4419,7 +5251,88 @@
                 <a:ea typeface="Calibri" pitchFamily="34" charset="-122"/>
                 <a:cs typeface="Calibri" pitchFamily="34" charset="-120"/>
               </a:rPr>
-              <a:t>3</a:t>
+              <a:t>5</a:t>
+            </a:r>
+            <a:endParaRPr lang="en-US" sz="1200" dirty="0"/>
+          </a:p>
+        </p:txBody>
+      </p:sp>
+      <p:sp>
+        <p:nvSpPr>
+          <p:cNvPr id="32" name="Text 30"/>
+          <p:cNvSpPr txBox="1"/>
+          <p:nvPr/>
+        </p:nvSpPr>
+        <p:spPr>
+          <a:xfrm>
+            <a:off x="9767987" y="2340864"/>
+            <a:ext cx="1545885" cy="329184"/>
+          </a:xfrm>
+          <a:prstGeom prst="rect">
+            <a:avLst/>
+          </a:prstGeom>
+          <a:noFill/>
+          <a:ln/>
+        </p:spPr>
+        <p:txBody>
+          <a:bodyPr wrap="square" lIns="0" tIns="0" rIns="0" bIns="0" rtlCol="0" anchor="ctr"/>
+          <a:lstStyle/>
+          <a:p>
+            <a:pPr indent="0" marL="0">
+              <a:buNone/>
+            </a:pPr>
+            <a:r>
+              <a:rPr lang="en-US" sz="1350" b="1" dirty="0">
+                <a:solidFill>
+                  <a:srgbClr val="0F1B33"/>
+                </a:solidFill>
+                <a:latin typeface="Calibri" pitchFamily="34" charset="0"/>
+                <a:ea typeface="Calibri" pitchFamily="34" charset="-122"/>
+                <a:cs typeface="Calibri" pitchFamily="34" charset="-120"/>
+              </a:rPr>
+              <a:t>절차 실행</a:t>
+            </a:r>
+            <a:endParaRPr lang="en-US" sz="1350" dirty="0"/>
+          </a:p>
+        </p:txBody>
+      </p:sp>
+      <p:sp>
+        <p:nvSpPr>
+          <p:cNvPr id="33" name="Text 31"/>
+          <p:cNvSpPr txBox="1"/>
+          <p:nvPr/>
+        </p:nvSpPr>
+        <p:spPr>
+          <a:xfrm>
+            <a:off x="9767987" y="2706624"/>
+            <a:ext cx="1545885" cy="512064"/>
+          </a:xfrm>
+          <a:prstGeom prst="rect">
+            <a:avLst/>
+          </a:prstGeom>
+          <a:noFill/>
+          <a:ln/>
+        </p:spPr>
+        <p:txBody>
+          <a:bodyPr wrap="square" lIns="0" tIns="0" rIns="0" bIns="0" rtlCol="0" anchor="ctr"/>
+          <a:lstStyle/>
+          <a:p>
+            <a:pPr indent="0" marL="0">
+              <a:lnSpc>
+                <a:spcPct val="120000"/>
+              </a:lnSpc>
+              <a:buNone/>
+            </a:pPr>
+            <a:r>
+              <a:rPr lang="en-US" sz="1100" dirty="0">
+                <a:solidFill>
+                  <a:srgbClr val="5B6577"/>
+                </a:solidFill>
+                <a:latin typeface="Calibri" pitchFamily="34" charset="0"/>
+                <a:ea typeface="Calibri" pitchFamily="34" charset="-122"/>
+                <a:cs typeface="Calibri" pitchFamily="34" charset="-120"/>
+              </a:rPr>
+              <a:t>진단·검증을 수행합니다</a:t>
             </a:r>
             <a:endParaRPr lang="en-US" sz="1100" dirty="0"/>
           </a:p>
@@ -4427,99 +5340,121 @@
       </p:sp>
       <p:sp>
         <p:nvSpPr>
-          <p:cNvPr id="18" name="Text 16"/>
-          <p:cNvSpPr txBox="1"/>
-          <p:nvPr/>
-        </p:nvSpPr>
-        <p:spPr>
-          <a:xfrm>
-            <a:off x="8834933" y="1755648"/>
-            <a:ext cx="2424074" cy="329184"/>
-          </a:xfrm>
-          <a:prstGeom prst="rect">
-            <a:avLst/>
-          </a:prstGeom>
-          <a:noFill/>
-          <a:ln/>
-        </p:spPr>
-        <p:txBody>
-          <a:bodyPr wrap="square" lIns="0" tIns="0" rIns="0" bIns="0" rtlCol="0" anchor="ctr"/>
-          <a:lstStyle/>
-          <a:p>
-            <a:pPr indent="0" marL="0">
-              <a:buNone/>
-            </a:pPr>
-            <a:r>
-              <a:rPr lang="en-US" sz="1300" b="1" dirty="0">
-                <a:solidFill>
-                  <a:srgbClr val="0F1B33"/>
-                </a:solidFill>
-                <a:latin typeface="Calibri" pitchFamily="34" charset="0"/>
-                <a:ea typeface="Calibri" pitchFamily="34" charset="-122"/>
-                <a:cs typeface="Calibri" pitchFamily="34" charset="-120"/>
-              </a:rPr>
-              <a:t>receiving-code-review</a:t>
-            </a:r>
-            <a:endParaRPr lang="en-US" sz="1300" dirty="0"/>
-          </a:p>
-        </p:txBody>
-      </p:sp>
-      <p:sp>
-        <p:nvSpPr>
-          <p:cNvPr id="19" name="Text 17"/>
-          <p:cNvSpPr txBox="1"/>
-          <p:nvPr/>
-        </p:nvSpPr>
-        <p:spPr>
-          <a:xfrm>
-            <a:off x="8432597" y="2231136"/>
-            <a:ext cx="2808122" cy="731520"/>
-          </a:xfrm>
-          <a:prstGeom prst="rect">
-            <a:avLst/>
-          </a:prstGeom>
-          <a:noFill/>
-          <a:ln/>
-        </p:spPr>
-        <p:txBody>
-          <a:bodyPr wrap="square" lIns="0" tIns="0" rIns="0" bIns="0" rtlCol="0" anchor="ctr"/>
-          <a:lstStyle/>
-          <a:p>
-            <a:pPr indent="0" marL="0">
-              <a:lnSpc>
-                <a:spcPct val="128000"/>
-              </a:lnSpc>
-              <a:buNone/>
-            </a:pPr>
-            <a:r>
-              <a:rPr lang="en-US" sz="1200" dirty="0">
-                <a:solidFill>
-                  <a:srgbClr val="5B6577"/>
-                </a:solidFill>
-                <a:latin typeface="Calibri" pitchFamily="34" charset="0"/>
-                <a:ea typeface="Calibri" pitchFamily="34" charset="-122"/>
-                <a:cs typeface="Calibri" pitchFamily="34" charset="-120"/>
-              </a:rPr>
-              <a:t>받은 피드백을 그대로 받지 않고 검증한 뒤 반영합니다.</a:t>
-            </a:r>
-            <a:endParaRPr lang="en-US" sz="1200" dirty="0"/>
-          </a:p>
-        </p:txBody>
-      </p:sp>
-      <p:sp>
-        <p:nvSpPr>
-          <p:cNvPr id="20" name="Shape 18"/>
+          <p:cNvPr id="34" name="Shape 32"/>
           <p:cNvSpPr/>
           <p:nvPr/>
         </p:nvSpPr>
         <p:spPr>
           <a:xfrm>
-            <a:off x="640080" y="3474720"/>
-            <a:ext cx="3429914" cy="1700784"/>
+            <a:off x="640080" y="3968496"/>
+            <a:ext cx="5272888" cy="1371600"/>
           </a:xfrm>
           <a:prstGeom prst="roundRect">
             <a:avLst>
-              <a:gd name="adj" fmla="val 3763"/>
+              <a:gd name="adj" fmla="val 4667"/>
+            </a:avLst>
+          </a:prstGeom>
+          <a:solidFill>
+            <a:srgbClr val="0F1B33"/>
+          </a:solidFill>
+          <a:ln/>
+        </p:spPr>
+      </p:sp>
+      <p:sp>
+        <p:nvSpPr>
+          <p:cNvPr id="35" name="Text 33"/>
+          <p:cNvSpPr txBox="1"/>
+          <p:nvPr/>
+        </p:nvSpPr>
+        <p:spPr>
+          <a:xfrm>
+            <a:off x="1024128" y="4242816"/>
+            <a:ext cx="4504792" cy="310896"/>
+          </a:xfrm>
+          <a:prstGeom prst="rect">
+            <a:avLst/>
+          </a:prstGeom>
+          <a:noFill/>
+          <a:ln/>
+        </p:spPr>
+        <p:txBody>
+          <a:bodyPr wrap="square" lIns="0" tIns="0" rIns="0" bIns="0" rtlCol="0" anchor="ctr"/>
+          <a:lstStyle/>
+          <a:p>
+            <a:pPr indent="0" marL="0">
+              <a:buNone/>
+            </a:pPr>
+            <a:r>
+              <a:rPr lang="en-US" sz="1500" b="1" dirty="0">
+                <a:solidFill>
+                  <a:srgbClr val="F2994A"/>
+                </a:solidFill>
+                <a:latin typeface="Calibri" pitchFamily="34" charset="0"/>
+                <a:ea typeface="Calibri" pitchFamily="34" charset="-122"/>
+                <a:cs typeface="Calibri" pitchFamily="34" charset="-120"/>
+              </a:rPr>
+              <a:t>자동 호출</a:t>
+            </a:r>
+            <a:endParaRPr lang="en-US" sz="1500" dirty="0"/>
+          </a:p>
+        </p:txBody>
+      </p:sp>
+      <p:sp>
+        <p:nvSpPr>
+          <p:cNvPr id="36" name="Text 34"/>
+          <p:cNvSpPr txBox="1"/>
+          <p:nvPr/>
+        </p:nvSpPr>
+        <p:spPr>
+          <a:xfrm>
+            <a:off x="1024128" y="4626864"/>
+            <a:ext cx="4504792" cy="548640"/>
+          </a:xfrm>
+          <a:prstGeom prst="rect">
+            <a:avLst/>
+          </a:prstGeom>
+          <a:noFill/>
+          <a:ln/>
+        </p:spPr>
+        <p:txBody>
+          <a:bodyPr wrap="square" lIns="0" tIns="0" rIns="0" bIns="0" rtlCol="0" anchor="ctr"/>
+          <a:lstStyle/>
+          <a:p>
+            <a:pPr indent="0" marL="0">
+              <a:lnSpc>
+                <a:spcPct val="125000"/>
+              </a:lnSpc>
+              <a:buNone/>
+            </a:pPr>
+            <a:r>
+              <a:rPr lang="en-US" sz="1250" dirty="0">
+                <a:solidFill>
+                  <a:srgbClr val="C3CFE2"/>
+                </a:solidFill>
+                <a:latin typeface="Calibri" pitchFamily="34" charset="0"/>
+                <a:ea typeface="Calibri" pitchFamily="34" charset="-122"/>
+                <a:cs typeface="Calibri" pitchFamily="34" charset="-120"/>
+              </a:rPr>
+              <a:t>요청의 의미가 Skill 설명과 맞으면 모델이 알아서 선택합니다.</a:t>
+            </a:r>
+            <a:endParaRPr lang="en-US" sz="1250" dirty="0"/>
+          </a:p>
+        </p:txBody>
+      </p:sp>
+      <p:sp>
+        <p:nvSpPr>
+          <p:cNvPr id="37" name="Shape 35"/>
+          <p:cNvSpPr/>
+          <p:nvPr/>
+        </p:nvSpPr>
+        <p:spPr>
+          <a:xfrm>
+            <a:off x="6278728" y="3968496"/>
+            <a:ext cx="5272888" cy="1371600"/>
+          </a:xfrm>
+          <a:prstGeom prst="roundRect">
+            <a:avLst>
+              <a:gd name="adj" fmla="val 4667"/>
             </a:avLst>
           </a:prstGeom>
           <a:solidFill>
@@ -4535,91 +5470,30 @@
       </p:sp>
       <p:sp>
         <p:nvSpPr>
-          <p:cNvPr id="21" name="Shape 19"/>
-          <p:cNvSpPr/>
-          <p:nvPr/>
-        </p:nvSpPr>
-        <p:spPr>
-          <a:xfrm>
-            <a:off x="950976" y="3767328"/>
-            <a:ext cx="292608" cy="292608"/>
-          </a:xfrm>
-          <a:prstGeom prst="roundRect">
-            <a:avLst>
-              <a:gd name="adj" fmla="val 28125"/>
-            </a:avLst>
-          </a:prstGeom>
-          <a:solidFill>
-            <a:srgbClr val="2F6BFF"/>
-          </a:solidFill>
-          <a:ln/>
-        </p:spPr>
-      </p:sp>
-      <p:sp>
-        <p:nvSpPr>
-          <p:cNvPr id="22" name="Text 20"/>
-          <p:cNvSpPr txBox="1"/>
-          <p:nvPr/>
-        </p:nvSpPr>
-        <p:spPr>
-          <a:xfrm>
-            <a:off x="950976" y="3767328"/>
-            <a:ext cx="292608" cy="292608"/>
-          </a:xfrm>
-          <a:prstGeom prst="rect">
-            <a:avLst/>
-          </a:prstGeom>
-          <a:noFill/>
-          <a:ln/>
-        </p:spPr>
-        <p:txBody>
-          <a:bodyPr wrap="square" lIns="0" tIns="0" rIns="0" bIns="0" rtlCol="0" anchor="ctr"/>
-          <a:lstStyle/>
-          <a:p>
-            <a:pPr algn="ctr" indent="0" marL="0">
-              <a:buNone/>
-            </a:pPr>
-            <a:r>
-              <a:rPr lang="en-US" sz="1100" b="1" dirty="0">
-                <a:solidFill>
-                  <a:srgbClr val="FFFFFF"/>
-                </a:solidFill>
-                <a:latin typeface="Calibri" pitchFamily="34" charset="0"/>
-                <a:ea typeface="Calibri" pitchFamily="34" charset="-122"/>
-                <a:cs typeface="Calibri" pitchFamily="34" charset="-120"/>
-              </a:rPr>
-              <a:t>4</a:t>
-            </a:r>
-            <a:endParaRPr lang="en-US" sz="1100" dirty="0"/>
-          </a:p>
-        </p:txBody>
-      </p:sp>
-      <p:sp>
-        <p:nvSpPr>
-          <p:cNvPr id="23" name="Text 21"/>
-          <p:cNvSpPr txBox="1"/>
-          <p:nvPr/>
-        </p:nvSpPr>
-        <p:spPr>
-          <a:xfrm>
-            <a:off x="1353312" y="3749040"/>
-            <a:ext cx="2424074" cy="329184"/>
-          </a:xfrm>
-          <a:prstGeom prst="rect">
-            <a:avLst/>
-          </a:prstGeom>
-          <a:noFill/>
-          <a:ln/>
-        </p:spPr>
-        <p:txBody>
-          <a:bodyPr wrap="square" lIns="0" tIns="0" rIns="0" bIns="0" rtlCol="0" anchor="ctr"/>
-          <a:lstStyle/>
-          <a:p>
-            <a:pPr indent="0" marL="0">
-              <a:buNone/>
-            </a:pPr>
-            <a:r>
-              <a:rPr lang="en-US" sz="1300" b="1" dirty="0">
+          <p:cNvPr id="38" name="Text 36"/>
+          <p:cNvSpPr txBox="1"/>
+          <p:nvPr/>
+        </p:nvSpPr>
+        <p:spPr>
+          <a:xfrm>
+            <a:off x="6662776" y="4242816"/>
+            <a:ext cx="4504792" cy="310896"/>
+          </a:xfrm>
+          <a:prstGeom prst="rect">
+            <a:avLst/>
+          </a:prstGeom>
+          <a:noFill/>
+          <a:ln/>
+        </p:spPr>
+        <p:txBody>
+          <a:bodyPr wrap="square" lIns="0" tIns="0" rIns="0" bIns="0" rtlCol="0" anchor="ctr"/>
+          <a:lstStyle/>
+          <a:p>
+            <a:pPr indent="0" marL="0">
+              <a:buNone/>
+            </a:pPr>
+            <a:r>
+              <a:rPr lang="en-US" sz="1500" b="1" dirty="0">
                 <a:solidFill>
                   <a:srgbClr val="0F1B33"/>
                 </a:solidFill>
@@ -4627,22 +5501,22 @@
                 <a:ea typeface="Calibri" pitchFamily="34" charset="-122"/>
                 <a:cs typeface="Calibri" pitchFamily="34" charset="-120"/>
               </a:rPr>
-              <a:t>verification-before-completion</a:t>
-            </a:r>
-            <a:endParaRPr lang="en-US" sz="1300" dirty="0"/>
-          </a:p>
-        </p:txBody>
-      </p:sp>
-      <p:sp>
-        <p:nvSpPr>
-          <p:cNvPr id="24" name="Text 22"/>
-          <p:cNvSpPr txBox="1"/>
-          <p:nvPr/>
-        </p:nvSpPr>
-        <p:spPr>
-          <a:xfrm>
-            <a:off x="950976" y="4224528"/>
-            <a:ext cx="2808122" cy="731520"/>
+              <a:t>직접 호출</a:t>
+            </a:r>
+            <a:endParaRPr lang="en-US" sz="1500" dirty="0"/>
+          </a:p>
+        </p:txBody>
+      </p:sp>
+      <p:sp>
+        <p:nvSpPr>
+          <p:cNvPr id="39" name="Text 37"/>
+          <p:cNvSpPr txBox="1"/>
+          <p:nvPr/>
+        </p:nvSpPr>
+        <p:spPr>
+          <a:xfrm>
+            <a:off x="6662776" y="4626864"/>
+            <a:ext cx="4504792" cy="548640"/>
           </a:xfrm>
           <a:prstGeom prst="rect">
             <a:avLst/>
@@ -4656,12 +5530,12 @@
           <a:p>
             <a:pPr indent="0" marL="0">
               <a:lnSpc>
-                <a:spcPct val="128000"/>
+                <a:spcPct val="125000"/>
               </a:lnSpc>
               <a:buNone/>
             </a:pPr>
             <a:r>
-              <a:rPr lang="en-US" sz="1200" dirty="0">
+              <a:rPr lang="en-US" sz="1250" dirty="0">
                 <a:solidFill>
                   <a:srgbClr val="5B6577"/>
                 </a:solidFill>
@@ -4669,414 +5543,15 @@
                 <a:ea typeface="Calibri" pitchFamily="34" charset="-122"/>
                 <a:cs typeface="Calibri" pitchFamily="34" charset="-120"/>
               </a:rPr>
-              <a:t>테스트를 돌려 통과한 뒤에야 완료를 선언합니다.</a:t>
-            </a:r>
-            <a:endParaRPr lang="en-US" sz="1200" dirty="0"/>
-          </a:p>
-        </p:txBody>
-      </p:sp>
-      <p:sp>
-        <p:nvSpPr>
-          <p:cNvPr id="25" name="Shape 23"/>
-          <p:cNvSpPr/>
-          <p:nvPr/>
-        </p:nvSpPr>
-        <p:spPr>
-          <a:xfrm>
-            <a:off x="4380890" y="3474720"/>
-            <a:ext cx="3429914" cy="1700784"/>
-          </a:xfrm>
-          <a:prstGeom prst="roundRect">
-            <a:avLst>
-              <a:gd name="adj" fmla="val 3763"/>
-            </a:avLst>
-          </a:prstGeom>
-          <a:solidFill>
-            <a:srgbClr val="F6F7F9"/>
-          </a:solidFill>
-          <a:ln w="12700">
-            <a:solidFill>
-              <a:srgbClr val="E5E8EE"/>
-            </a:solidFill>
-            <a:prstDash val="solid"/>
-          </a:ln>
-        </p:spPr>
-      </p:sp>
-      <p:sp>
-        <p:nvSpPr>
-          <p:cNvPr id="26" name="Shape 24"/>
-          <p:cNvSpPr/>
-          <p:nvPr/>
-        </p:nvSpPr>
-        <p:spPr>
-          <a:xfrm>
-            <a:off x="4691786" y="3767328"/>
-            <a:ext cx="292608" cy="292608"/>
-          </a:xfrm>
-          <a:prstGeom prst="roundRect">
-            <a:avLst>
-              <a:gd name="adj" fmla="val 28125"/>
-            </a:avLst>
-          </a:prstGeom>
-          <a:solidFill>
-            <a:srgbClr val="2F6BFF"/>
-          </a:solidFill>
-          <a:ln/>
-        </p:spPr>
-      </p:sp>
-      <p:sp>
-        <p:nvSpPr>
-          <p:cNvPr id="27" name="Text 25"/>
-          <p:cNvSpPr txBox="1"/>
-          <p:nvPr/>
-        </p:nvSpPr>
-        <p:spPr>
-          <a:xfrm>
-            <a:off x="4691786" y="3767328"/>
-            <a:ext cx="292608" cy="292608"/>
-          </a:xfrm>
-          <a:prstGeom prst="rect">
-            <a:avLst/>
-          </a:prstGeom>
-          <a:noFill/>
-          <a:ln/>
-        </p:spPr>
-        <p:txBody>
-          <a:bodyPr wrap="square" lIns="0" tIns="0" rIns="0" bIns="0" rtlCol="0" anchor="ctr"/>
-          <a:lstStyle/>
-          <a:p>
-            <a:pPr algn="ctr" indent="0" marL="0">
-              <a:buNone/>
-            </a:pPr>
-            <a:r>
-              <a:rPr lang="en-US" sz="1100" b="1" dirty="0">
-                <a:solidFill>
-                  <a:srgbClr val="FFFFFF"/>
-                </a:solidFill>
-                <a:latin typeface="Calibri" pitchFamily="34" charset="0"/>
-                <a:ea typeface="Calibri" pitchFamily="34" charset="-122"/>
-                <a:cs typeface="Calibri" pitchFamily="34" charset="-120"/>
-              </a:rPr>
-              <a:t>5</a:t>
-            </a:r>
-            <a:endParaRPr lang="en-US" sz="1100" dirty="0"/>
-          </a:p>
-        </p:txBody>
-      </p:sp>
-      <p:sp>
-        <p:nvSpPr>
-          <p:cNvPr id="28" name="Text 26"/>
-          <p:cNvSpPr txBox="1"/>
-          <p:nvPr/>
-        </p:nvSpPr>
-        <p:spPr>
-          <a:xfrm>
-            <a:off x="5094122" y="3749040"/>
-            <a:ext cx="2424074" cy="329184"/>
-          </a:xfrm>
-          <a:prstGeom prst="rect">
-            <a:avLst/>
-          </a:prstGeom>
-          <a:noFill/>
-          <a:ln/>
-        </p:spPr>
-        <p:txBody>
-          <a:bodyPr wrap="square" lIns="0" tIns="0" rIns="0" bIns="0" rtlCol="0" anchor="ctr"/>
-          <a:lstStyle/>
-          <a:p>
-            <a:pPr indent="0" marL="0">
-              <a:buNone/>
-            </a:pPr>
-            <a:r>
-              <a:rPr lang="en-US" sz="1300" b="1" dirty="0">
-                <a:solidFill>
-                  <a:srgbClr val="0F1B33"/>
-                </a:solidFill>
-                <a:latin typeface="Calibri" pitchFamily="34" charset="0"/>
-                <a:ea typeface="Calibri" pitchFamily="34" charset="-122"/>
-                <a:cs typeface="Calibri" pitchFamily="34" charset="-120"/>
-              </a:rPr>
-              <a:t>finishing-a-development-branch</a:t>
-            </a:r>
-            <a:endParaRPr lang="en-US" sz="1300" dirty="0"/>
-          </a:p>
-        </p:txBody>
-      </p:sp>
-      <p:sp>
-        <p:nvSpPr>
-          <p:cNvPr id="29" name="Text 27"/>
-          <p:cNvSpPr txBox="1"/>
-          <p:nvPr/>
-        </p:nvSpPr>
-        <p:spPr>
-          <a:xfrm>
-            <a:off x="4691786" y="4224528"/>
-            <a:ext cx="2808122" cy="731520"/>
-          </a:xfrm>
-          <a:prstGeom prst="rect">
-            <a:avLst/>
-          </a:prstGeom>
-          <a:noFill/>
-          <a:ln/>
-        </p:spPr>
-        <p:txBody>
-          <a:bodyPr wrap="square" lIns="0" tIns="0" rIns="0" bIns="0" rtlCol="0" anchor="ctr"/>
-          <a:lstStyle/>
-          <a:p>
-            <a:pPr indent="0" marL="0">
-              <a:lnSpc>
-                <a:spcPct val="128000"/>
-              </a:lnSpc>
-              <a:buNone/>
-            </a:pPr>
-            <a:r>
-              <a:rPr lang="en-US" sz="1200" dirty="0">
-                <a:solidFill>
-                  <a:srgbClr val="5B6577"/>
-                </a:solidFill>
-                <a:latin typeface="Calibri" pitchFamily="34" charset="0"/>
-                <a:ea typeface="Calibri" pitchFamily="34" charset="-122"/>
-                <a:cs typeface="Calibri" pitchFamily="34" charset="-120"/>
-              </a:rPr>
-              <a:t>병합 · PR · 브랜치 유지 중 하나를 골라 마무리합니다.</a:t>
-            </a:r>
-            <a:endParaRPr lang="en-US" sz="1200" dirty="0"/>
-          </a:p>
-        </p:txBody>
-      </p:sp>
-      <p:sp>
-        <p:nvSpPr>
-          <p:cNvPr id="30" name="Shape 28"/>
-          <p:cNvSpPr/>
-          <p:nvPr/>
-        </p:nvSpPr>
-        <p:spPr>
-          <a:xfrm>
-            <a:off x="8121701" y="3474720"/>
-            <a:ext cx="3429914" cy="1700784"/>
-          </a:xfrm>
-          <a:prstGeom prst="roundRect">
-            <a:avLst>
-              <a:gd name="adj" fmla="val 3763"/>
-            </a:avLst>
-          </a:prstGeom>
-          <a:solidFill>
-            <a:srgbClr val="F6F7F9"/>
-          </a:solidFill>
-          <a:ln w="12700">
-            <a:solidFill>
-              <a:srgbClr val="E5E8EE"/>
-            </a:solidFill>
-            <a:prstDash val="solid"/>
-          </a:ln>
-        </p:spPr>
-      </p:sp>
-      <p:sp>
-        <p:nvSpPr>
-          <p:cNvPr id="31" name="Shape 29"/>
-          <p:cNvSpPr/>
-          <p:nvPr/>
-        </p:nvSpPr>
-        <p:spPr>
-          <a:xfrm>
-            <a:off x="8432597" y="3767328"/>
-            <a:ext cx="292608" cy="292608"/>
-          </a:xfrm>
-          <a:prstGeom prst="roundRect">
-            <a:avLst>
-              <a:gd name="adj" fmla="val 28125"/>
-            </a:avLst>
-          </a:prstGeom>
-          <a:solidFill>
-            <a:srgbClr val="2F6BFF"/>
-          </a:solidFill>
-          <a:ln/>
-        </p:spPr>
-      </p:sp>
-      <p:sp>
-        <p:nvSpPr>
-          <p:cNvPr id="32" name="Text 30"/>
-          <p:cNvSpPr txBox="1"/>
-          <p:nvPr/>
-        </p:nvSpPr>
-        <p:spPr>
-          <a:xfrm>
-            <a:off x="8432597" y="3767328"/>
-            <a:ext cx="292608" cy="292608"/>
-          </a:xfrm>
-          <a:prstGeom prst="rect">
-            <a:avLst/>
-          </a:prstGeom>
-          <a:noFill/>
-          <a:ln/>
-        </p:spPr>
-        <p:txBody>
-          <a:bodyPr wrap="square" lIns="0" tIns="0" rIns="0" bIns="0" rtlCol="0" anchor="ctr"/>
-          <a:lstStyle/>
-          <a:p>
-            <a:pPr algn="ctr" indent="0" marL="0">
-              <a:buNone/>
-            </a:pPr>
-            <a:r>
-              <a:rPr lang="en-US" sz="1100" b="1" dirty="0">
-                <a:solidFill>
-                  <a:srgbClr val="FFFFFF"/>
-                </a:solidFill>
-                <a:latin typeface="Calibri" pitchFamily="34" charset="0"/>
-                <a:ea typeface="Calibri" pitchFamily="34" charset="-122"/>
-                <a:cs typeface="Calibri" pitchFamily="34" charset="-120"/>
-              </a:rPr>
-              <a:t>6</a:t>
-            </a:r>
-            <a:endParaRPr lang="en-US" sz="1100" dirty="0"/>
-          </a:p>
-        </p:txBody>
-      </p:sp>
-      <p:sp>
-        <p:nvSpPr>
-          <p:cNvPr id="33" name="Text 31"/>
-          <p:cNvSpPr txBox="1"/>
-          <p:nvPr/>
-        </p:nvSpPr>
-        <p:spPr>
-          <a:xfrm>
-            <a:off x="8834933" y="3749040"/>
-            <a:ext cx="2424074" cy="329184"/>
-          </a:xfrm>
-          <a:prstGeom prst="rect">
-            <a:avLst/>
-          </a:prstGeom>
-          <a:noFill/>
-          <a:ln/>
-        </p:spPr>
-        <p:txBody>
-          <a:bodyPr wrap="square" lIns="0" tIns="0" rIns="0" bIns="0" rtlCol="0" anchor="ctr"/>
-          <a:lstStyle/>
-          <a:p>
-            <a:pPr indent="0" marL="0">
-              <a:buNone/>
-            </a:pPr>
-            <a:r>
-              <a:rPr lang="en-US" sz="1300" b="1" dirty="0">
-                <a:solidFill>
-                  <a:srgbClr val="0F1B33"/>
-                </a:solidFill>
-                <a:latin typeface="Calibri" pitchFamily="34" charset="0"/>
-                <a:ea typeface="Calibri" pitchFamily="34" charset="-122"/>
-                <a:cs typeface="Calibri" pitchFamily="34" charset="-120"/>
-              </a:rPr>
-              <a:t>writing-skills</a:t>
-            </a:r>
-            <a:endParaRPr lang="en-US" sz="1300" dirty="0"/>
-          </a:p>
-        </p:txBody>
-      </p:sp>
-      <p:sp>
-        <p:nvSpPr>
-          <p:cNvPr id="34" name="Text 32"/>
-          <p:cNvSpPr txBox="1"/>
-          <p:nvPr/>
-        </p:nvSpPr>
-        <p:spPr>
-          <a:xfrm>
-            <a:off x="8432597" y="4224528"/>
-            <a:ext cx="2808122" cy="731520"/>
-          </a:xfrm>
-          <a:prstGeom prst="rect">
-            <a:avLst/>
-          </a:prstGeom>
-          <a:noFill/>
-          <a:ln/>
-        </p:spPr>
-        <p:txBody>
-          <a:bodyPr wrap="square" lIns="0" tIns="0" rIns="0" bIns="0" rtlCol="0" anchor="ctr"/>
-          <a:lstStyle/>
-          <a:p>
-            <a:pPr indent="0" marL="0">
-              <a:lnSpc>
-                <a:spcPct val="128000"/>
-              </a:lnSpc>
-              <a:buNone/>
-            </a:pPr>
-            <a:r>
-              <a:rPr lang="en-US" sz="1200" dirty="0">
-                <a:solidFill>
-                  <a:srgbClr val="5B6577"/>
-                </a:solidFill>
-                <a:latin typeface="Calibri" pitchFamily="34" charset="0"/>
-                <a:ea typeface="Calibri" pitchFamily="34" charset="-122"/>
-                <a:cs typeface="Calibri" pitchFamily="34" charset="-120"/>
-              </a:rPr>
-              <a:t>새 Skill을 직접 만들고 수정 · 검증합니다.</a:t>
-            </a:r>
-            <a:endParaRPr lang="en-US" sz="1200" dirty="0"/>
-          </a:p>
-        </p:txBody>
-      </p:sp>
-      <p:sp>
-        <p:nvSpPr>
-          <p:cNvPr id="35" name="Shape 33"/>
-          <p:cNvSpPr/>
-          <p:nvPr/>
-        </p:nvSpPr>
-        <p:spPr>
-          <a:xfrm>
-            <a:off x="640080" y="5358384"/>
-            <a:ext cx="10911535" cy="566928"/>
-          </a:xfrm>
-          <a:prstGeom prst="roundRect">
-            <a:avLst>
-              <a:gd name="adj" fmla="val 9677"/>
-            </a:avLst>
-          </a:prstGeom>
-          <a:solidFill>
-            <a:srgbClr val="EEF3FF"/>
-          </a:solidFill>
-          <a:ln/>
-        </p:spPr>
-      </p:sp>
-      <p:sp>
-        <p:nvSpPr>
-          <p:cNvPr id="36" name="Text 34"/>
-          <p:cNvSpPr txBox="1"/>
-          <p:nvPr/>
-        </p:nvSpPr>
-        <p:spPr>
-          <a:xfrm>
-            <a:off x="914400" y="5358384"/>
-            <a:ext cx="10362895" cy="566928"/>
-          </a:xfrm>
-          <a:prstGeom prst="rect">
-            <a:avLst/>
-          </a:prstGeom>
-          <a:noFill/>
-          <a:ln/>
-        </p:spPr>
-        <p:txBody>
-          <a:bodyPr wrap="square" lIns="0" tIns="0" rIns="0" bIns="0" rtlCol="0" anchor="ctr"/>
-          <a:lstStyle/>
-          <a:p>
-            <a:pPr algn="ctr" indent="0" marL="0">
-              <a:buNone/>
-            </a:pPr>
-            <a:r>
-              <a:rPr lang="en-US" sz="1350" b="1" dirty="0">
-                <a:solidFill>
-                  <a:srgbClr val="1E4FD1"/>
-                </a:solidFill>
-                <a:latin typeface="Calibri" pitchFamily="34" charset="0"/>
-                <a:ea typeface="Calibri" pitchFamily="34" charset="-122"/>
-                <a:cs typeface="Calibri" pitchFamily="34" charset="-120"/>
-              </a:rPr>
-              <a:t>공통 목적 — “된 것 같다”가 아니라 확인된 결과로 끝냅니다</a:t>
-            </a:r>
-            <a:endParaRPr lang="en-US" sz="1350" dirty="0"/>
-          </a:p>
-        </p:txBody>
-      </p:sp>
-      <p:sp>
-        <p:nvSpPr>
-          <p:cNvPr id="37" name="Text 35"/>
+              <a:t>Codex에서 $로 고르거나 “Brainstorming Skill을 써줘”라고 지정합니다.</a:t>
+            </a:r>
+            <a:endParaRPr lang="en-US" sz="1250" dirty="0"/>
+          </a:p>
+        </p:txBody>
+      </p:sp>
+      <p:sp>
+        <p:nvSpPr>
+          <p:cNvPr id="40" name="Text 38"/>
           <p:cNvSpPr txBox="1"/>
           <p:nvPr/>
         </p:nvSpPr>
@@ -5107,7 +5582,7 @@
                 <a:ea typeface="Calibri" pitchFamily="34" charset="-122"/>
                 <a:cs typeface="Calibri" pitchFamily="34" charset="-120"/>
               </a:rPr>
-              <a:t>Skill 이름은 Superpowers 6.3.0 기준입니다. · github.com/obra/superpowers/tree/main/skills</a:t>
+              <a:t>출처 · learn.chatgpt.com/ko-KR/docs/skills-and-plugins</a:t>
             </a:r>
             <a:endParaRPr lang="en-US" sz="950" dirty="0"/>
           </a:p>
@@ -10302,7 +10777,7 @@
                 <a:ea typeface="Calibri" pitchFamily="34" charset="-122"/>
                 <a:cs typeface="Calibri" pitchFamily="34" charset="-120"/>
               </a:rPr>
-              <a:t>어떻게 고르는가</a:t>
+              <a:t>어떤 Skill이 있는가</a:t>
             </a:r>
             <a:endParaRPr lang="en-US" sz="1700" dirty="0"/>
           </a:p>
@@ -10344,7 +10819,7 @@
                 <a:ea typeface="Calibri" pitchFamily="34" charset="-122"/>
                 <a:cs typeface="Calibri" pitchFamily="34" charset="-120"/>
               </a:rPr>
-              <a:t>모델이 Skill을 선택하는 방식과 14개 Skill</a:t>
+              <a:t>전체 흐름과 14개 Skill의 세 가지 종류</a:t>
             </a:r>
             <a:endParaRPr lang="en-US" sz="1250" dirty="0"/>
           </a:p>
@@ -10513,7 +10988,7 @@
                 <a:ea typeface="Calibri" pitchFamily="34" charset="-122"/>
                 <a:cs typeface="Calibri" pitchFamily="34" charset="-120"/>
               </a:rPr>
-              <a:t>설치부터 실제 결과·검증까지</a:t>
+              <a:t>Skill 호출 방법, 설치, 실제 결과·검증까지</a:t>
             </a:r>
             <a:endParaRPr lang="en-US" sz="1250" dirty="0"/>
           </a:p>
@@ -13009,7 +13484,7 @@
                 <a:ea typeface="Calibri" pitchFamily="34" charset="-122"/>
                 <a:cs typeface="Calibri" pitchFamily="34" charset="-120"/>
               </a:rPr>
-              <a:t>03 어떻게 고르는가</a:t>
+              <a:t>03 어떤 Skill이 있는가</a:t>
             </a:r>
             <a:endParaRPr lang="en-US" sz="1100" dirty="0"/>
           </a:p>
@@ -13051,7 +13526,7 @@
                 <a:ea typeface="Calibri" pitchFamily="34" charset="-122"/>
                 <a:cs typeface="Calibri" pitchFamily="34" charset="-120"/>
               </a:rPr>
-              <a:t>모델은 요청과 Skill 설명을 비교해 절차를 고릅니다</a:t>
+              <a:t>앞 단계에서 나온 것이 다음 단계의 재료가 됩니다</a:t>
             </a:r>
             <a:endParaRPr lang="en-US" sz="2400" dirty="0"/>
           </a:p>
@@ -13098,45 +13573,742 @@
       </p:sp>
       <p:sp>
         <p:nvSpPr>
-          <p:cNvPr id="5" name="Shape 3"/>
+          <p:cNvPr id="5" name="Text 3"/>
+          <p:cNvSpPr txBox="1"/>
+          <p:nvPr/>
+        </p:nvSpPr>
+        <p:spPr>
+          <a:xfrm>
+            <a:off x="640080" y="1188720"/>
+            <a:ext cx="5486400" cy="237744"/>
+          </a:xfrm>
+          <a:prstGeom prst="rect">
+            <a:avLst/>
+          </a:prstGeom>
+          <a:noFill/>
+          <a:ln/>
+        </p:spPr>
+        <p:txBody>
+          <a:bodyPr wrap="square" lIns="0" tIns="0" rIns="0" bIns="0" rtlCol="0" anchor="ctr"/>
+          <a:lstStyle/>
+          <a:p>
+            <a:pPr indent="0" marL="0">
+              <a:buNone/>
+            </a:pPr>
+            <a:r>
+              <a:rPr lang="en-US" sz="1050" b="1" spc="60" kern="0" dirty="0">
+                <a:solidFill>
+                  <a:srgbClr val="8A94A6"/>
+                </a:solidFill>
+                <a:latin typeface="Calibri" pitchFamily="34" charset="0"/>
+                <a:ea typeface="Calibri" pitchFamily="34" charset="-122"/>
+                <a:cs typeface="Calibri" pitchFamily="34" charset="-120"/>
+              </a:rPr>
+              <a:t>무엇을 하는 단계인가</a:t>
+            </a:r>
+            <a:endParaRPr lang="en-US" sz="1050" dirty="0"/>
+          </a:p>
+        </p:txBody>
+      </p:sp>
+      <p:sp>
+        <p:nvSpPr>
+          <p:cNvPr id="6" name="Shape 4"/>
           <p:cNvSpPr/>
           <p:nvPr/>
         </p:nvSpPr>
         <p:spPr>
           <a:xfrm>
-            <a:off x="640080" y="1572768"/>
-            <a:ext cx="2021373" cy="1847088"/>
+            <a:off x="640080" y="1481328"/>
+            <a:ext cx="2006742" cy="1207008"/>
           </a:xfrm>
           <a:prstGeom prst="roundRect">
             <a:avLst>
-              <a:gd name="adj" fmla="val 3465"/>
+              <a:gd name="adj" fmla="val 5303"/>
             </a:avLst>
           </a:prstGeom>
           <a:solidFill>
-            <a:srgbClr val="F6F7F9"/>
+            <a:srgbClr val="F2F4F8"/>
           </a:solidFill>
-          <a:ln w="12700">
-            <a:solidFill>
-              <a:srgbClr val="E5E8EE"/>
-            </a:solidFill>
-            <a:prstDash val="solid"/>
-          </a:ln>
-        </p:spPr>
-      </p:sp>
-      <p:sp>
-        <p:nvSpPr>
-          <p:cNvPr id="6" name="Shape 4"/>
+          <a:ln/>
+        </p:spPr>
+      </p:sp>
+      <p:sp>
+        <p:nvSpPr>
+          <p:cNvPr id="7" name="Text 5"/>
+          <p:cNvSpPr txBox="1"/>
+          <p:nvPr/>
+        </p:nvSpPr>
+        <p:spPr>
+          <a:xfrm>
+            <a:off x="859536" y="1609344"/>
+            <a:ext cx="1567830" cy="201168"/>
+          </a:xfrm>
+          <a:prstGeom prst="rect">
+            <a:avLst/>
+          </a:prstGeom>
+          <a:noFill/>
+          <a:ln/>
+        </p:spPr>
+        <p:txBody>
+          <a:bodyPr wrap="square" lIns="0" tIns="0" rIns="0" bIns="0" rtlCol="0" anchor="ctr"/>
+          <a:lstStyle/>
+          <a:p>
+            <a:pPr indent="0" marL="0">
+              <a:buNone/>
+            </a:pPr>
+            <a:r>
+              <a:rPr lang="en-US" sz="1000" b="1" dirty="0">
+                <a:solidFill>
+                  <a:srgbClr val="8A94A6"/>
+                </a:solidFill>
+                <a:latin typeface="Calibri" pitchFamily="34" charset="0"/>
+                <a:ea typeface="Calibri" pitchFamily="34" charset="-122"/>
+                <a:cs typeface="Calibri" pitchFamily="34" charset="-120"/>
+              </a:rPr>
+              <a:t>01</a:t>
+            </a:r>
+            <a:endParaRPr lang="en-US" sz="1000" dirty="0"/>
+          </a:p>
+        </p:txBody>
+      </p:sp>
+      <p:sp>
+        <p:nvSpPr>
+          <p:cNvPr id="8" name="Text 6"/>
+          <p:cNvSpPr txBox="1"/>
+          <p:nvPr/>
+        </p:nvSpPr>
+        <p:spPr>
+          <a:xfrm>
+            <a:off x="859536" y="1847088"/>
+            <a:ext cx="1567830" cy="530352"/>
+          </a:xfrm>
+          <a:prstGeom prst="rect">
+            <a:avLst/>
+          </a:prstGeom>
+          <a:noFill/>
+          <a:ln/>
+        </p:spPr>
+        <p:txBody>
+          <a:bodyPr wrap="square" lIns="0" tIns="0" rIns="0" bIns="0" rtlCol="0" anchor="ctr"/>
+          <a:lstStyle/>
+          <a:p>
+            <a:pPr indent="0" marL="0">
+              <a:lnSpc>
+                <a:spcPct val="115000"/>
+              </a:lnSpc>
+              <a:buNone/>
+            </a:pPr>
+            <a:r>
+              <a:rPr lang="en-US" sz="1300" b="1" dirty="0">
+                <a:solidFill>
+                  <a:srgbClr val="0F1B33"/>
+                </a:solidFill>
+                <a:latin typeface="Calibri" pitchFamily="34" charset="0"/>
+                <a:ea typeface="Calibri" pitchFamily="34" charset="-122"/>
+                <a:cs typeface="Calibri" pitchFamily="34" charset="-120"/>
+              </a:rPr>
+              <a:t>하고 싶은 것 말하기</a:t>
+            </a:r>
+            <a:endParaRPr lang="en-US" sz="1300" dirty="0"/>
+          </a:p>
+        </p:txBody>
+      </p:sp>
+      <p:sp>
+        <p:nvSpPr>
+          <p:cNvPr id="9" name="Text 7"/>
+          <p:cNvSpPr txBox="1"/>
+          <p:nvPr/>
+        </p:nvSpPr>
+        <p:spPr>
+          <a:xfrm>
+            <a:off x="2646822" y="1920240"/>
+            <a:ext cx="219456" cy="329184"/>
+          </a:xfrm>
+          <a:prstGeom prst="rect">
+            <a:avLst/>
+          </a:prstGeom>
+          <a:noFill/>
+          <a:ln/>
+        </p:spPr>
+        <p:txBody>
+          <a:bodyPr wrap="square" lIns="0" tIns="0" rIns="0" bIns="0" rtlCol="0" anchor="ctr"/>
+          <a:lstStyle/>
+          <a:p>
+            <a:pPr algn="ctr" indent="0" marL="0">
+              <a:buNone/>
+            </a:pPr>
+            <a:r>
+              <a:rPr lang="en-US" sz="1300" b="1" dirty="0">
+                <a:solidFill>
+                  <a:srgbClr val="8A94A6"/>
+                </a:solidFill>
+                <a:latin typeface="Calibri" pitchFamily="34" charset="0"/>
+                <a:ea typeface="Calibri" pitchFamily="34" charset="-122"/>
+                <a:cs typeface="Calibri" pitchFamily="34" charset="-120"/>
+              </a:rPr>
+              <a:t>→</a:t>
+            </a:r>
+            <a:endParaRPr lang="en-US" sz="1300" dirty="0"/>
+          </a:p>
+        </p:txBody>
+      </p:sp>
+      <p:sp>
+        <p:nvSpPr>
+          <p:cNvPr id="10" name="Shape 8"/>
           <p:cNvSpPr/>
           <p:nvPr/>
         </p:nvSpPr>
         <p:spPr>
           <a:xfrm>
-            <a:off x="914400" y="1847088"/>
-            <a:ext cx="310896" cy="310896"/>
+            <a:off x="2866278" y="1481328"/>
+            <a:ext cx="2006742" cy="1207008"/>
           </a:xfrm>
           <a:prstGeom prst="roundRect">
             <a:avLst>
-              <a:gd name="adj" fmla="val 26471"/>
+              <a:gd name="adj" fmla="val 5303"/>
+            </a:avLst>
+          </a:prstGeom>
+          <a:solidFill>
+            <a:srgbClr val="E4EBFB"/>
+          </a:solidFill>
+          <a:ln/>
+        </p:spPr>
+      </p:sp>
+      <p:sp>
+        <p:nvSpPr>
+          <p:cNvPr id="11" name="Text 9"/>
+          <p:cNvSpPr txBox="1"/>
+          <p:nvPr/>
+        </p:nvSpPr>
+        <p:spPr>
+          <a:xfrm>
+            <a:off x="3085734" y="1609344"/>
+            <a:ext cx="1567830" cy="201168"/>
+          </a:xfrm>
+          <a:prstGeom prst="rect">
+            <a:avLst/>
+          </a:prstGeom>
+          <a:noFill/>
+          <a:ln/>
+        </p:spPr>
+        <p:txBody>
+          <a:bodyPr wrap="square" lIns="0" tIns="0" rIns="0" bIns="0" rtlCol="0" anchor="ctr"/>
+          <a:lstStyle/>
+          <a:p>
+            <a:pPr indent="0" marL="0">
+              <a:buNone/>
+            </a:pPr>
+            <a:r>
+              <a:rPr lang="en-US" sz="1000" b="1" dirty="0">
+                <a:solidFill>
+                  <a:srgbClr val="8A94A6"/>
+                </a:solidFill>
+                <a:latin typeface="Calibri" pitchFamily="34" charset="0"/>
+                <a:ea typeface="Calibri" pitchFamily="34" charset="-122"/>
+                <a:cs typeface="Calibri" pitchFamily="34" charset="-120"/>
+              </a:rPr>
+              <a:t>02</a:t>
+            </a:r>
+            <a:endParaRPr lang="en-US" sz="1000" dirty="0"/>
+          </a:p>
+        </p:txBody>
+      </p:sp>
+      <p:sp>
+        <p:nvSpPr>
+          <p:cNvPr id="12" name="Text 10"/>
+          <p:cNvSpPr txBox="1"/>
+          <p:nvPr/>
+        </p:nvSpPr>
+        <p:spPr>
+          <a:xfrm>
+            <a:off x="3085734" y="1847088"/>
+            <a:ext cx="1567830" cy="530352"/>
+          </a:xfrm>
+          <a:prstGeom prst="rect">
+            <a:avLst/>
+          </a:prstGeom>
+          <a:noFill/>
+          <a:ln/>
+        </p:spPr>
+        <p:txBody>
+          <a:bodyPr wrap="square" lIns="0" tIns="0" rIns="0" bIns="0" rtlCol="0" anchor="ctr"/>
+          <a:lstStyle/>
+          <a:p>
+            <a:pPr indent="0" marL="0">
+              <a:lnSpc>
+                <a:spcPct val="115000"/>
+              </a:lnSpc>
+              <a:buNone/>
+            </a:pPr>
+            <a:r>
+              <a:rPr lang="en-US" sz="1300" b="1" dirty="0">
+                <a:solidFill>
+                  <a:srgbClr val="0F1B33"/>
+                </a:solidFill>
+                <a:latin typeface="Calibri" pitchFamily="34" charset="0"/>
+                <a:ea typeface="Calibri" pitchFamily="34" charset="-122"/>
+                <a:cs typeface="Calibri" pitchFamily="34" charset="-120"/>
+              </a:rPr>
+              <a:t>질문으로 조건 좁히기</a:t>
+            </a:r>
+            <a:endParaRPr lang="en-US" sz="1300" dirty="0"/>
+          </a:p>
+        </p:txBody>
+      </p:sp>
+      <p:sp>
+        <p:nvSpPr>
+          <p:cNvPr id="13" name="Text 11"/>
+          <p:cNvSpPr txBox="1"/>
+          <p:nvPr/>
+        </p:nvSpPr>
+        <p:spPr>
+          <a:xfrm>
+            <a:off x="3085734" y="2395728"/>
+            <a:ext cx="1567830" cy="219456"/>
+          </a:xfrm>
+          <a:prstGeom prst="rect">
+            <a:avLst/>
+          </a:prstGeom>
+          <a:noFill/>
+          <a:ln/>
+        </p:spPr>
+        <p:txBody>
+          <a:bodyPr wrap="square" lIns="0" tIns="0" rIns="0" bIns="0" rtlCol="0" anchor="ctr"/>
+          <a:lstStyle/>
+          <a:p>
+            <a:pPr indent="0" marL="0">
+              <a:buNone/>
+            </a:pPr>
+            <a:r>
+              <a:rPr lang="en-US" sz="950" dirty="0">
+                <a:solidFill>
+                  <a:srgbClr val="5B6577"/>
+                </a:solidFill>
+                <a:latin typeface="Calibri" pitchFamily="34" charset="0"/>
+                <a:ea typeface="Calibri" pitchFamily="34" charset="-122"/>
+                <a:cs typeface="Calibri" pitchFamily="34" charset="-120"/>
+              </a:rPr>
+              <a:t>Brainstorming</a:t>
+            </a:r>
+            <a:endParaRPr lang="en-US" sz="950" dirty="0"/>
+          </a:p>
+        </p:txBody>
+      </p:sp>
+      <p:sp>
+        <p:nvSpPr>
+          <p:cNvPr id="14" name="Text 12"/>
+          <p:cNvSpPr txBox="1"/>
+          <p:nvPr/>
+        </p:nvSpPr>
+        <p:spPr>
+          <a:xfrm>
+            <a:off x="4873020" y="1920240"/>
+            <a:ext cx="219456" cy="329184"/>
+          </a:xfrm>
+          <a:prstGeom prst="rect">
+            <a:avLst/>
+          </a:prstGeom>
+          <a:noFill/>
+          <a:ln/>
+        </p:spPr>
+        <p:txBody>
+          <a:bodyPr wrap="square" lIns="0" tIns="0" rIns="0" bIns="0" rtlCol="0" anchor="ctr"/>
+          <a:lstStyle/>
+          <a:p>
+            <a:pPr algn="ctr" indent="0" marL="0">
+              <a:buNone/>
+            </a:pPr>
+            <a:r>
+              <a:rPr lang="en-US" sz="1300" b="1" dirty="0">
+                <a:solidFill>
+                  <a:srgbClr val="8A94A6"/>
+                </a:solidFill>
+                <a:latin typeface="Calibri" pitchFamily="34" charset="0"/>
+                <a:ea typeface="Calibri" pitchFamily="34" charset="-122"/>
+                <a:cs typeface="Calibri" pitchFamily="34" charset="-120"/>
+              </a:rPr>
+              <a:t>→</a:t>
+            </a:r>
+            <a:endParaRPr lang="en-US" sz="1300" dirty="0"/>
+          </a:p>
+        </p:txBody>
+      </p:sp>
+      <p:sp>
+        <p:nvSpPr>
+          <p:cNvPr id="15" name="Shape 13"/>
+          <p:cNvSpPr/>
+          <p:nvPr/>
+        </p:nvSpPr>
+        <p:spPr>
+          <a:xfrm>
+            <a:off x="5092476" y="1481328"/>
+            <a:ext cx="2006742" cy="1207008"/>
+          </a:xfrm>
+          <a:prstGeom prst="roundRect">
+            <a:avLst>
+              <a:gd name="adj" fmla="val 5303"/>
+            </a:avLst>
+          </a:prstGeom>
+          <a:solidFill>
+            <a:srgbClr val="CBD9FA"/>
+          </a:solidFill>
+          <a:ln/>
+        </p:spPr>
+      </p:sp>
+      <p:sp>
+        <p:nvSpPr>
+          <p:cNvPr id="16" name="Text 14"/>
+          <p:cNvSpPr txBox="1"/>
+          <p:nvPr/>
+        </p:nvSpPr>
+        <p:spPr>
+          <a:xfrm>
+            <a:off x="5311932" y="1609344"/>
+            <a:ext cx="1567830" cy="201168"/>
+          </a:xfrm>
+          <a:prstGeom prst="rect">
+            <a:avLst/>
+          </a:prstGeom>
+          <a:noFill/>
+          <a:ln/>
+        </p:spPr>
+        <p:txBody>
+          <a:bodyPr wrap="square" lIns="0" tIns="0" rIns="0" bIns="0" rtlCol="0" anchor="ctr"/>
+          <a:lstStyle/>
+          <a:p>
+            <a:pPr indent="0" marL="0">
+              <a:buNone/>
+            </a:pPr>
+            <a:r>
+              <a:rPr lang="en-US" sz="1000" b="1" dirty="0">
+                <a:solidFill>
+                  <a:srgbClr val="8A94A6"/>
+                </a:solidFill>
+                <a:latin typeface="Calibri" pitchFamily="34" charset="0"/>
+                <a:ea typeface="Calibri" pitchFamily="34" charset="-122"/>
+                <a:cs typeface="Calibri" pitchFamily="34" charset="-120"/>
+              </a:rPr>
+              <a:t>03</a:t>
+            </a:r>
+            <a:endParaRPr lang="en-US" sz="1000" dirty="0"/>
+          </a:p>
+        </p:txBody>
+      </p:sp>
+      <p:sp>
+        <p:nvSpPr>
+          <p:cNvPr id="17" name="Text 15"/>
+          <p:cNvSpPr txBox="1"/>
+          <p:nvPr/>
+        </p:nvSpPr>
+        <p:spPr>
+          <a:xfrm>
+            <a:off x="5311932" y="1847088"/>
+            <a:ext cx="1567830" cy="530352"/>
+          </a:xfrm>
+          <a:prstGeom prst="rect">
+            <a:avLst/>
+          </a:prstGeom>
+          <a:noFill/>
+          <a:ln/>
+        </p:spPr>
+        <p:txBody>
+          <a:bodyPr wrap="square" lIns="0" tIns="0" rIns="0" bIns="0" rtlCol="0" anchor="ctr"/>
+          <a:lstStyle/>
+          <a:p>
+            <a:pPr indent="0" marL="0">
+              <a:lnSpc>
+                <a:spcPct val="115000"/>
+              </a:lnSpc>
+              <a:buNone/>
+            </a:pPr>
+            <a:r>
+              <a:rPr lang="en-US" sz="1300" b="1" dirty="0">
+                <a:solidFill>
+                  <a:srgbClr val="0F1B33"/>
+                </a:solidFill>
+                <a:latin typeface="Calibri" pitchFamily="34" charset="0"/>
+                <a:ea typeface="Calibri" pitchFamily="34" charset="-122"/>
+                <a:cs typeface="Calibri" pitchFamily="34" charset="-120"/>
+              </a:rPr>
+              <a:t>할 일을 잘게 쪼개기</a:t>
+            </a:r>
+            <a:endParaRPr lang="en-US" sz="1300" dirty="0"/>
+          </a:p>
+        </p:txBody>
+      </p:sp>
+      <p:sp>
+        <p:nvSpPr>
+          <p:cNvPr id="18" name="Text 16"/>
+          <p:cNvSpPr txBox="1"/>
+          <p:nvPr/>
+        </p:nvSpPr>
+        <p:spPr>
+          <a:xfrm>
+            <a:off x="5311932" y="2395728"/>
+            <a:ext cx="1567830" cy="219456"/>
+          </a:xfrm>
+          <a:prstGeom prst="rect">
+            <a:avLst/>
+          </a:prstGeom>
+          <a:noFill/>
+          <a:ln/>
+        </p:spPr>
+        <p:txBody>
+          <a:bodyPr wrap="square" lIns="0" tIns="0" rIns="0" bIns="0" rtlCol="0" anchor="ctr"/>
+          <a:lstStyle/>
+          <a:p>
+            <a:pPr indent="0" marL="0">
+              <a:buNone/>
+            </a:pPr>
+            <a:r>
+              <a:rPr lang="en-US" sz="950" dirty="0">
+                <a:solidFill>
+                  <a:srgbClr val="5B6577"/>
+                </a:solidFill>
+                <a:latin typeface="Calibri" pitchFamily="34" charset="0"/>
+                <a:ea typeface="Calibri" pitchFamily="34" charset="-122"/>
+                <a:cs typeface="Calibri" pitchFamily="34" charset="-120"/>
+              </a:rPr>
+              <a:t>Writing Plans</a:t>
+            </a:r>
+            <a:endParaRPr lang="en-US" sz="950" dirty="0"/>
+          </a:p>
+        </p:txBody>
+      </p:sp>
+      <p:sp>
+        <p:nvSpPr>
+          <p:cNvPr id="19" name="Text 17"/>
+          <p:cNvSpPr txBox="1"/>
+          <p:nvPr/>
+        </p:nvSpPr>
+        <p:spPr>
+          <a:xfrm>
+            <a:off x="7099219" y="1920240"/>
+            <a:ext cx="219456" cy="329184"/>
+          </a:xfrm>
+          <a:prstGeom prst="rect">
+            <a:avLst/>
+          </a:prstGeom>
+          <a:noFill/>
+          <a:ln/>
+        </p:spPr>
+        <p:txBody>
+          <a:bodyPr wrap="square" lIns="0" tIns="0" rIns="0" bIns="0" rtlCol="0" anchor="ctr"/>
+          <a:lstStyle/>
+          <a:p>
+            <a:pPr algn="ctr" indent="0" marL="0">
+              <a:buNone/>
+            </a:pPr>
+            <a:r>
+              <a:rPr lang="en-US" sz="1300" b="1" dirty="0">
+                <a:solidFill>
+                  <a:srgbClr val="8A94A6"/>
+                </a:solidFill>
+                <a:latin typeface="Calibri" pitchFamily="34" charset="0"/>
+                <a:ea typeface="Calibri" pitchFamily="34" charset="-122"/>
+                <a:cs typeface="Calibri" pitchFamily="34" charset="-120"/>
+              </a:rPr>
+              <a:t>→</a:t>
+            </a:r>
+            <a:endParaRPr lang="en-US" sz="1300" dirty="0"/>
+          </a:p>
+        </p:txBody>
+      </p:sp>
+      <p:sp>
+        <p:nvSpPr>
+          <p:cNvPr id="20" name="Shape 18"/>
+          <p:cNvSpPr/>
+          <p:nvPr/>
+        </p:nvSpPr>
+        <p:spPr>
+          <a:xfrm>
+            <a:off x="7318675" y="1481328"/>
+            <a:ext cx="2006742" cy="1207008"/>
+          </a:xfrm>
+          <a:prstGeom prst="roundRect">
+            <a:avLst>
+              <a:gd name="adj" fmla="val 5303"/>
+            </a:avLst>
+          </a:prstGeom>
+          <a:solidFill>
+            <a:srgbClr val="5B8BFF"/>
+          </a:solidFill>
+          <a:ln/>
+        </p:spPr>
+      </p:sp>
+      <p:sp>
+        <p:nvSpPr>
+          <p:cNvPr id="21" name="Text 19"/>
+          <p:cNvSpPr txBox="1"/>
+          <p:nvPr/>
+        </p:nvSpPr>
+        <p:spPr>
+          <a:xfrm>
+            <a:off x="7538131" y="1609344"/>
+            <a:ext cx="1567830" cy="201168"/>
+          </a:xfrm>
+          <a:prstGeom prst="rect">
+            <a:avLst/>
+          </a:prstGeom>
+          <a:noFill/>
+          <a:ln/>
+        </p:spPr>
+        <p:txBody>
+          <a:bodyPr wrap="square" lIns="0" tIns="0" rIns="0" bIns="0" rtlCol="0" anchor="ctr"/>
+          <a:lstStyle/>
+          <a:p>
+            <a:pPr indent="0" marL="0">
+              <a:buNone/>
+            </a:pPr>
+            <a:r>
+              <a:rPr lang="en-US" sz="1000" b="1" dirty="0">
+                <a:solidFill>
+                  <a:srgbClr val="9FB8FF"/>
+                </a:solidFill>
+                <a:latin typeface="Calibri" pitchFamily="34" charset="0"/>
+                <a:ea typeface="Calibri" pitchFamily="34" charset="-122"/>
+                <a:cs typeface="Calibri" pitchFamily="34" charset="-120"/>
+              </a:rPr>
+              <a:t>04</a:t>
+            </a:r>
+            <a:endParaRPr lang="en-US" sz="1000" dirty="0"/>
+          </a:p>
+        </p:txBody>
+      </p:sp>
+      <p:sp>
+        <p:nvSpPr>
+          <p:cNvPr id="22" name="Text 20"/>
+          <p:cNvSpPr txBox="1"/>
+          <p:nvPr/>
+        </p:nvSpPr>
+        <p:spPr>
+          <a:xfrm>
+            <a:off x="7538131" y="1847088"/>
+            <a:ext cx="1567830" cy="530352"/>
+          </a:xfrm>
+          <a:prstGeom prst="rect">
+            <a:avLst/>
+          </a:prstGeom>
+          <a:noFill/>
+          <a:ln/>
+        </p:spPr>
+        <p:txBody>
+          <a:bodyPr wrap="square" lIns="0" tIns="0" rIns="0" bIns="0" rtlCol="0" anchor="ctr"/>
+          <a:lstStyle/>
+          <a:p>
+            <a:pPr indent="0" marL="0">
+              <a:lnSpc>
+                <a:spcPct val="115000"/>
+              </a:lnSpc>
+              <a:buNone/>
+            </a:pPr>
+            <a:r>
+              <a:rPr lang="en-US" sz="1300" b="1" dirty="0">
+                <a:solidFill>
+                  <a:srgbClr val="FFFFFF"/>
+                </a:solidFill>
+                <a:latin typeface="Calibri" pitchFamily="34" charset="0"/>
+                <a:ea typeface="Calibri" pitchFamily="34" charset="-122"/>
+                <a:cs typeface="Calibri" pitchFamily="34" charset="-120"/>
+              </a:rPr>
+              <a:t>테스트 먼저, 구현 나중</a:t>
+            </a:r>
+            <a:endParaRPr lang="en-US" sz="1300" dirty="0"/>
+          </a:p>
+        </p:txBody>
+      </p:sp>
+      <p:sp>
+        <p:nvSpPr>
+          <p:cNvPr id="23" name="Text 21"/>
+          <p:cNvSpPr txBox="1"/>
+          <p:nvPr/>
+        </p:nvSpPr>
+        <p:spPr>
+          <a:xfrm>
+            <a:off x="7538131" y="2395728"/>
+            <a:ext cx="1567830" cy="219456"/>
+          </a:xfrm>
+          <a:prstGeom prst="rect">
+            <a:avLst/>
+          </a:prstGeom>
+          <a:noFill/>
+          <a:ln/>
+        </p:spPr>
+        <p:txBody>
+          <a:bodyPr wrap="square" lIns="0" tIns="0" rIns="0" bIns="0" rtlCol="0" anchor="ctr"/>
+          <a:lstStyle/>
+          <a:p>
+            <a:pPr indent="0" marL="0">
+              <a:buNone/>
+            </a:pPr>
+            <a:r>
+              <a:rPr lang="en-US" sz="950" dirty="0">
+                <a:solidFill>
+                  <a:srgbClr val="DCE7FF"/>
+                </a:solidFill>
+                <a:latin typeface="Calibri" pitchFamily="34" charset="0"/>
+                <a:ea typeface="Calibri" pitchFamily="34" charset="-122"/>
+                <a:cs typeface="Calibri" pitchFamily="34" charset="-120"/>
+              </a:rPr>
+              <a:t>TDD</a:t>
+            </a:r>
+            <a:endParaRPr lang="en-US" sz="950" dirty="0"/>
+          </a:p>
+        </p:txBody>
+      </p:sp>
+      <p:sp>
+        <p:nvSpPr>
+          <p:cNvPr id="24" name="Text 22"/>
+          <p:cNvSpPr txBox="1"/>
+          <p:nvPr/>
+        </p:nvSpPr>
+        <p:spPr>
+          <a:xfrm>
+            <a:off x="9325417" y="1920240"/>
+            <a:ext cx="219456" cy="329184"/>
+          </a:xfrm>
+          <a:prstGeom prst="rect">
+            <a:avLst/>
+          </a:prstGeom>
+          <a:noFill/>
+          <a:ln/>
+        </p:spPr>
+        <p:txBody>
+          <a:bodyPr wrap="square" lIns="0" tIns="0" rIns="0" bIns="0" rtlCol="0" anchor="ctr"/>
+          <a:lstStyle/>
+          <a:p>
+            <a:pPr algn="ctr" indent="0" marL="0">
+              <a:buNone/>
+            </a:pPr>
+            <a:r>
+              <a:rPr lang="en-US" sz="1300" b="1" dirty="0">
+                <a:solidFill>
+                  <a:srgbClr val="8A94A6"/>
+                </a:solidFill>
+                <a:latin typeface="Calibri" pitchFamily="34" charset="0"/>
+                <a:ea typeface="Calibri" pitchFamily="34" charset="-122"/>
+                <a:cs typeface="Calibri" pitchFamily="34" charset="-120"/>
+              </a:rPr>
+              <a:t>→</a:t>
+            </a:r>
+            <a:endParaRPr lang="en-US" sz="1300" dirty="0"/>
+          </a:p>
+        </p:txBody>
+      </p:sp>
+      <p:sp>
+        <p:nvSpPr>
+          <p:cNvPr id="25" name="Shape 23"/>
+          <p:cNvSpPr/>
+          <p:nvPr/>
+        </p:nvSpPr>
+        <p:spPr>
+          <a:xfrm>
+            <a:off x="9544873" y="1481328"/>
+            <a:ext cx="2006742" cy="1207008"/>
+          </a:xfrm>
+          <a:prstGeom prst="roundRect">
+            <a:avLst>
+              <a:gd name="adj" fmla="val 5303"/>
             </a:avLst>
           </a:prstGeom>
           <a:solidFill>
@@ -13147,14 +14319,173 @@
       </p:sp>
       <p:sp>
         <p:nvSpPr>
-          <p:cNvPr id="7" name="Text 5"/>
-          <p:cNvSpPr txBox="1"/>
-          <p:nvPr/>
-        </p:nvSpPr>
-        <p:spPr>
-          <a:xfrm>
-            <a:off x="914400" y="1847088"/>
-            <a:ext cx="310896" cy="310896"/>
+          <p:cNvPr id="26" name="Text 24"/>
+          <p:cNvSpPr txBox="1"/>
+          <p:nvPr/>
+        </p:nvSpPr>
+        <p:spPr>
+          <a:xfrm>
+            <a:off x="9764329" y="1609344"/>
+            <a:ext cx="1567830" cy="201168"/>
+          </a:xfrm>
+          <a:prstGeom prst="rect">
+            <a:avLst/>
+          </a:prstGeom>
+          <a:noFill/>
+          <a:ln/>
+        </p:spPr>
+        <p:txBody>
+          <a:bodyPr wrap="square" lIns="0" tIns="0" rIns="0" bIns="0" rtlCol="0" anchor="ctr"/>
+          <a:lstStyle/>
+          <a:p>
+            <a:pPr indent="0" marL="0">
+              <a:buNone/>
+            </a:pPr>
+            <a:r>
+              <a:rPr lang="en-US" sz="1000" b="1" dirty="0">
+                <a:solidFill>
+                  <a:srgbClr val="9FB8FF"/>
+                </a:solidFill>
+                <a:latin typeface="Calibri" pitchFamily="34" charset="0"/>
+                <a:ea typeface="Calibri" pitchFamily="34" charset="-122"/>
+                <a:cs typeface="Calibri" pitchFamily="34" charset="-120"/>
+              </a:rPr>
+              <a:t>05</a:t>
+            </a:r>
+            <a:endParaRPr lang="en-US" sz="1000" dirty="0"/>
+          </a:p>
+        </p:txBody>
+      </p:sp>
+      <p:sp>
+        <p:nvSpPr>
+          <p:cNvPr id="27" name="Text 25"/>
+          <p:cNvSpPr txBox="1"/>
+          <p:nvPr/>
+        </p:nvSpPr>
+        <p:spPr>
+          <a:xfrm>
+            <a:off x="9764329" y="1847088"/>
+            <a:ext cx="1567830" cy="530352"/>
+          </a:xfrm>
+          <a:prstGeom prst="rect">
+            <a:avLst/>
+          </a:prstGeom>
+          <a:noFill/>
+          <a:ln/>
+        </p:spPr>
+        <p:txBody>
+          <a:bodyPr wrap="square" lIns="0" tIns="0" rIns="0" bIns="0" rtlCol="0" anchor="ctr"/>
+          <a:lstStyle/>
+          <a:p>
+            <a:pPr indent="0" marL="0">
+              <a:lnSpc>
+                <a:spcPct val="115000"/>
+              </a:lnSpc>
+              <a:buNone/>
+            </a:pPr>
+            <a:r>
+              <a:rPr lang="en-US" sz="1300" b="1" dirty="0">
+                <a:solidFill>
+                  <a:srgbClr val="FFFFFF"/>
+                </a:solidFill>
+                <a:latin typeface="Calibri" pitchFamily="34" charset="0"/>
+                <a:ea typeface="Calibri" pitchFamily="34" charset="-122"/>
+                <a:cs typeface="Calibri" pitchFamily="34" charset="-120"/>
+              </a:rPr>
+              <a:t>증거로 확인하고 끝내기</a:t>
+            </a:r>
+            <a:endParaRPr lang="en-US" sz="1300" dirty="0"/>
+          </a:p>
+        </p:txBody>
+      </p:sp>
+      <p:sp>
+        <p:nvSpPr>
+          <p:cNvPr id="28" name="Text 26"/>
+          <p:cNvSpPr txBox="1"/>
+          <p:nvPr/>
+        </p:nvSpPr>
+        <p:spPr>
+          <a:xfrm>
+            <a:off x="9764329" y="2395728"/>
+            <a:ext cx="1567830" cy="219456"/>
+          </a:xfrm>
+          <a:prstGeom prst="rect">
+            <a:avLst/>
+          </a:prstGeom>
+          <a:noFill/>
+          <a:ln/>
+        </p:spPr>
+        <p:txBody>
+          <a:bodyPr wrap="square" lIns="0" tIns="0" rIns="0" bIns="0" rtlCol="0" anchor="ctr"/>
+          <a:lstStyle/>
+          <a:p>
+            <a:pPr indent="0" marL="0">
+              <a:buNone/>
+            </a:pPr>
+            <a:r>
+              <a:rPr lang="en-US" sz="950" dirty="0">
+                <a:solidFill>
+                  <a:srgbClr val="8FA2BC"/>
+                </a:solidFill>
+                <a:latin typeface="Calibri" pitchFamily="34" charset="0"/>
+                <a:ea typeface="Calibri" pitchFamily="34" charset="-122"/>
+                <a:cs typeface="Calibri" pitchFamily="34" charset="-120"/>
+              </a:rPr>
+              <a:t>검증 · 완료</a:t>
+            </a:r>
+            <a:endParaRPr lang="en-US" sz="950" dirty="0"/>
+          </a:p>
+        </p:txBody>
+      </p:sp>
+      <p:sp>
+        <p:nvSpPr>
+          <p:cNvPr id="29" name="Text 27"/>
+          <p:cNvSpPr txBox="1"/>
+          <p:nvPr/>
+        </p:nvSpPr>
+        <p:spPr>
+          <a:xfrm>
+            <a:off x="640080" y="2926080"/>
+            <a:ext cx="5486400" cy="237744"/>
+          </a:xfrm>
+          <a:prstGeom prst="rect">
+            <a:avLst/>
+          </a:prstGeom>
+          <a:noFill/>
+          <a:ln/>
+        </p:spPr>
+        <p:txBody>
+          <a:bodyPr wrap="square" lIns="0" tIns="0" rIns="0" bIns="0" rtlCol="0" anchor="ctr"/>
+          <a:lstStyle/>
+          <a:p>
+            <a:pPr indent="0" marL="0">
+              <a:buNone/>
+            </a:pPr>
+            <a:r>
+              <a:rPr lang="en-US" sz="1050" b="1" spc="60" kern="0" dirty="0">
+                <a:solidFill>
+                  <a:srgbClr val="2F6BFF"/>
+                </a:solidFill>
+                <a:latin typeface="Calibri" pitchFamily="34" charset="0"/>
+                <a:ea typeface="Calibri" pitchFamily="34" charset="-122"/>
+                <a:cs typeface="Calibri" pitchFamily="34" charset="-120"/>
+              </a:rPr>
+              <a:t>그래서 무엇이 나오는가</a:t>
+            </a:r>
+            <a:endParaRPr lang="en-US" sz="1050" dirty="0"/>
+          </a:p>
+        </p:txBody>
+      </p:sp>
+      <p:sp>
+        <p:nvSpPr>
+          <p:cNvPr id="30" name="Text 28"/>
+          <p:cNvSpPr txBox="1"/>
+          <p:nvPr/>
+        </p:nvSpPr>
+        <p:spPr>
+          <a:xfrm>
+            <a:off x="640080" y="2706624"/>
+            <a:ext cx="2006742" cy="219456"/>
           </a:xfrm>
           <a:prstGeom prst="rect">
             <a:avLst/>
@@ -13170,158 +14501,38 @@
               <a:buNone/>
             </a:pPr>
             <a:r>
-              <a:rPr lang="en-US" sz="1200" b="1" dirty="0">
-                <a:solidFill>
-                  <a:srgbClr val="FFFFFF"/>
-                </a:solidFill>
-                <a:latin typeface="Calibri" pitchFamily="34" charset="0"/>
-                <a:ea typeface="Calibri" pitchFamily="34" charset="-122"/>
-                <a:cs typeface="Calibri" pitchFamily="34" charset="-120"/>
-              </a:rPr>
-              <a:t>1</a:t>
-            </a:r>
-            <a:endParaRPr lang="en-US" sz="1200" dirty="0"/>
-          </a:p>
-        </p:txBody>
-      </p:sp>
-      <p:sp>
-        <p:nvSpPr>
-          <p:cNvPr id="8" name="Text 6"/>
-          <p:cNvSpPr txBox="1"/>
-          <p:nvPr/>
-        </p:nvSpPr>
-        <p:spPr>
-          <a:xfrm>
-            <a:off x="877824" y="2340864"/>
-            <a:ext cx="1545885" cy="329184"/>
-          </a:xfrm>
-          <a:prstGeom prst="rect">
-            <a:avLst/>
-          </a:prstGeom>
-          <a:noFill/>
-          <a:ln/>
-        </p:spPr>
-        <p:txBody>
-          <a:bodyPr wrap="square" lIns="0" tIns="0" rIns="0" bIns="0" rtlCol="0" anchor="ctr"/>
-          <a:lstStyle/>
-          <a:p>
-            <a:pPr indent="0" marL="0">
-              <a:buNone/>
-            </a:pPr>
-            <a:r>
-              <a:rPr lang="en-US" sz="1350" b="1" dirty="0">
-                <a:solidFill>
-                  <a:srgbClr val="0F1B33"/>
-                </a:solidFill>
-                <a:latin typeface="Calibri" pitchFamily="34" charset="0"/>
-                <a:ea typeface="Calibri" pitchFamily="34" charset="-122"/>
-                <a:cs typeface="Calibri" pitchFamily="34" charset="-120"/>
-              </a:rPr>
-              <a:t>사용자 요청</a:t>
-            </a:r>
-            <a:endParaRPr lang="en-US" sz="1350" dirty="0"/>
-          </a:p>
-        </p:txBody>
-      </p:sp>
-      <p:sp>
-        <p:nvSpPr>
-          <p:cNvPr id="9" name="Text 7"/>
-          <p:cNvSpPr txBox="1"/>
-          <p:nvPr/>
-        </p:nvSpPr>
-        <p:spPr>
-          <a:xfrm>
-            <a:off x="877824" y="2706624"/>
-            <a:ext cx="1545885" cy="512064"/>
-          </a:xfrm>
-          <a:prstGeom prst="rect">
-            <a:avLst/>
-          </a:prstGeom>
-          <a:noFill/>
-          <a:ln/>
-        </p:spPr>
-        <p:txBody>
-          <a:bodyPr wrap="square" lIns="0" tIns="0" rIns="0" bIns="0" rtlCol="0" anchor="ctr"/>
-          <a:lstStyle/>
-          <a:p>
-            <a:pPr indent="0" marL="0">
-              <a:lnSpc>
-                <a:spcPct val="120000"/>
-              </a:lnSpc>
-              <a:buNone/>
-            </a:pPr>
-            <a:r>
-              <a:rPr lang="en-US" sz="1100" dirty="0">
-                <a:solidFill>
-                  <a:srgbClr val="5B6577"/>
-                </a:solidFill>
-                <a:latin typeface="Calibri" pitchFamily="34" charset="0"/>
-                <a:ea typeface="Calibri" pitchFamily="34" charset="-122"/>
-                <a:cs typeface="Calibri" pitchFamily="34" charset="-120"/>
-              </a:rPr>
-              <a:t>“오류 원인을 찾아줘”</a:t>
-            </a:r>
-            <a:endParaRPr lang="en-US" sz="1100" dirty="0"/>
-          </a:p>
-        </p:txBody>
-      </p:sp>
-      <p:sp>
-        <p:nvSpPr>
-          <p:cNvPr id="10" name="Text 8"/>
-          <p:cNvSpPr txBox="1"/>
-          <p:nvPr/>
-        </p:nvSpPr>
-        <p:spPr>
-          <a:xfrm>
-            <a:off x="2661453" y="2304288"/>
-            <a:ext cx="201168" cy="365760"/>
-          </a:xfrm>
-          <a:prstGeom prst="rect">
-            <a:avLst/>
-          </a:prstGeom>
-          <a:noFill/>
-          <a:ln/>
-        </p:spPr>
-        <p:txBody>
-          <a:bodyPr wrap="square" lIns="0" tIns="0" rIns="0" bIns="0" rtlCol="0" anchor="ctr"/>
-          <a:lstStyle/>
-          <a:p>
-            <a:pPr algn="ctr" indent="0" marL="0">
-              <a:buNone/>
-            </a:pPr>
-            <a:r>
-              <a:rPr lang="en-US" sz="2200" b="1" dirty="0">
-                <a:solidFill>
-                  <a:srgbClr val="8A94A6"/>
-                </a:solidFill>
-                <a:latin typeface="Calibri" pitchFamily="34" charset="0"/>
-                <a:ea typeface="Calibri" pitchFamily="34" charset="-122"/>
-                <a:cs typeface="Calibri" pitchFamily="34" charset="-120"/>
-              </a:rPr>
-              <a:t>›</a:t>
-            </a:r>
-            <a:endParaRPr lang="en-US" sz="2200" dirty="0"/>
-          </a:p>
-        </p:txBody>
-      </p:sp>
-      <p:sp>
-        <p:nvSpPr>
-          <p:cNvPr id="11" name="Shape 9"/>
+              <a:rPr lang="en-US" sz="1300" b="1" dirty="0">
+                <a:solidFill>
+                  <a:srgbClr val="D3E0FF"/>
+                </a:solidFill>
+                <a:latin typeface="Calibri" pitchFamily="34" charset="0"/>
+                <a:ea typeface="Calibri" pitchFamily="34" charset="-122"/>
+                <a:cs typeface="Calibri" pitchFamily="34" charset="-120"/>
+              </a:rPr>
+              <a:t>↓</a:t>
+            </a:r>
+            <a:endParaRPr lang="en-US" sz="1300" dirty="0"/>
+          </a:p>
+        </p:txBody>
+      </p:sp>
+      <p:sp>
+        <p:nvSpPr>
+          <p:cNvPr id="31" name="Shape 29"/>
           <p:cNvSpPr/>
           <p:nvPr/>
         </p:nvSpPr>
         <p:spPr>
           <a:xfrm>
-            <a:off x="2862621" y="1572768"/>
-            <a:ext cx="2021373" cy="1847088"/>
+            <a:off x="640080" y="3236976"/>
+            <a:ext cx="2006742" cy="1188720"/>
           </a:xfrm>
           <a:prstGeom prst="roundRect">
             <a:avLst>
-              <a:gd name="adj" fmla="val 3465"/>
+              <a:gd name="adj" fmla="val 5385"/>
             </a:avLst>
           </a:prstGeom>
           <a:solidFill>
-            <a:srgbClr val="EEF3FF"/>
+            <a:srgbClr val="FFFFFF"/>
           </a:solidFill>
           <a:ln w="12700">
             <a:solidFill>
@@ -13333,411 +14544,123 @@
       </p:sp>
       <p:sp>
         <p:nvSpPr>
-          <p:cNvPr id="12" name="Shape 10"/>
+          <p:cNvPr id="32" name="Text 30"/>
+          <p:cNvSpPr txBox="1"/>
+          <p:nvPr/>
+        </p:nvSpPr>
+        <p:spPr>
+          <a:xfrm>
+            <a:off x="859536" y="3419856"/>
+            <a:ext cx="1567830" cy="822960"/>
+          </a:xfrm>
+          <a:prstGeom prst="rect">
+            <a:avLst/>
+          </a:prstGeom>
+          <a:noFill/>
+          <a:ln/>
+        </p:spPr>
+        <p:txBody>
+          <a:bodyPr wrap="square" lIns="0" tIns="0" rIns="0" bIns="0" rtlCol="0" anchor="ctr"/>
+          <a:lstStyle/>
+          <a:p>
+            <a:pPr indent="0" marL="0">
+              <a:lnSpc>
+                <a:spcPct val="130000"/>
+              </a:lnSpc>
+              <a:buNone/>
+            </a:pPr>
+            <a:r>
+              <a:rPr lang="en-US" sz="1150" dirty="0">
+                <a:solidFill>
+                  <a:srgbClr val="27374F"/>
+                </a:solidFill>
+                <a:latin typeface="Calibri" pitchFamily="34" charset="0"/>
+                <a:ea typeface="Calibri" pitchFamily="34" charset="-122"/>
+                <a:cs typeface="Calibri" pitchFamily="34" charset="-120"/>
+              </a:rPr>
+              <a:t>만들고 싶은 것</a:t>
+            </a:r>
+            <a:endParaRPr lang="en-US" sz="1150" dirty="0"/>
+          </a:p>
+          <a:p>
+            <a:pPr indent="0" marL="0">
+              <a:lnSpc>
+                <a:spcPct val="130000"/>
+              </a:lnSpc>
+              <a:buNone/>
+            </a:pPr>
+            <a:r>
+              <a:rPr lang="en-US" sz="1150" dirty="0">
+                <a:solidFill>
+                  <a:srgbClr val="27374F"/>
+                </a:solidFill>
+                <a:latin typeface="Calibri" pitchFamily="34" charset="0"/>
+                <a:ea typeface="Calibri" pitchFamily="34" charset="-122"/>
+                <a:cs typeface="Calibri" pitchFamily="34" charset="-120"/>
+              </a:rPr>
+              <a:t>한 문장</a:t>
+            </a:r>
+            <a:endParaRPr lang="en-US" sz="1150" dirty="0"/>
+          </a:p>
+        </p:txBody>
+      </p:sp>
+      <p:sp>
+        <p:nvSpPr>
+          <p:cNvPr id="33" name="Text 31"/>
+          <p:cNvSpPr txBox="1"/>
+          <p:nvPr/>
+        </p:nvSpPr>
+        <p:spPr>
+          <a:xfrm>
+            <a:off x="2866278" y="2706624"/>
+            <a:ext cx="2006742" cy="219456"/>
+          </a:xfrm>
+          <a:prstGeom prst="rect">
+            <a:avLst/>
+          </a:prstGeom>
+          <a:noFill/>
+          <a:ln/>
+        </p:spPr>
+        <p:txBody>
+          <a:bodyPr wrap="square" lIns="0" tIns="0" rIns="0" bIns="0" rtlCol="0" anchor="ctr"/>
+          <a:lstStyle/>
+          <a:p>
+            <a:pPr algn="ctr" indent="0" marL="0">
+              <a:buNone/>
+            </a:pPr>
+            <a:r>
+              <a:rPr lang="en-US" sz="1300" b="1" dirty="0">
+                <a:solidFill>
+                  <a:srgbClr val="D3E0FF"/>
+                </a:solidFill>
+                <a:latin typeface="Calibri" pitchFamily="34" charset="0"/>
+                <a:ea typeface="Calibri" pitchFamily="34" charset="-122"/>
+                <a:cs typeface="Calibri" pitchFamily="34" charset="-120"/>
+              </a:rPr>
+              <a:t>↓</a:t>
+            </a:r>
+            <a:endParaRPr lang="en-US" sz="1300" dirty="0"/>
+          </a:p>
+        </p:txBody>
+      </p:sp>
+      <p:sp>
+        <p:nvSpPr>
+          <p:cNvPr id="34" name="Shape 32"/>
           <p:cNvSpPr/>
           <p:nvPr/>
         </p:nvSpPr>
         <p:spPr>
           <a:xfrm>
-            <a:off x="3136941" y="1847088"/>
-            <a:ext cx="310896" cy="310896"/>
+            <a:off x="2866278" y="3236976"/>
+            <a:ext cx="2006742" cy="1188720"/>
           </a:xfrm>
           <a:prstGeom prst="roundRect">
             <a:avLst>
-              <a:gd name="adj" fmla="val 26471"/>
+              <a:gd name="adj" fmla="val 5385"/>
             </a:avLst>
           </a:prstGeom>
           <a:solidFill>
-            <a:srgbClr val="2F6BFF"/>
-          </a:solidFill>
-          <a:ln/>
-        </p:spPr>
-      </p:sp>
-      <p:sp>
-        <p:nvSpPr>
-          <p:cNvPr id="13" name="Text 11"/>
-          <p:cNvSpPr txBox="1"/>
-          <p:nvPr/>
-        </p:nvSpPr>
-        <p:spPr>
-          <a:xfrm>
-            <a:off x="3136941" y="1847088"/>
-            <a:ext cx="310896" cy="310896"/>
-          </a:xfrm>
-          <a:prstGeom prst="rect">
-            <a:avLst/>
-          </a:prstGeom>
-          <a:noFill/>
-          <a:ln/>
-        </p:spPr>
-        <p:txBody>
-          <a:bodyPr wrap="square" lIns="0" tIns="0" rIns="0" bIns="0" rtlCol="0" anchor="ctr"/>
-          <a:lstStyle/>
-          <a:p>
-            <a:pPr algn="ctr" indent="0" marL="0">
-              <a:buNone/>
-            </a:pPr>
-            <a:r>
-              <a:rPr lang="en-US" sz="1200" b="1" dirty="0">
-                <a:solidFill>
-                  <a:srgbClr val="FFFFFF"/>
-                </a:solidFill>
-                <a:latin typeface="Calibri" pitchFamily="34" charset="0"/>
-                <a:ea typeface="Calibri" pitchFamily="34" charset="-122"/>
-                <a:cs typeface="Calibri" pitchFamily="34" charset="-120"/>
-              </a:rPr>
-              <a:t>2</a:t>
-            </a:r>
-            <a:endParaRPr lang="en-US" sz="1200" dirty="0"/>
-          </a:p>
-        </p:txBody>
-      </p:sp>
-      <p:sp>
-        <p:nvSpPr>
-          <p:cNvPr id="14" name="Text 12"/>
-          <p:cNvSpPr txBox="1"/>
-          <p:nvPr/>
-        </p:nvSpPr>
-        <p:spPr>
-          <a:xfrm>
-            <a:off x="3100365" y="2340864"/>
-            <a:ext cx="1545885" cy="329184"/>
-          </a:xfrm>
-          <a:prstGeom prst="rect">
-            <a:avLst/>
-          </a:prstGeom>
-          <a:noFill/>
-          <a:ln/>
-        </p:spPr>
-        <p:txBody>
-          <a:bodyPr wrap="square" lIns="0" tIns="0" rIns="0" bIns="0" rtlCol="0" anchor="ctr"/>
-          <a:lstStyle/>
-          <a:p>
-            <a:pPr indent="0" marL="0">
-              <a:buNone/>
-            </a:pPr>
-            <a:r>
-              <a:rPr lang="en-US" sz="1350" b="1" dirty="0">
-                <a:solidFill>
-                  <a:srgbClr val="0F1B33"/>
-                </a:solidFill>
-                <a:latin typeface="Calibri" pitchFamily="34" charset="0"/>
-                <a:ea typeface="Calibri" pitchFamily="34" charset="-122"/>
-                <a:cs typeface="Calibri" pitchFamily="34" charset="-120"/>
-              </a:rPr>
-              <a:t>Skill 목록 확인</a:t>
-            </a:r>
-            <a:endParaRPr lang="en-US" sz="1350" dirty="0"/>
-          </a:p>
-        </p:txBody>
-      </p:sp>
-      <p:sp>
-        <p:nvSpPr>
-          <p:cNvPr id="15" name="Text 13"/>
-          <p:cNvSpPr txBox="1"/>
-          <p:nvPr/>
-        </p:nvSpPr>
-        <p:spPr>
-          <a:xfrm>
-            <a:off x="3100365" y="2706624"/>
-            <a:ext cx="1545885" cy="512064"/>
-          </a:xfrm>
-          <a:prstGeom prst="rect">
-            <a:avLst/>
-          </a:prstGeom>
-          <a:noFill/>
-          <a:ln/>
-        </p:spPr>
-        <p:txBody>
-          <a:bodyPr wrap="square" lIns="0" tIns="0" rIns="0" bIns="0" rtlCol="0" anchor="ctr"/>
-          <a:lstStyle/>
-          <a:p>
-            <a:pPr indent="0" marL="0">
-              <a:lnSpc>
-                <a:spcPct val="120000"/>
-              </a:lnSpc>
-              <a:buNone/>
-            </a:pPr>
-            <a:r>
-              <a:rPr lang="en-US" sz="1100" dirty="0">
-                <a:solidFill>
-                  <a:srgbClr val="5B6577"/>
-                </a:solidFill>
-                <a:latin typeface="Calibri" pitchFamily="34" charset="0"/>
-                <a:ea typeface="Calibri" pitchFamily="34" charset="-122"/>
-                <a:cs typeface="Calibri" pitchFamily="34" charset="-120"/>
-              </a:rPr>
-              <a:t>이름과 설명을 훑습니다</a:t>
-            </a:r>
-            <a:endParaRPr lang="en-US" sz="1100" dirty="0"/>
-          </a:p>
-        </p:txBody>
-      </p:sp>
-      <p:sp>
-        <p:nvSpPr>
-          <p:cNvPr id="16" name="Text 14"/>
-          <p:cNvSpPr txBox="1"/>
-          <p:nvPr/>
-        </p:nvSpPr>
-        <p:spPr>
-          <a:xfrm>
-            <a:off x="4883993" y="2304288"/>
-            <a:ext cx="201168" cy="365760"/>
-          </a:xfrm>
-          <a:prstGeom prst="rect">
-            <a:avLst/>
-          </a:prstGeom>
-          <a:noFill/>
-          <a:ln/>
-        </p:spPr>
-        <p:txBody>
-          <a:bodyPr wrap="square" lIns="0" tIns="0" rIns="0" bIns="0" rtlCol="0" anchor="ctr"/>
-          <a:lstStyle/>
-          <a:p>
-            <a:pPr algn="ctr" indent="0" marL="0">
-              <a:buNone/>
-            </a:pPr>
-            <a:r>
-              <a:rPr lang="en-US" sz="2200" b="1" dirty="0">
-                <a:solidFill>
-                  <a:srgbClr val="8A94A6"/>
-                </a:solidFill>
-                <a:latin typeface="Calibri" pitchFamily="34" charset="0"/>
-                <a:ea typeface="Calibri" pitchFamily="34" charset="-122"/>
-                <a:cs typeface="Calibri" pitchFamily="34" charset="-120"/>
-              </a:rPr>
-              <a:t>›</a:t>
-            </a:r>
-            <a:endParaRPr lang="en-US" sz="2200" dirty="0"/>
-          </a:p>
-        </p:txBody>
-      </p:sp>
-      <p:sp>
-        <p:nvSpPr>
-          <p:cNvPr id="17" name="Shape 15"/>
-          <p:cNvSpPr/>
-          <p:nvPr/>
-        </p:nvSpPr>
-        <p:spPr>
-          <a:xfrm>
-            <a:off x="5085161" y="1572768"/>
-            <a:ext cx="2021373" cy="1847088"/>
-          </a:xfrm>
-          <a:prstGeom prst="roundRect">
-            <a:avLst>
-              <a:gd name="adj" fmla="val 3465"/>
-            </a:avLst>
-          </a:prstGeom>
-          <a:solidFill>
-            <a:srgbClr val="F6F7F9"/>
-          </a:solidFill>
-          <a:ln w="12700">
-            <a:solidFill>
-              <a:srgbClr val="E5E8EE"/>
-            </a:solidFill>
-            <a:prstDash val="solid"/>
-          </a:ln>
-        </p:spPr>
-      </p:sp>
-      <p:sp>
-        <p:nvSpPr>
-          <p:cNvPr id="18" name="Shape 16"/>
-          <p:cNvSpPr/>
-          <p:nvPr/>
-        </p:nvSpPr>
-        <p:spPr>
-          <a:xfrm>
-            <a:off x="5359481" y="1847088"/>
-            <a:ext cx="310896" cy="310896"/>
-          </a:xfrm>
-          <a:prstGeom prst="roundRect">
-            <a:avLst>
-              <a:gd name="adj" fmla="val 26471"/>
-            </a:avLst>
-          </a:prstGeom>
-          <a:solidFill>
-            <a:srgbClr val="0F1B33"/>
-          </a:solidFill>
-          <a:ln/>
-        </p:spPr>
-      </p:sp>
-      <p:sp>
-        <p:nvSpPr>
-          <p:cNvPr id="19" name="Text 17"/>
-          <p:cNvSpPr txBox="1"/>
-          <p:nvPr/>
-        </p:nvSpPr>
-        <p:spPr>
-          <a:xfrm>
-            <a:off x="5359481" y="1847088"/>
-            <a:ext cx="310896" cy="310896"/>
-          </a:xfrm>
-          <a:prstGeom prst="rect">
-            <a:avLst/>
-          </a:prstGeom>
-          <a:noFill/>
-          <a:ln/>
-        </p:spPr>
-        <p:txBody>
-          <a:bodyPr wrap="square" lIns="0" tIns="0" rIns="0" bIns="0" rtlCol="0" anchor="ctr"/>
-          <a:lstStyle/>
-          <a:p>
-            <a:pPr algn="ctr" indent="0" marL="0">
-              <a:buNone/>
-            </a:pPr>
-            <a:r>
-              <a:rPr lang="en-US" sz="1200" b="1" dirty="0">
-                <a:solidFill>
-                  <a:srgbClr val="FFFFFF"/>
-                </a:solidFill>
-                <a:latin typeface="Calibri" pitchFamily="34" charset="0"/>
-                <a:ea typeface="Calibri" pitchFamily="34" charset="-122"/>
-                <a:cs typeface="Calibri" pitchFamily="34" charset="-120"/>
-              </a:rPr>
-              <a:t>3</a:t>
-            </a:r>
-            <a:endParaRPr lang="en-US" sz="1200" dirty="0"/>
-          </a:p>
-        </p:txBody>
-      </p:sp>
-      <p:sp>
-        <p:nvSpPr>
-          <p:cNvPr id="20" name="Text 18"/>
-          <p:cNvSpPr txBox="1"/>
-          <p:nvPr/>
-        </p:nvSpPr>
-        <p:spPr>
-          <a:xfrm>
-            <a:off x="5322905" y="2340864"/>
-            <a:ext cx="1545885" cy="329184"/>
-          </a:xfrm>
-          <a:prstGeom prst="rect">
-            <a:avLst/>
-          </a:prstGeom>
-          <a:noFill/>
-          <a:ln/>
-        </p:spPr>
-        <p:txBody>
-          <a:bodyPr wrap="square" lIns="0" tIns="0" rIns="0" bIns="0" rtlCol="0" anchor="ctr"/>
-          <a:lstStyle/>
-          <a:p>
-            <a:pPr indent="0" marL="0">
-              <a:buNone/>
-            </a:pPr>
-            <a:r>
-              <a:rPr lang="en-US" sz="1350" b="1" dirty="0">
-                <a:solidFill>
-                  <a:srgbClr val="0F1B33"/>
-                </a:solidFill>
-                <a:latin typeface="Calibri" pitchFamily="34" charset="0"/>
-                <a:ea typeface="Calibri" pitchFamily="34" charset="-122"/>
-                <a:cs typeface="Calibri" pitchFamily="34" charset="-120"/>
-              </a:rPr>
-              <a:t>용도 비교</a:t>
-            </a:r>
-            <a:endParaRPr lang="en-US" sz="1350" dirty="0"/>
-          </a:p>
-        </p:txBody>
-      </p:sp>
-      <p:sp>
-        <p:nvSpPr>
-          <p:cNvPr id="21" name="Text 19"/>
-          <p:cNvSpPr txBox="1"/>
-          <p:nvPr/>
-        </p:nvSpPr>
-        <p:spPr>
-          <a:xfrm>
-            <a:off x="5322905" y="2706624"/>
-            <a:ext cx="1545885" cy="512064"/>
-          </a:xfrm>
-          <a:prstGeom prst="rect">
-            <a:avLst/>
-          </a:prstGeom>
-          <a:noFill/>
-          <a:ln/>
-        </p:spPr>
-        <p:txBody>
-          <a:bodyPr wrap="square" lIns="0" tIns="0" rIns="0" bIns="0" rtlCol="0" anchor="ctr"/>
-          <a:lstStyle/>
-          <a:p>
-            <a:pPr indent="0" marL="0">
-              <a:lnSpc>
-                <a:spcPct val="120000"/>
-              </a:lnSpc>
-              <a:buNone/>
-            </a:pPr>
-            <a:r>
-              <a:rPr lang="en-US" sz="1100" dirty="0">
-                <a:solidFill>
-                  <a:srgbClr val="5B6577"/>
-                </a:solidFill>
-                <a:latin typeface="Calibri" pitchFamily="34" charset="0"/>
-                <a:ea typeface="Calibri" pitchFamily="34" charset="-122"/>
-                <a:cs typeface="Calibri" pitchFamily="34" charset="-120"/>
-              </a:rPr>
-              <a:t>요청과 맞는지 판단합니다</a:t>
-            </a:r>
-            <a:endParaRPr lang="en-US" sz="1100" dirty="0"/>
-          </a:p>
-        </p:txBody>
-      </p:sp>
-      <p:sp>
-        <p:nvSpPr>
-          <p:cNvPr id="22" name="Text 20"/>
-          <p:cNvSpPr txBox="1"/>
-          <p:nvPr/>
-        </p:nvSpPr>
-        <p:spPr>
-          <a:xfrm>
-            <a:off x="7106534" y="2304288"/>
-            <a:ext cx="201168" cy="365760"/>
-          </a:xfrm>
-          <a:prstGeom prst="rect">
-            <a:avLst/>
-          </a:prstGeom>
-          <a:noFill/>
-          <a:ln/>
-        </p:spPr>
-        <p:txBody>
-          <a:bodyPr wrap="square" lIns="0" tIns="0" rIns="0" bIns="0" rtlCol="0" anchor="ctr"/>
-          <a:lstStyle/>
-          <a:p>
-            <a:pPr algn="ctr" indent="0" marL="0">
-              <a:buNone/>
-            </a:pPr>
-            <a:r>
-              <a:rPr lang="en-US" sz="2200" b="1" dirty="0">
-                <a:solidFill>
-                  <a:srgbClr val="8A94A6"/>
-                </a:solidFill>
-                <a:latin typeface="Calibri" pitchFamily="34" charset="0"/>
-                <a:ea typeface="Calibri" pitchFamily="34" charset="-122"/>
-                <a:cs typeface="Calibri" pitchFamily="34" charset="-120"/>
-              </a:rPr>
-              <a:t>›</a:t>
-            </a:r>
-            <a:endParaRPr lang="en-US" sz="2200" dirty="0"/>
-          </a:p>
-        </p:txBody>
-      </p:sp>
-      <p:sp>
-        <p:nvSpPr>
-          <p:cNvPr id="23" name="Shape 21"/>
-          <p:cNvSpPr/>
-          <p:nvPr/>
-        </p:nvSpPr>
-        <p:spPr>
-          <a:xfrm>
-            <a:off x="7307702" y="1572768"/>
-            <a:ext cx="2021373" cy="1847088"/>
-          </a:xfrm>
-          <a:prstGeom prst="roundRect">
-            <a:avLst>
-              <a:gd name="adj" fmla="val 3465"/>
-            </a:avLst>
-          </a:prstGeom>
-          <a:solidFill>
-            <a:srgbClr val="EEF3FF"/>
+            <a:srgbClr val="FFFFFF"/>
           </a:solidFill>
           <a:ln w="12700">
             <a:solidFill>
@@ -13749,207 +14672,127 @@
       </p:sp>
       <p:sp>
         <p:nvSpPr>
-          <p:cNvPr id="24" name="Shape 22"/>
+          <p:cNvPr id="35" name="Text 33"/>
+          <p:cNvSpPr txBox="1"/>
+          <p:nvPr/>
+        </p:nvSpPr>
+        <p:spPr>
+          <a:xfrm>
+            <a:off x="3085734" y="3419856"/>
+            <a:ext cx="1567830" cy="822960"/>
+          </a:xfrm>
+          <a:prstGeom prst="rect">
+            <a:avLst/>
+          </a:prstGeom>
+          <a:noFill/>
+          <a:ln/>
+        </p:spPr>
+        <p:txBody>
+          <a:bodyPr wrap="square" lIns="0" tIns="0" rIns="0" bIns="0" rtlCol="0" anchor="ctr"/>
+          <a:lstStyle/>
+          <a:p>
+            <a:pPr indent="0" marL="0">
+              <a:lnSpc>
+                <a:spcPct val="130000"/>
+              </a:lnSpc>
+              <a:buNone/>
+            </a:pPr>
+            <a:r>
+              <a:rPr lang="en-US" sz="1150" dirty="0">
+                <a:solidFill>
+                  <a:srgbClr val="27374F"/>
+                </a:solidFill>
+                <a:latin typeface="Calibri" pitchFamily="34" charset="0"/>
+                <a:ea typeface="Calibri" pitchFamily="34" charset="-122"/>
+                <a:cs typeface="Calibri" pitchFamily="34" charset="-120"/>
+              </a:rPr>
+              <a:t>확정된 요구사항과</a:t>
+            </a:r>
+            <a:endParaRPr lang="en-US" sz="1150" dirty="0"/>
+          </a:p>
+          <a:p>
+            <a:pPr indent="0" marL="0">
+              <a:lnSpc>
+                <a:spcPct val="130000"/>
+              </a:lnSpc>
+              <a:buNone/>
+            </a:pPr>
+            <a:r>
+              <a:rPr lang="en-US" sz="1150" dirty="0">
+                <a:solidFill>
+                  <a:srgbClr val="27374F"/>
+                </a:solidFill>
+                <a:latin typeface="Calibri" pitchFamily="34" charset="0"/>
+                <a:ea typeface="Calibri" pitchFamily="34" charset="-122"/>
+                <a:cs typeface="Calibri" pitchFamily="34" charset="-120"/>
+              </a:rPr>
+              <a:t>설계</a:t>
+            </a:r>
+            <a:endParaRPr lang="en-US" sz="1150" dirty="0"/>
+          </a:p>
+        </p:txBody>
+      </p:sp>
+      <p:sp>
+        <p:nvSpPr>
+          <p:cNvPr id="36" name="Text 34"/>
+          <p:cNvSpPr txBox="1"/>
+          <p:nvPr/>
+        </p:nvSpPr>
+        <p:spPr>
+          <a:xfrm>
+            <a:off x="5092476" y="2706624"/>
+            <a:ext cx="2006742" cy="219456"/>
+          </a:xfrm>
+          <a:prstGeom prst="rect">
+            <a:avLst/>
+          </a:prstGeom>
+          <a:noFill/>
+          <a:ln/>
+        </p:spPr>
+        <p:txBody>
+          <a:bodyPr wrap="square" lIns="0" tIns="0" rIns="0" bIns="0" rtlCol="0" anchor="ctr"/>
+          <a:lstStyle/>
+          <a:p>
+            <a:pPr algn="ctr" indent="0" marL="0">
+              <a:buNone/>
+            </a:pPr>
+            <a:r>
+              <a:rPr lang="en-US" sz="1300" b="1" dirty="0">
+                <a:solidFill>
+                  <a:srgbClr val="D3E0FF"/>
+                </a:solidFill>
+                <a:latin typeface="Calibri" pitchFamily="34" charset="0"/>
+                <a:ea typeface="Calibri" pitchFamily="34" charset="-122"/>
+                <a:cs typeface="Calibri" pitchFamily="34" charset="-120"/>
+              </a:rPr>
+              <a:t>↓</a:t>
+            </a:r>
+            <a:endParaRPr lang="en-US" sz="1300" dirty="0"/>
+          </a:p>
+        </p:txBody>
+      </p:sp>
+      <p:sp>
+        <p:nvSpPr>
+          <p:cNvPr id="37" name="Shape 35"/>
           <p:cNvSpPr/>
           <p:nvPr/>
         </p:nvSpPr>
         <p:spPr>
           <a:xfrm>
-            <a:off x="7582022" y="1847088"/>
-            <a:ext cx="310896" cy="310896"/>
+            <a:off x="5092476" y="3236976"/>
+            <a:ext cx="2006742" cy="1188720"/>
           </a:xfrm>
           <a:prstGeom prst="roundRect">
             <a:avLst>
-              <a:gd name="adj" fmla="val 26471"/>
+              <a:gd name="adj" fmla="val 5385"/>
             </a:avLst>
           </a:prstGeom>
           <a:solidFill>
-            <a:srgbClr val="2F6BFF"/>
-          </a:solidFill>
-          <a:ln/>
-        </p:spPr>
-      </p:sp>
-      <p:sp>
-        <p:nvSpPr>
-          <p:cNvPr id="25" name="Text 23"/>
-          <p:cNvSpPr txBox="1"/>
-          <p:nvPr/>
-        </p:nvSpPr>
-        <p:spPr>
-          <a:xfrm>
-            <a:off x="7582022" y="1847088"/>
-            <a:ext cx="310896" cy="310896"/>
-          </a:xfrm>
-          <a:prstGeom prst="rect">
-            <a:avLst/>
-          </a:prstGeom>
-          <a:noFill/>
-          <a:ln/>
-        </p:spPr>
-        <p:txBody>
-          <a:bodyPr wrap="square" lIns="0" tIns="0" rIns="0" bIns="0" rtlCol="0" anchor="ctr"/>
-          <a:lstStyle/>
-          <a:p>
-            <a:pPr algn="ctr" indent="0" marL="0">
-              <a:buNone/>
-            </a:pPr>
-            <a:r>
-              <a:rPr lang="en-US" sz="1200" b="1" dirty="0">
-                <a:solidFill>
-                  <a:srgbClr val="FFFFFF"/>
-                </a:solidFill>
-                <a:latin typeface="Calibri" pitchFamily="34" charset="0"/>
-                <a:ea typeface="Calibri" pitchFamily="34" charset="-122"/>
-                <a:cs typeface="Calibri" pitchFamily="34" charset="-120"/>
-              </a:rPr>
-              <a:t>4</a:t>
-            </a:r>
-            <a:endParaRPr lang="en-US" sz="1200" dirty="0"/>
-          </a:p>
-        </p:txBody>
-      </p:sp>
-      <p:sp>
-        <p:nvSpPr>
-          <p:cNvPr id="26" name="Text 24"/>
-          <p:cNvSpPr txBox="1"/>
-          <p:nvPr/>
-        </p:nvSpPr>
-        <p:spPr>
-          <a:xfrm>
-            <a:off x="7545446" y="2340864"/>
-            <a:ext cx="1545885" cy="329184"/>
-          </a:xfrm>
-          <a:prstGeom prst="rect">
-            <a:avLst/>
-          </a:prstGeom>
-          <a:noFill/>
-          <a:ln/>
-        </p:spPr>
-        <p:txBody>
-          <a:bodyPr wrap="square" lIns="0" tIns="0" rIns="0" bIns="0" rtlCol="0" anchor="ctr"/>
-          <a:lstStyle/>
-          <a:p>
-            <a:pPr indent="0" marL="0">
-              <a:buNone/>
-            </a:pPr>
-            <a:r>
-              <a:rPr lang="en-US" sz="1350" b="1" dirty="0">
-                <a:solidFill>
-                  <a:srgbClr val="0F1B33"/>
-                </a:solidFill>
-                <a:latin typeface="Calibri" pitchFamily="34" charset="0"/>
-                <a:ea typeface="Calibri" pitchFamily="34" charset="-122"/>
-                <a:cs typeface="Calibri" pitchFamily="34" charset="-120"/>
-              </a:rPr>
-              <a:t>Skill 호출</a:t>
-            </a:r>
-            <a:endParaRPr lang="en-US" sz="1350" dirty="0"/>
-          </a:p>
-        </p:txBody>
-      </p:sp>
-      <p:sp>
-        <p:nvSpPr>
-          <p:cNvPr id="27" name="Text 25"/>
-          <p:cNvSpPr txBox="1"/>
-          <p:nvPr/>
-        </p:nvSpPr>
-        <p:spPr>
-          <a:xfrm>
-            <a:off x="7545446" y="2706624"/>
-            <a:ext cx="1545885" cy="512064"/>
-          </a:xfrm>
-          <a:prstGeom prst="rect">
-            <a:avLst/>
-          </a:prstGeom>
-          <a:noFill/>
-          <a:ln/>
-        </p:spPr>
-        <p:txBody>
-          <a:bodyPr wrap="square" lIns="0" tIns="0" rIns="0" bIns="0" rtlCol="0" anchor="ctr"/>
-          <a:lstStyle/>
-          <a:p>
-            <a:pPr indent="0" marL="0">
-              <a:lnSpc>
-                <a:spcPct val="120000"/>
-              </a:lnSpc>
-              <a:buNone/>
-            </a:pPr>
-            <a:r>
-              <a:rPr lang="en-US" sz="1100" dirty="0">
-                <a:solidFill>
-                  <a:srgbClr val="5B6577"/>
-                </a:solidFill>
-                <a:latin typeface="Calibri" pitchFamily="34" charset="0"/>
-                <a:ea typeface="Calibri" pitchFamily="34" charset="-122"/>
-                <a:cs typeface="Calibri" pitchFamily="34" charset="-120"/>
-              </a:rPr>
-              <a:t>전체 지침을 읽습니다</a:t>
-            </a:r>
-            <a:endParaRPr lang="en-US" sz="1100" dirty="0"/>
-          </a:p>
-        </p:txBody>
-      </p:sp>
-      <p:sp>
-        <p:nvSpPr>
-          <p:cNvPr id="28" name="Text 26"/>
-          <p:cNvSpPr txBox="1"/>
-          <p:nvPr/>
-        </p:nvSpPr>
-        <p:spPr>
-          <a:xfrm>
-            <a:off x="9329075" y="2304288"/>
-            <a:ext cx="201168" cy="365760"/>
-          </a:xfrm>
-          <a:prstGeom prst="rect">
-            <a:avLst/>
-          </a:prstGeom>
-          <a:noFill/>
-          <a:ln/>
-        </p:spPr>
-        <p:txBody>
-          <a:bodyPr wrap="square" lIns="0" tIns="0" rIns="0" bIns="0" rtlCol="0" anchor="ctr"/>
-          <a:lstStyle/>
-          <a:p>
-            <a:pPr algn="ctr" indent="0" marL="0">
-              <a:buNone/>
-            </a:pPr>
-            <a:r>
-              <a:rPr lang="en-US" sz="2200" b="1" dirty="0">
-                <a:solidFill>
-                  <a:srgbClr val="8A94A6"/>
-                </a:solidFill>
-                <a:latin typeface="Calibri" pitchFamily="34" charset="0"/>
-                <a:ea typeface="Calibri" pitchFamily="34" charset="-122"/>
-                <a:cs typeface="Calibri" pitchFamily="34" charset="-120"/>
-              </a:rPr>
-              <a:t>›</a:t>
-            </a:r>
-            <a:endParaRPr lang="en-US" sz="2200" dirty="0"/>
-          </a:p>
-        </p:txBody>
-      </p:sp>
-      <p:sp>
-        <p:nvSpPr>
-          <p:cNvPr id="29" name="Shape 27"/>
-          <p:cNvSpPr/>
-          <p:nvPr/>
-        </p:nvSpPr>
-        <p:spPr>
-          <a:xfrm>
-            <a:off x="9530243" y="1572768"/>
-            <a:ext cx="2021373" cy="1847088"/>
-          </a:xfrm>
-          <a:prstGeom prst="roundRect">
-            <a:avLst>
-              <a:gd name="adj" fmla="val 3465"/>
-            </a:avLst>
-          </a:prstGeom>
-          <a:solidFill>
-            <a:srgbClr val="F6F7F9"/>
+            <a:srgbClr val="FFFFFF"/>
           </a:solidFill>
           <a:ln w="12700">
             <a:solidFill>
-              <a:srgbClr val="E5E8EE"/>
+              <a:srgbClr val="D3E0FF"/>
             </a:solidFill>
             <a:prstDash val="solid"/>
           </a:ln>
@@ -13957,271 +14800,127 @@
       </p:sp>
       <p:sp>
         <p:nvSpPr>
-          <p:cNvPr id="30" name="Shape 28"/>
+          <p:cNvPr id="38" name="Text 36"/>
+          <p:cNvSpPr txBox="1"/>
+          <p:nvPr/>
+        </p:nvSpPr>
+        <p:spPr>
+          <a:xfrm>
+            <a:off x="5311932" y="3419856"/>
+            <a:ext cx="1567830" cy="822960"/>
+          </a:xfrm>
+          <a:prstGeom prst="rect">
+            <a:avLst/>
+          </a:prstGeom>
+          <a:noFill/>
+          <a:ln/>
+        </p:spPr>
+        <p:txBody>
+          <a:bodyPr wrap="square" lIns="0" tIns="0" rIns="0" bIns="0" rtlCol="0" anchor="ctr"/>
+          <a:lstStyle/>
+          <a:p>
+            <a:pPr indent="0" marL="0">
+              <a:lnSpc>
+                <a:spcPct val="130000"/>
+              </a:lnSpc>
+              <a:buNone/>
+            </a:pPr>
+            <a:r>
+              <a:rPr lang="en-US" sz="1150" dirty="0">
+                <a:solidFill>
+                  <a:srgbClr val="27374F"/>
+                </a:solidFill>
+                <a:latin typeface="Calibri" pitchFamily="34" charset="0"/>
+                <a:ea typeface="Calibri" pitchFamily="34" charset="-122"/>
+                <a:cs typeface="Calibri" pitchFamily="34" charset="-120"/>
+              </a:rPr>
+              <a:t>구현 계획서</a:t>
+            </a:r>
+            <a:endParaRPr lang="en-US" sz="1150" dirty="0"/>
+          </a:p>
+          <a:p>
+            <a:pPr indent="0" marL="0">
+              <a:lnSpc>
+                <a:spcPct val="130000"/>
+              </a:lnSpc>
+              <a:buNone/>
+            </a:pPr>
+            <a:r>
+              <a:rPr lang="en-US" sz="1150" dirty="0">
+                <a:solidFill>
+                  <a:srgbClr val="27374F"/>
+                </a:solidFill>
+                <a:latin typeface="Calibri" pitchFamily="34" charset="0"/>
+                <a:ea typeface="Calibri" pitchFamily="34" charset="-122"/>
+                <a:cs typeface="Calibri" pitchFamily="34" charset="-120"/>
+              </a:rPr>
+              <a:t>(파일·테스트·순서)</a:t>
+            </a:r>
+            <a:endParaRPr lang="en-US" sz="1150" dirty="0"/>
+          </a:p>
+        </p:txBody>
+      </p:sp>
+      <p:sp>
+        <p:nvSpPr>
+          <p:cNvPr id="39" name="Text 37"/>
+          <p:cNvSpPr txBox="1"/>
+          <p:nvPr/>
+        </p:nvSpPr>
+        <p:spPr>
+          <a:xfrm>
+            <a:off x="7318675" y="2706624"/>
+            <a:ext cx="2006742" cy="219456"/>
+          </a:xfrm>
+          <a:prstGeom prst="rect">
+            <a:avLst/>
+          </a:prstGeom>
+          <a:noFill/>
+          <a:ln/>
+        </p:spPr>
+        <p:txBody>
+          <a:bodyPr wrap="square" lIns="0" tIns="0" rIns="0" bIns="0" rtlCol="0" anchor="ctr"/>
+          <a:lstStyle/>
+          <a:p>
+            <a:pPr algn="ctr" indent="0" marL="0">
+              <a:buNone/>
+            </a:pPr>
+            <a:r>
+              <a:rPr lang="en-US" sz="1300" b="1" dirty="0">
+                <a:solidFill>
+                  <a:srgbClr val="D3E0FF"/>
+                </a:solidFill>
+                <a:latin typeface="Calibri" pitchFamily="34" charset="0"/>
+                <a:ea typeface="Calibri" pitchFamily="34" charset="-122"/>
+                <a:cs typeface="Calibri" pitchFamily="34" charset="-120"/>
+              </a:rPr>
+              <a:t>↓</a:t>
+            </a:r>
+            <a:endParaRPr lang="en-US" sz="1300" dirty="0"/>
+          </a:p>
+        </p:txBody>
+      </p:sp>
+      <p:sp>
+        <p:nvSpPr>
+          <p:cNvPr id="40" name="Shape 38"/>
           <p:cNvSpPr/>
           <p:nvPr/>
         </p:nvSpPr>
         <p:spPr>
           <a:xfrm>
-            <a:off x="9804563" y="1847088"/>
-            <a:ext cx="310896" cy="310896"/>
+            <a:off x="7318675" y="3236976"/>
+            <a:ext cx="2006742" cy="1188720"/>
           </a:xfrm>
           <a:prstGeom prst="roundRect">
             <a:avLst>
-              <a:gd name="adj" fmla="val 26471"/>
+              <a:gd name="adj" fmla="val 5385"/>
             </a:avLst>
           </a:prstGeom>
           <a:solidFill>
-            <a:srgbClr val="0F1B33"/>
-          </a:solidFill>
-          <a:ln/>
-        </p:spPr>
-      </p:sp>
-      <p:sp>
-        <p:nvSpPr>
-          <p:cNvPr id="31" name="Text 29"/>
-          <p:cNvSpPr txBox="1"/>
-          <p:nvPr/>
-        </p:nvSpPr>
-        <p:spPr>
-          <a:xfrm>
-            <a:off x="9804563" y="1847088"/>
-            <a:ext cx="310896" cy="310896"/>
-          </a:xfrm>
-          <a:prstGeom prst="rect">
-            <a:avLst/>
-          </a:prstGeom>
-          <a:noFill/>
-          <a:ln/>
-        </p:spPr>
-        <p:txBody>
-          <a:bodyPr wrap="square" lIns="0" tIns="0" rIns="0" bIns="0" rtlCol="0" anchor="ctr"/>
-          <a:lstStyle/>
-          <a:p>
-            <a:pPr algn="ctr" indent="0" marL="0">
-              <a:buNone/>
-            </a:pPr>
-            <a:r>
-              <a:rPr lang="en-US" sz="1200" b="1" dirty="0">
-                <a:solidFill>
-                  <a:srgbClr val="FFFFFF"/>
-                </a:solidFill>
-                <a:latin typeface="Calibri" pitchFamily="34" charset="0"/>
-                <a:ea typeface="Calibri" pitchFamily="34" charset="-122"/>
-                <a:cs typeface="Calibri" pitchFamily="34" charset="-120"/>
-              </a:rPr>
-              <a:t>5</a:t>
-            </a:r>
-            <a:endParaRPr lang="en-US" sz="1200" dirty="0"/>
-          </a:p>
-        </p:txBody>
-      </p:sp>
-      <p:sp>
-        <p:nvSpPr>
-          <p:cNvPr id="32" name="Text 30"/>
-          <p:cNvSpPr txBox="1"/>
-          <p:nvPr/>
-        </p:nvSpPr>
-        <p:spPr>
-          <a:xfrm>
-            <a:off x="9767987" y="2340864"/>
-            <a:ext cx="1545885" cy="329184"/>
-          </a:xfrm>
-          <a:prstGeom prst="rect">
-            <a:avLst/>
-          </a:prstGeom>
-          <a:noFill/>
-          <a:ln/>
-        </p:spPr>
-        <p:txBody>
-          <a:bodyPr wrap="square" lIns="0" tIns="0" rIns="0" bIns="0" rtlCol="0" anchor="ctr"/>
-          <a:lstStyle/>
-          <a:p>
-            <a:pPr indent="0" marL="0">
-              <a:buNone/>
-            </a:pPr>
-            <a:r>
-              <a:rPr lang="en-US" sz="1350" b="1" dirty="0">
-                <a:solidFill>
-                  <a:srgbClr val="0F1B33"/>
-                </a:solidFill>
-                <a:latin typeface="Calibri" pitchFamily="34" charset="0"/>
-                <a:ea typeface="Calibri" pitchFamily="34" charset="-122"/>
-                <a:cs typeface="Calibri" pitchFamily="34" charset="-120"/>
-              </a:rPr>
-              <a:t>절차 실행</a:t>
-            </a:r>
-            <a:endParaRPr lang="en-US" sz="1350" dirty="0"/>
-          </a:p>
-        </p:txBody>
-      </p:sp>
-      <p:sp>
-        <p:nvSpPr>
-          <p:cNvPr id="33" name="Text 31"/>
-          <p:cNvSpPr txBox="1"/>
-          <p:nvPr/>
-        </p:nvSpPr>
-        <p:spPr>
-          <a:xfrm>
-            <a:off x="9767987" y="2706624"/>
-            <a:ext cx="1545885" cy="512064"/>
-          </a:xfrm>
-          <a:prstGeom prst="rect">
-            <a:avLst/>
-          </a:prstGeom>
-          <a:noFill/>
-          <a:ln/>
-        </p:spPr>
-        <p:txBody>
-          <a:bodyPr wrap="square" lIns="0" tIns="0" rIns="0" bIns="0" rtlCol="0" anchor="ctr"/>
-          <a:lstStyle/>
-          <a:p>
-            <a:pPr indent="0" marL="0">
-              <a:lnSpc>
-                <a:spcPct val="120000"/>
-              </a:lnSpc>
-              <a:buNone/>
-            </a:pPr>
-            <a:r>
-              <a:rPr lang="en-US" sz="1100" dirty="0">
-                <a:solidFill>
-                  <a:srgbClr val="5B6577"/>
-                </a:solidFill>
-                <a:latin typeface="Calibri" pitchFamily="34" charset="0"/>
-                <a:ea typeface="Calibri" pitchFamily="34" charset="-122"/>
-                <a:cs typeface="Calibri" pitchFamily="34" charset="-120"/>
-              </a:rPr>
-              <a:t>진단·검증을 수행합니다</a:t>
-            </a:r>
-            <a:endParaRPr lang="en-US" sz="1100" dirty="0"/>
-          </a:p>
-        </p:txBody>
-      </p:sp>
-      <p:sp>
-        <p:nvSpPr>
-          <p:cNvPr id="34" name="Shape 32"/>
-          <p:cNvSpPr/>
-          <p:nvPr/>
-        </p:nvSpPr>
-        <p:spPr>
-          <a:xfrm>
-            <a:off x="640080" y="3968496"/>
-            <a:ext cx="5272888" cy="1371600"/>
-          </a:xfrm>
-          <a:prstGeom prst="roundRect">
-            <a:avLst>
-              <a:gd name="adj" fmla="val 4667"/>
-            </a:avLst>
-          </a:prstGeom>
-          <a:solidFill>
-            <a:srgbClr val="0F1B33"/>
-          </a:solidFill>
-          <a:ln/>
-        </p:spPr>
-      </p:sp>
-      <p:sp>
-        <p:nvSpPr>
-          <p:cNvPr id="35" name="Text 33"/>
-          <p:cNvSpPr txBox="1"/>
-          <p:nvPr/>
-        </p:nvSpPr>
-        <p:spPr>
-          <a:xfrm>
-            <a:off x="1024128" y="4242816"/>
-            <a:ext cx="4504792" cy="310896"/>
-          </a:xfrm>
-          <a:prstGeom prst="rect">
-            <a:avLst/>
-          </a:prstGeom>
-          <a:noFill/>
-          <a:ln/>
-        </p:spPr>
-        <p:txBody>
-          <a:bodyPr wrap="square" lIns="0" tIns="0" rIns="0" bIns="0" rtlCol="0" anchor="ctr"/>
-          <a:lstStyle/>
-          <a:p>
-            <a:pPr indent="0" marL="0">
-              <a:buNone/>
-            </a:pPr>
-            <a:r>
-              <a:rPr lang="en-US" sz="1500" b="1" dirty="0">
-                <a:solidFill>
-                  <a:srgbClr val="F2994A"/>
-                </a:solidFill>
-                <a:latin typeface="Calibri" pitchFamily="34" charset="0"/>
-                <a:ea typeface="Calibri" pitchFamily="34" charset="-122"/>
-                <a:cs typeface="Calibri" pitchFamily="34" charset="-120"/>
-              </a:rPr>
-              <a:t>자동 호출</a:t>
-            </a:r>
-            <a:endParaRPr lang="en-US" sz="1500" dirty="0"/>
-          </a:p>
-        </p:txBody>
-      </p:sp>
-      <p:sp>
-        <p:nvSpPr>
-          <p:cNvPr id="36" name="Text 34"/>
-          <p:cNvSpPr txBox="1"/>
-          <p:nvPr/>
-        </p:nvSpPr>
-        <p:spPr>
-          <a:xfrm>
-            <a:off x="1024128" y="4626864"/>
-            <a:ext cx="4504792" cy="548640"/>
-          </a:xfrm>
-          <a:prstGeom prst="rect">
-            <a:avLst/>
-          </a:prstGeom>
-          <a:noFill/>
-          <a:ln/>
-        </p:spPr>
-        <p:txBody>
-          <a:bodyPr wrap="square" lIns="0" tIns="0" rIns="0" bIns="0" rtlCol="0" anchor="ctr"/>
-          <a:lstStyle/>
-          <a:p>
-            <a:pPr indent="0" marL="0">
-              <a:lnSpc>
-                <a:spcPct val="125000"/>
-              </a:lnSpc>
-              <a:buNone/>
-            </a:pPr>
-            <a:r>
-              <a:rPr lang="en-US" sz="1250" dirty="0">
-                <a:solidFill>
-                  <a:srgbClr val="C3CFE2"/>
-                </a:solidFill>
-                <a:latin typeface="Calibri" pitchFamily="34" charset="0"/>
-                <a:ea typeface="Calibri" pitchFamily="34" charset="-122"/>
-                <a:cs typeface="Calibri" pitchFamily="34" charset="-120"/>
-              </a:rPr>
-              <a:t>요청의 의미가 Skill 설명과 맞으면 모델이 알아서 선택합니다.</a:t>
-            </a:r>
-            <a:endParaRPr lang="en-US" sz="1250" dirty="0"/>
-          </a:p>
-        </p:txBody>
-      </p:sp>
-      <p:sp>
-        <p:nvSpPr>
-          <p:cNvPr id="37" name="Shape 35"/>
-          <p:cNvSpPr/>
-          <p:nvPr/>
-        </p:nvSpPr>
-        <p:spPr>
-          <a:xfrm>
-            <a:off x="6278728" y="3968496"/>
-            <a:ext cx="5272888" cy="1371600"/>
-          </a:xfrm>
-          <a:prstGeom prst="roundRect">
-            <a:avLst>
-              <a:gd name="adj" fmla="val 4667"/>
-            </a:avLst>
-          </a:prstGeom>
-          <a:solidFill>
-            <a:srgbClr val="F6F7F9"/>
+            <a:srgbClr val="FFFFFF"/>
           </a:solidFill>
           <a:ln w="12700">
             <a:solidFill>
-              <a:srgbClr val="E5E8EE"/>
+              <a:srgbClr val="D3E0FF"/>
             </a:solidFill>
             <a:prstDash val="solid"/>
           </a:ln>
@@ -14229,53 +14928,14 @@
       </p:sp>
       <p:sp>
         <p:nvSpPr>
-          <p:cNvPr id="38" name="Text 36"/>
-          <p:cNvSpPr txBox="1"/>
-          <p:nvPr/>
-        </p:nvSpPr>
-        <p:spPr>
-          <a:xfrm>
-            <a:off x="6662776" y="4242816"/>
-            <a:ext cx="4504792" cy="310896"/>
-          </a:xfrm>
-          <a:prstGeom prst="rect">
-            <a:avLst/>
-          </a:prstGeom>
-          <a:noFill/>
-          <a:ln/>
-        </p:spPr>
-        <p:txBody>
-          <a:bodyPr wrap="square" lIns="0" tIns="0" rIns="0" bIns="0" rtlCol="0" anchor="ctr"/>
-          <a:lstStyle/>
-          <a:p>
-            <a:pPr indent="0" marL="0">
-              <a:buNone/>
-            </a:pPr>
-            <a:r>
-              <a:rPr lang="en-US" sz="1500" b="1" dirty="0">
-                <a:solidFill>
-                  <a:srgbClr val="0F1B33"/>
-                </a:solidFill>
-                <a:latin typeface="Calibri" pitchFamily="34" charset="0"/>
-                <a:ea typeface="Calibri" pitchFamily="34" charset="-122"/>
-                <a:cs typeface="Calibri" pitchFamily="34" charset="-120"/>
-              </a:rPr>
-              <a:t>직접 호출</a:t>
-            </a:r>
-            <a:endParaRPr lang="en-US" sz="1500" dirty="0"/>
-          </a:p>
-        </p:txBody>
-      </p:sp>
-      <p:sp>
-        <p:nvSpPr>
-          <p:cNvPr id="39" name="Text 37"/>
-          <p:cNvSpPr txBox="1"/>
-          <p:nvPr/>
-        </p:nvSpPr>
-        <p:spPr>
-          <a:xfrm>
-            <a:off x="6662776" y="4626864"/>
-            <a:ext cx="4504792" cy="548640"/>
+          <p:cNvPr id="41" name="Text 39"/>
+          <p:cNvSpPr txBox="1"/>
+          <p:nvPr/>
+        </p:nvSpPr>
+        <p:spPr>
+          <a:xfrm>
+            <a:off x="7538131" y="3419856"/>
+            <a:ext cx="1567830" cy="822960"/>
           </a:xfrm>
           <a:prstGeom prst="rect">
             <a:avLst/>
@@ -14289,20 +14949,318 @@
           <a:p>
             <a:pPr indent="0" marL="0">
               <a:lnSpc>
-                <a:spcPct val="125000"/>
+                <a:spcPct val="130000"/>
               </a:lnSpc>
               <a:buNone/>
             </a:pPr>
             <a:r>
+              <a:rPr lang="en-US" sz="1150" dirty="0">
+                <a:solidFill>
+                  <a:srgbClr val="27374F"/>
+                </a:solidFill>
+                <a:latin typeface="Calibri" pitchFamily="34" charset="0"/>
+                <a:ea typeface="Calibri" pitchFamily="34" charset="-122"/>
+                <a:cs typeface="Calibri" pitchFamily="34" charset="-120"/>
+              </a:rPr>
+              <a:t>테스트를 통과한</a:t>
+            </a:r>
+            <a:endParaRPr lang="en-US" sz="1150" dirty="0"/>
+          </a:p>
+          <a:p>
+            <a:pPr indent="0" marL="0">
+              <a:lnSpc>
+                <a:spcPct val="130000"/>
+              </a:lnSpc>
+              <a:buNone/>
+            </a:pPr>
+            <a:r>
+              <a:rPr lang="en-US" sz="1150" dirty="0">
+                <a:solidFill>
+                  <a:srgbClr val="27374F"/>
+                </a:solidFill>
+                <a:latin typeface="Calibri" pitchFamily="34" charset="0"/>
+                <a:ea typeface="Calibri" pitchFamily="34" charset="-122"/>
+                <a:cs typeface="Calibri" pitchFamily="34" charset="-120"/>
+              </a:rPr>
+              <a:t>코드</a:t>
+            </a:r>
+            <a:endParaRPr lang="en-US" sz="1150" dirty="0"/>
+          </a:p>
+        </p:txBody>
+      </p:sp>
+      <p:sp>
+        <p:nvSpPr>
+          <p:cNvPr id="42" name="Text 40"/>
+          <p:cNvSpPr txBox="1"/>
+          <p:nvPr/>
+        </p:nvSpPr>
+        <p:spPr>
+          <a:xfrm>
+            <a:off x="9544873" y="2706624"/>
+            <a:ext cx="2006742" cy="219456"/>
+          </a:xfrm>
+          <a:prstGeom prst="rect">
+            <a:avLst/>
+          </a:prstGeom>
+          <a:noFill/>
+          <a:ln/>
+        </p:spPr>
+        <p:txBody>
+          <a:bodyPr wrap="square" lIns="0" tIns="0" rIns="0" bIns="0" rtlCol="0" anchor="ctr"/>
+          <a:lstStyle/>
+          <a:p>
+            <a:pPr algn="ctr" indent="0" marL="0">
+              <a:buNone/>
+            </a:pPr>
+            <a:r>
+              <a:rPr lang="en-US" sz="1300" b="1" dirty="0">
+                <a:solidFill>
+                  <a:srgbClr val="D3E0FF"/>
+                </a:solidFill>
+                <a:latin typeface="Calibri" pitchFamily="34" charset="0"/>
+                <a:ea typeface="Calibri" pitchFamily="34" charset="-122"/>
+                <a:cs typeface="Calibri" pitchFamily="34" charset="-120"/>
+              </a:rPr>
+              <a:t>↓</a:t>
+            </a:r>
+            <a:endParaRPr lang="en-US" sz="1300" dirty="0"/>
+          </a:p>
+        </p:txBody>
+      </p:sp>
+      <p:sp>
+        <p:nvSpPr>
+          <p:cNvPr id="43" name="Shape 41"/>
+          <p:cNvSpPr/>
+          <p:nvPr/>
+        </p:nvSpPr>
+        <p:spPr>
+          <a:xfrm>
+            <a:off x="9544873" y="3236976"/>
+            <a:ext cx="2006742" cy="1188720"/>
+          </a:xfrm>
+          <a:prstGeom prst="roundRect">
+            <a:avLst>
+              <a:gd name="adj" fmla="val 5385"/>
+            </a:avLst>
+          </a:prstGeom>
+          <a:solidFill>
+            <a:srgbClr val="FFFFFF"/>
+          </a:solidFill>
+          <a:ln w="12700">
+            <a:solidFill>
+              <a:srgbClr val="D3E0FF"/>
+            </a:solidFill>
+            <a:prstDash val="solid"/>
+          </a:ln>
+        </p:spPr>
+      </p:sp>
+      <p:sp>
+        <p:nvSpPr>
+          <p:cNvPr id="44" name="Text 42"/>
+          <p:cNvSpPr txBox="1"/>
+          <p:nvPr/>
+        </p:nvSpPr>
+        <p:spPr>
+          <a:xfrm>
+            <a:off x="9764329" y="3419856"/>
+            <a:ext cx="1567830" cy="822960"/>
+          </a:xfrm>
+          <a:prstGeom prst="rect">
+            <a:avLst/>
+          </a:prstGeom>
+          <a:noFill/>
+          <a:ln/>
+        </p:spPr>
+        <p:txBody>
+          <a:bodyPr wrap="square" lIns="0" tIns="0" rIns="0" bIns="0" rtlCol="0" anchor="ctr"/>
+          <a:lstStyle/>
+          <a:p>
+            <a:pPr indent="0" marL="0">
+              <a:lnSpc>
+                <a:spcPct val="130000"/>
+              </a:lnSpc>
+              <a:buNone/>
+            </a:pPr>
+            <a:r>
+              <a:rPr lang="en-US" sz="1150" dirty="0">
+                <a:solidFill>
+                  <a:srgbClr val="27374F"/>
+                </a:solidFill>
+                <a:latin typeface="Calibri" pitchFamily="34" charset="0"/>
+                <a:ea typeface="Calibri" pitchFamily="34" charset="-122"/>
+                <a:cs typeface="Calibri" pitchFamily="34" charset="-120"/>
+              </a:rPr>
+              <a:t>테스트 기록과</a:t>
+            </a:r>
+            <a:endParaRPr lang="en-US" sz="1150" dirty="0"/>
+          </a:p>
+          <a:p>
+            <a:pPr indent="0" marL="0">
+              <a:lnSpc>
+                <a:spcPct val="130000"/>
+              </a:lnSpc>
+              <a:buNone/>
+            </a:pPr>
+            <a:r>
+              <a:rPr lang="en-US" sz="1150" dirty="0">
+                <a:solidFill>
+                  <a:srgbClr val="27374F"/>
+                </a:solidFill>
+                <a:latin typeface="Calibri" pitchFamily="34" charset="0"/>
+                <a:ea typeface="Calibri" pitchFamily="34" charset="-122"/>
+                <a:cs typeface="Calibri" pitchFamily="34" charset="-120"/>
+              </a:rPr>
+              <a:t>정리된 브랜치</a:t>
+            </a:r>
+            <a:endParaRPr lang="en-US" sz="1150" dirty="0"/>
+          </a:p>
+        </p:txBody>
+      </p:sp>
+      <p:sp>
+        <p:nvSpPr>
+          <p:cNvPr id="45" name="Shape 43"/>
+          <p:cNvSpPr/>
+          <p:nvPr/>
+        </p:nvSpPr>
+        <p:spPr>
+          <a:xfrm>
+            <a:off x="640080" y="4736592"/>
+            <a:ext cx="10911535" cy="914400"/>
+          </a:xfrm>
+          <a:prstGeom prst="roundRect">
+            <a:avLst>
+              <a:gd name="adj" fmla="val 6000"/>
+            </a:avLst>
+          </a:prstGeom>
+          <a:solidFill>
+            <a:srgbClr val="FDF2E6"/>
+          </a:solidFill>
+          <a:ln/>
+        </p:spPr>
+      </p:sp>
+      <p:sp>
+        <p:nvSpPr>
+          <p:cNvPr id="46" name="Shape 44"/>
+          <p:cNvSpPr/>
+          <p:nvPr/>
+        </p:nvSpPr>
+        <p:spPr>
+          <a:xfrm>
+            <a:off x="950976" y="5020056"/>
+            <a:ext cx="1133856" cy="347472"/>
+          </a:xfrm>
+          <a:prstGeom prst="roundRect">
+            <a:avLst>
+              <a:gd name="adj" fmla="val 50000"/>
+            </a:avLst>
+          </a:prstGeom>
+          <a:solidFill>
+            <a:srgbClr val="F2994A"/>
+          </a:solidFill>
+          <a:ln/>
+        </p:spPr>
+      </p:sp>
+      <p:sp>
+        <p:nvSpPr>
+          <p:cNvPr id="47" name="Text 45"/>
+          <p:cNvSpPr txBox="1"/>
+          <p:nvPr/>
+        </p:nvSpPr>
+        <p:spPr>
+          <a:xfrm>
+            <a:off x="950976" y="5020056"/>
+            <a:ext cx="1133856" cy="347472"/>
+          </a:xfrm>
+          <a:prstGeom prst="rect">
+            <a:avLst/>
+          </a:prstGeom>
+          <a:noFill/>
+          <a:ln/>
+        </p:spPr>
+        <p:txBody>
+          <a:bodyPr wrap="square" lIns="0" tIns="0" rIns="0" bIns="0" rtlCol="0" anchor="ctr"/>
+          <a:lstStyle/>
+          <a:p>
+            <a:pPr algn="ctr" indent="0" marL="0">
+              <a:buNone/>
+            </a:pPr>
+            <a:r>
+              <a:rPr lang="en-US" sz="1050" b="1" dirty="0">
+                <a:solidFill>
+                  <a:srgbClr val="FFFFFF"/>
+                </a:solidFill>
+                <a:latin typeface="Calibri" pitchFamily="34" charset="0"/>
+                <a:ea typeface="Calibri" pitchFamily="34" charset="-122"/>
+                <a:cs typeface="Calibri" pitchFamily="34" charset="-120"/>
+              </a:rPr>
+              <a:t>오류 발생 시</a:t>
+            </a:r>
+            <a:endParaRPr lang="en-US" sz="1050" dirty="0"/>
+          </a:p>
+        </p:txBody>
+      </p:sp>
+      <p:sp>
+        <p:nvSpPr>
+          <p:cNvPr id="48" name="Text 46"/>
+          <p:cNvSpPr txBox="1"/>
+          <p:nvPr/>
+        </p:nvSpPr>
+        <p:spPr>
+          <a:xfrm>
+            <a:off x="2249424" y="4736592"/>
+            <a:ext cx="8991295" cy="914400"/>
+          </a:xfrm>
+          <a:prstGeom prst="rect">
+            <a:avLst/>
+          </a:prstGeom>
+          <a:noFill/>
+          <a:ln/>
+        </p:spPr>
+        <p:txBody>
+          <a:bodyPr wrap="square" lIns="0" tIns="0" rIns="0" bIns="0" rtlCol="0" anchor="ctr"/>
+          <a:lstStyle/>
+          <a:p>
+            <a:pPr indent="0" marL="0">
+              <a:buNone/>
+            </a:pPr>
+            <a:r>
               <a:rPr lang="en-US" sz="1250" dirty="0">
                 <a:solidFill>
-                  <a:srgbClr val="5B6577"/>
-                </a:solidFill>
-                <a:latin typeface="Calibri" pitchFamily="34" charset="0"/>
-                <a:ea typeface="Calibri" pitchFamily="34" charset="-122"/>
-                <a:cs typeface="Calibri" pitchFamily="34" charset="-120"/>
-              </a:rPr>
-              <a:t>Codex에서 $로 고르거나 “Brainstorming Skill을 써줘”라고 지정합니다.</a:t>
+                  <a:srgbClr val="7E6242"/>
+                </a:solidFill>
+                <a:latin typeface="Calibri" pitchFamily="34" charset="0"/>
+                <a:ea typeface="Calibri" pitchFamily="34" charset="-122"/>
+                <a:cs typeface="Calibri" pitchFamily="34" charset="-120"/>
+              </a:rPr>
+              <a:t>추측하지 않고 </a:t>
+            </a:r>
+            <a:pPr indent="0" marL="0">
+              <a:buNone/>
+            </a:pPr>
+            <a:r>
+              <a:rPr lang="en-US" sz="1250" b="1" dirty="0">
+                <a:solidFill>
+                  <a:srgbClr val="A9541A"/>
+                </a:solidFill>
+                <a:latin typeface="Calibri" pitchFamily="34" charset="0"/>
+                <a:ea typeface="Calibri" pitchFamily="34" charset="-122"/>
+                <a:cs typeface="Calibri" pitchFamily="34" charset="-120"/>
+              </a:rPr>
+              <a:t>재현 → 증거 → 원인</a:t>
+            </a:r>
+            <a:pPr indent="0" marL="0">
+              <a:buNone/>
+            </a:pPr>
+            <a:r>
+              <a:rPr lang="en-US" sz="1250" dirty="0">
+                <a:solidFill>
+                  <a:srgbClr val="7E6242"/>
+                </a:solidFill>
+                <a:latin typeface="Calibri" pitchFamily="34" charset="0"/>
+                <a:ea typeface="Calibri" pitchFamily="34" charset="-122"/>
+                <a:cs typeface="Calibri" pitchFamily="34" charset="-120"/>
+              </a:rPr>
+              <a:t> 순으로 확인한 뒤, 멈췄던 단계로 돌아갑니다. (Systematic Debugging)</a:t>
             </a:r>
             <a:endParaRPr lang="en-US" sz="1250" dirty="0"/>
           </a:p>
@@ -14310,7 +15268,7 @@
       </p:sp>
       <p:sp>
         <p:nvSpPr>
-          <p:cNvPr id="40" name="Text 38"/>
+          <p:cNvPr id="49" name="Text 47"/>
           <p:cNvSpPr txBox="1"/>
           <p:nvPr/>
         </p:nvSpPr>
@@ -14341,7 +15299,7 @@
                 <a:ea typeface="Calibri" pitchFamily="34" charset="-122"/>
                 <a:cs typeface="Calibri" pitchFamily="34" charset="-120"/>
               </a:rPr>
-              <a:t>출처 · learn.chatgpt.com/ko-KR/docs/skills-and-plugins</a:t>
+              <a:t>TDD = 실패하는 테스트를 먼저 쓰고, 그 테스트를 통과시키는 코드를 쓰는 방식 · 각 단계에 쓰이는 Skill은 다음 장부터 살펴봅니다.</a:t>
             </a:r>
             <a:endParaRPr lang="en-US" sz="950" dirty="0"/>
           </a:p>
@@ -14412,7 +15370,7 @@
                 <a:ea typeface="Calibri" pitchFamily="34" charset="-122"/>
                 <a:cs typeface="Calibri" pitchFamily="34" charset="-120"/>
               </a:rPr>
-              <a:t>03 어떻게 고르는가</a:t>
+              <a:t>03 어떤 Skill이 있는가</a:t>
             </a:r>
             <a:endParaRPr lang="en-US" sz="1100" dirty="0"/>
           </a:p>
@@ -14454,7 +15412,7 @@
                 <a:ea typeface="Calibri" pitchFamily="34" charset="-122"/>
                 <a:cs typeface="Calibri" pitchFamily="34" charset="-120"/>
               </a:rPr>
-              <a:t>앞 단계에서 나온 것이 다음 단계의 재료가 됩니다</a:t>
+              <a:t>14개 Skill은 세 묶음으로 나뉩니다</a:t>
             </a:r>
             <a:endParaRPr lang="en-US" sz="2400" dirty="0"/>
           </a:p>
@@ -14501,64 +15459,69 @@
       </p:sp>
       <p:sp>
         <p:nvSpPr>
-          <p:cNvPr id="5" name="Text 3"/>
-          <p:cNvSpPr txBox="1"/>
-          <p:nvPr/>
-        </p:nvSpPr>
-        <p:spPr>
-          <a:xfrm>
-            <a:off x="640080" y="1188720"/>
-            <a:ext cx="5486400" cy="237744"/>
-          </a:xfrm>
-          <a:prstGeom prst="rect">
-            <a:avLst/>
-          </a:prstGeom>
-          <a:noFill/>
-          <a:ln/>
-        </p:spPr>
-        <p:txBody>
-          <a:bodyPr wrap="square" lIns="0" tIns="0" rIns="0" bIns="0" rtlCol="0" anchor="ctr"/>
-          <a:lstStyle/>
-          <a:p>
-            <a:pPr indent="0" marL="0">
-              <a:buNone/>
-            </a:pPr>
-            <a:r>
-              <a:rPr lang="en-US" sz="1050" b="1" spc="60" kern="0" dirty="0">
-                <a:solidFill>
-                  <a:srgbClr val="8A94A6"/>
-                </a:solidFill>
-                <a:latin typeface="Calibri" pitchFamily="34" charset="0"/>
-                <a:ea typeface="Calibri" pitchFamily="34" charset="-122"/>
-                <a:cs typeface="Calibri" pitchFamily="34" charset="-120"/>
-              </a:rPr>
-              <a:t>무엇을 하는 단계인가</a:t>
-            </a:r>
-            <a:endParaRPr lang="en-US" sz="1050" dirty="0"/>
-          </a:p>
-        </p:txBody>
-      </p:sp>
-      <p:sp>
-        <p:nvSpPr>
-          <p:cNvPr id="6" name="Shape 4"/>
+          <p:cNvPr id="5" name="Shape 3"/>
           <p:cNvSpPr/>
           <p:nvPr/>
         </p:nvSpPr>
         <p:spPr>
           <a:xfrm>
             <a:off x="640080" y="1481328"/>
-            <a:ext cx="2006742" cy="1207008"/>
+            <a:ext cx="3393338" cy="3566160"/>
           </a:xfrm>
           <a:prstGeom prst="roundRect">
             <a:avLst>
-              <a:gd name="adj" fmla="val 5303"/>
+              <a:gd name="adj" fmla="val 1886"/>
             </a:avLst>
           </a:prstGeom>
           <a:solidFill>
-            <a:srgbClr val="F2F4F8"/>
+            <a:srgbClr val="F6F7F9"/>
           </a:solidFill>
-          <a:ln/>
-        </p:spPr>
+          <a:ln w="12700">
+            <a:solidFill>
+              <a:srgbClr val="E5E8EE"/>
+            </a:solidFill>
+            <a:prstDash val="solid"/>
+          </a:ln>
+        </p:spPr>
+      </p:sp>
+      <p:sp>
+        <p:nvSpPr>
+          <p:cNvPr id="6" name="Text 4"/>
+          <p:cNvSpPr txBox="1"/>
+          <p:nvPr/>
+        </p:nvSpPr>
+        <p:spPr>
+          <a:xfrm>
+            <a:off x="1042416" y="1883664"/>
+            <a:ext cx="2588666" cy="1133856"/>
+          </a:xfrm>
+          <a:prstGeom prst="rect">
+            <a:avLst/>
+          </a:prstGeom>
+          <a:noFill/>
+          <a:ln/>
+        </p:spPr>
+        <p:txBody>
+          <a:bodyPr wrap="square" lIns="0" tIns="0" rIns="0" bIns="0" rtlCol="0" anchor="ctr"/>
+          <a:lstStyle/>
+          <a:p>
+            <a:pPr indent="0" marL="0">
+              <a:buNone/>
+            </a:pPr>
+            <a:r>
+              <a:rPr lang="en-US" sz="6600" b="1" dirty="0">
+                <a:solidFill>
+                  <a:srgbClr val="0F1B33"/>
+                </a:solidFill>
+                <a:latin typeface="Calibri" pitchFamily="34" charset="0"/>
+                <a:ea typeface="Calibri" pitchFamily="34" charset="-122"/>
+                <a:cs typeface="Calibri" pitchFamily="34" charset="-120"/>
+              </a:rPr>
+              <a:t>4</a:t>
+            </a:r>
+            <a:endParaRPr lang="en-US" sz="6600" dirty="0"/>
+          </a:p>
+        </p:txBody>
       </p:sp>
       <p:sp>
         <p:nvSpPr>
@@ -14568,24 +15531,24 @@
         </p:nvSpPr>
         <p:spPr>
           <a:xfrm>
-            <a:off x="859536" y="1609344"/>
-            <a:ext cx="1567830" cy="201168"/>
-          </a:xfrm>
-          <a:prstGeom prst="rect">
-            <a:avLst/>
-          </a:prstGeom>
-          <a:noFill/>
-          <a:ln/>
-        </p:spPr>
-        <p:txBody>
-          <a:bodyPr wrap="square" lIns="0" tIns="0" rIns="0" bIns="0" rtlCol="0" anchor="ctr"/>
-          <a:lstStyle/>
-          <a:p>
-            <a:pPr indent="0" marL="0">
-              <a:buNone/>
-            </a:pPr>
-            <a:r>
-              <a:rPr lang="en-US" sz="1000" b="1" dirty="0">
+            <a:off x="1042416" y="3054096"/>
+            <a:ext cx="2588666" cy="274320"/>
+          </a:xfrm>
+          <a:prstGeom prst="rect">
+            <a:avLst/>
+          </a:prstGeom>
+          <a:noFill/>
+          <a:ln/>
+        </p:spPr>
+        <p:txBody>
+          <a:bodyPr wrap="square" lIns="0" tIns="0" rIns="0" bIns="0" rtlCol="0" anchor="ctr"/>
+          <a:lstStyle/>
+          <a:p>
+            <a:pPr indent="0" marL="0">
+              <a:buNone/>
+            </a:pPr>
+            <a:r>
+              <a:rPr lang="en-US" sz="1200" dirty="0">
                 <a:solidFill>
                   <a:srgbClr val="8A94A6"/>
                 </a:solidFill>
@@ -14593,9 +15556,9 @@
                 <a:ea typeface="Calibri" pitchFamily="34" charset="-122"/>
                 <a:cs typeface="Calibri" pitchFamily="34" charset="-120"/>
               </a:rPr>
-              <a:t>01</a:t>
-            </a:r>
-            <a:endParaRPr lang="en-US" sz="1000" dirty="0"/>
+              <a:t>개 Skill</a:t>
+            </a:r>
+            <a:endParaRPr lang="en-US" sz="1200" dirty="0"/>
           </a:p>
         </p:txBody>
       </p:sp>
@@ -14607,8 +15570,47 @@
         </p:nvSpPr>
         <p:spPr>
           <a:xfrm>
-            <a:off x="859536" y="1847088"/>
-            <a:ext cx="1567830" cy="530352"/>
+            <a:off x="1042416" y="3456432"/>
+            <a:ext cx="2588666" cy="347472"/>
+          </a:xfrm>
+          <a:prstGeom prst="rect">
+            <a:avLst/>
+          </a:prstGeom>
+          <a:noFill/>
+          <a:ln/>
+        </p:spPr>
+        <p:txBody>
+          <a:bodyPr wrap="square" lIns="0" tIns="0" rIns="0" bIns="0" rtlCol="0" anchor="ctr"/>
+          <a:lstStyle/>
+          <a:p>
+            <a:pPr indent="0" marL="0">
+              <a:buNone/>
+            </a:pPr>
+            <a:r>
+              <a:rPr lang="en-US" sz="1900" b="1" dirty="0">
+                <a:solidFill>
+                  <a:srgbClr val="0F1B33"/>
+                </a:solidFill>
+                <a:latin typeface="Calibri" pitchFamily="34" charset="0"/>
+                <a:ea typeface="Calibri" pitchFamily="34" charset="-122"/>
+                <a:cs typeface="Calibri" pitchFamily="34" charset="-120"/>
+              </a:rPr>
+              <a:t>계획 · 준비</a:t>
+            </a:r>
+            <a:endParaRPr lang="en-US" sz="1900" dirty="0"/>
+          </a:p>
+        </p:txBody>
+      </p:sp>
+      <p:sp>
+        <p:nvSpPr>
+          <p:cNvPr id="9" name="Text 7"/>
+          <p:cNvSpPr txBox="1"/>
+          <p:nvPr/>
+        </p:nvSpPr>
+        <p:spPr>
+          <a:xfrm>
+            <a:off x="1042416" y="3913632"/>
+            <a:ext cx="2588666" cy="822960"/>
           </a:xfrm>
           <a:prstGeom prst="rect">
             <a:avLst/>
@@ -14622,61 +15624,22 @@
           <a:p>
             <a:pPr indent="0" marL="0">
               <a:lnSpc>
-                <a:spcPct val="115000"/>
+                <a:spcPct val="130000"/>
               </a:lnSpc>
               <a:buNone/>
             </a:pPr>
             <a:r>
-              <a:rPr lang="en-US" sz="1300" b="1" dirty="0">
-                <a:solidFill>
-                  <a:srgbClr val="0F1B33"/>
-                </a:solidFill>
-                <a:latin typeface="Calibri" pitchFamily="34" charset="0"/>
-                <a:ea typeface="Calibri" pitchFamily="34" charset="-122"/>
-                <a:cs typeface="Calibri" pitchFamily="34" charset="-120"/>
-              </a:rPr>
-              <a:t>하고 싶은 것 말하기</a:t>
-            </a:r>
-            <a:endParaRPr lang="en-US" sz="1300" dirty="0"/>
-          </a:p>
-        </p:txBody>
-      </p:sp>
-      <p:sp>
-        <p:nvSpPr>
-          <p:cNvPr id="9" name="Text 7"/>
-          <p:cNvSpPr txBox="1"/>
-          <p:nvPr/>
-        </p:nvSpPr>
-        <p:spPr>
-          <a:xfrm>
-            <a:off x="2646822" y="1920240"/>
-            <a:ext cx="219456" cy="329184"/>
-          </a:xfrm>
-          <a:prstGeom prst="rect">
-            <a:avLst/>
-          </a:prstGeom>
-          <a:noFill/>
-          <a:ln/>
-        </p:spPr>
-        <p:txBody>
-          <a:bodyPr wrap="square" lIns="0" tIns="0" rIns="0" bIns="0" rtlCol="0" anchor="ctr"/>
-          <a:lstStyle/>
-          <a:p>
-            <a:pPr algn="ctr" indent="0" marL="0">
-              <a:buNone/>
-            </a:pPr>
-            <a:r>
-              <a:rPr lang="en-US" sz="1300" b="1" dirty="0">
-                <a:solidFill>
-                  <a:srgbClr val="8A94A6"/>
-                </a:solidFill>
-                <a:latin typeface="Calibri" pitchFamily="34" charset="0"/>
-                <a:ea typeface="Calibri" pitchFamily="34" charset="-122"/>
-                <a:cs typeface="Calibri" pitchFamily="34" charset="-120"/>
-              </a:rPr>
-              <a:t>→</a:t>
-            </a:r>
-            <a:endParaRPr lang="en-US" sz="1300" dirty="0"/>
+              <a:rPr lang="en-US" sz="1250" dirty="0">
+                <a:solidFill>
+                  <a:srgbClr val="5B6577"/>
+                </a:solidFill>
+                <a:latin typeface="Calibri" pitchFamily="34" charset="0"/>
+                <a:ea typeface="Calibri" pitchFamily="34" charset="-122"/>
+                <a:cs typeface="Calibri" pitchFamily="34" charset="-120"/>
+              </a:rPr>
+              <a:t>코드를 쓰기 전에 무엇을 만들지, 어떤 순서로 할지 확정합니다.</a:t>
+            </a:r>
+            <a:endParaRPr lang="en-US" sz="1250" dirty="0"/>
           </a:p>
         </p:txBody>
       </p:sp>
@@ -14688,779 +15651,16 @@
         </p:nvSpPr>
         <p:spPr>
           <a:xfrm>
-            <a:off x="2866278" y="1481328"/>
-            <a:ext cx="2006742" cy="1207008"/>
+            <a:off x="4399178" y="1481328"/>
+            <a:ext cx="3393338" cy="3566160"/>
           </a:xfrm>
           <a:prstGeom prst="roundRect">
             <a:avLst>
-              <a:gd name="adj" fmla="val 5303"/>
+              <a:gd name="adj" fmla="val 1886"/>
             </a:avLst>
           </a:prstGeom>
           <a:solidFill>
-            <a:srgbClr val="E4EBFB"/>
-          </a:solidFill>
-          <a:ln/>
-        </p:spPr>
-      </p:sp>
-      <p:sp>
-        <p:nvSpPr>
-          <p:cNvPr id="11" name="Text 9"/>
-          <p:cNvSpPr txBox="1"/>
-          <p:nvPr/>
-        </p:nvSpPr>
-        <p:spPr>
-          <a:xfrm>
-            <a:off x="3085734" y="1609344"/>
-            <a:ext cx="1567830" cy="201168"/>
-          </a:xfrm>
-          <a:prstGeom prst="rect">
-            <a:avLst/>
-          </a:prstGeom>
-          <a:noFill/>
-          <a:ln/>
-        </p:spPr>
-        <p:txBody>
-          <a:bodyPr wrap="square" lIns="0" tIns="0" rIns="0" bIns="0" rtlCol="0" anchor="ctr"/>
-          <a:lstStyle/>
-          <a:p>
-            <a:pPr indent="0" marL="0">
-              <a:buNone/>
-            </a:pPr>
-            <a:r>
-              <a:rPr lang="en-US" sz="1000" b="1" dirty="0">
-                <a:solidFill>
-                  <a:srgbClr val="8A94A6"/>
-                </a:solidFill>
-                <a:latin typeface="Calibri" pitchFamily="34" charset="0"/>
-                <a:ea typeface="Calibri" pitchFamily="34" charset="-122"/>
-                <a:cs typeface="Calibri" pitchFamily="34" charset="-120"/>
-              </a:rPr>
-              <a:t>02</a:t>
-            </a:r>
-            <a:endParaRPr lang="en-US" sz="1000" dirty="0"/>
-          </a:p>
-        </p:txBody>
-      </p:sp>
-      <p:sp>
-        <p:nvSpPr>
-          <p:cNvPr id="12" name="Text 10"/>
-          <p:cNvSpPr txBox="1"/>
-          <p:nvPr/>
-        </p:nvSpPr>
-        <p:spPr>
-          <a:xfrm>
-            <a:off x="3085734" y="1847088"/>
-            <a:ext cx="1567830" cy="530352"/>
-          </a:xfrm>
-          <a:prstGeom prst="rect">
-            <a:avLst/>
-          </a:prstGeom>
-          <a:noFill/>
-          <a:ln/>
-        </p:spPr>
-        <p:txBody>
-          <a:bodyPr wrap="square" lIns="0" tIns="0" rIns="0" bIns="0" rtlCol="0" anchor="ctr"/>
-          <a:lstStyle/>
-          <a:p>
-            <a:pPr indent="0" marL="0">
-              <a:lnSpc>
-                <a:spcPct val="115000"/>
-              </a:lnSpc>
-              <a:buNone/>
-            </a:pPr>
-            <a:r>
-              <a:rPr lang="en-US" sz="1300" b="1" dirty="0">
-                <a:solidFill>
-                  <a:srgbClr val="0F1B33"/>
-                </a:solidFill>
-                <a:latin typeface="Calibri" pitchFamily="34" charset="0"/>
-                <a:ea typeface="Calibri" pitchFamily="34" charset="-122"/>
-                <a:cs typeface="Calibri" pitchFamily="34" charset="-120"/>
-              </a:rPr>
-              <a:t>질문으로 조건 좁히기</a:t>
-            </a:r>
-            <a:endParaRPr lang="en-US" sz="1300" dirty="0"/>
-          </a:p>
-        </p:txBody>
-      </p:sp>
-      <p:sp>
-        <p:nvSpPr>
-          <p:cNvPr id="13" name="Text 11"/>
-          <p:cNvSpPr txBox="1"/>
-          <p:nvPr/>
-        </p:nvSpPr>
-        <p:spPr>
-          <a:xfrm>
-            <a:off x="3085734" y="2395728"/>
-            <a:ext cx="1567830" cy="219456"/>
-          </a:xfrm>
-          <a:prstGeom prst="rect">
-            <a:avLst/>
-          </a:prstGeom>
-          <a:noFill/>
-          <a:ln/>
-        </p:spPr>
-        <p:txBody>
-          <a:bodyPr wrap="square" lIns="0" tIns="0" rIns="0" bIns="0" rtlCol="0" anchor="ctr"/>
-          <a:lstStyle/>
-          <a:p>
-            <a:pPr indent="0" marL="0">
-              <a:buNone/>
-            </a:pPr>
-            <a:r>
-              <a:rPr lang="en-US" sz="950" dirty="0">
-                <a:solidFill>
-                  <a:srgbClr val="5B6577"/>
-                </a:solidFill>
-                <a:latin typeface="Calibri" pitchFamily="34" charset="0"/>
-                <a:ea typeface="Calibri" pitchFamily="34" charset="-122"/>
-                <a:cs typeface="Calibri" pitchFamily="34" charset="-120"/>
-              </a:rPr>
-              <a:t>Brainstorming</a:t>
-            </a:r>
-            <a:endParaRPr lang="en-US" sz="950" dirty="0"/>
-          </a:p>
-        </p:txBody>
-      </p:sp>
-      <p:sp>
-        <p:nvSpPr>
-          <p:cNvPr id="14" name="Text 12"/>
-          <p:cNvSpPr txBox="1"/>
-          <p:nvPr/>
-        </p:nvSpPr>
-        <p:spPr>
-          <a:xfrm>
-            <a:off x="4873020" y="1920240"/>
-            <a:ext cx="219456" cy="329184"/>
-          </a:xfrm>
-          <a:prstGeom prst="rect">
-            <a:avLst/>
-          </a:prstGeom>
-          <a:noFill/>
-          <a:ln/>
-        </p:spPr>
-        <p:txBody>
-          <a:bodyPr wrap="square" lIns="0" tIns="0" rIns="0" bIns="0" rtlCol="0" anchor="ctr"/>
-          <a:lstStyle/>
-          <a:p>
-            <a:pPr algn="ctr" indent="0" marL="0">
-              <a:buNone/>
-            </a:pPr>
-            <a:r>
-              <a:rPr lang="en-US" sz="1300" b="1" dirty="0">
-                <a:solidFill>
-                  <a:srgbClr val="8A94A6"/>
-                </a:solidFill>
-                <a:latin typeface="Calibri" pitchFamily="34" charset="0"/>
-                <a:ea typeface="Calibri" pitchFamily="34" charset="-122"/>
-                <a:cs typeface="Calibri" pitchFamily="34" charset="-120"/>
-              </a:rPr>
-              <a:t>→</a:t>
-            </a:r>
-            <a:endParaRPr lang="en-US" sz="1300" dirty="0"/>
-          </a:p>
-        </p:txBody>
-      </p:sp>
-      <p:sp>
-        <p:nvSpPr>
-          <p:cNvPr id="15" name="Shape 13"/>
-          <p:cNvSpPr/>
-          <p:nvPr/>
-        </p:nvSpPr>
-        <p:spPr>
-          <a:xfrm>
-            <a:off x="5092476" y="1481328"/>
-            <a:ext cx="2006742" cy="1207008"/>
-          </a:xfrm>
-          <a:prstGeom prst="roundRect">
-            <a:avLst>
-              <a:gd name="adj" fmla="val 5303"/>
-            </a:avLst>
-          </a:prstGeom>
-          <a:solidFill>
-            <a:srgbClr val="CBD9FA"/>
-          </a:solidFill>
-          <a:ln/>
-        </p:spPr>
-      </p:sp>
-      <p:sp>
-        <p:nvSpPr>
-          <p:cNvPr id="16" name="Text 14"/>
-          <p:cNvSpPr txBox="1"/>
-          <p:nvPr/>
-        </p:nvSpPr>
-        <p:spPr>
-          <a:xfrm>
-            <a:off x="5311932" y="1609344"/>
-            <a:ext cx="1567830" cy="201168"/>
-          </a:xfrm>
-          <a:prstGeom prst="rect">
-            <a:avLst/>
-          </a:prstGeom>
-          <a:noFill/>
-          <a:ln/>
-        </p:spPr>
-        <p:txBody>
-          <a:bodyPr wrap="square" lIns="0" tIns="0" rIns="0" bIns="0" rtlCol="0" anchor="ctr"/>
-          <a:lstStyle/>
-          <a:p>
-            <a:pPr indent="0" marL="0">
-              <a:buNone/>
-            </a:pPr>
-            <a:r>
-              <a:rPr lang="en-US" sz="1000" b="1" dirty="0">
-                <a:solidFill>
-                  <a:srgbClr val="8A94A6"/>
-                </a:solidFill>
-                <a:latin typeface="Calibri" pitchFamily="34" charset="0"/>
-                <a:ea typeface="Calibri" pitchFamily="34" charset="-122"/>
-                <a:cs typeface="Calibri" pitchFamily="34" charset="-120"/>
-              </a:rPr>
-              <a:t>03</a:t>
-            </a:r>
-            <a:endParaRPr lang="en-US" sz="1000" dirty="0"/>
-          </a:p>
-        </p:txBody>
-      </p:sp>
-      <p:sp>
-        <p:nvSpPr>
-          <p:cNvPr id="17" name="Text 15"/>
-          <p:cNvSpPr txBox="1"/>
-          <p:nvPr/>
-        </p:nvSpPr>
-        <p:spPr>
-          <a:xfrm>
-            <a:off x="5311932" y="1847088"/>
-            <a:ext cx="1567830" cy="530352"/>
-          </a:xfrm>
-          <a:prstGeom prst="rect">
-            <a:avLst/>
-          </a:prstGeom>
-          <a:noFill/>
-          <a:ln/>
-        </p:spPr>
-        <p:txBody>
-          <a:bodyPr wrap="square" lIns="0" tIns="0" rIns="0" bIns="0" rtlCol="0" anchor="ctr"/>
-          <a:lstStyle/>
-          <a:p>
-            <a:pPr indent="0" marL="0">
-              <a:lnSpc>
-                <a:spcPct val="115000"/>
-              </a:lnSpc>
-              <a:buNone/>
-            </a:pPr>
-            <a:r>
-              <a:rPr lang="en-US" sz="1300" b="1" dirty="0">
-                <a:solidFill>
-                  <a:srgbClr val="0F1B33"/>
-                </a:solidFill>
-                <a:latin typeface="Calibri" pitchFamily="34" charset="0"/>
-                <a:ea typeface="Calibri" pitchFamily="34" charset="-122"/>
-                <a:cs typeface="Calibri" pitchFamily="34" charset="-120"/>
-              </a:rPr>
-              <a:t>할 일을 잘게 쪼개기</a:t>
-            </a:r>
-            <a:endParaRPr lang="en-US" sz="1300" dirty="0"/>
-          </a:p>
-        </p:txBody>
-      </p:sp>
-      <p:sp>
-        <p:nvSpPr>
-          <p:cNvPr id="18" name="Text 16"/>
-          <p:cNvSpPr txBox="1"/>
-          <p:nvPr/>
-        </p:nvSpPr>
-        <p:spPr>
-          <a:xfrm>
-            <a:off x="5311932" y="2395728"/>
-            <a:ext cx="1567830" cy="219456"/>
-          </a:xfrm>
-          <a:prstGeom prst="rect">
-            <a:avLst/>
-          </a:prstGeom>
-          <a:noFill/>
-          <a:ln/>
-        </p:spPr>
-        <p:txBody>
-          <a:bodyPr wrap="square" lIns="0" tIns="0" rIns="0" bIns="0" rtlCol="0" anchor="ctr"/>
-          <a:lstStyle/>
-          <a:p>
-            <a:pPr indent="0" marL="0">
-              <a:buNone/>
-            </a:pPr>
-            <a:r>
-              <a:rPr lang="en-US" sz="950" dirty="0">
-                <a:solidFill>
-                  <a:srgbClr val="5B6577"/>
-                </a:solidFill>
-                <a:latin typeface="Calibri" pitchFamily="34" charset="0"/>
-                <a:ea typeface="Calibri" pitchFamily="34" charset="-122"/>
-                <a:cs typeface="Calibri" pitchFamily="34" charset="-120"/>
-              </a:rPr>
-              <a:t>Writing Plans</a:t>
-            </a:r>
-            <a:endParaRPr lang="en-US" sz="950" dirty="0"/>
-          </a:p>
-        </p:txBody>
-      </p:sp>
-      <p:sp>
-        <p:nvSpPr>
-          <p:cNvPr id="19" name="Text 17"/>
-          <p:cNvSpPr txBox="1"/>
-          <p:nvPr/>
-        </p:nvSpPr>
-        <p:spPr>
-          <a:xfrm>
-            <a:off x="7099219" y="1920240"/>
-            <a:ext cx="219456" cy="329184"/>
-          </a:xfrm>
-          <a:prstGeom prst="rect">
-            <a:avLst/>
-          </a:prstGeom>
-          <a:noFill/>
-          <a:ln/>
-        </p:spPr>
-        <p:txBody>
-          <a:bodyPr wrap="square" lIns="0" tIns="0" rIns="0" bIns="0" rtlCol="0" anchor="ctr"/>
-          <a:lstStyle/>
-          <a:p>
-            <a:pPr algn="ctr" indent="0" marL="0">
-              <a:buNone/>
-            </a:pPr>
-            <a:r>
-              <a:rPr lang="en-US" sz="1300" b="1" dirty="0">
-                <a:solidFill>
-                  <a:srgbClr val="8A94A6"/>
-                </a:solidFill>
-                <a:latin typeface="Calibri" pitchFamily="34" charset="0"/>
-                <a:ea typeface="Calibri" pitchFamily="34" charset="-122"/>
-                <a:cs typeface="Calibri" pitchFamily="34" charset="-120"/>
-              </a:rPr>
-              <a:t>→</a:t>
-            </a:r>
-            <a:endParaRPr lang="en-US" sz="1300" dirty="0"/>
-          </a:p>
-        </p:txBody>
-      </p:sp>
-      <p:sp>
-        <p:nvSpPr>
-          <p:cNvPr id="20" name="Shape 18"/>
-          <p:cNvSpPr/>
-          <p:nvPr/>
-        </p:nvSpPr>
-        <p:spPr>
-          <a:xfrm>
-            <a:off x="7318675" y="1481328"/>
-            <a:ext cx="2006742" cy="1207008"/>
-          </a:xfrm>
-          <a:prstGeom prst="roundRect">
-            <a:avLst>
-              <a:gd name="adj" fmla="val 5303"/>
-            </a:avLst>
-          </a:prstGeom>
-          <a:solidFill>
-            <a:srgbClr val="5B8BFF"/>
-          </a:solidFill>
-          <a:ln/>
-        </p:spPr>
-      </p:sp>
-      <p:sp>
-        <p:nvSpPr>
-          <p:cNvPr id="21" name="Text 19"/>
-          <p:cNvSpPr txBox="1"/>
-          <p:nvPr/>
-        </p:nvSpPr>
-        <p:spPr>
-          <a:xfrm>
-            <a:off x="7538131" y="1609344"/>
-            <a:ext cx="1567830" cy="201168"/>
-          </a:xfrm>
-          <a:prstGeom prst="rect">
-            <a:avLst/>
-          </a:prstGeom>
-          <a:noFill/>
-          <a:ln/>
-        </p:spPr>
-        <p:txBody>
-          <a:bodyPr wrap="square" lIns="0" tIns="0" rIns="0" bIns="0" rtlCol="0" anchor="ctr"/>
-          <a:lstStyle/>
-          <a:p>
-            <a:pPr indent="0" marL="0">
-              <a:buNone/>
-            </a:pPr>
-            <a:r>
-              <a:rPr lang="en-US" sz="1000" b="1" dirty="0">
-                <a:solidFill>
-                  <a:srgbClr val="9FB8FF"/>
-                </a:solidFill>
-                <a:latin typeface="Calibri" pitchFamily="34" charset="0"/>
-                <a:ea typeface="Calibri" pitchFamily="34" charset="-122"/>
-                <a:cs typeface="Calibri" pitchFamily="34" charset="-120"/>
-              </a:rPr>
-              <a:t>04</a:t>
-            </a:r>
-            <a:endParaRPr lang="en-US" sz="1000" dirty="0"/>
-          </a:p>
-        </p:txBody>
-      </p:sp>
-      <p:sp>
-        <p:nvSpPr>
-          <p:cNvPr id="22" name="Text 20"/>
-          <p:cNvSpPr txBox="1"/>
-          <p:nvPr/>
-        </p:nvSpPr>
-        <p:spPr>
-          <a:xfrm>
-            <a:off x="7538131" y="1847088"/>
-            <a:ext cx="1567830" cy="530352"/>
-          </a:xfrm>
-          <a:prstGeom prst="rect">
-            <a:avLst/>
-          </a:prstGeom>
-          <a:noFill/>
-          <a:ln/>
-        </p:spPr>
-        <p:txBody>
-          <a:bodyPr wrap="square" lIns="0" tIns="0" rIns="0" bIns="0" rtlCol="0" anchor="ctr"/>
-          <a:lstStyle/>
-          <a:p>
-            <a:pPr indent="0" marL="0">
-              <a:lnSpc>
-                <a:spcPct val="115000"/>
-              </a:lnSpc>
-              <a:buNone/>
-            </a:pPr>
-            <a:r>
-              <a:rPr lang="en-US" sz="1300" b="1" dirty="0">
-                <a:solidFill>
-                  <a:srgbClr val="FFFFFF"/>
-                </a:solidFill>
-                <a:latin typeface="Calibri" pitchFamily="34" charset="0"/>
-                <a:ea typeface="Calibri" pitchFamily="34" charset="-122"/>
-                <a:cs typeface="Calibri" pitchFamily="34" charset="-120"/>
-              </a:rPr>
-              <a:t>테스트 먼저, 구현 나중</a:t>
-            </a:r>
-            <a:endParaRPr lang="en-US" sz="1300" dirty="0"/>
-          </a:p>
-        </p:txBody>
-      </p:sp>
-      <p:sp>
-        <p:nvSpPr>
-          <p:cNvPr id="23" name="Text 21"/>
-          <p:cNvSpPr txBox="1"/>
-          <p:nvPr/>
-        </p:nvSpPr>
-        <p:spPr>
-          <a:xfrm>
-            <a:off x="7538131" y="2395728"/>
-            <a:ext cx="1567830" cy="219456"/>
-          </a:xfrm>
-          <a:prstGeom prst="rect">
-            <a:avLst/>
-          </a:prstGeom>
-          <a:noFill/>
-          <a:ln/>
-        </p:spPr>
-        <p:txBody>
-          <a:bodyPr wrap="square" lIns="0" tIns="0" rIns="0" bIns="0" rtlCol="0" anchor="ctr"/>
-          <a:lstStyle/>
-          <a:p>
-            <a:pPr indent="0" marL="0">
-              <a:buNone/>
-            </a:pPr>
-            <a:r>
-              <a:rPr lang="en-US" sz="950" dirty="0">
-                <a:solidFill>
-                  <a:srgbClr val="DCE7FF"/>
-                </a:solidFill>
-                <a:latin typeface="Calibri" pitchFamily="34" charset="0"/>
-                <a:ea typeface="Calibri" pitchFamily="34" charset="-122"/>
-                <a:cs typeface="Calibri" pitchFamily="34" charset="-120"/>
-              </a:rPr>
-              <a:t>TDD</a:t>
-            </a:r>
-            <a:endParaRPr lang="en-US" sz="950" dirty="0"/>
-          </a:p>
-        </p:txBody>
-      </p:sp>
-      <p:sp>
-        <p:nvSpPr>
-          <p:cNvPr id="24" name="Text 22"/>
-          <p:cNvSpPr txBox="1"/>
-          <p:nvPr/>
-        </p:nvSpPr>
-        <p:spPr>
-          <a:xfrm>
-            <a:off x="9325417" y="1920240"/>
-            <a:ext cx="219456" cy="329184"/>
-          </a:xfrm>
-          <a:prstGeom prst="rect">
-            <a:avLst/>
-          </a:prstGeom>
-          <a:noFill/>
-          <a:ln/>
-        </p:spPr>
-        <p:txBody>
-          <a:bodyPr wrap="square" lIns="0" tIns="0" rIns="0" bIns="0" rtlCol="0" anchor="ctr"/>
-          <a:lstStyle/>
-          <a:p>
-            <a:pPr algn="ctr" indent="0" marL="0">
-              <a:buNone/>
-            </a:pPr>
-            <a:r>
-              <a:rPr lang="en-US" sz="1300" b="1" dirty="0">
-                <a:solidFill>
-                  <a:srgbClr val="8A94A6"/>
-                </a:solidFill>
-                <a:latin typeface="Calibri" pitchFamily="34" charset="0"/>
-                <a:ea typeface="Calibri" pitchFamily="34" charset="-122"/>
-                <a:cs typeface="Calibri" pitchFamily="34" charset="-120"/>
-              </a:rPr>
-              <a:t>→</a:t>
-            </a:r>
-            <a:endParaRPr lang="en-US" sz="1300" dirty="0"/>
-          </a:p>
-        </p:txBody>
-      </p:sp>
-      <p:sp>
-        <p:nvSpPr>
-          <p:cNvPr id="25" name="Shape 23"/>
-          <p:cNvSpPr/>
-          <p:nvPr/>
-        </p:nvSpPr>
-        <p:spPr>
-          <a:xfrm>
-            <a:off x="9544873" y="1481328"/>
-            <a:ext cx="2006742" cy="1207008"/>
-          </a:xfrm>
-          <a:prstGeom prst="roundRect">
-            <a:avLst>
-              <a:gd name="adj" fmla="val 5303"/>
-            </a:avLst>
-          </a:prstGeom>
-          <a:solidFill>
-            <a:srgbClr val="0F1B33"/>
-          </a:solidFill>
-          <a:ln/>
-        </p:spPr>
-      </p:sp>
-      <p:sp>
-        <p:nvSpPr>
-          <p:cNvPr id="26" name="Text 24"/>
-          <p:cNvSpPr txBox="1"/>
-          <p:nvPr/>
-        </p:nvSpPr>
-        <p:spPr>
-          <a:xfrm>
-            <a:off x="9764329" y="1609344"/>
-            <a:ext cx="1567830" cy="201168"/>
-          </a:xfrm>
-          <a:prstGeom prst="rect">
-            <a:avLst/>
-          </a:prstGeom>
-          <a:noFill/>
-          <a:ln/>
-        </p:spPr>
-        <p:txBody>
-          <a:bodyPr wrap="square" lIns="0" tIns="0" rIns="0" bIns="0" rtlCol="0" anchor="ctr"/>
-          <a:lstStyle/>
-          <a:p>
-            <a:pPr indent="0" marL="0">
-              <a:buNone/>
-            </a:pPr>
-            <a:r>
-              <a:rPr lang="en-US" sz="1000" b="1" dirty="0">
-                <a:solidFill>
-                  <a:srgbClr val="9FB8FF"/>
-                </a:solidFill>
-                <a:latin typeface="Calibri" pitchFamily="34" charset="0"/>
-                <a:ea typeface="Calibri" pitchFamily="34" charset="-122"/>
-                <a:cs typeface="Calibri" pitchFamily="34" charset="-120"/>
-              </a:rPr>
-              <a:t>05</a:t>
-            </a:r>
-            <a:endParaRPr lang="en-US" sz="1000" dirty="0"/>
-          </a:p>
-        </p:txBody>
-      </p:sp>
-      <p:sp>
-        <p:nvSpPr>
-          <p:cNvPr id="27" name="Text 25"/>
-          <p:cNvSpPr txBox="1"/>
-          <p:nvPr/>
-        </p:nvSpPr>
-        <p:spPr>
-          <a:xfrm>
-            <a:off x="9764329" y="1847088"/>
-            <a:ext cx="1567830" cy="530352"/>
-          </a:xfrm>
-          <a:prstGeom prst="rect">
-            <a:avLst/>
-          </a:prstGeom>
-          <a:noFill/>
-          <a:ln/>
-        </p:spPr>
-        <p:txBody>
-          <a:bodyPr wrap="square" lIns="0" tIns="0" rIns="0" bIns="0" rtlCol="0" anchor="ctr"/>
-          <a:lstStyle/>
-          <a:p>
-            <a:pPr indent="0" marL="0">
-              <a:lnSpc>
-                <a:spcPct val="115000"/>
-              </a:lnSpc>
-              <a:buNone/>
-            </a:pPr>
-            <a:r>
-              <a:rPr lang="en-US" sz="1300" b="1" dirty="0">
-                <a:solidFill>
-                  <a:srgbClr val="FFFFFF"/>
-                </a:solidFill>
-                <a:latin typeface="Calibri" pitchFamily="34" charset="0"/>
-                <a:ea typeface="Calibri" pitchFamily="34" charset="-122"/>
-                <a:cs typeface="Calibri" pitchFamily="34" charset="-120"/>
-              </a:rPr>
-              <a:t>증거로 확인하고 끝내기</a:t>
-            </a:r>
-            <a:endParaRPr lang="en-US" sz="1300" dirty="0"/>
-          </a:p>
-        </p:txBody>
-      </p:sp>
-      <p:sp>
-        <p:nvSpPr>
-          <p:cNvPr id="28" name="Text 26"/>
-          <p:cNvSpPr txBox="1"/>
-          <p:nvPr/>
-        </p:nvSpPr>
-        <p:spPr>
-          <a:xfrm>
-            <a:off x="9764329" y="2395728"/>
-            <a:ext cx="1567830" cy="219456"/>
-          </a:xfrm>
-          <a:prstGeom prst="rect">
-            <a:avLst/>
-          </a:prstGeom>
-          <a:noFill/>
-          <a:ln/>
-        </p:spPr>
-        <p:txBody>
-          <a:bodyPr wrap="square" lIns="0" tIns="0" rIns="0" bIns="0" rtlCol="0" anchor="ctr"/>
-          <a:lstStyle/>
-          <a:p>
-            <a:pPr indent="0" marL="0">
-              <a:buNone/>
-            </a:pPr>
-            <a:r>
-              <a:rPr lang="en-US" sz="950" dirty="0">
-                <a:solidFill>
-                  <a:srgbClr val="8FA2BC"/>
-                </a:solidFill>
-                <a:latin typeface="Calibri" pitchFamily="34" charset="0"/>
-                <a:ea typeface="Calibri" pitchFamily="34" charset="-122"/>
-                <a:cs typeface="Calibri" pitchFamily="34" charset="-120"/>
-              </a:rPr>
-              <a:t>검증 · 완료</a:t>
-            </a:r>
-            <a:endParaRPr lang="en-US" sz="950" dirty="0"/>
-          </a:p>
-        </p:txBody>
-      </p:sp>
-      <p:sp>
-        <p:nvSpPr>
-          <p:cNvPr id="29" name="Text 27"/>
-          <p:cNvSpPr txBox="1"/>
-          <p:nvPr/>
-        </p:nvSpPr>
-        <p:spPr>
-          <a:xfrm>
-            <a:off x="640080" y="2926080"/>
-            <a:ext cx="5486400" cy="237744"/>
-          </a:xfrm>
-          <a:prstGeom prst="rect">
-            <a:avLst/>
-          </a:prstGeom>
-          <a:noFill/>
-          <a:ln/>
-        </p:spPr>
-        <p:txBody>
-          <a:bodyPr wrap="square" lIns="0" tIns="0" rIns="0" bIns="0" rtlCol="0" anchor="ctr"/>
-          <a:lstStyle/>
-          <a:p>
-            <a:pPr indent="0" marL="0">
-              <a:buNone/>
-            </a:pPr>
-            <a:r>
-              <a:rPr lang="en-US" sz="1050" b="1" spc="60" kern="0" dirty="0">
-                <a:solidFill>
-                  <a:srgbClr val="2F6BFF"/>
-                </a:solidFill>
-                <a:latin typeface="Calibri" pitchFamily="34" charset="0"/>
-                <a:ea typeface="Calibri" pitchFamily="34" charset="-122"/>
-                <a:cs typeface="Calibri" pitchFamily="34" charset="-120"/>
-              </a:rPr>
-              <a:t>그래서 무엇이 나오는가</a:t>
-            </a:r>
-            <a:endParaRPr lang="en-US" sz="1050" dirty="0"/>
-          </a:p>
-        </p:txBody>
-      </p:sp>
-      <p:sp>
-        <p:nvSpPr>
-          <p:cNvPr id="30" name="Text 28"/>
-          <p:cNvSpPr txBox="1"/>
-          <p:nvPr/>
-        </p:nvSpPr>
-        <p:spPr>
-          <a:xfrm>
-            <a:off x="640080" y="2706624"/>
-            <a:ext cx="2006742" cy="219456"/>
-          </a:xfrm>
-          <a:prstGeom prst="rect">
-            <a:avLst/>
-          </a:prstGeom>
-          <a:noFill/>
-          <a:ln/>
-        </p:spPr>
-        <p:txBody>
-          <a:bodyPr wrap="square" lIns="0" tIns="0" rIns="0" bIns="0" rtlCol="0" anchor="ctr"/>
-          <a:lstStyle/>
-          <a:p>
-            <a:pPr algn="ctr" indent="0" marL="0">
-              <a:buNone/>
-            </a:pPr>
-            <a:r>
-              <a:rPr lang="en-US" sz="1300" b="1" dirty="0">
-                <a:solidFill>
-                  <a:srgbClr val="D3E0FF"/>
-                </a:solidFill>
-                <a:latin typeface="Calibri" pitchFamily="34" charset="0"/>
-                <a:ea typeface="Calibri" pitchFamily="34" charset="-122"/>
-                <a:cs typeface="Calibri" pitchFamily="34" charset="-120"/>
-              </a:rPr>
-              <a:t>↓</a:t>
-            </a:r>
-            <a:endParaRPr lang="en-US" sz="1300" dirty="0"/>
-          </a:p>
-        </p:txBody>
-      </p:sp>
-      <p:sp>
-        <p:nvSpPr>
-          <p:cNvPr id="31" name="Shape 29"/>
-          <p:cNvSpPr/>
-          <p:nvPr/>
-        </p:nvSpPr>
-        <p:spPr>
-          <a:xfrm>
-            <a:off x="640080" y="3236976"/>
-            <a:ext cx="2006742" cy="1188720"/>
-          </a:xfrm>
-          <a:prstGeom prst="roundRect">
-            <a:avLst>
-              <a:gd name="adj" fmla="val 5385"/>
-            </a:avLst>
-          </a:prstGeom>
-          <a:solidFill>
-            <a:srgbClr val="FFFFFF"/>
+            <a:srgbClr val="EEF3FF"/>
           </a:solidFill>
           <a:ln w="12700">
             <a:solidFill>
@@ -15472,14 +15672,131 @@
       </p:sp>
       <p:sp>
         <p:nvSpPr>
-          <p:cNvPr id="32" name="Text 30"/>
-          <p:cNvSpPr txBox="1"/>
-          <p:nvPr/>
-        </p:nvSpPr>
-        <p:spPr>
-          <a:xfrm>
-            <a:off x="859536" y="3419856"/>
-            <a:ext cx="1567830" cy="822960"/>
+          <p:cNvPr id="11" name="Text 9"/>
+          <p:cNvSpPr txBox="1"/>
+          <p:nvPr/>
+        </p:nvSpPr>
+        <p:spPr>
+          <a:xfrm>
+            <a:off x="4801514" y="1883664"/>
+            <a:ext cx="2588666" cy="1133856"/>
+          </a:xfrm>
+          <a:prstGeom prst="rect">
+            <a:avLst/>
+          </a:prstGeom>
+          <a:noFill/>
+          <a:ln/>
+        </p:spPr>
+        <p:txBody>
+          <a:bodyPr wrap="square" lIns="0" tIns="0" rIns="0" bIns="0" rtlCol="0" anchor="ctr"/>
+          <a:lstStyle/>
+          <a:p>
+            <a:pPr indent="0" marL="0">
+              <a:buNone/>
+            </a:pPr>
+            <a:r>
+              <a:rPr lang="en-US" sz="6600" b="1" dirty="0">
+                <a:solidFill>
+                  <a:srgbClr val="1E4FD1"/>
+                </a:solidFill>
+                <a:latin typeface="Calibri" pitchFamily="34" charset="0"/>
+                <a:ea typeface="Calibri" pitchFamily="34" charset="-122"/>
+                <a:cs typeface="Calibri" pitchFamily="34" charset="-120"/>
+              </a:rPr>
+              <a:t>4</a:t>
+            </a:r>
+            <a:endParaRPr lang="en-US" sz="6600" dirty="0"/>
+          </a:p>
+        </p:txBody>
+      </p:sp>
+      <p:sp>
+        <p:nvSpPr>
+          <p:cNvPr id="12" name="Text 10"/>
+          <p:cNvSpPr txBox="1"/>
+          <p:nvPr/>
+        </p:nvSpPr>
+        <p:spPr>
+          <a:xfrm>
+            <a:off x="4801514" y="3054096"/>
+            <a:ext cx="2588666" cy="274320"/>
+          </a:xfrm>
+          <a:prstGeom prst="rect">
+            <a:avLst/>
+          </a:prstGeom>
+          <a:noFill/>
+          <a:ln/>
+        </p:spPr>
+        <p:txBody>
+          <a:bodyPr wrap="square" lIns="0" tIns="0" rIns="0" bIns="0" rtlCol="0" anchor="ctr"/>
+          <a:lstStyle/>
+          <a:p>
+            <a:pPr indent="0" marL="0">
+              <a:buNone/>
+            </a:pPr>
+            <a:r>
+              <a:rPr lang="en-US" sz="1200" dirty="0">
+                <a:solidFill>
+                  <a:srgbClr val="8A94A6"/>
+                </a:solidFill>
+                <a:latin typeface="Calibri" pitchFamily="34" charset="0"/>
+                <a:ea typeface="Calibri" pitchFamily="34" charset="-122"/>
+                <a:cs typeface="Calibri" pitchFamily="34" charset="-120"/>
+              </a:rPr>
+              <a:t>개 Skill</a:t>
+            </a:r>
+            <a:endParaRPr lang="en-US" sz="1200" dirty="0"/>
+          </a:p>
+        </p:txBody>
+      </p:sp>
+      <p:sp>
+        <p:nvSpPr>
+          <p:cNvPr id="13" name="Text 11"/>
+          <p:cNvSpPr txBox="1"/>
+          <p:nvPr/>
+        </p:nvSpPr>
+        <p:spPr>
+          <a:xfrm>
+            <a:off x="4801514" y="3456432"/>
+            <a:ext cx="2588666" cy="347472"/>
+          </a:xfrm>
+          <a:prstGeom prst="rect">
+            <a:avLst/>
+          </a:prstGeom>
+          <a:noFill/>
+          <a:ln/>
+        </p:spPr>
+        <p:txBody>
+          <a:bodyPr wrap="square" lIns="0" tIns="0" rIns="0" bIns="0" rtlCol="0" anchor="ctr"/>
+          <a:lstStyle/>
+          <a:p>
+            <a:pPr indent="0" marL="0">
+              <a:buNone/>
+            </a:pPr>
+            <a:r>
+              <a:rPr lang="en-US" sz="1900" b="1" dirty="0">
+                <a:solidFill>
+                  <a:srgbClr val="0F1B33"/>
+                </a:solidFill>
+                <a:latin typeface="Calibri" pitchFamily="34" charset="0"/>
+                <a:ea typeface="Calibri" pitchFamily="34" charset="-122"/>
+                <a:cs typeface="Calibri" pitchFamily="34" charset="-120"/>
+              </a:rPr>
+              <a:t>구현 · 협업</a:t>
+            </a:r>
+            <a:endParaRPr lang="en-US" sz="1900" dirty="0"/>
+          </a:p>
+        </p:txBody>
+      </p:sp>
+      <p:sp>
+        <p:nvSpPr>
+          <p:cNvPr id="14" name="Text 12"/>
+          <p:cNvSpPr txBox="1"/>
+          <p:nvPr/>
+        </p:nvSpPr>
+        <p:spPr>
+          <a:xfrm>
+            <a:off x="4801514" y="3913632"/>
+            <a:ext cx="2588666" cy="822960"/>
           </a:xfrm>
           <a:prstGeom prst="rect">
             <a:avLst/>
@@ -15498,18 +15815,179 @@
               <a:buNone/>
             </a:pPr>
             <a:r>
-              <a:rPr lang="en-US" sz="1150" dirty="0">
-                <a:solidFill>
-                  <a:srgbClr val="27374F"/>
-                </a:solidFill>
-                <a:latin typeface="Calibri" pitchFamily="34" charset="0"/>
-                <a:ea typeface="Calibri" pitchFamily="34" charset="-122"/>
-                <a:cs typeface="Calibri" pitchFamily="34" charset="-120"/>
-              </a:rPr>
-              <a:t>만들고 싶은 것</a:t>
-            </a:r>
-            <a:endParaRPr lang="en-US" sz="1150" dirty="0"/>
-          </a:p>
+              <a:rPr lang="en-US" sz="1250" dirty="0">
+                <a:solidFill>
+                  <a:srgbClr val="5B6577"/>
+                </a:solidFill>
+                <a:latin typeface="Calibri" pitchFamily="34" charset="0"/>
+                <a:ea typeface="Calibri" pitchFamily="34" charset="-122"/>
+                <a:cs typeface="Calibri" pitchFamily="34" charset="-120"/>
+              </a:rPr>
+              <a:t>계획을 지키면서 작은 결과를 만들고 계속 확인합니다.</a:t>
+            </a:r>
+            <a:endParaRPr lang="en-US" sz="1250" dirty="0"/>
+          </a:p>
+        </p:txBody>
+      </p:sp>
+      <p:sp>
+        <p:nvSpPr>
+          <p:cNvPr id="15" name="Shape 13"/>
+          <p:cNvSpPr/>
+          <p:nvPr/>
+        </p:nvSpPr>
+        <p:spPr>
+          <a:xfrm>
+            <a:off x="8158277" y="1481328"/>
+            <a:ext cx="3393338" cy="3566160"/>
+          </a:xfrm>
+          <a:prstGeom prst="roundRect">
+            <a:avLst>
+              <a:gd name="adj" fmla="val 1886"/>
+            </a:avLst>
+          </a:prstGeom>
+          <a:solidFill>
+            <a:srgbClr val="0F1B33"/>
+          </a:solidFill>
+          <a:ln/>
+        </p:spPr>
+      </p:sp>
+      <p:sp>
+        <p:nvSpPr>
+          <p:cNvPr id="16" name="Text 14"/>
+          <p:cNvSpPr txBox="1"/>
+          <p:nvPr/>
+        </p:nvSpPr>
+        <p:spPr>
+          <a:xfrm>
+            <a:off x="8560613" y="1883664"/>
+            <a:ext cx="2588666" cy="1133856"/>
+          </a:xfrm>
+          <a:prstGeom prst="rect">
+            <a:avLst/>
+          </a:prstGeom>
+          <a:noFill/>
+          <a:ln/>
+        </p:spPr>
+        <p:txBody>
+          <a:bodyPr wrap="square" lIns="0" tIns="0" rIns="0" bIns="0" rtlCol="0" anchor="ctr"/>
+          <a:lstStyle/>
+          <a:p>
+            <a:pPr indent="0" marL="0">
+              <a:buNone/>
+            </a:pPr>
+            <a:r>
+              <a:rPr lang="en-US" sz="6600" b="1" dirty="0">
+                <a:solidFill>
+                  <a:srgbClr val="F2994A"/>
+                </a:solidFill>
+                <a:latin typeface="Calibri" pitchFamily="34" charset="0"/>
+                <a:ea typeface="Calibri" pitchFamily="34" charset="-122"/>
+                <a:cs typeface="Calibri" pitchFamily="34" charset="-120"/>
+              </a:rPr>
+              <a:t>6</a:t>
+            </a:r>
+            <a:endParaRPr lang="en-US" sz="6600" dirty="0"/>
+          </a:p>
+        </p:txBody>
+      </p:sp>
+      <p:sp>
+        <p:nvSpPr>
+          <p:cNvPr id="17" name="Text 15"/>
+          <p:cNvSpPr txBox="1"/>
+          <p:nvPr/>
+        </p:nvSpPr>
+        <p:spPr>
+          <a:xfrm>
+            <a:off x="8560613" y="3054096"/>
+            <a:ext cx="2588666" cy="274320"/>
+          </a:xfrm>
+          <a:prstGeom prst="rect">
+            <a:avLst/>
+          </a:prstGeom>
+          <a:noFill/>
+          <a:ln/>
+        </p:spPr>
+        <p:txBody>
+          <a:bodyPr wrap="square" lIns="0" tIns="0" rIns="0" bIns="0" rtlCol="0" anchor="ctr"/>
+          <a:lstStyle/>
+          <a:p>
+            <a:pPr indent="0" marL="0">
+              <a:buNone/>
+            </a:pPr>
+            <a:r>
+              <a:rPr lang="en-US" sz="1200" dirty="0">
+                <a:solidFill>
+                  <a:srgbClr val="8FA2BC"/>
+                </a:solidFill>
+                <a:latin typeface="Calibri" pitchFamily="34" charset="0"/>
+                <a:ea typeface="Calibri" pitchFamily="34" charset="-122"/>
+                <a:cs typeface="Calibri" pitchFamily="34" charset="-120"/>
+              </a:rPr>
+              <a:t>개 Skill</a:t>
+            </a:r>
+            <a:endParaRPr lang="en-US" sz="1200" dirty="0"/>
+          </a:p>
+        </p:txBody>
+      </p:sp>
+      <p:sp>
+        <p:nvSpPr>
+          <p:cNvPr id="18" name="Text 16"/>
+          <p:cNvSpPr txBox="1"/>
+          <p:nvPr/>
+        </p:nvSpPr>
+        <p:spPr>
+          <a:xfrm>
+            <a:off x="8560613" y="3456432"/>
+            <a:ext cx="2588666" cy="347472"/>
+          </a:xfrm>
+          <a:prstGeom prst="rect">
+            <a:avLst/>
+          </a:prstGeom>
+          <a:noFill/>
+          <a:ln/>
+        </p:spPr>
+        <p:txBody>
+          <a:bodyPr wrap="square" lIns="0" tIns="0" rIns="0" bIns="0" rtlCol="0" anchor="ctr"/>
+          <a:lstStyle/>
+          <a:p>
+            <a:pPr indent="0" marL="0">
+              <a:buNone/>
+            </a:pPr>
+            <a:r>
+              <a:rPr lang="en-US" sz="1900" b="1" dirty="0">
+                <a:solidFill>
+                  <a:srgbClr val="FFFFFF"/>
+                </a:solidFill>
+                <a:latin typeface="Calibri" pitchFamily="34" charset="0"/>
+                <a:ea typeface="Calibri" pitchFamily="34" charset="-122"/>
+                <a:cs typeface="Calibri" pitchFamily="34" charset="-120"/>
+              </a:rPr>
+              <a:t>품질 · 완료</a:t>
+            </a:r>
+            <a:endParaRPr lang="en-US" sz="1900" dirty="0"/>
+          </a:p>
+        </p:txBody>
+      </p:sp>
+      <p:sp>
+        <p:nvSpPr>
+          <p:cNvPr id="19" name="Text 17"/>
+          <p:cNvSpPr txBox="1"/>
+          <p:nvPr/>
+        </p:nvSpPr>
+        <p:spPr>
+          <a:xfrm>
+            <a:off x="8560613" y="3913632"/>
+            <a:ext cx="2588666" cy="822960"/>
+          </a:xfrm>
+          <a:prstGeom prst="rect">
+            <a:avLst/>
+          </a:prstGeom>
+          <a:noFill/>
+          <a:ln/>
+        </p:spPr>
+        <p:txBody>
+          <a:bodyPr wrap="square" lIns="0" tIns="0" rIns="0" bIns="0" rtlCol="0" anchor="ctr"/>
+          <a:lstStyle/>
           <a:p>
             <a:pPr indent="0" marL="0">
               <a:lnSpc>
@@ -15518,158 +15996,52 @@
               <a:buNone/>
             </a:pPr>
             <a:r>
-              <a:rPr lang="en-US" sz="1150" dirty="0">
-                <a:solidFill>
-                  <a:srgbClr val="27374F"/>
-                </a:solidFill>
-                <a:latin typeface="Calibri" pitchFamily="34" charset="0"/>
-                <a:ea typeface="Calibri" pitchFamily="34" charset="-122"/>
-                <a:cs typeface="Calibri" pitchFamily="34" charset="-120"/>
-              </a:rPr>
-              <a:t>한 문장</a:t>
-            </a:r>
-            <a:endParaRPr lang="en-US" sz="1150" dirty="0"/>
-          </a:p>
-        </p:txBody>
-      </p:sp>
-      <p:sp>
-        <p:nvSpPr>
-          <p:cNvPr id="33" name="Text 31"/>
-          <p:cNvSpPr txBox="1"/>
-          <p:nvPr/>
-        </p:nvSpPr>
-        <p:spPr>
-          <a:xfrm>
-            <a:off x="2866278" y="2706624"/>
-            <a:ext cx="2006742" cy="219456"/>
-          </a:xfrm>
-          <a:prstGeom prst="rect">
-            <a:avLst/>
-          </a:prstGeom>
-          <a:noFill/>
-          <a:ln/>
-        </p:spPr>
-        <p:txBody>
-          <a:bodyPr wrap="square" lIns="0" tIns="0" rIns="0" bIns="0" rtlCol="0" anchor="ctr"/>
-          <a:lstStyle/>
-          <a:p>
-            <a:pPr algn="ctr" indent="0" marL="0">
-              <a:buNone/>
-            </a:pPr>
-            <a:r>
-              <a:rPr lang="en-US" sz="1300" b="1" dirty="0">
-                <a:solidFill>
-                  <a:srgbClr val="D3E0FF"/>
-                </a:solidFill>
-                <a:latin typeface="Calibri" pitchFamily="34" charset="0"/>
-                <a:ea typeface="Calibri" pitchFamily="34" charset="-122"/>
-                <a:cs typeface="Calibri" pitchFamily="34" charset="-120"/>
-              </a:rPr>
-              <a:t>↓</a:t>
-            </a:r>
-            <a:endParaRPr lang="en-US" sz="1300" dirty="0"/>
-          </a:p>
-        </p:txBody>
-      </p:sp>
-      <p:sp>
-        <p:nvSpPr>
-          <p:cNvPr id="34" name="Shape 32"/>
+              <a:rPr lang="en-US" sz="1250" dirty="0">
+                <a:solidFill>
+                  <a:srgbClr val="C3CFE2"/>
+                </a:solidFill>
+                <a:latin typeface="Calibri" pitchFamily="34" charset="0"/>
+                <a:ea typeface="Calibri" pitchFamily="34" charset="-122"/>
+                <a:cs typeface="Calibri" pitchFamily="34" charset="-120"/>
+              </a:rPr>
+              <a:t>“된 것 같다”가 아니라 확인된 결과로 마무리합니다.</a:t>
+            </a:r>
+            <a:endParaRPr lang="en-US" sz="1250" dirty="0"/>
+          </a:p>
+        </p:txBody>
+      </p:sp>
+      <p:sp>
+        <p:nvSpPr>
+          <p:cNvPr id="20" name="Shape 18"/>
           <p:cNvSpPr/>
           <p:nvPr/>
         </p:nvSpPr>
         <p:spPr>
           <a:xfrm>
-            <a:off x="2866278" y="3236976"/>
-            <a:ext cx="2006742" cy="1188720"/>
+            <a:off x="640080" y="5358384"/>
+            <a:ext cx="10911535" cy="566928"/>
           </a:xfrm>
           <a:prstGeom prst="roundRect">
             <a:avLst>
-              <a:gd name="adj" fmla="val 5385"/>
+              <a:gd name="adj" fmla="val 9677"/>
             </a:avLst>
           </a:prstGeom>
           <a:solidFill>
-            <a:srgbClr val="FFFFFF"/>
+            <a:srgbClr val="EEF3FF"/>
           </a:solidFill>
-          <a:ln w="12700">
-            <a:solidFill>
-              <a:srgbClr val="D3E0FF"/>
-            </a:solidFill>
-            <a:prstDash val="solid"/>
-          </a:ln>
-        </p:spPr>
-      </p:sp>
-      <p:sp>
-        <p:nvSpPr>
-          <p:cNvPr id="35" name="Text 33"/>
-          <p:cNvSpPr txBox="1"/>
-          <p:nvPr/>
-        </p:nvSpPr>
-        <p:spPr>
-          <a:xfrm>
-            <a:off x="3085734" y="3419856"/>
-            <a:ext cx="1567830" cy="822960"/>
-          </a:xfrm>
-          <a:prstGeom prst="rect">
-            <a:avLst/>
-          </a:prstGeom>
-          <a:noFill/>
-          <a:ln/>
-        </p:spPr>
-        <p:txBody>
-          <a:bodyPr wrap="square" lIns="0" tIns="0" rIns="0" bIns="0" rtlCol="0" anchor="ctr"/>
-          <a:lstStyle/>
-          <a:p>
-            <a:pPr indent="0" marL="0">
-              <a:lnSpc>
-                <a:spcPct val="130000"/>
-              </a:lnSpc>
-              <a:buNone/>
-            </a:pPr>
-            <a:r>
-              <a:rPr lang="en-US" sz="1150" dirty="0">
-                <a:solidFill>
-                  <a:srgbClr val="27374F"/>
-                </a:solidFill>
-                <a:latin typeface="Calibri" pitchFamily="34" charset="0"/>
-                <a:ea typeface="Calibri" pitchFamily="34" charset="-122"/>
-                <a:cs typeface="Calibri" pitchFamily="34" charset="-120"/>
-              </a:rPr>
-              <a:t>확정된 요구사항과</a:t>
-            </a:r>
-            <a:endParaRPr lang="en-US" sz="1150" dirty="0"/>
-          </a:p>
-          <a:p>
-            <a:pPr indent="0" marL="0">
-              <a:lnSpc>
-                <a:spcPct val="130000"/>
-              </a:lnSpc>
-              <a:buNone/>
-            </a:pPr>
-            <a:r>
-              <a:rPr lang="en-US" sz="1150" dirty="0">
-                <a:solidFill>
-                  <a:srgbClr val="27374F"/>
-                </a:solidFill>
-                <a:latin typeface="Calibri" pitchFamily="34" charset="0"/>
-                <a:ea typeface="Calibri" pitchFamily="34" charset="-122"/>
-                <a:cs typeface="Calibri" pitchFamily="34" charset="-120"/>
-              </a:rPr>
-              <a:t>설계</a:t>
-            </a:r>
-            <a:endParaRPr lang="en-US" sz="1150" dirty="0"/>
-          </a:p>
-        </p:txBody>
-      </p:sp>
-      <p:sp>
-        <p:nvSpPr>
-          <p:cNvPr id="36" name="Text 34"/>
-          <p:cNvSpPr txBox="1"/>
-          <p:nvPr/>
-        </p:nvSpPr>
-        <p:spPr>
-          <a:xfrm>
-            <a:off x="5092476" y="2706624"/>
-            <a:ext cx="2006742" cy="219456"/>
+          <a:ln/>
+        </p:spPr>
+      </p:sp>
+      <p:sp>
+        <p:nvSpPr>
+          <p:cNvPr id="21" name="Text 19"/>
+          <p:cNvSpPr txBox="1"/>
+          <p:nvPr/>
+        </p:nvSpPr>
+        <p:spPr>
+          <a:xfrm>
+            <a:off x="914400" y="5358384"/>
+            <a:ext cx="10362895" cy="566928"/>
           </a:xfrm>
           <a:prstGeom prst="rect">
             <a:avLst/>
@@ -15685,518 +16057,23 @@
               <a:buNone/>
             </a:pPr>
             <a:r>
-              <a:rPr lang="en-US" sz="1300" b="1" dirty="0">
-                <a:solidFill>
-                  <a:srgbClr val="D3E0FF"/>
-                </a:solidFill>
-                <a:latin typeface="Calibri" pitchFamily="34" charset="0"/>
-                <a:ea typeface="Calibri" pitchFamily="34" charset="-122"/>
-                <a:cs typeface="Calibri" pitchFamily="34" charset="-120"/>
-              </a:rPr>
-              <a:t>↓</a:t>
-            </a:r>
-            <a:endParaRPr lang="en-US" sz="1300" dirty="0"/>
-          </a:p>
-        </p:txBody>
-      </p:sp>
-      <p:sp>
-        <p:nvSpPr>
-          <p:cNvPr id="37" name="Shape 35"/>
-          <p:cNvSpPr/>
-          <p:nvPr/>
-        </p:nvSpPr>
-        <p:spPr>
-          <a:xfrm>
-            <a:off x="5092476" y="3236976"/>
-            <a:ext cx="2006742" cy="1188720"/>
-          </a:xfrm>
-          <a:prstGeom prst="roundRect">
-            <a:avLst>
-              <a:gd name="adj" fmla="val 5385"/>
-            </a:avLst>
-          </a:prstGeom>
-          <a:solidFill>
-            <a:srgbClr val="FFFFFF"/>
-          </a:solidFill>
-          <a:ln w="12700">
-            <a:solidFill>
-              <a:srgbClr val="D3E0FF"/>
-            </a:solidFill>
-            <a:prstDash val="solid"/>
-          </a:ln>
-        </p:spPr>
-      </p:sp>
-      <p:sp>
-        <p:nvSpPr>
-          <p:cNvPr id="38" name="Text 36"/>
-          <p:cNvSpPr txBox="1"/>
-          <p:nvPr/>
-        </p:nvSpPr>
-        <p:spPr>
-          <a:xfrm>
-            <a:off x="5311932" y="3419856"/>
-            <a:ext cx="1567830" cy="822960"/>
-          </a:xfrm>
-          <a:prstGeom prst="rect">
-            <a:avLst/>
-          </a:prstGeom>
-          <a:noFill/>
-          <a:ln/>
-        </p:spPr>
-        <p:txBody>
-          <a:bodyPr wrap="square" lIns="0" tIns="0" rIns="0" bIns="0" rtlCol="0" anchor="ctr"/>
-          <a:lstStyle/>
-          <a:p>
-            <a:pPr indent="0" marL="0">
-              <a:lnSpc>
-                <a:spcPct val="130000"/>
-              </a:lnSpc>
-              <a:buNone/>
-            </a:pPr>
-            <a:r>
-              <a:rPr lang="en-US" sz="1150" dirty="0">
-                <a:solidFill>
-                  <a:srgbClr val="27374F"/>
-                </a:solidFill>
-                <a:latin typeface="Calibri" pitchFamily="34" charset="0"/>
-                <a:ea typeface="Calibri" pitchFamily="34" charset="-122"/>
-                <a:cs typeface="Calibri" pitchFamily="34" charset="-120"/>
-              </a:rPr>
-              <a:t>구현 계획서</a:t>
-            </a:r>
-            <a:endParaRPr lang="en-US" sz="1150" dirty="0"/>
-          </a:p>
-          <a:p>
-            <a:pPr indent="0" marL="0">
-              <a:lnSpc>
-                <a:spcPct val="130000"/>
-              </a:lnSpc>
-              <a:buNone/>
-            </a:pPr>
-            <a:r>
-              <a:rPr lang="en-US" sz="1150" dirty="0">
-                <a:solidFill>
-                  <a:srgbClr val="27374F"/>
-                </a:solidFill>
-                <a:latin typeface="Calibri" pitchFamily="34" charset="0"/>
-                <a:ea typeface="Calibri" pitchFamily="34" charset="-122"/>
-                <a:cs typeface="Calibri" pitchFamily="34" charset="-120"/>
-              </a:rPr>
-              <a:t>(파일·테스트·순서)</a:t>
-            </a:r>
-            <a:endParaRPr lang="en-US" sz="1150" dirty="0"/>
-          </a:p>
-        </p:txBody>
-      </p:sp>
-      <p:sp>
-        <p:nvSpPr>
-          <p:cNvPr id="39" name="Text 37"/>
-          <p:cNvSpPr txBox="1"/>
-          <p:nvPr/>
-        </p:nvSpPr>
-        <p:spPr>
-          <a:xfrm>
-            <a:off x="7318675" y="2706624"/>
-            <a:ext cx="2006742" cy="219456"/>
-          </a:xfrm>
-          <a:prstGeom prst="rect">
-            <a:avLst/>
-          </a:prstGeom>
-          <a:noFill/>
-          <a:ln/>
-        </p:spPr>
-        <p:txBody>
-          <a:bodyPr wrap="square" lIns="0" tIns="0" rIns="0" bIns="0" rtlCol="0" anchor="ctr"/>
-          <a:lstStyle/>
-          <a:p>
-            <a:pPr algn="ctr" indent="0" marL="0">
-              <a:buNone/>
-            </a:pPr>
-            <a:r>
-              <a:rPr lang="en-US" sz="1300" b="1" dirty="0">
-                <a:solidFill>
-                  <a:srgbClr val="D3E0FF"/>
-                </a:solidFill>
-                <a:latin typeface="Calibri" pitchFamily="34" charset="0"/>
-                <a:ea typeface="Calibri" pitchFamily="34" charset="-122"/>
-                <a:cs typeface="Calibri" pitchFamily="34" charset="-120"/>
-              </a:rPr>
-              <a:t>↓</a:t>
-            </a:r>
-            <a:endParaRPr lang="en-US" sz="1300" dirty="0"/>
-          </a:p>
-        </p:txBody>
-      </p:sp>
-      <p:sp>
-        <p:nvSpPr>
-          <p:cNvPr id="40" name="Shape 38"/>
-          <p:cNvSpPr/>
-          <p:nvPr/>
-        </p:nvSpPr>
-        <p:spPr>
-          <a:xfrm>
-            <a:off x="7318675" y="3236976"/>
-            <a:ext cx="2006742" cy="1188720"/>
-          </a:xfrm>
-          <a:prstGeom prst="roundRect">
-            <a:avLst>
-              <a:gd name="adj" fmla="val 5385"/>
-            </a:avLst>
-          </a:prstGeom>
-          <a:solidFill>
-            <a:srgbClr val="FFFFFF"/>
-          </a:solidFill>
-          <a:ln w="12700">
-            <a:solidFill>
-              <a:srgbClr val="D3E0FF"/>
-            </a:solidFill>
-            <a:prstDash val="solid"/>
-          </a:ln>
-        </p:spPr>
-      </p:sp>
-      <p:sp>
-        <p:nvSpPr>
-          <p:cNvPr id="41" name="Text 39"/>
-          <p:cNvSpPr txBox="1"/>
-          <p:nvPr/>
-        </p:nvSpPr>
-        <p:spPr>
-          <a:xfrm>
-            <a:off x="7538131" y="3419856"/>
-            <a:ext cx="1567830" cy="822960"/>
-          </a:xfrm>
-          <a:prstGeom prst="rect">
-            <a:avLst/>
-          </a:prstGeom>
-          <a:noFill/>
-          <a:ln/>
-        </p:spPr>
-        <p:txBody>
-          <a:bodyPr wrap="square" lIns="0" tIns="0" rIns="0" bIns="0" rtlCol="0" anchor="ctr"/>
-          <a:lstStyle/>
-          <a:p>
-            <a:pPr indent="0" marL="0">
-              <a:lnSpc>
-                <a:spcPct val="130000"/>
-              </a:lnSpc>
-              <a:buNone/>
-            </a:pPr>
-            <a:r>
-              <a:rPr lang="en-US" sz="1150" dirty="0">
-                <a:solidFill>
-                  <a:srgbClr val="27374F"/>
-                </a:solidFill>
-                <a:latin typeface="Calibri" pitchFamily="34" charset="0"/>
-                <a:ea typeface="Calibri" pitchFamily="34" charset="-122"/>
-                <a:cs typeface="Calibri" pitchFamily="34" charset="-120"/>
-              </a:rPr>
-              <a:t>테스트를 통과한</a:t>
-            </a:r>
-            <a:endParaRPr lang="en-US" sz="1150" dirty="0"/>
-          </a:p>
-          <a:p>
-            <a:pPr indent="0" marL="0">
-              <a:lnSpc>
-                <a:spcPct val="130000"/>
-              </a:lnSpc>
-              <a:buNone/>
-            </a:pPr>
-            <a:r>
-              <a:rPr lang="en-US" sz="1150" dirty="0">
-                <a:solidFill>
-                  <a:srgbClr val="27374F"/>
-                </a:solidFill>
-                <a:latin typeface="Calibri" pitchFamily="34" charset="0"/>
-                <a:ea typeface="Calibri" pitchFamily="34" charset="-122"/>
-                <a:cs typeface="Calibri" pitchFamily="34" charset="-120"/>
-              </a:rPr>
-              <a:t>코드</a:t>
-            </a:r>
-            <a:endParaRPr lang="en-US" sz="1150" dirty="0"/>
-          </a:p>
-        </p:txBody>
-      </p:sp>
-      <p:sp>
-        <p:nvSpPr>
-          <p:cNvPr id="42" name="Text 40"/>
-          <p:cNvSpPr txBox="1"/>
-          <p:nvPr/>
-        </p:nvSpPr>
-        <p:spPr>
-          <a:xfrm>
-            <a:off x="9544873" y="2706624"/>
-            <a:ext cx="2006742" cy="219456"/>
-          </a:xfrm>
-          <a:prstGeom prst="rect">
-            <a:avLst/>
-          </a:prstGeom>
-          <a:noFill/>
-          <a:ln/>
-        </p:spPr>
-        <p:txBody>
-          <a:bodyPr wrap="square" lIns="0" tIns="0" rIns="0" bIns="0" rtlCol="0" anchor="ctr"/>
-          <a:lstStyle/>
-          <a:p>
-            <a:pPr algn="ctr" indent="0" marL="0">
-              <a:buNone/>
-            </a:pPr>
-            <a:r>
-              <a:rPr lang="en-US" sz="1300" b="1" dirty="0">
-                <a:solidFill>
-                  <a:srgbClr val="D3E0FF"/>
-                </a:solidFill>
-                <a:latin typeface="Calibri" pitchFamily="34" charset="0"/>
-                <a:ea typeface="Calibri" pitchFamily="34" charset="-122"/>
-                <a:cs typeface="Calibri" pitchFamily="34" charset="-120"/>
-              </a:rPr>
-              <a:t>↓</a:t>
-            </a:r>
-            <a:endParaRPr lang="en-US" sz="1300" dirty="0"/>
-          </a:p>
-        </p:txBody>
-      </p:sp>
-      <p:sp>
-        <p:nvSpPr>
-          <p:cNvPr id="43" name="Shape 41"/>
-          <p:cNvSpPr/>
-          <p:nvPr/>
-        </p:nvSpPr>
-        <p:spPr>
-          <a:xfrm>
-            <a:off x="9544873" y="3236976"/>
-            <a:ext cx="2006742" cy="1188720"/>
-          </a:xfrm>
-          <a:prstGeom prst="roundRect">
-            <a:avLst>
-              <a:gd name="adj" fmla="val 5385"/>
-            </a:avLst>
-          </a:prstGeom>
-          <a:solidFill>
-            <a:srgbClr val="FFFFFF"/>
-          </a:solidFill>
-          <a:ln w="12700">
-            <a:solidFill>
-              <a:srgbClr val="D3E0FF"/>
-            </a:solidFill>
-            <a:prstDash val="solid"/>
-          </a:ln>
-        </p:spPr>
-      </p:sp>
-      <p:sp>
-        <p:nvSpPr>
-          <p:cNvPr id="44" name="Text 42"/>
-          <p:cNvSpPr txBox="1"/>
-          <p:nvPr/>
-        </p:nvSpPr>
-        <p:spPr>
-          <a:xfrm>
-            <a:off x="9764329" y="3419856"/>
-            <a:ext cx="1567830" cy="822960"/>
-          </a:xfrm>
-          <a:prstGeom prst="rect">
-            <a:avLst/>
-          </a:prstGeom>
-          <a:noFill/>
-          <a:ln/>
-        </p:spPr>
-        <p:txBody>
-          <a:bodyPr wrap="square" lIns="0" tIns="0" rIns="0" bIns="0" rtlCol="0" anchor="ctr"/>
-          <a:lstStyle/>
-          <a:p>
-            <a:pPr indent="0" marL="0">
-              <a:lnSpc>
-                <a:spcPct val="130000"/>
-              </a:lnSpc>
-              <a:buNone/>
-            </a:pPr>
-            <a:r>
-              <a:rPr lang="en-US" sz="1150" dirty="0">
-                <a:solidFill>
-                  <a:srgbClr val="27374F"/>
-                </a:solidFill>
-                <a:latin typeface="Calibri" pitchFamily="34" charset="0"/>
-                <a:ea typeface="Calibri" pitchFamily="34" charset="-122"/>
-                <a:cs typeface="Calibri" pitchFamily="34" charset="-120"/>
-              </a:rPr>
-              <a:t>테스트 기록과</a:t>
-            </a:r>
-            <a:endParaRPr lang="en-US" sz="1150" dirty="0"/>
-          </a:p>
-          <a:p>
-            <a:pPr indent="0" marL="0">
-              <a:lnSpc>
-                <a:spcPct val="130000"/>
-              </a:lnSpc>
-              <a:buNone/>
-            </a:pPr>
-            <a:r>
-              <a:rPr lang="en-US" sz="1150" dirty="0">
-                <a:solidFill>
-                  <a:srgbClr val="27374F"/>
-                </a:solidFill>
-                <a:latin typeface="Calibri" pitchFamily="34" charset="0"/>
-                <a:ea typeface="Calibri" pitchFamily="34" charset="-122"/>
-                <a:cs typeface="Calibri" pitchFamily="34" charset="-120"/>
-              </a:rPr>
-              <a:t>정리된 브랜치</a:t>
-            </a:r>
-            <a:endParaRPr lang="en-US" sz="1150" dirty="0"/>
-          </a:p>
-        </p:txBody>
-      </p:sp>
-      <p:sp>
-        <p:nvSpPr>
-          <p:cNvPr id="45" name="Shape 43"/>
-          <p:cNvSpPr/>
-          <p:nvPr/>
-        </p:nvSpPr>
-        <p:spPr>
-          <a:xfrm>
-            <a:off x="640080" y="4736592"/>
-            <a:ext cx="10911535" cy="914400"/>
-          </a:xfrm>
-          <a:prstGeom prst="roundRect">
-            <a:avLst>
-              <a:gd name="adj" fmla="val 6000"/>
-            </a:avLst>
-          </a:prstGeom>
-          <a:solidFill>
-            <a:srgbClr val="FDF2E6"/>
-          </a:solidFill>
-          <a:ln/>
-        </p:spPr>
-      </p:sp>
-      <p:sp>
-        <p:nvSpPr>
-          <p:cNvPr id="46" name="Shape 44"/>
-          <p:cNvSpPr/>
-          <p:nvPr/>
-        </p:nvSpPr>
-        <p:spPr>
-          <a:xfrm>
-            <a:off x="950976" y="5020056"/>
-            <a:ext cx="1133856" cy="347472"/>
-          </a:xfrm>
-          <a:prstGeom prst="roundRect">
-            <a:avLst>
-              <a:gd name="adj" fmla="val 50000"/>
-            </a:avLst>
-          </a:prstGeom>
-          <a:solidFill>
-            <a:srgbClr val="F2994A"/>
-          </a:solidFill>
-          <a:ln/>
-        </p:spPr>
-      </p:sp>
-      <p:sp>
-        <p:nvSpPr>
-          <p:cNvPr id="47" name="Text 45"/>
-          <p:cNvSpPr txBox="1"/>
-          <p:nvPr/>
-        </p:nvSpPr>
-        <p:spPr>
-          <a:xfrm>
-            <a:off x="950976" y="5020056"/>
-            <a:ext cx="1133856" cy="347472"/>
-          </a:xfrm>
-          <a:prstGeom prst="rect">
-            <a:avLst/>
-          </a:prstGeom>
-          <a:noFill/>
-          <a:ln/>
-        </p:spPr>
-        <p:txBody>
-          <a:bodyPr wrap="square" lIns="0" tIns="0" rIns="0" bIns="0" rtlCol="0" anchor="ctr"/>
-          <a:lstStyle/>
-          <a:p>
-            <a:pPr algn="ctr" indent="0" marL="0">
-              <a:buNone/>
-            </a:pPr>
-            <a:r>
-              <a:rPr lang="en-US" sz="1050" b="1" dirty="0">
-                <a:solidFill>
-                  <a:srgbClr val="FFFFFF"/>
-                </a:solidFill>
-                <a:latin typeface="Calibri" pitchFamily="34" charset="0"/>
-                <a:ea typeface="Calibri" pitchFamily="34" charset="-122"/>
-                <a:cs typeface="Calibri" pitchFamily="34" charset="-120"/>
-              </a:rPr>
-              <a:t>오류 발생 시</a:t>
-            </a:r>
-            <a:endParaRPr lang="en-US" sz="1050" dirty="0"/>
-          </a:p>
-        </p:txBody>
-      </p:sp>
-      <p:sp>
-        <p:nvSpPr>
-          <p:cNvPr id="48" name="Text 46"/>
-          <p:cNvSpPr txBox="1"/>
-          <p:nvPr/>
-        </p:nvSpPr>
-        <p:spPr>
-          <a:xfrm>
-            <a:off x="2249424" y="4736592"/>
-            <a:ext cx="8991295" cy="914400"/>
-          </a:xfrm>
-          <a:prstGeom prst="rect">
-            <a:avLst/>
-          </a:prstGeom>
-          <a:noFill/>
-          <a:ln/>
-        </p:spPr>
-        <p:txBody>
-          <a:bodyPr wrap="square" lIns="0" tIns="0" rIns="0" bIns="0" rtlCol="0" anchor="ctr"/>
-          <a:lstStyle/>
-          <a:p>
-            <a:pPr indent="0" marL="0">
-              <a:buNone/>
-            </a:pPr>
-            <a:r>
-              <a:rPr lang="en-US" sz="1250" dirty="0">
-                <a:solidFill>
-                  <a:srgbClr val="7E6242"/>
-                </a:solidFill>
-                <a:latin typeface="Calibri" pitchFamily="34" charset="0"/>
-                <a:ea typeface="Calibri" pitchFamily="34" charset="-122"/>
-                <a:cs typeface="Calibri" pitchFamily="34" charset="-120"/>
-              </a:rPr>
-              <a:t>추측하지 않고 </a:t>
-            </a:r>
-            <a:pPr indent="0" marL="0">
-              <a:buNone/>
-            </a:pPr>
-            <a:r>
-              <a:rPr lang="en-US" sz="1250" b="1" dirty="0">
-                <a:solidFill>
-                  <a:srgbClr val="A9541A"/>
-                </a:solidFill>
-                <a:latin typeface="Calibri" pitchFamily="34" charset="0"/>
-                <a:ea typeface="Calibri" pitchFamily="34" charset="-122"/>
-                <a:cs typeface="Calibri" pitchFamily="34" charset="-120"/>
-              </a:rPr>
-              <a:t>재현 → 증거 → 원인</a:t>
-            </a:r>
-            <a:pPr indent="0" marL="0">
-              <a:buNone/>
-            </a:pPr>
-            <a:r>
-              <a:rPr lang="en-US" sz="1250" dirty="0">
-                <a:solidFill>
-                  <a:srgbClr val="7E6242"/>
-                </a:solidFill>
-                <a:latin typeface="Calibri" pitchFamily="34" charset="0"/>
-                <a:ea typeface="Calibri" pitchFamily="34" charset="-122"/>
-                <a:cs typeface="Calibri" pitchFamily="34" charset="-120"/>
-              </a:rPr>
-              <a:t> 순으로 확인한 뒤, 멈췄던 단계로 돌아갑니다. (Systematic Debugging)</a:t>
-            </a:r>
-            <a:endParaRPr lang="en-US" sz="1250" dirty="0"/>
-          </a:p>
-        </p:txBody>
-      </p:sp>
-      <p:sp>
-        <p:nvSpPr>
-          <p:cNvPr id="49" name="Text 47"/>
+              <a:rPr lang="en-US" sz="1350" b="1" dirty="0">
+                <a:solidFill>
+                  <a:srgbClr val="1E4FD1"/>
+                </a:solidFill>
+                <a:latin typeface="Calibri" pitchFamily="34" charset="0"/>
+                <a:ea typeface="Calibri" pitchFamily="34" charset="-122"/>
+                <a:cs typeface="Calibri" pitchFamily="34" charset="-120"/>
+              </a:rPr>
+              <a:t>14개 = 계획·준비 4개 + 구현·협업 4개 + 품질·완료 6개</a:t>
+            </a:r>
+            <a:endParaRPr lang="en-US" sz="1350" dirty="0"/>
+          </a:p>
+        </p:txBody>
+      </p:sp>
+      <p:sp>
+        <p:nvSpPr>
+          <p:cNvPr id="22" name="Text 20"/>
           <p:cNvSpPr txBox="1"/>
           <p:nvPr/>
         </p:nvSpPr>
@@ -16227,7 +16104,7 @@
                 <a:ea typeface="Calibri" pitchFamily="34" charset="-122"/>
                 <a:cs typeface="Calibri" pitchFamily="34" charset="-120"/>
               </a:rPr>
-              <a:t>TDD = 실패하는 테스트를 먼저 쓰고, 그 테스트를 통과시키는 코드를 쓰는 방식 · 각 단계에 쓰이는 Skill은 다음 장부터 살펴봅니다.</a:t>
+              <a:t>Skill 이름과 개수는 Superpowers 6.3.0 기준입니다. · github.com/obra/superpowers/tree/main/skills</a:t>
             </a:r>
             <a:endParaRPr lang="en-US" sz="950" dirty="0"/>
           </a:p>
@@ -16298,7 +16175,7 @@
                 <a:ea typeface="Calibri" pitchFamily="34" charset="-122"/>
                 <a:cs typeface="Calibri" pitchFamily="34" charset="-120"/>
               </a:rPr>
-              <a:t>03 어떻게 고르는가</a:t>
+              <a:t>03 어떤 Skill이 있는가</a:t>
             </a:r>
             <a:endParaRPr lang="en-US" sz="1100" dirty="0"/>
           </a:p>
@@ -16340,7 +16217,7 @@
                 <a:ea typeface="Calibri" pitchFamily="34" charset="-122"/>
                 <a:cs typeface="Calibri" pitchFamily="34" charset="-120"/>
               </a:rPr>
-              <a:t>14개 Skill은 세 묶음으로 나뉩니다</a:t>
+              <a:t>① 계획 · 준비 — 코드를 쓰기 전에 범위를 확정합니다</a:t>
             </a:r>
             <a:endParaRPr lang="en-US" sz="2400" dirty="0"/>
           </a:p>
@@ -16394,11 +16271,11 @@
         <p:spPr>
           <a:xfrm>
             <a:off x="640080" y="1481328"/>
-            <a:ext cx="3393338" cy="3566160"/>
+            <a:ext cx="5300320" cy="1700784"/>
           </a:xfrm>
           <a:prstGeom prst="roundRect">
             <a:avLst>
-              <a:gd name="adj" fmla="val 1886"/>
+              <a:gd name="adj" fmla="val 3763"/>
             </a:avLst>
           </a:prstGeom>
           <a:solidFill>
@@ -16414,30 +16291,91 @@
       </p:sp>
       <p:sp>
         <p:nvSpPr>
-          <p:cNvPr id="6" name="Text 4"/>
-          <p:cNvSpPr txBox="1"/>
-          <p:nvPr/>
-        </p:nvSpPr>
-        <p:spPr>
-          <a:xfrm>
-            <a:off x="1042416" y="1883664"/>
-            <a:ext cx="2588666" cy="1133856"/>
-          </a:xfrm>
-          <a:prstGeom prst="rect">
-            <a:avLst/>
-          </a:prstGeom>
-          <a:noFill/>
-          <a:ln/>
-        </p:spPr>
-        <p:txBody>
-          <a:bodyPr wrap="square" lIns="0" tIns="0" rIns="0" bIns="0" rtlCol="0" anchor="ctr"/>
-          <a:lstStyle/>
-          <a:p>
-            <a:pPr indent="0" marL="0">
-              <a:buNone/>
-            </a:pPr>
-            <a:r>
-              <a:rPr lang="en-US" sz="6600" b="1" dirty="0">
+          <p:cNvPr id="6" name="Shape 4"/>
+          <p:cNvSpPr/>
+          <p:nvPr/>
+        </p:nvSpPr>
+        <p:spPr>
+          <a:xfrm>
+            <a:off x="950976" y="1773936"/>
+            <a:ext cx="292608" cy="292608"/>
+          </a:xfrm>
+          <a:prstGeom prst="roundRect">
+            <a:avLst>
+              <a:gd name="adj" fmla="val 28125"/>
+            </a:avLst>
+          </a:prstGeom>
+          <a:solidFill>
+            <a:srgbClr val="2F6BFF"/>
+          </a:solidFill>
+          <a:ln/>
+        </p:spPr>
+      </p:sp>
+      <p:sp>
+        <p:nvSpPr>
+          <p:cNvPr id="7" name="Text 5"/>
+          <p:cNvSpPr txBox="1"/>
+          <p:nvPr/>
+        </p:nvSpPr>
+        <p:spPr>
+          <a:xfrm>
+            <a:off x="950976" y="1773936"/>
+            <a:ext cx="292608" cy="292608"/>
+          </a:xfrm>
+          <a:prstGeom prst="rect">
+            <a:avLst/>
+          </a:prstGeom>
+          <a:noFill/>
+          <a:ln/>
+        </p:spPr>
+        <p:txBody>
+          <a:bodyPr wrap="square" lIns="0" tIns="0" rIns="0" bIns="0" rtlCol="0" anchor="ctr"/>
+          <a:lstStyle/>
+          <a:p>
+            <a:pPr algn="ctr" indent="0" marL="0">
+              <a:buNone/>
+            </a:pPr>
+            <a:r>
+              <a:rPr lang="en-US" sz="1100" b="1" dirty="0">
+                <a:solidFill>
+                  <a:srgbClr val="FFFFFF"/>
+                </a:solidFill>
+                <a:latin typeface="Calibri" pitchFamily="34" charset="0"/>
+                <a:ea typeface="Calibri" pitchFamily="34" charset="-122"/>
+                <a:cs typeface="Calibri" pitchFamily="34" charset="-120"/>
+              </a:rPr>
+              <a:t>1</a:t>
+            </a:r>
+            <a:endParaRPr lang="en-US" sz="1100" dirty="0"/>
+          </a:p>
+        </p:txBody>
+      </p:sp>
+      <p:sp>
+        <p:nvSpPr>
+          <p:cNvPr id="8" name="Text 6"/>
+          <p:cNvSpPr txBox="1"/>
+          <p:nvPr/>
+        </p:nvSpPr>
+        <p:spPr>
+          <a:xfrm>
+            <a:off x="1353312" y="1755648"/>
+            <a:ext cx="4294480" cy="329184"/>
+          </a:xfrm>
+          <a:prstGeom prst="rect">
+            <a:avLst/>
+          </a:prstGeom>
+          <a:noFill/>
+          <a:ln/>
+        </p:spPr>
+        <p:txBody>
+          <a:bodyPr wrap="square" lIns="0" tIns="0" rIns="0" bIns="0" rtlCol="0" anchor="ctr"/>
+          <a:lstStyle/>
+          <a:p>
+            <a:pPr indent="0" marL="0">
+              <a:buNone/>
+            </a:pPr>
+            <a:r>
+              <a:rPr lang="en-US" sz="1300" b="1" dirty="0">
                 <a:solidFill>
                   <a:srgbClr val="0F1B33"/>
                 </a:solidFill>
@@ -16445,129 +16383,51 @@
                 <a:ea typeface="Calibri" pitchFamily="34" charset="-122"/>
                 <a:cs typeface="Calibri" pitchFamily="34" charset="-120"/>
               </a:rPr>
-              <a:t>4</a:t>
-            </a:r>
-            <a:endParaRPr lang="en-US" sz="6600" dirty="0"/>
-          </a:p>
-        </p:txBody>
-      </p:sp>
-      <p:sp>
-        <p:nvSpPr>
-          <p:cNvPr id="7" name="Text 5"/>
-          <p:cNvSpPr txBox="1"/>
-          <p:nvPr/>
-        </p:nvSpPr>
-        <p:spPr>
-          <a:xfrm>
-            <a:off x="1042416" y="3054096"/>
-            <a:ext cx="2588666" cy="274320"/>
-          </a:xfrm>
-          <a:prstGeom prst="rect">
-            <a:avLst/>
-          </a:prstGeom>
-          <a:noFill/>
-          <a:ln/>
-        </p:spPr>
-        <p:txBody>
-          <a:bodyPr wrap="square" lIns="0" tIns="0" rIns="0" bIns="0" rtlCol="0" anchor="ctr"/>
-          <a:lstStyle/>
-          <a:p>
-            <a:pPr indent="0" marL="0">
+              <a:t>using-superpowers</a:t>
+            </a:r>
+            <a:endParaRPr lang="en-US" sz="1300" dirty="0"/>
+          </a:p>
+        </p:txBody>
+      </p:sp>
+      <p:sp>
+        <p:nvSpPr>
+          <p:cNvPr id="9" name="Text 7"/>
+          <p:cNvSpPr txBox="1"/>
+          <p:nvPr/>
+        </p:nvSpPr>
+        <p:spPr>
+          <a:xfrm>
+            <a:off x="950976" y="2231136"/>
+            <a:ext cx="4678528" cy="731520"/>
+          </a:xfrm>
+          <a:prstGeom prst="rect">
+            <a:avLst/>
+          </a:prstGeom>
+          <a:noFill/>
+          <a:ln/>
+        </p:spPr>
+        <p:txBody>
+          <a:bodyPr wrap="square" lIns="0" tIns="0" rIns="0" bIns="0" rtlCol="0" anchor="ctr"/>
+          <a:lstStyle/>
+          <a:p>
+            <a:pPr indent="0" marL="0">
+              <a:lnSpc>
+                <a:spcPct val="128000"/>
+              </a:lnSpc>
               <a:buNone/>
             </a:pPr>
             <a:r>
               <a:rPr lang="en-US" sz="1200" dirty="0">
                 <a:solidFill>
-                  <a:srgbClr val="8A94A6"/>
-                </a:solidFill>
-                <a:latin typeface="Calibri" pitchFamily="34" charset="0"/>
-                <a:ea typeface="Calibri" pitchFamily="34" charset="-122"/>
-                <a:cs typeface="Calibri" pitchFamily="34" charset="-120"/>
-              </a:rPr>
-              <a:t>개 Skill</a:t>
+                  <a:srgbClr val="5B6577"/>
+                </a:solidFill>
+                <a:latin typeface="Calibri" pitchFamily="34" charset="0"/>
+                <a:ea typeface="Calibri" pitchFamily="34" charset="-122"/>
+                <a:cs typeface="Calibri" pitchFamily="34" charset="-120"/>
+              </a:rPr>
+              <a:t>작업을 시작하기 전에 지금 상황에 맞는 Skill이 있는지 먼저 확인하고 사용합니다.</a:t>
             </a:r>
             <a:endParaRPr lang="en-US" sz="1200" dirty="0"/>
-          </a:p>
-        </p:txBody>
-      </p:sp>
-      <p:sp>
-        <p:nvSpPr>
-          <p:cNvPr id="8" name="Text 6"/>
-          <p:cNvSpPr txBox="1"/>
-          <p:nvPr/>
-        </p:nvSpPr>
-        <p:spPr>
-          <a:xfrm>
-            <a:off x="1042416" y="3456432"/>
-            <a:ext cx="2588666" cy="347472"/>
-          </a:xfrm>
-          <a:prstGeom prst="rect">
-            <a:avLst/>
-          </a:prstGeom>
-          <a:noFill/>
-          <a:ln/>
-        </p:spPr>
-        <p:txBody>
-          <a:bodyPr wrap="square" lIns="0" tIns="0" rIns="0" bIns="0" rtlCol="0" anchor="ctr"/>
-          <a:lstStyle/>
-          <a:p>
-            <a:pPr indent="0" marL="0">
-              <a:buNone/>
-            </a:pPr>
-            <a:r>
-              <a:rPr lang="en-US" sz="1900" b="1" dirty="0">
-                <a:solidFill>
-                  <a:srgbClr val="0F1B33"/>
-                </a:solidFill>
-                <a:latin typeface="Calibri" pitchFamily="34" charset="0"/>
-                <a:ea typeface="Calibri" pitchFamily="34" charset="-122"/>
-                <a:cs typeface="Calibri" pitchFamily="34" charset="-120"/>
-              </a:rPr>
-              <a:t>계획 · 준비</a:t>
-            </a:r>
-            <a:endParaRPr lang="en-US" sz="1900" dirty="0"/>
-          </a:p>
-        </p:txBody>
-      </p:sp>
-      <p:sp>
-        <p:nvSpPr>
-          <p:cNvPr id="9" name="Text 7"/>
-          <p:cNvSpPr txBox="1"/>
-          <p:nvPr/>
-        </p:nvSpPr>
-        <p:spPr>
-          <a:xfrm>
-            <a:off x="1042416" y="3913632"/>
-            <a:ext cx="2588666" cy="822960"/>
-          </a:xfrm>
-          <a:prstGeom prst="rect">
-            <a:avLst/>
-          </a:prstGeom>
-          <a:noFill/>
-          <a:ln/>
-        </p:spPr>
-        <p:txBody>
-          <a:bodyPr wrap="square" lIns="0" tIns="0" rIns="0" bIns="0" rtlCol="0" anchor="ctr"/>
-          <a:lstStyle/>
-          <a:p>
-            <a:pPr indent="0" marL="0">
-              <a:lnSpc>
-                <a:spcPct val="130000"/>
-              </a:lnSpc>
-              <a:buNone/>
-            </a:pPr>
-            <a:r>
-              <a:rPr lang="en-US" sz="1250" dirty="0">
-                <a:solidFill>
-                  <a:srgbClr val="5B6577"/>
-                </a:solidFill>
-                <a:latin typeface="Calibri" pitchFamily="34" charset="0"/>
-                <a:ea typeface="Calibri" pitchFamily="34" charset="-122"/>
-                <a:cs typeface="Calibri" pitchFamily="34" charset="-120"/>
-              </a:rPr>
-              <a:t>코드를 쓰기 전에 무엇을 만들지, 어떤 순서로 할지 확정합니다.</a:t>
-            </a:r>
-            <a:endParaRPr lang="en-US" sz="1250" dirty="0"/>
           </a:p>
         </p:txBody>
       </p:sp>
@@ -16579,20 +16439,20 @@
         </p:nvSpPr>
         <p:spPr>
           <a:xfrm>
-            <a:off x="4399178" y="1481328"/>
-            <a:ext cx="3393338" cy="3566160"/>
+            <a:off x="6251296" y="1481328"/>
+            <a:ext cx="5300320" cy="1700784"/>
           </a:xfrm>
           <a:prstGeom prst="roundRect">
             <a:avLst>
-              <a:gd name="adj" fmla="val 1886"/>
+              <a:gd name="adj" fmla="val 3763"/>
             </a:avLst>
           </a:prstGeom>
           <a:solidFill>
-            <a:srgbClr val="EEF3FF"/>
+            <a:srgbClr val="F6F7F9"/>
           </a:solidFill>
           <a:ln w="12700">
             <a:solidFill>
-              <a:srgbClr val="D3E0FF"/>
+              <a:srgbClr val="E5E8EE"/>
             </a:solidFill>
             <a:prstDash val="solid"/>
           </a:ln>
@@ -16600,42 +16460,25 @@
       </p:sp>
       <p:sp>
         <p:nvSpPr>
-          <p:cNvPr id="11" name="Text 9"/>
-          <p:cNvSpPr txBox="1"/>
-          <p:nvPr/>
-        </p:nvSpPr>
-        <p:spPr>
-          <a:xfrm>
-            <a:off x="4801514" y="1883664"/>
-            <a:ext cx="2588666" cy="1133856"/>
-          </a:xfrm>
-          <a:prstGeom prst="rect">
-            <a:avLst/>
-          </a:prstGeom>
-          <a:noFill/>
-          <a:ln/>
-        </p:spPr>
-        <p:txBody>
-          <a:bodyPr wrap="square" lIns="0" tIns="0" rIns="0" bIns="0" rtlCol="0" anchor="ctr"/>
-          <a:lstStyle/>
-          <a:p>
-            <a:pPr indent="0" marL="0">
-              <a:buNone/>
-            </a:pPr>
-            <a:r>
-              <a:rPr lang="en-US" sz="6600" b="1" dirty="0">
-                <a:solidFill>
-                  <a:srgbClr val="1E4FD1"/>
-                </a:solidFill>
-                <a:latin typeface="Calibri" pitchFamily="34" charset="0"/>
-                <a:ea typeface="Calibri" pitchFamily="34" charset="-122"/>
-                <a:cs typeface="Calibri" pitchFamily="34" charset="-120"/>
-              </a:rPr>
-              <a:t>4</a:t>
-            </a:r>
-            <a:endParaRPr lang="en-US" sz="6600" dirty="0"/>
-          </a:p>
-        </p:txBody>
+          <p:cNvPr id="11" name="Shape 9"/>
+          <p:cNvSpPr/>
+          <p:nvPr/>
+        </p:nvSpPr>
+        <p:spPr>
+          <a:xfrm>
+            <a:off x="6562192" y="1773936"/>
+            <a:ext cx="292608" cy="292608"/>
+          </a:xfrm>
+          <a:prstGeom prst="roundRect">
+            <a:avLst>
+              <a:gd name="adj" fmla="val 28125"/>
+            </a:avLst>
+          </a:prstGeom>
+          <a:solidFill>
+            <a:srgbClr val="2F6BFF"/>
+          </a:solidFill>
+          <a:ln/>
+        </p:spPr>
       </p:sp>
       <p:sp>
         <p:nvSpPr>
@@ -16645,115 +16488,115 @@
         </p:nvSpPr>
         <p:spPr>
           <a:xfrm>
-            <a:off x="4801514" y="3054096"/>
-            <a:ext cx="2588666" cy="274320"/>
-          </a:xfrm>
-          <a:prstGeom prst="rect">
-            <a:avLst/>
-          </a:prstGeom>
-          <a:noFill/>
-          <a:ln/>
-        </p:spPr>
-        <p:txBody>
-          <a:bodyPr wrap="square" lIns="0" tIns="0" rIns="0" bIns="0" rtlCol="0" anchor="ctr"/>
-          <a:lstStyle/>
-          <a:p>
-            <a:pPr indent="0" marL="0">
+            <a:off x="6562192" y="1773936"/>
+            <a:ext cx="292608" cy="292608"/>
+          </a:xfrm>
+          <a:prstGeom prst="rect">
+            <a:avLst/>
+          </a:prstGeom>
+          <a:noFill/>
+          <a:ln/>
+        </p:spPr>
+        <p:txBody>
+          <a:bodyPr wrap="square" lIns="0" tIns="0" rIns="0" bIns="0" rtlCol="0" anchor="ctr"/>
+          <a:lstStyle/>
+          <a:p>
+            <a:pPr algn="ctr" indent="0" marL="0">
+              <a:buNone/>
+            </a:pPr>
+            <a:r>
+              <a:rPr lang="en-US" sz="1100" b="1" dirty="0">
+                <a:solidFill>
+                  <a:srgbClr val="FFFFFF"/>
+                </a:solidFill>
+                <a:latin typeface="Calibri" pitchFamily="34" charset="0"/>
+                <a:ea typeface="Calibri" pitchFamily="34" charset="-122"/>
+                <a:cs typeface="Calibri" pitchFamily="34" charset="-120"/>
+              </a:rPr>
+              <a:t>2</a:t>
+            </a:r>
+            <a:endParaRPr lang="en-US" sz="1100" dirty="0"/>
+          </a:p>
+        </p:txBody>
+      </p:sp>
+      <p:sp>
+        <p:nvSpPr>
+          <p:cNvPr id="13" name="Text 11"/>
+          <p:cNvSpPr txBox="1"/>
+          <p:nvPr/>
+        </p:nvSpPr>
+        <p:spPr>
+          <a:xfrm>
+            <a:off x="6964528" y="1755648"/>
+            <a:ext cx="4294480" cy="329184"/>
+          </a:xfrm>
+          <a:prstGeom prst="rect">
+            <a:avLst/>
+          </a:prstGeom>
+          <a:noFill/>
+          <a:ln/>
+        </p:spPr>
+        <p:txBody>
+          <a:bodyPr wrap="square" lIns="0" tIns="0" rIns="0" bIns="0" rtlCol="0" anchor="ctr"/>
+          <a:lstStyle/>
+          <a:p>
+            <a:pPr indent="0" marL="0">
+              <a:buNone/>
+            </a:pPr>
+            <a:r>
+              <a:rPr lang="en-US" sz="1300" b="1" dirty="0">
+                <a:solidFill>
+                  <a:srgbClr val="0F1B33"/>
+                </a:solidFill>
+                <a:latin typeface="Calibri" pitchFamily="34" charset="0"/>
+                <a:ea typeface="Calibri" pitchFamily="34" charset="-122"/>
+                <a:cs typeface="Calibri" pitchFamily="34" charset="-120"/>
+              </a:rPr>
+              <a:t>brainstorming</a:t>
+            </a:r>
+            <a:endParaRPr lang="en-US" sz="1300" dirty="0"/>
+          </a:p>
+        </p:txBody>
+      </p:sp>
+      <p:sp>
+        <p:nvSpPr>
+          <p:cNvPr id="14" name="Text 12"/>
+          <p:cNvSpPr txBox="1"/>
+          <p:nvPr/>
+        </p:nvSpPr>
+        <p:spPr>
+          <a:xfrm>
+            <a:off x="6562192" y="2231136"/>
+            <a:ext cx="4678528" cy="731520"/>
+          </a:xfrm>
+          <a:prstGeom prst="rect">
+            <a:avLst/>
+          </a:prstGeom>
+          <a:noFill/>
+          <a:ln/>
+        </p:spPr>
+        <p:txBody>
+          <a:bodyPr wrap="square" lIns="0" tIns="0" rIns="0" bIns="0" rtlCol="0" anchor="ctr"/>
+          <a:lstStyle/>
+          <a:p>
+            <a:pPr indent="0" marL="0">
+              <a:lnSpc>
+                <a:spcPct val="128000"/>
+              </a:lnSpc>
               <a:buNone/>
             </a:pPr>
             <a:r>
               <a:rPr lang="en-US" sz="1200" dirty="0">
                 <a:solidFill>
-                  <a:srgbClr val="8A94A6"/>
-                </a:solidFill>
-                <a:latin typeface="Calibri" pitchFamily="34" charset="0"/>
-                <a:ea typeface="Calibri" pitchFamily="34" charset="-122"/>
-                <a:cs typeface="Calibri" pitchFamily="34" charset="-120"/>
-              </a:rPr>
-              <a:t>개 Skill</a:t>
+                  <a:srgbClr val="5B6577"/>
+                </a:solidFill>
+                <a:latin typeface="Calibri" pitchFamily="34" charset="0"/>
+                <a:ea typeface="Calibri" pitchFamily="34" charset="-122"/>
+                <a:cs typeface="Calibri" pitchFamily="34" charset="-120"/>
+              </a:rPr>
+              <a:t>코딩 전에 질문 → 대안 → 설계를 정리합니다. 승인 전에는 구현하지 않습니다.</a:t>
             </a:r>
             <a:endParaRPr lang="en-US" sz="1200" dirty="0"/>
-          </a:p>
-        </p:txBody>
-      </p:sp>
-      <p:sp>
-        <p:nvSpPr>
-          <p:cNvPr id="13" name="Text 11"/>
-          <p:cNvSpPr txBox="1"/>
-          <p:nvPr/>
-        </p:nvSpPr>
-        <p:spPr>
-          <a:xfrm>
-            <a:off x="4801514" y="3456432"/>
-            <a:ext cx="2588666" cy="347472"/>
-          </a:xfrm>
-          <a:prstGeom prst="rect">
-            <a:avLst/>
-          </a:prstGeom>
-          <a:noFill/>
-          <a:ln/>
-        </p:spPr>
-        <p:txBody>
-          <a:bodyPr wrap="square" lIns="0" tIns="0" rIns="0" bIns="0" rtlCol="0" anchor="ctr"/>
-          <a:lstStyle/>
-          <a:p>
-            <a:pPr indent="0" marL="0">
-              <a:buNone/>
-            </a:pPr>
-            <a:r>
-              <a:rPr lang="en-US" sz="1900" b="1" dirty="0">
-                <a:solidFill>
-                  <a:srgbClr val="0F1B33"/>
-                </a:solidFill>
-                <a:latin typeface="Calibri" pitchFamily="34" charset="0"/>
-                <a:ea typeface="Calibri" pitchFamily="34" charset="-122"/>
-                <a:cs typeface="Calibri" pitchFamily="34" charset="-120"/>
-              </a:rPr>
-              <a:t>구현 · 협업</a:t>
-            </a:r>
-            <a:endParaRPr lang="en-US" sz="1900" dirty="0"/>
-          </a:p>
-        </p:txBody>
-      </p:sp>
-      <p:sp>
-        <p:nvSpPr>
-          <p:cNvPr id="14" name="Text 12"/>
-          <p:cNvSpPr txBox="1"/>
-          <p:nvPr/>
-        </p:nvSpPr>
-        <p:spPr>
-          <a:xfrm>
-            <a:off x="4801514" y="3913632"/>
-            <a:ext cx="2588666" cy="822960"/>
-          </a:xfrm>
-          <a:prstGeom prst="rect">
-            <a:avLst/>
-          </a:prstGeom>
-          <a:noFill/>
-          <a:ln/>
-        </p:spPr>
-        <p:txBody>
-          <a:bodyPr wrap="square" lIns="0" tIns="0" rIns="0" bIns="0" rtlCol="0" anchor="ctr"/>
-          <a:lstStyle/>
-          <a:p>
-            <a:pPr indent="0" marL="0">
-              <a:lnSpc>
-                <a:spcPct val="130000"/>
-              </a:lnSpc>
-              <a:buNone/>
-            </a:pPr>
-            <a:r>
-              <a:rPr lang="en-US" sz="1250" dirty="0">
-                <a:solidFill>
-                  <a:srgbClr val="5B6577"/>
-                </a:solidFill>
-                <a:latin typeface="Calibri" pitchFamily="34" charset="0"/>
-                <a:ea typeface="Calibri" pitchFamily="34" charset="-122"/>
-                <a:cs typeface="Calibri" pitchFamily="34" charset="-120"/>
-              </a:rPr>
-              <a:t>계획을 지키면서 작은 결과를 만들고 계속 확인합니다.</a:t>
-            </a:r>
-            <a:endParaRPr lang="en-US" sz="1250" dirty="0"/>
           </a:p>
         </p:txBody>
       </p:sp>
@@ -16765,58 +16608,46 @@
         </p:nvSpPr>
         <p:spPr>
           <a:xfrm>
-            <a:off x="8158277" y="1481328"/>
-            <a:ext cx="3393338" cy="3566160"/>
+            <a:off x="640080" y="3474720"/>
+            <a:ext cx="5300320" cy="1700784"/>
           </a:xfrm>
           <a:prstGeom prst="roundRect">
             <a:avLst>
-              <a:gd name="adj" fmla="val 1886"/>
+              <a:gd name="adj" fmla="val 3763"/>
             </a:avLst>
           </a:prstGeom>
           <a:solidFill>
-            <a:srgbClr val="0F1B33"/>
+            <a:srgbClr val="F6F7F9"/>
           </a:solidFill>
-          <a:ln/>
-        </p:spPr>
-      </p:sp>
-      <p:sp>
-        <p:nvSpPr>
-          <p:cNvPr id="16" name="Text 14"/>
-          <p:cNvSpPr txBox="1"/>
-          <p:nvPr/>
-        </p:nvSpPr>
-        <p:spPr>
-          <a:xfrm>
-            <a:off x="8560613" y="1883664"/>
-            <a:ext cx="2588666" cy="1133856"/>
-          </a:xfrm>
-          <a:prstGeom prst="rect">
-            <a:avLst/>
-          </a:prstGeom>
-          <a:noFill/>
-          <a:ln/>
-        </p:spPr>
-        <p:txBody>
-          <a:bodyPr wrap="square" lIns="0" tIns="0" rIns="0" bIns="0" rtlCol="0" anchor="ctr"/>
-          <a:lstStyle/>
-          <a:p>
-            <a:pPr indent="0" marL="0">
-              <a:buNone/>
-            </a:pPr>
-            <a:r>
-              <a:rPr lang="en-US" sz="6600" b="1" dirty="0">
-                <a:solidFill>
-                  <a:srgbClr val="F2994A"/>
-                </a:solidFill>
-                <a:latin typeface="Calibri" pitchFamily="34" charset="0"/>
-                <a:ea typeface="Calibri" pitchFamily="34" charset="-122"/>
-                <a:cs typeface="Calibri" pitchFamily="34" charset="-120"/>
-              </a:rPr>
-              <a:t>6</a:t>
-            </a:r>
-            <a:endParaRPr lang="en-US" sz="6600" dirty="0"/>
-          </a:p>
-        </p:txBody>
+          <a:ln w="12700">
+            <a:solidFill>
+              <a:srgbClr val="E5E8EE"/>
+            </a:solidFill>
+            <a:prstDash val="solid"/>
+          </a:ln>
+        </p:spPr>
+      </p:sp>
+      <p:sp>
+        <p:nvSpPr>
+          <p:cNvPr id="16" name="Shape 14"/>
+          <p:cNvSpPr/>
+          <p:nvPr/>
+        </p:nvSpPr>
+        <p:spPr>
+          <a:xfrm>
+            <a:off x="950976" y="3767328"/>
+            <a:ext cx="292608" cy="292608"/>
+          </a:xfrm>
+          <a:prstGeom prst="roundRect">
+            <a:avLst>
+              <a:gd name="adj" fmla="val 28125"/>
+            </a:avLst>
+          </a:prstGeom>
+          <a:solidFill>
+            <a:srgbClr val="2F6BFF"/>
+          </a:solidFill>
+          <a:ln/>
+        </p:spPr>
       </p:sp>
       <p:sp>
         <p:nvSpPr>
@@ -16826,32 +16657,113 @@
         </p:nvSpPr>
         <p:spPr>
           <a:xfrm>
-            <a:off x="8560613" y="3054096"/>
-            <a:ext cx="2588666" cy="274320"/>
-          </a:xfrm>
-          <a:prstGeom prst="rect">
-            <a:avLst/>
-          </a:prstGeom>
-          <a:noFill/>
-          <a:ln/>
-        </p:spPr>
-        <p:txBody>
-          <a:bodyPr wrap="square" lIns="0" tIns="0" rIns="0" bIns="0" rtlCol="0" anchor="ctr"/>
-          <a:lstStyle/>
-          <a:p>
-            <a:pPr indent="0" marL="0">
+            <a:off x="950976" y="3767328"/>
+            <a:ext cx="292608" cy="292608"/>
+          </a:xfrm>
+          <a:prstGeom prst="rect">
+            <a:avLst/>
+          </a:prstGeom>
+          <a:noFill/>
+          <a:ln/>
+        </p:spPr>
+        <p:txBody>
+          <a:bodyPr wrap="square" lIns="0" tIns="0" rIns="0" bIns="0" rtlCol="0" anchor="ctr"/>
+          <a:lstStyle/>
+          <a:p>
+            <a:pPr algn="ctr" indent="0" marL="0">
+              <a:buNone/>
+            </a:pPr>
+            <a:r>
+              <a:rPr lang="en-US" sz="1100" b="1" dirty="0">
+                <a:solidFill>
+                  <a:srgbClr val="FFFFFF"/>
+                </a:solidFill>
+                <a:latin typeface="Calibri" pitchFamily="34" charset="0"/>
+                <a:ea typeface="Calibri" pitchFamily="34" charset="-122"/>
+                <a:cs typeface="Calibri" pitchFamily="34" charset="-120"/>
+              </a:rPr>
+              <a:t>3</a:t>
+            </a:r>
+            <a:endParaRPr lang="en-US" sz="1100" dirty="0"/>
+          </a:p>
+        </p:txBody>
+      </p:sp>
+      <p:sp>
+        <p:nvSpPr>
+          <p:cNvPr id="18" name="Text 16"/>
+          <p:cNvSpPr txBox="1"/>
+          <p:nvPr/>
+        </p:nvSpPr>
+        <p:spPr>
+          <a:xfrm>
+            <a:off x="1353312" y="3749040"/>
+            <a:ext cx="4294480" cy="329184"/>
+          </a:xfrm>
+          <a:prstGeom prst="rect">
+            <a:avLst/>
+          </a:prstGeom>
+          <a:noFill/>
+          <a:ln/>
+        </p:spPr>
+        <p:txBody>
+          <a:bodyPr wrap="square" lIns="0" tIns="0" rIns="0" bIns="0" rtlCol="0" anchor="ctr"/>
+          <a:lstStyle/>
+          <a:p>
+            <a:pPr indent="0" marL="0">
+              <a:buNone/>
+            </a:pPr>
+            <a:r>
+              <a:rPr lang="en-US" sz="1300" b="1" dirty="0">
+                <a:solidFill>
+                  <a:srgbClr val="0F1B33"/>
+                </a:solidFill>
+                <a:latin typeface="Calibri" pitchFamily="34" charset="0"/>
+                <a:ea typeface="Calibri" pitchFamily="34" charset="-122"/>
+                <a:cs typeface="Calibri" pitchFamily="34" charset="-120"/>
+              </a:rPr>
+              <a:t>writing-plans</a:t>
+            </a:r>
+            <a:endParaRPr lang="en-US" sz="1300" dirty="0"/>
+          </a:p>
+        </p:txBody>
+      </p:sp>
+      <p:sp>
+        <p:nvSpPr>
+          <p:cNvPr id="19" name="Text 17"/>
+          <p:cNvSpPr txBox="1"/>
+          <p:nvPr/>
+        </p:nvSpPr>
+        <p:spPr>
+          <a:xfrm>
+            <a:off x="950976" y="4224528"/>
+            <a:ext cx="4678528" cy="731520"/>
+          </a:xfrm>
+          <a:prstGeom prst="rect">
+            <a:avLst/>
+          </a:prstGeom>
+          <a:noFill/>
+          <a:ln/>
+        </p:spPr>
+        <p:txBody>
+          <a:bodyPr wrap="square" lIns="0" tIns="0" rIns="0" bIns="0" rtlCol="0" anchor="ctr"/>
+          <a:lstStyle/>
+          <a:p>
+            <a:pPr indent="0" marL="0">
+              <a:lnSpc>
+                <a:spcPct val="128000"/>
+              </a:lnSpc>
               <a:buNone/>
             </a:pPr>
             <a:r>
               <a:rPr lang="en-US" sz="1200" dirty="0">
                 <a:solidFill>
-                  <a:srgbClr val="8FA2BC"/>
-                </a:solidFill>
-                <a:latin typeface="Calibri" pitchFamily="34" charset="0"/>
-                <a:ea typeface="Calibri" pitchFamily="34" charset="-122"/>
-                <a:cs typeface="Calibri" pitchFamily="34" charset="-120"/>
-              </a:rPr>
-              <a:t>개 Skill</a:t>
+                  <a:srgbClr val="5B6577"/>
+                </a:solidFill>
+                <a:latin typeface="Calibri" pitchFamily="34" charset="0"/>
+                <a:ea typeface="Calibri" pitchFamily="34" charset="-122"/>
+                <a:cs typeface="Calibri" pitchFamily="34" charset="-120"/>
+              </a:rPr>
+              <a:t>승인된 설계를 파일·테스트·작업 순서로 잘게 나눈 구현 계획서로 만듭니다.</a:t>
             </a:r>
             <a:endParaRPr lang="en-US" sz="1200" dirty="0"/>
           </a:p>
@@ -16859,30 +16771,79 @@
       </p:sp>
       <p:sp>
         <p:nvSpPr>
-          <p:cNvPr id="18" name="Text 16"/>
-          <p:cNvSpPr txBox="1"/>
-          <p:nvPr/>
-        </p:nvSpPr>
-        <p:spPr>
-          <a:xfrm>
-            <a:off x="8560613" y="3456432"/>
-            <a:ext cx="2588666" cy="347472"/>
-          </a:xfrm>
-          <a:prstGeom prst="rect">
-            <a:avLst/>
-          </a:prstGeom>
-          <a:noFill/>
-          <a:ln/>
-        </p:spPr>
-        <p:txBody>
-          <a:bodyPr wrap="square" lIns="0" tIns="0" rIns="0" bIns="0" rtlCol="0" anchor="ctr"/>
-          <a:lstStyle/>
-          <a:p>
-            <a:pPr indent="0" marL="0">
-              <a:buNone/>
-            </a:pPr>
-            <a:r>
-              <a:rPr lang="en-US" sz="1900" b="1" dirty="0">
+          <p:cNvPr id="20" name="Shape 18"/>
+          <p:cNvSpPr/>
+          <p:nvPr/>
+        </p:nvSpPr>
+        <p:spPr>
+          <a:xfrm>
+            <a:off x="6251296" y="3474720"/>
+            <a:ext cx="5300320" cy="1700784"/>
+          </a:xfrm>
+          <a:prstGeom prst="roundRect">
+            <a:avLst>
+              <a:gd name="adj" fmla="val 3763"/>
+            </a:avLst>
+          </a:prstGeom>
+          <a:solidFill>
+            <a:srgbClr val="F6F7F9"/>
+          </a:solidFill>
+          <a:ln w="12700">
+            <a:solidFill>
+              <a:srgbClr val="E5E8EE"/>
+            </a:solidFill>
+            <a:prstDash val="solid"/>
+          </a:ln>
+        </p:spPr>
+      </p:sp>
+      <p:sp>
+        <p:nvSpPr>
+          <p:cNvPr id="21" name="Shape 19"/>
+          <p:cNvSpPr/>
+          <p:nvPr/>
+        </p:nvSpPr>
+        <p:spPr>
+          <a:xfrm>
+            <a:off x="6562192" y="3767328"/>
+            <a:ext cx="292608" cy="292608"/>
+          </a:xfrm>
+          <a:prstGeom prst="roundRect">
+            <a:avLst>
+              <a:gd name="adj" fmla="val 28125"/>
+            </a:avLst>
+          </a:prstGeom>
+          <a:solidFill>
+            <a:srgbClr val="2F6BFF"/>
+          </a:solidFill>
+          <a:ln/>
+        </p:spPr>
+      </p:sp>
+      <p:sp>
+        <p:nvSpPr>
+          <p:cNvPr id="22" name="Text 20"/>
+          <p:cNvSpPr txBox="1"/>
+          <p:nvPr/>
+        </p:nvSpPr>
+        <p:spPr>
+          <a:xfrm>
+            <a:off x="6562192" y="3767328"/>
+            <a:ext cx="292608" cy="292608"/>
+          </a:xfrm>
+          <a:prstGeom prst="rect">
+            <a:avLst/>
+          </a:prstGeom>
+          <a:noFill/>
+          <a:ln/>
+        </p:spPr>
+        <p:txBody>
+          <a:bodyPr wrap="square" lIns="0" tIns="0" rIns="0" bIns="0" rtlCol="0" anchor="ctr"/>
+          <a:lstStyle/>
+          <a:p>
+            <a:pPr algn="ctr" indent="0" marL="0">
+              <a:buNone/>
+            </a:pPr>
+            <a:r>
+              <a:rPr lang="en-US" sz="1100" b="1" dirty="0">
                 <a:solidFill>
                   <a:srgbClr val="FFFFFF"/>
                 </a:solidFill>
@@ -16890,22 +16851,61 @@
                 <a:ea typeface="Calibri" pitchFamily="34" charset="-122"/>
                 <a:cs typeface="Calibri" pitchFamily="34" charset="-120"/>
               </a:rPr>
-              <a:t>품질 · 완료</a:t>
-            </a:r>
-            <a:endParaRPr lang="en-US" sz="1900" dirty="0"/>
-          </a:p>
-        </p:txBody>
-      </p:sp>
-      <p:sp>
-        <p:nvSpPr>
-          <p:cNvPr id="19" name="Text 17"/>
-          <p:cNvSpPr txBox="1"/>
-          <p:nvPr/>
-        </p:nvSpPr>
-        <p:spPr>
-          <a:xfrm>
-            <a:off x="8560613" y="3913632"/>
-            <a:ext cx="2588666" cy="822960"/>
+              <a:t>4</a:t>
+            </a:r>
+            <a:endParaRPr lang="en-US" sz="1100" dirty="0"/>
+          </a:p>
+        </p:txBody>
+      </p:sp>
+      <p:sp>
+        <p:nvSpPr>
+          <p:cNvPr id="23" name="Text 21"/>
+          <p:cNvSpPr txBox="1"/>
+          <p:nvPr/>
+        </p:nvSpPr>
+        <p:spPr>
+          <a:xfrm>
+            <a:off x="6964528" y="3749040"/>
+            <a:ext cx="4294480" cy="329184"/>
+          </a:xfrm>
+          <a:prstGeom prst="rect">
+            <a:avLst/>
+          </a:prstGeom>
+          <a:noFill/>
+          <a:ln/>
+        </p:spPr>
+        <p:txBody>
+          <a:bodyPr wrap="square" lIns="0" tIns="0" rIns="0" bIns="0" rtlCol="0" anchor="ctr"/>
+          <a:lstStyle/>
+          <a:p>
+            <a:pPr indent="0" marL="0">
+              <a:buNone/>
+            </a:pPr>
+            <a:r>
+              <a:rPr lang="en-US" sz="1300" b="1" dirty="0">
+                <a:solidFill>
+                  <a:srgbClr val="0F1B33"/>
+                </a:solidFill>
+                <a:latin typeface="Calibri" pitchFamily="34" charset="0"/>
+                <a:ea typeface="Calibri" pitchFamily="34" charset="-122"/>
+                <a:cs typeface="Calibri" pitchFamily="34" charset="-120"/>
+              </a:rPr>
+              <a:t>using-git-worktrees</a:t>
+            </a:r>
+            <a:endParaRPr lang="en-US" sz="1300" dirty="0"/>
+          </a:p>
+        </p:txBody>
+      </p:sp>
+      <p:sp>
+        <p:nvSpPr>
+          <p:cNvPr id="24" name="Text 22"/>
+          <p:cNvSpPr txBox="1"/>
+          <p:nvPr/>
+        </p:nvSpPr>
+        <p:spPr>
+          <a:xfrm>
+            <a:off x="6562192" y="4224528"/>
+            <a:ext cx="4678528" cy="731520"/>
           </a:xfrm>
           <a:prstGeom prst="rect">
             <a:avLst/>
@@ -16919,28 +16919,28 @@
           <a:p>
             <a:pPr indent="0" marL="0">
               <a:lnSpc>
-                <a:spcPct val="130000"/>
+                <a:spcPct val="128000"/>
               </a:lnSpc>
               <a:buNone/>
             </a:pPr>
             <a:r>
-              <a:rPr lang="en-US" sz="1250" dirty="0">
-                <a:solidFill>
-                  <a:srgbClr val="C3CFE2"/>
-                </a:solidFill>
-                <a:latin typeface="Calibri" pitchFamily="34" charset="0"/>
-                <a:ea typeface="Calibri" pitchFamily="34" charset="-122"/>
-                <a:cs typeface="Calibri" pitchFamily="34" charset="-120"/>
-              </a:rPr>
-              <a:t>“된 것 같다”가 아니라 확인된 결과로 마무리합니다.</a:t>
-            </a:r>
-            <a:endParaRPr lang="en-US" sz="1250" dirty="0"/>
-          </a:p>
-        </p:txBody>
-      </p:sp>
-      <p:sp>
-        <p:nvSpPr>
-          <p:cNvPr id="20" name="Shape 18"/>
+              <a:rPr lang="en-US" sz="1200" dirty="0">
+                <a:solidFill>
+                  <a:srgbClr val="5B6577"/>
+                </a:solidFill>
+                <a:latin typeface="Calibri" pitchFamily="34" charset="0"/>
+                <a:ea typeface="Calibri" pitchFamily="34" charset="-122"/>
+                <a:cs typeface="Calibri" pitchFamily="34" charset="-120"/>
+              </a:rPr>
+              <a:t>기존 작업과 분리된 안전한 작업 공간을 미리 준비합니다.</a:t>
+            </a:r>
+            <a:endParaRPr lang="en-US" sz="1200" dirty="0"/>
+          </a:p>
+        </p:txBody>
+      </p:sp>
+      <p:sp>
+        <p:nvSpPr>
+          <p:cNvPr id="25" name="Shape 23"/>
           <p:cNvSpPr/>
           <p:nvPr/>
         </p:nvSpPr>
@@ -16962,7 +16962,7 @@
       </p:sp>
       <p:sp>
         <p:nvSpPr>
-          <p:cNvPr id="21" name="Text 19"/>
+          <p:cNvPr id="26" name="Text 24"/>
           <p:cNvSpPr txBox="1"/>
           <p:nvPr/>
         </p:nvSpPr>
@@ -16993,7 +16993,7 @@
                 <a:ea typeface="Calibri" pitchFamily="34" charset="-122"/>
                 <a:cs typeface="Calibri" pitchFamily="34" charset="-120"/>
               </a:rPr>
-              <a:t>14개 = 계획·준비 4개 + 구현·협업 4개 + 품질·완료 6개</a:t>
+              <a:t>공통 목적 — 코드를 쓰기 전에 “범위”와 “순서”를 확정합니다</a:t>
             </a:r>
             <a:endParaRPr lang="en-US" sz="1350" dirty="0"/>
           </a:p>
@@ -17001,7 +17001,7 @@
       </p:sp>
       <p:sp>
         <p:nvSpPr>
-          <p:cNvPr id="22" name="Text 20"/>
+          <p:cNvPr id="27" name="Text 25"/>
           <p:cNvSpPr txBox="1"/>
           <p:nvPr/>
         </p:nvSpPr>
@@ -17032,7 +17032,7 @@
                 <a:ea typeface="Calibri" pitchFamily="34" charset="-122"/>
                 <a:cs typeface="Calibri" pitchFamily="34" charset="-120"/>
               </a:rPr>
-              <a:t>Skill 이름과 개수는 Superpowers 6.3.0 기준입니다. · github.com/obra/superpowers/tree/main/skills</a:t>
+              <a:t>Skill 이름은 Superpowers 6.3.0 기준입니다.</a:t>
             </a:r>
             <a:endParaRPr lang="en-US" sz="950" dirty="0"/>
           </a:p>
@@ -17103,7 +17103,7 @@
                 <a:ea typeface="Calibri" pitchFamily="34" charset="-122"/>
                 <a:cs typeface="Calibri" pitchFamily="34" charset="-120"/>
               </a:rPr>
-              <a:t>03 어떻게 고르는가</a:t>
+              <a:t>03 어떤 Skill이 있는가</a:t>
             </a:r>
             <a:endParaRPr lang="en-US" sz="1100" dirty="0"/>
           </a:p>
@@ -17145,7 +17145,7 @@
                 <a:ea typeface="Calibri" pitchFamily="34" charset="-122"/>
                 <a:cs typeface="Calibri" pitchFamily="34" charset="-120"/>
               </a:rPr>
-              <a:t>① 계획 · 준비 — 코드를 쓰기 전에 범위를 확정합니다</a:t>
+              <a:t>② 구현 · 협업 — 계획대로 작게 만들고 계속 확인합니다</a:t>
             </a:r>
             <a:endParaRPr lang="en-US" sz="2400" dirty="0"/>
           </a:p>
@@ -17311,7 +17311,7 @@
                 <a:ea typeface="Calibri" pitchFamily="34" charset="-122"/>
                 <a:cs typeface="Calibri" pitchFamily="34" charset="-120"/>
               </a:rPr>
-              <a:t>using-superpowers</a:t>
+              <a:t>test-driven-development</a:t>
             </a:r>
             <a:endParaRPr lang="en-US" sz="1300" dirty="0"/>
           </a:p>
@@ -17353,7 +17353,7 @@
                 <a:ea typeface="Calibri" pitchFamily="34" charset="-122"/>
                 <a:cs typeface="Calibri" pitchFamily="34" charset="-120"/>
               </a:rPr>
-              <a:t>작업을 시작하기 전에 지금 상황에 맞는 Skill이 있는지 먼저 확인하고 사용합니다.</a:t>
+              <a:t>실패하는 테스트를 먼저 만들고, 그것을 통과하는 최소한의 코드를 씁니다.</a:t>
             </a:r>
             <a:endParaRPr lang="en-US" sz="1200" dirty="0"/>
           </a:p>
@@ -17480,7 +17480,7 @@
                 <a:ea typeface="Calibri" pitchFamily="34" charset="-122"/>
                 <a:cs typeface="Calibri" pitchFamily="34" charset="-120"/>
               </a:rPr>
-              <a:t>brainstorming</a:t>
+              <a:t>executing-plans</a:t>
             </a:r>
             <a:endParaRPr lang="en-US" sz="1300" dirty="0"/>
           </a:p>
@@ -17522,7 +17522,7 @@
                 <a:ea typeface="Calibri" pitchFamily="34" charset="-122"/>
                 <a:cs typeface="Calibri" pitchFamily="34" charset="-120"/>
               </a:rPr>
-              <a:t>코딩 전에 질문 → 대안 → 설계를 정리합니다. 승인 전에는 구현하지 않습니다.</a:t>
+              <a:t>작성된 계획을 체크포인트별로, 순서대로 실행합니다.</a:t>
             </a:r>
             <a:endParaRPr lang="en-US" sz="1200" dirty="0"/>
           </a:p>
@@ -17649,7 +17649,7 @@
                 <a:ea typeface="Calibri" pitchFamily="34" charset="-122"/>
                 <a:cs typeface="Calibri" pitchFamily="34" charset="-120"/>
               </a:rPr>
-              <a:t>writing-plans</a:t>
+              <a:t>subagent-driven-development</a:t>
             </a:r>
             <a:endParaRPr lang="en-US" sz="1300" dirty="0"/>
           </a:p>
@@ -17691,7 +17691,7 @@
                 <a:ea typeface="Calibri" pitchFamily="34" charset="-122"/>
                 <a:cs typeface="Calibri" pitchFamily="34" charset="-120"/>
               </a:rPr>
-              <a:t>승인된 설계를 파일·테스트·작업 순서로 잘게 나눈 구현 계획서로 만듭니다.</a:t>
+              <a:t>작업마다 새 에이전트가 구현하고 단계마다 리뷰를 받습니다.</a:t>
             </a:r>
             <a:endParaRPr lang="en-US" sz="1200" dirty="0"/>
           </a:p>
@@ -17818,7 +17818,7 @@
                 <a:ea typeface="Calibri" pitchFamily="34" charset="-122"/>
                 <a:cs typeface="Calibri" pitchFamily="34" charset="-120"/>
               </a:rPr>
-              <a:t>using-git-worktrees</a:t>
+              <a:t>dispatching-parallel-agents</a:t>
             </a:r>
             <a:endParaRPr lang="en-US" sz="1300" dirty="0"/>
           </a:p>
@@ -17860,7 +17860,7 @@
                 <a:ea typeface="Calibri" pitchFamily="34" charset="-122"/>
                 <a:cs typeface="Calibri" pitchFamily="34" charset="-120"/>
               </a:rPr>
-              <a:t>기존 작업과 분리된 안전한 작업 공간을 미리 준비합니다.</a:t>
+              <a:t>서로 의존하지 않는 일은 여러 에이전트로 나눠 동시에 처리합니다.</a:t>
             </a:r>
             <a:endParaRPr lang="en-US" sz="1200" dirty="0"/>
           </a:p>
@@ -17921,7 +17921,7 @@
                 <a:ea typeface="Calibri" pitchFamily="34" charset="-122"/>
                 <a:cs typeface="Calibri" pitchFamily="34" charset="-120"/>
               </a:rPr>
-              <a:t>공통 목적 — 코드를 쓰기 전에 “범위”와 “순서”를 확정합니다</a:t>
+              <a:t>공통 목적 — 계획을 지키면서 작은 결과를 만들고 매번 확인합니다</a:t>
             </a:r>
             <a:endParaRPr lang="en-US" sz="1350" dirty="0"/>
           </a:p>
@@ -17960,7 +17960,7 @@
                 <a:ea typeface="Calibri" pitchFamily="34" charset="-122"/>
                 <a:cs typeface="Calibri" pitchFamily="34" charset="-120"/>
               </a:rPr>
-              <a:t>Skill 이름은 Superpowers 6.3.0 기준입니다.</a:t>
+              <a:t>Subagent 관련 기능은 사용 환경과 설정에 따라 달라질 수 있습니다.</a:t>
             </a:r>
             <a:endParaRPr lang="en-US" sz="950" dirty="0"/>
           </a:p>
